--- a/docs/lb3/Spendly_LB3_Praesentation.pptx
+++ b/docs/lb3/Spendly_LB3_Praesentation.pptx
@@ -2,22 +2,22 @@
 <file path=ppt/presentation.xml><?xml version="1.0" encoding="utf-8"?>
 <p:presentation xmlns:p="http://schemas.openxmlformats.org/presentationml/2006/main">
   <p:sldMasterIdLst>
-    <p:sldMasterId xmlns:r="http://schemas.openxmlformats.org/officeDocument/2006/relationships" id="2147483648" r:id="Re8a4c45581214f22"/>
+    <p:sldMasterId xmlns:r="http://schemas.openxmlformats.org/officeDocument/2006/relationships" id="2147483648" r:id="Re5c093cf7e704b2e"/>
   </p:sldMasterIdLst>
   <p:notesMasterIdLst>
-    <p:notesMasterId xmlns:r="http://schemas.openxmlformats.org/officeDocument/2006/relationships" r:id="Ra2d01c24a59d4570"/>
+    <p:notesMasterId xmlns:r="http://schemas.openxmlformats.org/officeDocument/2006/relationships" r:id="Ra37a072923744fd6"/>
   </p:notesMasterIdLst>
   <p:sldIdLst>
-    <p:sldId xmlns:r="http://schemas.openxmlformats.org/officeDocument/2006/relationships" id="256" r:id="R03b84c14dd1241fd"/>
-    <p:sldId xmlns:r="http://schemas.openxmlformats.org/officeDocument/2006/relationships" id="257" r:id="Ra709b7e7e2f44d9e"/>
-    <p:sldId xmlns:r="http://schemas.openxmlformats.org/officeDocument/2006/relationships" id="258" r:id="Rdbd142fed3754c25"/>
-    <p:sldId xmlns:r="http://schemas.openxmlformats.org/officeDocument/2006/relationships" id="259" r:id="R97d3988cf1224aa1"/>
-    <p:sldId xmlns:r="http://schemas.openxmlformats.org/officeDocument/2006/relationships" id="260" r:id="R4414f1001df94864"/>
-    <p:sldId xmlns:r="http://schemas.openxmlformats.org/officeDocument/2006/relationships" id="261" r:id="R360d6a23b7e94d1e"/>
-    <p:sldId xmlns:r="http://schemas.openxmlformats.org/officeDocument/2006/relationships" id="262" r:id="R88a9e04b8702463f"/>
-    <p:sldId xmlns:r="http://schemas.openxmlformats.org/officeDocument/2006/relationships" id="263" r:id="R64e15f4305de47eb"/>
-    <p:sldId xmlns:r="http://schemas.openxmlformats.org/officeDocument/2006/relationships" id="264" r:id="R22724b5971ac4b51"/>
-    <p:sldId xmlns:r="http://schemas.openxmlformats.org/officeDocument/2006/relationships" id="265" r:id="R47fe202aa8c04918"/>
+    <p:sldId xmlns:r="http://schemas.openxmlformats.org/officeDocument/2006/relationships" id="256" r:id="R4471962a1b6a43d0"/>
+    <p:sldId xmlns:r="http://schemas.openxmlformats.org/officeDocument/2006/relationships" id="257" r:id="R81c2ca057d00470f"/>
+    <p:sldId xmlns:r="http://schemas.openxmlformats.org/officeDocument/2006/relationships" id="258" r:id="R3c93456cf0064715"/>
+    <p:sldId xmlns:r="http://schemas.openxmlformats.org/officeDocument/2006/relationships" id="259" r:id="R06c6203881f4436a"/>
+    <p:sldId xmlns:r="http://schemas.openxmlformats.org/officeDocument/2006/relationships" id="260" r:id="Rf90df02d9af1413f"/>
+    <p:sldId xmlns:r="http://schemas.openxmlformats.org/officeDocument/2006/relationships" id="261" r:id="R43e390562c0443a3"/>
+    <p:sldId xmlns:r="http://schemas.openxmlformats.org/officeDocument/2006/relationships" id="262" r:id="R81677bfd054842d2"/>
+    <p:sldId xmlns:r="http://schemas.openxmlformats.org/officeDocument/2006/relationships" id="263" r:id="Re30ae793a26445a4"/>
+    <p:sldId xmlns:r="http://schemas.openxmlformats.org/officeDocument/2006/relationships" id="264" r:id="Rc744d64de1954e20"/>
+    <p:sldId xmlns:r="http://schemas.openxmlformats.org/officeDocument/2006/relationships" id="265" r:id="R8155a8d476ee4083"/>
   </p:sldIdLst>
   <p:sldSz cx="12192000" cy="6858000"/>
   <p:notesSz cx="6858000" cy="9144000"/>
@@ -451,7 +451,7 @@
           <a:lstStyle xmlns:a="http://schemas.openxmlformats.org/drawingml/2006/main"/>
           <a:p xmlns:a="http://schemas.openxmlformats.org/drawingml/2006/main">
             <a:r>
-              <a:t>DAUER: 0:20</a:t>
+              <a:t>DAUER: 0:35</a:t>
             </a:r>
           </a:p>
           <a:p xmlns:a="http://schemas.openxmlformats.org/drawingml/2006/main">
@@ -461,7 +461,27 @@
           </a:p>
           <a:p xmlns:a="http://schemas.openxmlformats.org/drawingml/2006/main">
             <a:r>
-              <a:t>Darian: Wir zeigen Spendly, unsere Ausgaben-App für Lernende und Studierende. Sie sammelt kleine tägliche Ausgaben und zeigt, was vom Monatsbudget übrig bleibt. Wir vergleichen zuerst die Idee mit der fertigen App und zeigen danach die wichtigsten Funktionen direkt am Gerät.</a:t>
+              <a:t>Darian: Wie entscheidet ihr, was ihr euch heute noch leisten könnt?</a:t>
+            </a:r>
+          </a:p>
+          <a:p xmlns:a="http://schemas.openxmlformats.org/drawingml/2006/main">
+            <a:r>
+              <a:t/>
+            </a:r>
+          </a:p>
+          <a:p xmlns:a="http://schemas.openxmlformats.org/drawingml/2006/main">
+            <a:r>
+              <a:t>[Die Frage wirken lassen. Etwa fünf Sekunden warten, dann ein bis zwei kurze Antworten aufnehmen. Keine privaten Beträge verlangen.]</a:t>
+            </a:r>
+          </a:p>
+          <a:p xmlns:a="http://schemas.openxmlformats.org/drawingml/2006/main">
+            <a:r>
+              <a:t/>
+            </a:r>
+          </a:p>
+          <a:p xmlns:a="http://schemas.openxmlformats.org/drawingml/2006/main">
+            <a:r>
+              <a:t>Vielleicht schaut ihr auf den Kontostand. Vielleicht überschlagt ihr es im Kopf. Genau bei dieser Entscheidung beginnt unser Projekt. Wir wollten wissen: Wie können wir kleine Ausgaben so sichtbar machen, dass das restliche Monatsbudget verständlich bleibt?</a:t>
             </a:r>
           </a:p>
           <a:p xmlns:a="http://schemas.openxmlformats.org/drawingml/2006/main">
@@ -561,7 +581,7 @@
           </a:p>
           <a:p xmlns:a="http://schemas.openxmlformats.org/drawingml/2006/main">
             <a:r>
-              <a:t>Darian: Spendly setzt die Kernidee aus LB1 um: tägliche Ausgaben erfassen und das verfügbare Monatsbudget verständlich zeigen. Die wichtigste technische Lehre ist, Fehlerfälle früher genauso konkret zu planen wie den normalen Ablauf. Dazu gehören falsche Codes, abgebrochene Formulare und ein Neustart während einer Aktion. Als Nächstes würden wir die App mit Lernenden testen. Verstehen sie den Tagesbetrag? Finden sie die Korrektur eines Eintrags? Und gelingt die Erfassung tatsächlich in der geplanten kurzen Zeit? Erst mit diesen Beobachtungen lässt sich die Bedienung gezielt weiterentwickeln. Damit sind wir am Ende und beantworten gerne Fragen.</a:t>
+              <a:t>Darian: Am Anfang haben wir gefragt, wie ihr entscheidet, was ihr euch heute noch leisten könnt. Spendly macht einen Teil dieser Entscheidung sichtbar: eure erfassten Ausgaben und das restliche Monatsbudget. Wir haben eine funktionierende App gebaut, den Entwurf weiterentwickelt und die wichtigsten Abläufe geprüft. Jetzt interessiert uns euer Blick als mögliche Nutzerinnen und Nutzer. Welche Ausgabe würdet ihr zuerst erfassen? Und was müsste Spendly können, damit ihr es auch nächste Woche noch öffnet?</a:t>
             </a:r>
           </a:p>
           <a:p xmlns:a="http://schemas.openxmlformats.org/drawingml/2006/main">
@@ -571,6 +591,26 @@
           </a:p>
           <a:p xmlns:a="http://schemas.openxmlformats.org/drawingml/2006/main">
             <a:r>
+              <a:t>[Eine kurze Antwort aufnehmen und in die Fragerunde überleiten.]</a:t>
+            </a:r>
+          </a:p>
+          <a:p xmlns:a="http://schemas.openxmlformats.org/drawingml/2006/main">
+            <a:r>
+              <a:t/>
+            </a:r>
+          </a:p>
+          <a:p xmlns:a="http://schemas.openxmlformats.org/drawingml/2006/main">
+            <a:r>
+              <a:t>Vielen Dank. Wir beantworten gerne eure Fragen zur Idee, zur App und zur technischen Umsetzung.</a:t>
+            </a:r>
+          </a:p>
+          <a:p xmlns:a="http://schemas.openxmlformats.org/drawingml/2006/main">
+            <a:r>
+              <a:t/>
+            </a:r>
+          </a:p>
+          <a:p xmlns:a="http://schemas.openxmlformats.org/drawingml/2006/main">
+            <a:r>
               <a:t>QUELLEN</a:t>
             </a:r>
           </a:p>
@@ -591,17 +631,12 @@
           </a:p>
           <a:p xmlns:a="http://schemas.openxmlformats.org/drawingml/2006/main">
             <a:r>
-              <a:t>Datei: screens/NewExpenseScreen.js</a:t>
-            </a:r>
-          </a:p>
-          <a:p xmlns:a="http://schemas.openxmlformats.org/drawingml/2006/main">
-            <a:r>
-              <a:t>Datei: screens/LockScreen.js</a:t>
-            </a:r>
-          </a:p>
-          <a:p xmlns:a="http://schemas.openxmlformats.org/drawingml/2006/main">
-            <a:r>
-              <a:t>Datei: storage/DataContext.js</a:t>
+              <a:t>Datei: screens/OverviewScreen.js</a:t>
+            </a:r>
+          </a:p>
+          <a:p xmlns:a="http://schemas.openxmlformats.org/drawingml/2006/main">
+            <a:r>
+              <a:t>Datei: utils/budget.js</a:t>
             </a:r>
           </a:p>
         </p:txBody>
@@ -671,7 +706,7 @@
           <a:lstStyle xmlns:a="http://schemas.openxmlformats.org/drawingml/2006/main"/>
           <a:p xmlns:a="http://schemas.openxmlformats.org/drawingml/2006/main">
             <a:r>
-              <a:t>DAUER: 0:45</a:t>
+              <a:t>DAUER: 0:40</a:t>
             </a:r>
           </a:p>
           <a:p xmlns:a="http://schemas.openxmlformats.org/drawingml/2006/main">
@@ -681,7 +716,7 @@
           </a:p>
           <a:p xmlns:a="http://schemas.openxmlformats.org/drawingml/2006/main">
             <a:r>
-              <a:t>Darian: Unsere Zielgruppe sind Lernende und Studierende in der Schweiz. Wer den ersten Lohn erhält, bezahlt vieles mit Karte, TWINT oder Bargeld. Einzelne Beträge wirken klein. Zusammen belasten sie das Budget. Unsere Aufgabe war deshalb eine einfache, lokale App: Betrag und Kategorie erfassen, den verbleibenden Betrag sehen und einen Eintrag später korrigieren. Die 14 Franken 80 sind unser Beispiel aus dem Konzept. Es gibt kein Benutzerkonto und keine Bankverbindung. Ein kurzer Weg durch die App war ein Designziel. Die geplanten zehn Sekunden für eine Erfassung sind noch keine gemessene Leistung.</a:t>
+              <a:t>Darian: Ein Kaffee für vier Franken fünfzig. Ein Mittagessen für zwölf Franken achtzig. Ein Musikabo für dreizehn Franken fünfundneunzig. Jede Zahlung ist für sich überschaubar. Zusammen sind es bereits einunddreissig Franken fünfundzwanzig. Das ist ein Beispiel, keine Statistik über unsere Zielgruppe. Gerade beim ersten eigenen Lohn oder einem festen Monatsbudget hilft es, diese Beträge zusammen zu sehen. Unsere Aufgabe aus LB1 war deshalb klar: eine einfache App für Lernende und Studierende, die Ausgaben in Franken erfasst und das verbleibende Budget zeigt.</a:t>
             </a:r>
           </a:p>
           <a:p xmlns:a="http://schemas.openxmlformats.org/drawingml/2006/main">
@@ -706,17 +741,7 @@
           </a:p>
           <a:p xmlns:a="http://schemas.openxmlformats.org/drawingml/2006/main">
             <a:r>
-              <a:t>Quellcode: https://github.com/germanndarian/Spendly. Prüfstand 01.10.2026, finale Quelldateien in der LB3-Abgabe.</a:t>
-            </a:r>
-          </a:p>
-          <a:p xmlns:a="http://schemas.openxmlformats.org/drawingml/2006/main">
-            <a:r>
-              <a:t>Datei: screens/NewExpenseScreen.js</a:t>
-            </a:r>
-          </a:p>
-          <a:p xmlns:a="http://schemas.openxmlformats.org/drawingml/2006/main">
-            <a:r>
-              <a:t>Datei: utils/validation.js</a:t>
+              <a:t>Beispielrechnung: CHF 4.50 + CHF 12.80 + CHF 13.95 = CHF 31.25. Keine Marktdaten oder Nutzungszahlen.</a:t>
             </a:r>
           </a:p>
         </p:txBody>
@@ -786,7 +811,7 @@
           <a:lstStyle xmlns:a="http://schemas.openxmlformats.org/drawingml/2006/main"/>
           <a:p xmlns:a="http://schemas.openxmlformats.org/drawingml/2006/main">
             <a:r>
-              <a:t>DAUER: 0:50</a:t>
+              <a:t>DAUER: 0:45</a:t>
             </a:r>
           </a:p>
           <a:p xmlns:a="http://schemas.openxmlformats.org/drawingml/2006/main">
@@ -796,7 +821,7 @@
           </a:p>
           <a:p xmlns:a="http://schemas.openxmlformats.org/drawingml/2006/main">
             <a:r>
-              <a:t>Darian: Links sehen wir das LB1-Mockup, rechts die aktuelle App. Der verfügbare Betrag bleibt im Vordergrund. Waldgrün, ein warmer Hintergrund und die Serifenschrift bei Beträgen bilden die Identität von Spendly. Übersicht, Verlauf und Einstellungen sind direkt erreichbar. Die Entwicklung verlief in Schritten: zuerst Oberfläche und Navigation, dann Speicherung und Biometrie, danach Fehlerfälle und Tests. Das zeigt auch die Historie im Repository. Für LB3 haben wir den Stand nochmals mit dem Konzept abgeglichen. Die App ergänzt native Bedienung und Dark Mode. Beide Bilder verwenden unterschiedliche Beispieldaten. Sie zeigen den Designvergleich, keinen Zahlenvergleich.</a:t>
+              <a:t>Darian: Das ist Spendly. Auf der Übersicht steht die Frage aus dem Einstieg jetzt als konkrete Zahl: Was bleibt für heute? Im gezeigten Beispiel sind es fünfundzwanzig Franken vierzehn. Spendly verteilt das restliche Monatsbudget auf die verbleibenden Kalendertage, einschliesslich heute. Diese Zahl ist eine Orientierung und reagiert auf neue Ausgaben. Betrag und Kategorie reichen für einen Eintrag. Im Verlauf könnt ihr eine Ausgabe wiederfinden und korrigieren. Ein eigenes Budget pro Monat hält ältere Werte getrennt. Für den Einstieg braucht es kein Konto und keine Verbindung zu einer Bank. Die Daten liegen auf dem Gerät. Wir zeigen euch jetzt, wie sich das im Alltag anfühlt.</a:t>
             </a:r>
           </a:p>
           <a:p xmlns:a="http://schemas.openxmlformats.org/drawingml/2006/main">
@@ -816,37 +841,32 @@
           </a:p>
           <a:p xmlns:a="http://schemas.openxmlformats.org/drawingml/2006/main">
             <a:r>
-              <a:t>Spendly_LB1.pdf, 24.09.2026, Seiten 1–11. Lokale Abgabe: LB1_Spendly/Spendly_LB1.pdf.</a:t>
-            </a:r>
-          </a:p>
-          <a:p xmlns:a="http://schemas.openxmlformats.org/drawingml/2006/main">
-            <a:r>
               <a:t>Quellcode: https://github.com/germanndarian/Spendly. Prüfstand 01.10.2026, finale Quelldateien in der LB3-Abgabe.</a:t>
             </a:r>
           </a:p>
           <a:p xmlns:a="http://schemas.openxmlformats.org/drawingml/2006/main">
             <a:r>
-              <a:t>Datei: theme/colors.js</a:t>
-            </a:r>
-          </a:p>
-          <a:p xmlns:a="http://schemas.openxmlformats.org/drawingml/2006/main">
-            <a:r>
-              <a:t>Datei: theme/typography.js</a:t>
-            </a:r>
-          </a:p>
-          <a:p xmlns:a="http://schemas.openxmlformats.org/drawingml/2006/main">
-            <a:r>
               <a:t>Datei: screens/OverviewScreen.js</a:t>
             </a:r>
           </a:p>
           <a:p xmlns:a="http://schemas.openxmlformats.org/drawingml/2006/main">
             <a:r>
-              <a:t>Vorgehen belegt durch Git-Commits: 5f4b8f3 (23.09.2026), 958eed7 (24.09.2026), 686081d und 633fb0f (25.09.2026).</a:t>
-            </a:r>
-          </a:p>
-          <a:p xmlns:a="http://schemas.openxmlformats.org/drawingml/2006/main">
-            <a:r>
-              <a:t>Bild links: LB1_Spendly/Mockups/02-uebersicht.png. Bild rechts: aktuelle Aufnahme in dieser LB3-Abgabe.</a:t>
+              <a:t>Datei: utils/budget.js</a:t>
+            </a:r>
+          </a:p>
+          <a:p xmlns:a="http://schemas.openxmlformats.org/drawingml/2006/main">
+            <a:r>
+              <a:t>Datei: screens/NewExpenseScreen.js</a:t>
+            </a:r>
+          </a:p>
+          <a:p xmlns:a="http://schemas.openxmlformats.org/drawingml/2006/main">
+            <a:r>
+              <a:t>Datei: storage/budgets.js</a:t>
+            </a:r>
+          </a:p>
+          <a:p xmlns:a="http://schemas.openxmlformats.org/drawingml/2006/main">
+            <a:r>
+              <a:t>Produktbild: tatsächlicher eigener iOS-Release-Build, Demo-Budget Oktober 2026 CHF 800.00, Ausgaben CHF 20.40, 31 Kalendertage.</a:t>
             </a:r>
           </a:p>
         </p:txBody>
@@ -926,7 +946,7 @@
           </a:p>
           <a:p xmlns:a="http://schemas.openxmlformats.org/drawingml/2006/main">
             <a:r>
-              <a:t>Darian zeigt die App, Alex erklärt kurz die Ergebnisse.</a:t>
+              <a:t>Alex erklärt, Darian bedient die App. Bei der Aufnahme erklären beide die sichtbaren Schritte.</a:t>
             </a:r>
           </a:p>
           <a:p xmlns:a="http://schemas.openxmlformats.org/drawingml/2006/main">
@@ -936,32 +956,7 @@
           </a:p>
           <a:p xmlns:a="http://schemas.openxmlformats.org/drawingml/2006/main">
             <a:r>
-              <a:t>0:00–0:15: App entsperren. Face ID nur zeigen, wenn der Test am Präsentationsgerät erfolgreich war. Sonst den eingerichteten App-Code verwenden.</a:t>
-            </a:r>
-          </a:p>
-          <a:p xmlns:a="http://schemas.openxmlformats.org/drawingml/2006/main">
-            <a:r>
-              <a:t>0:15–0:40: Neue Ausgabe erfassen: CHF 14.80, Kategorie Essen &amp; Trinken, Beschreibung «Mittagessen», heutiges Datum. Speichern.</a:t>
-            </a:r>
-          </a:p>
-          <a:p xmlns:a="http://schemas.openxmlformats.org/drawingml/2006/main">
-            <a:r>
-              <a:t>0:40–0:55: Auf der Übersicht zeigen, dass Restbudget und Tagesbetrag sinken. Der Tagesbetrag verteilt das restliche Budget auf die restlichen Kalendertage inklusive heute.</a:t>
-            </a:r>
-          </a:p>
-          <a:p xmlns:a="http://schemas.openxmlformats.org/drawingml/2006/main">
-            <a:r>
-              <a:t>0:55–1:15: Im Verlauf «Mittagessen» suchen. Den Betrag auf CHF 12.80 ändern und speichern.</a:t>
-            </a:r>
-          </a:p>
-          <a:p xmlns:a="http://schemas.openxmlformats.org/drawingml/2006/main">
-            <a:r>
-              <a:t>1:15–1:35: Den Eintrag löschen und mit «Rückgängig» wiederherstellen.</a:t>
-            </a:r>
-          </a:p>
-          <a:p xmlns:a="http://schemas.openxmlformats.org/drawingml/2006/main">
-            <a:r>
-              <a:t>1:35–2:00: App vollständig schliessen und neu öffnen. Erneut entsperren und denselben Eintrag im Verlauf zeigen. So wird die lokale Speicherung sichtbar.</a:t>
+              <a:t>Alex: Stellt euch vor, ihr kommt gerade vom Mittagessen. Wir erfassen jetzt genau diese Ausgabe.</a:t>
             </a:r>
           </a:p>
           <a:p xmlns:a="http://schemas.openxmlformats.org/drawingml/2006/main">
@@ -971,7 +966,42 @@
           </a:p>
           <a:p xmlns:a="http://schemas.openxmlformats.org/drawingml/2006/main">
             <a:r>
-              <a:t>Falls die Vorführung stockt: nach spätestens 15 Sekunden auf die mitgelieferte Aufnahme wechseln. Keine ungetestete Biometrie als erfolgreiche Demonstration ankündigen. Beispieldaten vor dem Vortrag einmal vorbereiten, nach dem Durchlauf wiederherstellen.</a:t>
+              <a:t>0:00–0:15: Spendly entsperren. Den Demo-PIN 111111 verwenden. Face ID nur als Live-Scan zeigen, wenn es am Präsentationsgerät erfolgreich geprüft wurde.</a:t>
+            </a:r>
+          </a:p>
+          <a:p xmlns:a="http://schemas.openxmlformats.org/drawingml/2006/main">
+            <a:r>
+              <a:t>0:15–0:40: CHF 14.80, Essen &amp; Trinken, «Mittagessen», heutiges Datum eingeben und speichern.</a:t>
+            </a:r>
+          </a:p>
+          <a:p xmlns:a="http://schemas.openxmlformats.org/drawingml/2006/main">
+            <a:r>
+              <a:t>0:40–0:55: Alex: Der Eintrag ist gespeichert. Gleichzeitig verändert sich die Tagesorientierung. Wir sehen direkt, was vom Monatsbudget bleibt.</a:t>
+            </a:r>
+          </a:p>
+          <a:p xmlns:a="http://schemas.openxmlformats.org/drawingml/2006/main">
+            <a:r>
+              <a:t>0:55–1:15: Im Verlauf «Mittagessen» suchen. CHF 14.80 auf CHF 12.80 ändern und speichern.</a:t>
+            </a:r>
+          </a:p>
+          <a:p xmlns:a="http://schemas.openxmlformats.org/drawingml/2006/main">
+            <a:r>
+              <a:t>1:15–1:35: Den Eintrag löschen und innerhalb der fünf Sekunden «Rückgängig» wählen.</a:t>
+            </a:r>
+          </a:p>
+          <a:p xmlns:a="http://schemas.openxmlformats.org/drawingml/2006/main">
+            <a:r>
+              <a:t>1:35–2:00: App vollständig beenden und neu öffnen. Mit PIN 111111 entsperren und den erhaltenen Eintrag zeigen. Alex: Die Ausgabe bleibt auch nach einem Neustart erhalten.</a:t>
+            </a:r>
+          </a:p>
+          <a:p xmlns:a="http://schemas.openxmlformats.org/drawingml/2006/main">
+            <a:r>
+              <a:t/>
+            </a:r>
+          </a:p>
+          <a:p xmlns:a="http://schemas.openxmlformats.org/drawingml/2006/main">
+            <a:r>
+              <a:t>Wenn die Live-Demo nach 15 Sekunden nicht läuft, auf das beigefügte Video wechseln. Die Aufnahme dauert 2:06 und hat keinen Ton. Mit Video verlängert sich die Zielzeit von 8:55 auf etwa 9:01. Vor einer neuen Live-Demo den Beispieldatensatz prüfen, damit nicht bereits ein zweiter identischer Mittagessen-Eintrag besteht.</a:t>
             </a:r>
           </a:p>
           <a:p xmlns:a="http://schemas.openxmlformats.org/drawingml/2006/main">
@@ -1096,7 +1126,7 @@
           </a:p>
           <a:p xmlns:a="http://schemas.openxmlformats.org/drawingml/2006/main">
             <a:r>
-              <a:t>Alex: Die App-Sperre ist unser Smartphone-Feature. Anschaulich ist das Betriebssystem der Türsteher. Spendly fragt, ob die Person das Gerät entsperren darf. Das Gerät prüft Gesicht oder Fingerabdruck, und die App erhält Erfolg oder einen Fehler. Spendly bekommt kein Foto und keinen Fingerabdruck. Wer Biometrie nicht verwenden kann, nutzt einen eigenen sechsstelligen Code. Dessen Prüfwert liegt zusammen mit einem zufälligen Salz in SecureStore. Nach fünf falschen Versuchen folgen 30 Sekunden Wartezeit. Weitere Fehler verlängern die Wartezeit bis auf fünf Minuten. Ein Neustart setzt diese Sperre nicht zurück. Die App-Sperre schützt den Zugang innerhalb der App. Die SQLite-Datei ist dadurch nicht zusätzlich verschlüsselt. Der native Systemdialog und die erfolgreiche Erkennung wurden im Simulator geprüft. Das physische iPhone war für Xcode nicht erreichbar. Ein echter Gesichtsscan ist deshalb noch nicht nachgewiesen.</a:t>
+              <a:t>Alex: Ausgaben können persönlich sein. Spendly speichert sie lokal, ohne Konto und ohne eigenen Server. Die App-Sperre nutzt eine Funktion des Smartphones. Stellt euch das Betriebssystem als Türsteher vor: Spendly fragt, ob die Person das Gerät entsperren darf. Das Gerät prüft Gesicht oder Fingerabdruck. Die App erhält nur das Ergebnis, kein Foto und keinen Fingerabdruck. Als Alternative gibt es einen eigenen sechsstelligen Code. Nach fünf falschen Versuchen wartet die App dreissig Sekunden. Weitere Fehler verlängern diese Zeit, und ein Neustart setzt sie nicht zurück. Die Grenze ist klar: Die App-Sperre verschlüsselt die SQLite-Datei nicht zusätzlich. Der native Face-ID-Dialog funktioniert im Simulator. Ein echter Scan bleibt offen, weil Xcode unser physisches iPhone nicht erreichen konnte.</a:t>
             </a:r>
           </a:p>
           <a:p xmlns:a="http://schemas.openxmlformats.org/drawingml/2006/main">
@@ -1126,6 +1156,11 @@
           </a:p>
           <a:p xmlns:a="http://schemas.openxmlformats.org/drawingml/2006/main">
             <a:r>
+              <a:t>Expo SQLite: https://docs.expo.dev/versions/latest/sdk/sqlite/ (abgerufen 01.10.2026).</a:t>
+            </a:r>
+          </a:p>
+          <a:p xmlns:a="http://schemas.openxmlformats.org/drawingml/2006/main">
+            <a:r>
               <a:t>Quellcode: https://github.com/germanndarian/Spendly. Prüfstand 01.10.2026, finale Quelldateien in der LB3-Abgabe.</a:t>
             </a:r>
           </a:p>
@@ -1136,12 +1171,12 @@
           </a:p>
           <a:p xmlns:a="http://schemas.openxmlformats.org/drawingml/2006/main">
             <a:r>
+              <a:t>Datei: storage/pin.js</a:t>
+            </a:r>
+          </a:p>
+          <a:p xmlns:a="http://schemas.openxmlformats.org/drawingml/2006/main">
+            <a:r>
               <a:t>Datei: screens/LockScreen.js</a:t>
-            </a:r>
-          </a:p>
-          <a:p xmlns:a="http://schemas.openxmlformats.org/drawingml/2006/main">
-            <a:r>
-              <a:t>Datei: storage/pin.js</a:t>
             </a:r>
           </a:p>
         </p:txBody>
@@ -1211,7 +1246,7 @@
           <a:lstStyle xmlns:a="http://schemas.openxmlformats.org/drawingml/2006/main"/>
           <a:p xmlns:a="http://schemas.openxmlformats.org/drawingml/2006/main">
             <a:r>
-              <a:t>DAUER: 0:55</a:t>
+              <a:t>DAUER: 0:45</a:t>
             </a:r>
           </a:p>
           <a:p xmlns:a="http://schemas.openxmlformats.org/drawingml/2006/main">
@@ -1221,7 +1256,7 @@
           </a:p>
           <a:p xmlns:a="http://schemas.openxmlformats.org/drawingml/2006/main">
             <a:r>
-              <a:t>Alex: Die App trennt Bedienung, Berechnungen und Speicherung. Das Formular prüft zuerst den Betrag und die übrigen Felder. Nur gültige Eingaben gehen an den gemeinsamen DataContext. Dieser ruft die Speicherfunktionen auf. In SQLite steht jede Ausgabe als Datensatz mit ID, Betrag, Kategorie, Beschreibung und Datum. Geld speichern wir als ganze Rappen. 14 Franken 80 sind die ganze Zahl 1480. Das verhindert typische Ungenauigkeiten mit Dezimalzahlen. Danach aktualisiert der Context die Daten, und die Übersicht berechnet das Budget neu. Reine Funktionen lassen sich unabhängig von der Oberfläche testen. Kommentare erklären etwa die Rappenrechnung und gebundene SQL-Parameter.</a:t>
+              <a:t>Darian: Rechts läuft die App, links steht der ursprüngliche Entwurf. Der Betrag ist in beiden der Mittelpunkt. Die Kategorie ist direkt erreichbar. Grün, der warme Hintergrund und die Schrift bei den Beträgen bleiben Teil des Designs. Wir haben zuerst Oberfläche und Navigation umgesetzt. Danach kamen Speicherung und Gerätesperre. Anschliessend haben wir Fehlerfälle und Tests ergänzt. Für LB3 verglichen wir den Code nochmals mit dem Konzept. Getrennte Monatsbudgets und dauerhafte Fristen haben wir vervollständigt. Dark Mode erweitert den geplanten Umfang. Dabei war eine Erkenntnis entscheidend: Die App braucht auch bei einer falschen Eingabe oder einer abgebrochenen Aktion einen klaren Zustand.</a:t>
             </a:r>
           </a:p>
           <a:p xmlns:a="http://schemas.openxmlformats.org/drawingml/2006/main">
@@ -1241,7 +1276,7 @@
           </a:p>
           <a:p xmlns:a="http://schemas.openxmlformats.org/drawingml/2006/main">
             <a:r>
-              <a:t>Expo SQLite: https://docs.expo.dev/versions/latest/sdk/sqlite/ (abgerufen 01.10.2026).</a:t>
+              <a:t>Spendly_LB1.pdf, 24.09.2026, Seiten 1–11. Lokale Abgabe: LB1_Spendly/Spendly_LB1.pdf.</a:t>
             </a:r>
           </a:p>
           <a:p xmlns:a="http://schemas.openxmlformats.org/drawingml/2006/main">
@@ -1251,37 +1286,27 @@
           </a:p>
           <a:p xmlns:a="http://schemas.openxmlformats.org/drawingml/2006/main">
             <a:r>
+              <a:t>Datei: theme/colors.js</a:t>
+            </a:r>
+          </a:p>
+          <a:p xmlns:a="http://schemas.openxmlformats.org/drawingml/2006/main">
+            <a:r>
+              <a:t>Datei: theme/typography.js</a:t>
+            </a:r>
+          </a:p>
+          <a:p xmlns:a="http://schemas.openxmlformats.org/drawingml/2006/main">
+            <a:r>
               <a:t>Datei: screens/NewExpenseScreen.js</a:t>
             </a:r>
           </a:p>
           <a:p xmlns:a="http://schemas.openxmlformats.org/drawingml/2006/main">
             <a:r>
-              <a:t>Datei: utils/validation.js</a:t>
-            </a:r>
-          </a:p>
-          <a:p xmlns:a="http://schemas.openxmlformats.org/drawingml/2006/main">
-            <a:r>
-              <a:t>Datei: storage/DataContext.js</a:t>
-            </a:r>
-          </a:p>
-          <a:p xmlns:a="http://schemas.openxmlformats.org/drawingml/2006/main">
-            <a:r>
-              <a:t>Datei: storage/expenses.js</a:t>
-            </a:r>
-          </a:p>
-          <a:p xmlns:a="http://schemas.openxmlformats.org/drawingml/2006/main">
-            <a:r>
-              <a:t>Datei: storage/db.js</a:t>
-            </a:r>
-          </a:p>
-          <a:p xmlns:a="http://schemas.openxmlformats.org/drawingml/2006/main">
-            <a:r>
-              <a:t>Datei: screens/OverviewScreen.js</a:t>
-            </a:r>
-          </a:p>
-          <a:p xmlns:a="http://schemas.openxmlformats.org/drawingml/2006/main">
-            <a:r>
-              <a:t>Datei: utils/budget.js</a:t>
+              <a:t>Vorgehen: Git-Commits 5f4b8f3 (23.09.2026), 958eed7 (24.09.2026), 686081d und 633fb0f (25.09.2026).</a:t>
+            </a:r>
+          </a:p>
+          <a:p xmlns:a="http://schemas.openxmlformats.org/drawingml/2006/main">
+            <a:r>
+              <a:t>Bild links: LB1_Spendly/Mockups/03-neue-ausgabe.png. Bild rechts: eigene native Aufnahme.</a:t>
             </a:r>
           </a:p>
         </p:txBody>
@@ -1361,7 +1386,7 @@
           </a:p>
           <a:p xmlns:a="http://schemas.openxmlformats.org/drawingml/2006/main">
             <a:r>
-              <a:t>Alex: Das finale Konzept war unsere Ausgangsbasis. Die lokale SQLite-Datenbank und ganze Rappen entsprechen bereits der Planung aus LB1. Monatsbudgets bleiben getrennt. Ein Standardbudget gilt für neue Monate. Auch die fünf Sekunden lange Löschfrist liegt dauerhaft in SQLite. Dark Mode erweitert den Mindestumfang. Eine Abweichung bleibt beim Code-Prüfwert: Die App nutzt SHA-256 mit Salt und SecureStore, keine spezielle langsame Passwortableitung. Das ist bewusst als Vereinfachung dokumentiert. Zusätzliche Funktionen wie Cloud-Synchronisierung oder Bankimport bleiben ausserhalb des Projekts. Der genaue Vergleich und die Abweichungen stehen in der technischen Dokumentation.</a:t>
+              <a:t>Alex: Hinter dem kurzen Ablauf steckt eine getrennte Struktur. Das Formular prüft die Eingabe. Der gemeinsame DataContext führt die Aktion aus. SQLite speichert sie, danach aktualisieren sich die Ansichten. Die Methoden und Kommentare erklären diese Aufgaben im Code. Geld liegt als ganze Rappen in der Datenbank. Aus vierzehn Franken achtzig wird die Zahl eintausendvierhundertachtzig. Beim Monatsbudget behalten wir für jeden Monat einen eigenen Wert. Beim Löschen speichern wir die fünf Sekunden lange Frist, damit ein Neustart sie nicht verändert. Beides entspricht dem Konzept. Eine Abweichung bleibt beim Code-Prüfwert: SHA-256 mit zufälligem Salt in SecureStore ist einfacher als die geplante langsame Passwortableitung. Diese Grenze haben wir dokumentiert.</a:t>
             </a:r>
           </a:p>
           <a:p xmlns:a="http://schemas.openxmlformats.org/drawingml/2006/main">
@@ -1386,27 +1411,47 @@
           </a:p>
           <a:p xmlns:a="http://schemas.openxmlformats.org/drawingml/2006/main">
             <a:r>
+              <a:t>Expo SQLite: https://docs.expo.dev/versions/latest/sdk/sqlite/ (abgerufen 01.10.2026).</a:t>
+            </a:r>
+          </a:p>
+          <a:p xmlns:a="http://schemas.openxmlformats.org/drawingml/2006/main">
+            <a:r>
+              <a:t>Expo SecureStore: https://docs.expo.dev/versions/latest/sdk/securestore/ (abgerufen 01.10.2026).</a:t>
+            </a:r>
+          </a:p>
+          <a:p xmlns:a="http://schemas.openxmlformats.org/drawingml/2006/main">
+            <a:r>
               <a:t>Quellcode: https://github.com/germanndarian/Spendly. Prüfstand 01.10.2026, finale Quelldateien in der LB3-Abgabe.</a:t>
             </a:r>
           </a:p>
           <a:p xmlns:a="http://schemas.openxmlformats.org/drawingml/2006/main">
             <a:r>
-              <a:t>Datei: storage/db.js</a:t>
-            </a:r>
-          </a:p>
-          <a:p xmlns:a="http://schemas.openxmlformats.org/drawingml/2006/main">
-            <a:r>
-              <a:t>Datei: storage/settings.js</a:t>
+              <a:t>Datei: screens/NewExpenseScreen.js</a:t>
+            </a:r>
+          </a:p>
+          <a:p xmlns:a="http://schemas.openxmlformats.org/drawingml/2006/main">
+            <a:r>
+              <a:t>Datei: utils/validation.js</a:t>
+            </a:r>
+          </a:p>
+          <a:p xmlns:a="http://schemas.openxmlformats.org/drawingml/2006/main">
+            <a:r>
+              <a:t>Datei: storage/DataContext.js</a:t>
+            </a:r>
+          </a:p>
+          <a:p xmlns:a="http://schemas.openxmlformats.org/drawingml/2006/main">
+            <a:r>
+              <a:t>Datei: storage/budgets.js</a:t>
+            </a:r>
+          </a:p>
+          <a:p xmlns:a="http://schemas.openxmlformats.org/drawingml/2006/main">
+            <a:r>
+              <a:t>Datei: storage/expenses.js</a:t>
             </a:r>
           </a:p>
           <a:p xmlns:a="http://schemas.openxmlformats.org/drawingml/2006/main">
             <a:r>
               <a:t>Datei: storage/pin.js</a:t>
-            </a:r>
-          </a:p>
-          <a:p xmlns:a="http://schemas.openxmlformats.org/drawingml/2006/main">
-            <a:r>
-              <a:t>Datei: storage/DataContext.js</a:t>
             </a:r>
           </a:p>
         </p:txBody>
@@ -1486,7 +1531,7 @@
           </a:p>
           <a:p xmlns:a="http://schemas.openxmlformats.org/drawingml/2006/main">
             <a:r>
-              <a:t>Alex: Der aktuelle Prüflauf umfasst 91 bestandene automatisierte Tests. Neun Testsuiten prüfen unter anderem Berechnungen, Validierung, Code-Sperren und die SQLite-Speicherung. Die Datenbanktests nutzen eine echte SQLite-Engine. Zwei Tests prüfen den tatsächlichen Ablauf bei vergessenem Code mit aktivierter und deaktivierter Biometrie. ESLint ist ebenfalls ohne Fehler durchgelaufen. Zusätzlich prüfen wir die App als Ablauf: erstellen, verändern, löschen, zurückholen und nach einem Neustart wiederfinden. Der vollständige Ablauf funktionierte im eigenen iOS-Release-Build im Simulator, auch nach dem Stoppen des Entwicklungsservers. Historische Budgets und dunkle Darstellung wurden zusätzlich geprüft. Der native Face-ID-Systemdialog konnte mit einer simulierten passenden Erkennung entsperren. Der physische Gesichtsscan bleibt offen. Ein Unit-Test beweist keinen erfolgreichen Face-ID-Vorgang. Deshalb unterscheiden wir diese Nachweise. Einen Nutzertest mit der Zielgruppe und eine gemessene Erfassungszeit haben wir noch nicht durchgeführt.</a:t>
+              <a:t>Alex: Wir können den Kern heute zeigen. Einundneunzig automatisierte Tests in neun Suiten bestehen. Sie prüfen Berechnungen, Eingaben, PIN-Sperren und die Speicherung. Die SQLite-Regressionen führen echtes SQL aus. ESLint meldet keine Fehler. Zusätzlich haben wir den vollständigen Ablauf im eigenen iOS-Release-Build geprüft: erfassen, korrigieren, löschen, zurückholen und nach einem vollständigen Neustart wiederfinden. Dabei war der Entwicklungsserver gestoppt. Auch alte Monatsbudgets und Dark Mode wurden geprüft. Das ist technischer Nachweis. Ob Lernende Spendly täglich nutzen und die Tagesorientierung verstehen, müssen wir als Nächstes mit ihnen testen. Ein erfolgreicher Simulator-Dialog ersetzt auch keinen echten Gesichtsscan.</a:t>
             </a:r>
           </a:p>
           <a:p xmlns:a="http://schemas.openxmlformats.org/drawingml/2006/main">
@@ -1526,7 +1571,7 @@
           </a:p>
           <a:p xmlns:a="http://schemas.openxmlformats.org/drawingml/2006/main">
             <a:r>
-              <a:t>Prüfprotokoll: 01.10.2026: 91/91 Tests in9Suiten, ESLint und Diff-Prüfung erfolgreich. Native Release-Builds für iOS-Simulator und iPhone erfolgreich. Simulatorablauf und simulierte Face ID im technischen Testprotokoll; echte Geräteerkennung offen.</a:t>
+              <a:t>Prüfprotokoll: 01.10.2026: 91/91 Tests in 9 Suiten, ESLint und Diff-Prüfung erfolgreich. Native Release-Builds für iOS-Simulator und iPhone erfolgreich. Simulatorablauf und simulierte Face ID im technischen Testprotokoll; echte Geräteerkennung offen.</a:t>
             </a:r>
           </a:p>
         </p:txBody>
@@ -1596,7 +1641,7 @@
           <a:lstStyle xmlns:a="http://schemas.openxmlformats.org/drawingml/2006/main"/>
           <a:p xmlns:a="http://schemas.openxmlformats.org/drawingml/2006/main">
             <a:r>
-              <a:t>DAUER: 0:50</a:t>
+              <a:t>DAUER: 0:55</a:t>
             </a:r>
           </a:p>
           <a:p xmlns:a="http://schemas.openxmlformats.org/drawingml/2006/main">
@@ -1606,7 +1651,7 @@
           </a:p>
           <a:p xmlns:a="http://schemas.openxmlformats.org/drawingml/2006/main">
             <a:r>
-              <a:t>Darian: Zwei Stellen zeigen, warum eine fertige App mehr braucht als den normalen Erfolgsfall. Ein einzelner globaler Budgetwert würde alte Monate beim Ändern verfälschen. Deshalb speichert die App Monatswerte getrennt und hält das Standardbudget zusätzlich fest. Auch ein Neustart darf die Sperrzeit nach falschen Codes nicht zurücksetzen. Dafür speichert SecureStore die Fehlversuche und den Sperrzeitpunkt. Beim Schliessen eines veränderten Formulars fragt die App vor dem Verwerfen nach. Die Folgerung ist für uns technisch klar: Jede wichtige Aktion braucht einen definierten Zustand vor der Änderung, ein Ergebnis bei Erfolg und eine verständliche Reaktion bei einem Fehler. Sonst können Oberfläche und gespeicherte Daten auseinanderlaufen.</a:t>
+              <a:t>Darian: Der nächste Schritt wäre eine kleine Alltagsprobe: fünf Lernende oder Studierende nutzen Spendly eine Woche. Das ist unser Vorschlag, kein bereits durchgeführter Pilot. Wir würden beobachten, wie schnell eine Erfassung gelingt, ob die Tagesorientierung verständlich ist und ob die Personen freiwillig wiederkommen. Erst danach lässt sich entscheiden, welche Erweiterung hilfreich ist und ob ein Geschäftsmodell Sinn ergibt. Vor einem Launch gehören auch der echte iPhone-Test, Android und Screenreader dazu. Aus der Entwicklung nehmen wir mit, Fehlerfälle früher zu planen. Ein altes Monatsbudget darf sich beim Ändern des neuen Monats nicht verschieben. Ein Neustart darf keine Sperrfrist zurücksetzen. Diese Erfahrungen würden wir im nächsten Durchgang schon beim Entwurf berücksichtigen.</a:t>
             </a:r>
           </a:p>
           <a:p xmlns:a="http://schemas.openxmlformats.org/drawingml/2006/main">
@@ -1626,12 +1671,17 @@
           </a:p>
           <a:p xmlns:a="http://schemas.openxmlformats.org/drawingml/2006/main">
             <a:r>
+              <a:t>Spendly_LB1.pdf, 24.09.2026, Seiten 1–11. Lokale Abgabe: LB1_Spendly/Spendly_LB1.pdf.</a:t>
+            </a:r>
+          </a:p>
+          <a:p xmlns:a="http://schemas.openxmlformats.org/drawingml/2006/main">
+            <a:r>
               <a:t>Quellcode: https://github.com/germanndarian/Spendly. Prüfstand 01.10.2026, finale Quelldateien in der LB3-Abgabe.</a:t>
             </a:r>
           </a:p>
           <a:p xmlns:a="http://schemas.openxmlformats.org/drawingml/2006/main">
             <a:r>
-              <a:t>Datei: storage/settings.js</a:t>
+              <a:t>Datei: storage/budgets.js</a:t>
             </a:r>
           </a:p>
           <a:p xmlns:a="http://schemas.openxmlformats.org/drawingml/2006/main">
@@ -1646,7 +1696,7 @@
           </a:p>
           <a:p xmlns:a="http://schemas.openxmlformats.org/drawingml/2006/main">
             <a:r>
-              <a:t>Datei: storage/DataContext.js</a:t>
+              <a:t>Die fünf Personen und eine Woche sind ein vorgeschlagener Nutzertest. Keine bestätigten Nutzer, Umsätze oder Finanzierungsrunde.</a:t>
             </a:r>
           </a:p>
         </p:txBody>
@@ -1714,7 +1764,7 @@
   </p:cSld>
   <p:clrMap bg1="lt1" tx1="dk1" bg2="lt2" tx2="dk2" accent1="accent1" accent2="accent2" accent3="accent3" accent4="accent4" accent5="accent5" accent6="accent6" hlink="hlink" folHlink="folHlink"/>
   <p:sldLayoutIdLst>
-    <p:sldLayoutId xmlns:r="http://schemas.openxmlformats.org/officeDocument/2006/relationships" id="2147483649" r:id="R0f98ca21fe7b4baa"/>
+    <p:sldLayoutId xmlns:r="http://schemas.openxmlformats.org/officeDocument/2006/relationships" id="2147483649" r:id="Re0ffd5f4382140cf"/>
   </p:sldLayoutIdLst>
   <p:txStyles>
     <p:titleStyle>
@@ -2247,7 +2297,7 @@
     <p:bg>
       <p:bgPr>
         <a:solidFill xmlns:a="http://schemas.openxmlformats.org/drawingml/2006/main">
-          <a:srgbClr val="1F5A45"/>
+          <a:srgbClr val="F6F5F1"/>
         </a:solidFill>
       </p:bgPr>
     </p:bg>
@@ -2262,10 +2312,10 @@
       </p:grpSpPr>
       <p:sp>
         <p:nvSpPr>
-          <p:cNvPr id="6" name="">
+          <p:cNvPr id="5" name="">
             <a:extLst xmlns:a="http://schemas.openxmlformats.org/drawingml/2006/main">
               <a:ext uri="{FF2B5EF4-FFF2-40B4-BE49-F238E27FC236}">
-                <a16:creationId xmlns:a16="http://schemas.microsoft.com/office/drawing/2014/main" id="{136AC718-2004-4D91-98A3-10DA846CDCBC}"/>
+                <a16:creationId xmlns:a16="http://schemas.microsoft.com/office/drawing/2014/main" id="{CE6DC4BD-200B-4336-8706-1A8D3EE7F618}"/>
               </a:ext>
             </a:extLst>
           </p:cNvPr>
@@ -2296,7 +2346,7 @@
             <a:pPr algn="r">
               <a:defRPr sz="1275" b="0">
                 <a:solidFill>
-                  <a:srgbClr val="DCEBE2"/>
+                  <a:srgbClr val="6E6D68"/>
                 </a:solidFill>
                 <a:latin typeface="Inter"/>
                 <a:ea typeface="Inter"/>
@@ -2306,7 +2356,7 @@
             <a:r>
               <a:rPr sz="1275" b="0">
                 <a:solidFill>
-                  <a:srgbClr val="DCEBE2"/>
+                  <a:srgbClr val="6E6D68"/>
                 </a:solidFill>
                 <a:latin typeface="Inter"/>
                 <a:ea typeface="Inter"/>
@@ -2322,7 +2372,7 @@
           <p:cNvPr id="2" name="">
             <a:extLst xmlns:a="http://schemas.openxmlformats.org/drawingml/2006/main">
               <a:ext uri="{FF2B5EF4-FFF2-40B4-BE49-F238E27FC236}">
-                <a16:creationId xmlns:a16="http://schemas.microsoft.com/office/drawing/2014/main" id="{2AE00056-D5F7-4ACE-A075-3BB5D9390044}"/>
+                <a16:creationId xmlns:a16="http://schemas.microsoft.com/office/drawing/2014/main" id="{AAA9DDFC-1119-402F-BE0B-8F77200840BB}"/>
               </a:ext>
             </a:extLst>
           </p:cNvPr>
@@ -2333,8 +2383,8 @@
         </p:nvSpPr>
         <p:spPr>
           <a:xfrm xmlns:a="http://schemas.openxmlformats.org/drawingml/2006/main">
-            <a:off x="609600" y="1381125"/>
-            <a:ext cx="10906125" cy="1600200"/>
+            <a:off x="609600" y="1343025"/>
+            <a:ext cx="10668000" cy="3476625"/>
           </a:xfrm>
           <a:prstGeom xmlns:a="http://schemas.openxmlformats.org/drawingml/2006/main" prst="rect">
             <a:avLst/>
@@ -2351,9 +2401,9 @@
           <a:lstStyle xmlns:a="http://schemas.openxmlformats.org/drawingml/2006/main"/>
           <a:p xmlns:a="http://schemas.openxmlformats.org/drawingml/2006/main">
             <a:pPr algn="l">
-              <a:defRPr sz="10650" b="0">
-                <a:solidFill>
-                  <a:srgbClr val="F6F5F1"/>
+              <a:defRPr sz="6300" b="0">
+                <a:solidFill>
+                  <a:srgbClr val="1F5A45"/>
                 </a:solidFill>
                 <a:latin typeface="Newsreader"/>
                 <a:ea typeface="Newsreader"/>
@@ -2361,15 +2411,61 @@
               </a:defRPr>
             </a:pPr>
             <a:r>
-              <a:rPr sz="10650" b="0">
-                <a:solidFill>
-                  <a:srgbClr val="F6F5F1"/>
+              <a:rPr sz="6300" b="0">
+                <a:solidFill>
+                  <a:srgbClr val="1F5A45"/>
                 </a:solidFill>
                 <a:latin typeface="Newsreader"/>
                 <a:ea typeface="Newsreader"/>
                 <a:cs typeface="Newsreader"/>
               </a:rPr>
-              <a:t>spendly.</a:t>
+              <a:t>Wie entscheidest du,</a:t>
+            </a:r>
+          </a:p>
+          <a:p xmlns:a="http://schemas.openxmlformats.org/drawingml/2006/main">
+            <a:pPr algn="l">
+              <a:defRPr sz="6300" b="0">
+                <a:solidFill>
+                  <a:srgbClr val="1F5A45"/>
+                </a:solidFill>
+                <a:latin typeface="Newsreader"/>
+                <a:ea typeface="Newsreader"/>
+                <a:cs typeface="Newsreader"/>
+              </a:defRPr>
+            </a:pPr>
+            <a:r>
+              <a:rPr sz="6300" b="0">
+                <a:solidFill>
+                  <a:srgbClr val="1F5A45"/>
+                </a:solidFill>
+                <a:latin typeface="Newsreader"/>
+                <a:ea typeface="Newsreader"/>
+                <a:cs typeface="Newsreader"/>
+              </a:rPr>
+              <a:t>was du dir heute</a:t>
+            </a:r>
+          </a:p>
+          <a:p xmlns:a="http://schemas.openxmlformats.org/drawingml/2006/main">
+            <a:pPr algn="l">
+              <a:defRPr sz="6300" b="0">
+                <a:solidFill>
+                  <a:srgbClr val="1F5A45"/>
+                </a:solidFill>
+                <a:latin typeface="Newsreader"/>
+                <a:ea typeface="Newsreader"/>
+                <a:cs typeface="Newsreader"/>
+              </a:defRPr>
+            </a:pPr>
+            <a:r>
+              <a:rPr sz="6300" b="0">
+                <a:solidFill>
+                  <a:srgbClr val="1F5A45"/>
+                </a:solidFill>
+                <a:latin typeface="Newsreader"/>
+                <a:ea typeface="Newsreader"/>
+                <a:cs typeface="Newsreader"/>
+              </a:rPr>
+              <a:t>noch leisten kannst?</a:t>
             </a:r>
           </a:p>
         </p:txBody>
@@ -2379,7 +2475,7 @@
           <p:cNvPr id="3" name="">
             <a:extLst xmlns:a="http://schemas.openxmlformats.org/drawingml/2006/main">
               <a:ext uri="{FF2B5EF4-FFF2-40B4-BE49-F238E27FC236}">
-                <a16:creationId xmlns:a16="http://schemas.microsoft.com/office/drawing/2014/main" id="{F7E8A34E-8F71-49D7-B4DA-EA74094015AA}"/>
+                <a16:creationId xmlns:a16="http://schemas.microsoft.com/office/drawing/2014/main" id="{25CC1988-9CBB-4818-B922-168AF33DA6BB}"/>
               </a:ext>
             </a:extLst>
           </p:cNvPr>
@@ -2390,8 +2486,8 @@
         </p:nvSpPr>
         <p:spPr>
           <a:xfrm xmlns:a="http://schemas.openxmlformats.org/drawingml/2006/main">
-            <a:off x="666750" y="3276600"/>
-            <a:ext cx="9334500" cy="542925"/>
+            <a:off x="657225" y="5772150"/>
+            <a:ext cx="7762875" cy="342900"/>
           </a:xfrm>
           <a:prstGeom xmlns:a="http://schemas.openxmlformats.org/drawingml/2006/main" prst="rect">
             <a:avLst/>
@@ -2408,25 +2504,25 @@
           <a:lstStyle xmlns:a="http://schemas.openxmlformats.org/drawingml/2006/main"/>
           <a:p xmlns:a="http://schemas.openxmlformats.org/drawingml/2006/main">
             <a:pPr algn="l">
-              <a:defRPr sz="2850" b="0">
-                <a:solidFill>
-                  <a:srgbClr val="F6F5F1"/>
-                </a:solidFill>
-                <a:latin typeface="Inter"/>
-                <a:ea typeface="Inter"/>
-                <a:cs typeface="Inter"/>
-              </a:defRPr>
-            </a:pPr>
-            <a:r>
-              <a:rPr sz="2850" b="0">
-                <a:solidFill>
-                  <a:srgbClr val="F6F5F1"/>
-                </a:solidFill>
-                <a:latin typeface="Inter"/>
-                <a:ea typeface="Inter"/>
-                <a:cs typeface="Inter"/>
-              </a:rPr>
-              <a:t>Ausgaben und Monatsbudget</a:t>
+              <a:defRPr sz="1725" b="0">
+                <a:solidFill>
+                  <a:srgbClr val="6E6D68"/>
+                </a:solidFill>
+                <a:latin typeface="Inter"/>
+                <a:ea typeface="Inter"/>
+                <a:cs typeface="Inter"/>
+              </a:defRPr>
+            </a:pPr>
+            <a:r>
+              <a:rPr sz="1725" b="0">
+                <a:solidFill>
+                  <a:srgbClr val="6E6D68"/>
+                </a:solidFill>
+                <a:latin typeface="Inter"/>
+                <a:ea typeface="Inter"/>
+                <a:cs typeface="Inter"/>
+              </a:rPr>
+              <a:t>Darian Germann und Alex Platret</a:t>
             </a:r>
           </a:p>
         </p:txBody>
@@ -2436,7 +2532,7 @@
           <p:cNvPr id="4" name="">
             <a:extLst xmlns:a="http://schemas.openxmlformats.org/drawingml/2006/main">
               <a:ext uri="{FF2B5EF4-FFF2-40B4-BE49-F238E27FC236}">
-                <a16:creationId xmlns:a16="http://schemas.microsoft.com/office/drawing/2014/main" id="{6A4D56D4-4668-4C7B-97BF-F99E863DFC50}"/>
+                <a16:creationId xmlns:a16="http://schemas.microsoft.com/office/drawing/2014/main" id="{D73F961F-B116-4AB2-BC0B-C77F07D486B7}"/>
               </a:ext>
             </a:extLst>
           </p:cNvPr>
@@ -2447,8 +2543,8 @@
         </p:nvSpPr>
         <p:spPr>
           <a:xfrm xmlns:a="http://schemas.openxmlformats.org/drawingml/2006/main">
-            <a:off x="666750" y="5219700"/>
-            <a:ext cx="6000750" cy="762000"/>
+            <a:off x="8905875" y="5772150"/>
+            <a:ext cx="2638425" cy="342900"/>
           </a:xfrm>
           <a:prstGeom xmlns:a="http://schemas.openxmlformats.org/drawingml/2006/main" prst="rect">
             <a:avLst/>
@@ -2464,129 +2560,26 @@
           </a:bodyPr>
           <a:lstStyle xmlns:a="http://schemas.openxmlformats.org/drawingml/2006/main"/>
           <a:p xmlns:a="http://schemas.openxmlformats.org/drawingml/2006/main">
-            <a:pPr algn="l">
-              <a:defRPr sz="1950" b="0">
-                <a:solidFill>
-                  <a:srgbClr val="DCEBE2"/>
-                </a:solidFill>
-                <a:latin typeface="Inter"/>
-                <a:ea typeface="Inter"/>
-                <a:cs typeface="Inter"/>
-              </a:defRPr>
-            </a:pPr>
-            <a:r>
-              <a:rPr sz="1950" b="0">
-                <a:solidFill>
-                  <a:srgbClr val="DCEBE2"/>
-                </a:solidFill>
-                <a:latin typeface="Inter"/>
-                <a:ea typeface="Inter"/>
-                <a:cs typeface="Inter"/>
-              </a:rPr>
-              <a:t>Darian Germann</a:t>
-            </a:r>
-          </a:p>
-          <a:p xmlns:a="http://schemas.openxmlformats.org/drawingml/2006/main">
-            <a:pPr algn="l">
-              <a:defRPr sz="1950" b="0">
-                <a:solidFill>
-                  <a:srgbClr val="DCEBE2"/>
-                </a:solidFill>
-                <a:latin typeface="Inter"/>
-                <a:ea typeface="Inter"/>
-                <a:cs typeface="Inter"/>
-              </a:defRPr>
-            </a:pPr>
-            <a:r>
-              <a:rPr sz="1950" b="0">
-                <a:solidFill>
-                  <a:srgbClr val="DCEBE2"/>
-                </a:solidFill>
-                <a:latin typeface="Inter"/>
-                <a:ea typeface="Inter"/>
-                <a:cs typeface="Inter"/>
-              </a:rPr>
-              <a:t>Alex Platret</a:t>
-            </a:r>
-          </a:p>
-        </p:txBody>
-      </p:sp>
-      <p:sp>
-        <p:nvSpPr>
-          <p:cNvPr id="5" name="">
-            <a:extLst xmlns:a="http://schemas.openxmlformats.org/drawingml/2006/main">
-              <a:ext uri="{FF2B5EF4-FFF2-40B4-BE49-F238E27FC236}">
-                <a16:creationId xmlns:a16="http://schemas.microsoft.com/office/drawing/2014/main" id="{7FD7A784-F78D-4FC1-A37A-86055CC325E4}"/>
-              </a:ext>
-            </a:extLst>
-          </p:cNvPr>
-          <p:cNvSpPr>
-            <a:spLocks xmlns:a="http://schemas.openxmlformats.org/drawingml/2006/main" noGrp="1"/>
-          </p:cNvSpPr>
-          <p:nvPr/>
-        </p:nvSpPr>
-        <p:spPr>
-          <a:xfrm xmlns:a="http://schemas.openxmlformats.org/drawingml/2006/main">
-            <a:off x="7810500" y="5219700"/>
-            <a:ext cx="3743325" cy="714375"/>
-          </a:xfrm>
-          <a:prstGeom xmlns:a="http://schemas.openxmlformats.org/drawingml/2006/main" prst="rect">
-            <a:avLst/>
-          </a:prstGeom>
-          <a:noFill xmlns:a="http://schemas.openxmlformats.org/drawingml/2006/main"/>
-          <a:ln xmlns:a="http://schemas.openxmlformats.org/drawingml/2006/main" w="0">
-            <a:noFill/>
-          </a:ln>
-        </p:spPr>
-        <p:txBody>
-          <a:bodyPr xmlns:a="http://schemas.openxmlformats.org/drawingml/2006/main" wrap="square" lIns="0" tIns="0" rIns="0" bIns="0" anchor="t">
-            <a:noAutofit/>
-          </a:bodyPr>
-          <a:lstStyle xmlns:a="http://schemas.openxmlformats.org/drawingml/2006/main"/>
-          <a:p xmlns:a="http://schemas.openxmlformats.org/drawingml/2006/main">
             <a:pPr algn="r">
-              <a:defRPr sz="1725" b="0">
-                <a:solidFill>
-                  <a:srgbClr val="DCEBE2"/>
-                </a:solidFill>
-                <a:latin typeface="Inter"/>
-                <a:ea typeface="Inter"/>
-                <a:cs typeface="Inter"/>
-              </a:defRPr>
-            </a:pPr>
-            <a:r>
-              <a:rPr sz="1725" b="0">
-                <a:solidFill>
-                  <a:srgbClr val="DCEBE2"/>
-                </a:solidFill>
-                <a:latin typeface="Inter"/>
-                <a:ea typeface="Inter"/>
-                <a:cs typeface="Inter"/>
-              </a:rPr>
-              <a:t>LB3  /  Modul 335</a:t>
-            </a:r>
-          </a:p>
-          <a:p xmlns:a="http://schemas.openxmlformats.org/drawingml/2006/main">
-            <a:pPr algn="r">
-              <a:defRPr sz="1725" b="0">
-                <a:solidFill>
-                  <a:srgbClr val="DCEBE2"/>
-                </a:solidFill>
-                <a:latin typeface="Inter"/>
-                <a:ea typeface="Inter"/>
-                <a:cs typeface="Inter"/>
-              </a:defRPr>
-            </a:pPr>
-            <a:r>
-              <a:rPr sz="1725" b="0">
-                <a:solidFill>
-                  <a:srgbClr val="DCEBE2"/>
-                </a:solidFill>
-                <a:latin typeface="Inter"/>
-                <a:ea typeface="Inter"/>
-                <a:cs typeface="Inter"/>
-              </a:rPr>
-              <a:t>1. Oktober 2026</a:t>
+              <a:defRPr sz="1650" b="0">
+                <a:solidFill>
+                  <a:srgbClr val="6E6D68"/>
+                </a:solidFill>
+                <a:latin typeface="Inter"/>
+                <a:ea typeface="Inter"/>
+                <a:cs typeface="Inter"/>
+              </a:defRPr>
+            </a:pPr>
+            <a:r>
+              <a:rPr sz="1650" b="0">
+                <a:solidFill>
+                  <a:srgbClr val="6E6D68"/>
+                </a:solidFill>
+                <a:latin typeface="Inter"/>
+                <a:ea typeface="Inter"/>
+                <a:cs typeface="Inter"/>
+              </a:rPr>
+              <a:t>LB3 / Modul 335</a:t>
             </a:r>
           </a:p>
         </p:txBody>
@@ -2594,7 +2587,7 @@
     </p:spTree>
     <p:extLst>
       <p:ext uri="{BB962C8B-B14F-4D97-AF65-F5344CB8AC3E}">
-        <p14:creationId xmlns:p14="http://schemas.microsoft.com/office/powerpoint/2010/main" val="254823485"/>
+        <p14:creationId xmlns:p14="http://schemas.microsoft.com/office/powerpoint/2010/main" val="1363150488"/>
       </p:ext>
     </p:extLst>
   </p:cSld>
@@ -2622,10 +2615,10 @@
       </p:grpSpPr>
       <p:sp>
         <p:nvSpPr>
-          <p:cNvPr id="7" name="">
+          <p:cNvPr id="6" name="">
             <a:extLst xmlns:a="http://schemas.openxmlformats.org/drawingml/2006/main">
               <a:ext uri="{FF2B5EF4-FFF2-40B4-BE49-F238E27FC236}">
-                <a16:creationId xmlns:a16="http://schemas.microsoft.com/office/drawing/2014/main" id="{B05039AA-3E22-4067-B7E4-FB1DA54F7AD4}"/>
+                <a16:creationId xmlns:a16="http://schemas.microsoft.com/office/drawing/2014/main" id="{BA6CDA79-18A7-4EDB-978A-27F44232B2A9}"/>
               </a:ext>
             </a:extLst>
           </p:cNvPr>
@@ -2682,7 +2675,7 @@
           <p:cNvPr id="2" name="">
             <a:extLst xmlns:a="http://schemas.openxmlformats.org/drawingml/2006/main">
               <a:ext uri="{FF2B5EF4-FFF2-40B4-BE49-F238E27FC236}">
-                <a16:creationId xmlns:a16="http://schemas.microsoft.com/office/drawing/2014/main" id="{0DC02941-618F-4346-A3FD-E693186224E1}"/>
+                <a16:creationId xmlns:a16="http://schemas.microsoft.com/office/drawing/2014/main" id="{06D1F899-5E30-4E77-84C7-0D2F8C426A8D}"/>
               </a:ext>
             </a:extLst>
           </p:cNvPr>
@@ -2693,8 +2686,8 @@
         </p:nvSpPr>
         <p:spPr>
           <a:xfrm xmlns:a="http://schemas.openxmlformats.org/drawingml/2006/main">
-            <a:off x="609600" y="476250"/>
-            <a:ext cx="10934700" cy="742950"/>
+            <a:off x="628650" y="876300"/>
+            <a:ext cx="10096500" cy="1190625"/>
           </a:xfrm>
           <a:prstGeom xmlns:a="http://schemas.openxmlformats.org/drawingml/2006/main" prst="rect">
             <a:avLst/>
@@ -2711,7 +2704,7 @@
           <a:lstStyle xmlns:a="http://schemas.openxmlformats.org/drawingml/2006/main"/>
           <a:p xmlns:a="http://schemas.openxmlformats.org/drawingml/2006/main">
             <a:pPr algn="l">
-              <a:defRPr sz="3975" b="0">
+              <a:defRPr sz="7725" b="0">
                 <a:solidFill>
                   <a:srgbClr val="F6F5F1"/>
                 </a:solidFill>
@@ -2721,7 +2714,7 @@
               </a:defRPr>
             </a:pPr>
             <a:r>
-              <a:rPr sz="3975" b="0">
+              <a:rPr sz="7725" b="0">
                 <a:solidFill>
                   <a:srgbClr val="F6F5F1"/>
                 </a:solidFill>
@@ -2729,7 +2722,7 @@
                 <a:ea typeface="Newsreader"/>
                 <a:cs typeface="Newsreader"/>
               </a:rPr>
-              <a:t>Rückblick und Ausblick</a:t>
+              <a:t>spendly.</a:t>
             </a:r>
           </a:p>
         </p:txBody>
@@ -2739,7 +2732,7 @@
           <p:cNvPr id="3" name="">
             <a:extLst xmlns:a="http://schemas.openxmlformats.org/drawingml/2006/main">
               <a:ext uri="{FF2B5EF4-FFF2-40B4-BE49-F238E27FC236}">
-                <a16:creationId xmlns:a16="http://schemas.microsoft.com/office/drawing/2014/main" id="{AA6DA68F-4E4E-43B6-AA2D-783EE88EF28F}"/>
+                <a16:creationId xmlns:a16="http://schemas.microsoft.com/office/drawing/2014/main" id="{E6B79EE1-6EBE-4831-BF50-BAF411DA366A}"/>
               </a:ext>
             </a:extLst>
           </p:cNvPr>
@@ -2750,8 +2743,8 @@
         </p:nvSpPr>
         <p:spPr>
           <a:xfrm xmlns:a="http://schemas.openxmlformats.org/drawingml/2006/main">
-            <a:off x="638175" y="1752600"/>
-            <a:ext cx="10239375" cy="1685925"/>
+            <a:off x="628650" y="2466975"/>
+            <a:ext cx="10668000" cy="2047875"/>
           </a:xfrm>
           <a:prstGeom xmlns:a="http://schemas.openxmlformats.org/drawingml/2006/main" prst="rect">
             <a:avLst/>
@@ -2768,7 +2761,7 @@
           <a:lstStyle xmlns:a="http://schemas.openxmlformats.org/drawingml/2006/main"/>
           <a:p xmlns:a="http://schemas.openxmlformats.org/drawingml/2006/main">
             <a:pPr algn="l">
-              <a:defRPr sz="5250" b="0">
+              <a:defRPr sz="5850" b="0">
                 <a:solidFill>
                   <a:srgbClr val="F6F5F1"/>
                 </a:solidFill>
@@ -2778,7 +2771,7 @@
               </a:defRPr>
             </a:pPr>
             <a:r>
-              <a:rPr sz="5250" b="0">
+              <a:rPr sz="5850" b="0">
                 <a:solidFill>
                   <a:srgbClr val="F6F5F1"/>
                 </a:solidFill>
@@ -2786,12 +2779,12 @@
                 <a:ea typeface="Newsreader"/>
                 <a:cs typeface="Newsreader"/>
               </a:rPr>
-              <a:t>Fehlerfälle gehören</a:t>
+              <a:t>Was kannst du dir</a:t>
             </a:r>
           </a:p>
           <a:p xmlns:a="http://schemas.openxmlformats.org/drawingml/2006/main">
             <a:pPr algn="l">
-              <a:defRPr sz="5250" b="0">
+              <a:defRPr sz="5850" b="0">
                 <a:solidFill>
                   <a:srgbClr val="F6F5F1"/>
                 </a:solidFill>
@@ -2801,7 +2794,7 @@
               </a:defRPr>
             </a:pPr>
             <a:r>
-              <a:rPr sz="5250" b="0">
+              <a:rPr sz="5850" b="0">
                 <a:solidFill>
                   <a:srgbClr val="F6F5F1"/>
                 </a:solidFill>
@@ -2809,7 +2802,7 @@
                 <a:ea typeface="Newsreader"/>
                 <a:cs typeface="Newsreader"/>
               </a:rPr>
-              <a:t>früh zum Konzept.</a:t>
+              <a:t>heute noch leisten?</a:t>
             </a:r>
           </a:p>
         </p:txBody>
@@ -2819,7 +2812,7 @@
           <p:cNvPr id="4" name="">
             <a:extLst xmlns:a="http://schemas.openxmlformats.org/drawingml/2006/main">
               <a:ext uri="{FF2B5EF4-FFF2-40B4-BE49-F238E27FC236}">
-                <a16:creationId xmlns:a16="http://schemas.microsoft.com/office/drawing/2014/main" id="{0CF6C913-1825-4858-9536-A3279DACE16F}"/>
+                <a16:creationId xmlns:a16="http://schemas.microsoft.com/office/drawing/2014/main" id="{1F4AAE30-6F1B-4893-A608-54F9A9073B71}"/>
               </a:ext>
             </a:extLst>
           </p:cNvPr>
@@ -2830,8 +2823,8 @@
         </p:nvSpPr>
         <p:spPr>
           <a:xfrm xmlns:a="http://schemas.openxmlformats.org/drawingml/2006/main">
-            <a:off x="666750" y="4229100"/>
-            <a:ext cx="8572500" cy="428625"/>
+            <a:off x="676275" y="4829175"/>
+            <a:ext cx="10086975" cy="542925"/>
           </a:xfrm>
           <a:prstGeom xmlns:a="http://schemas.openxmlformats.org/drawingml/2006/main" prst="rect">
             <a:avLst/>
@@ -2848,7 +2841,7 @@
           <a:lstStyle xmlns:a="http://schemas.openxmlformats.org/drawingml/2006/main"/>
           <a:p xmlns:a="http://schemas.openxmlformats.org/drawingml/2006/main">
             <a:pPr algn="l">
-              <a:defRPr sz="2025" b="1">
+              <a:defRPr sz="2325" b="0">
                 <a:solidFill>
                   <a:srgbClr val="DCEBE2"/>
                 </a:solidFill>
@@ -2858,7 +2851,7 @@
               </a:defRPr>
             </a:pPr>
             <a:r>
-              <a:rPr sz="2025" b="1">
+              <a:rPr sz="2325" b="0">
                 <a:solidFill>
                   <a:srgbClr val="DCEBE2"/>
                 </a:solidFill>
@@ -2866,7 +2859,7 @@
                 <a:ea typeface="Inter"/>
                 <a:cs typeface="Inter"/>
               </a:rPr>
-              <a:t>Nächster Schritt</a:t>
+              <a:t>Dein restliches Budget direkt im Blick.</a:t>
             </a:r>
           </a:p>
         </p:txBody>
@@ -2876,7 +2869,7 @@
           <p:cNvPr id="5" name="">
             <a:extLst xmlns:a="http://schemas.openxmlformats.org/drawingml/2006/main">
               <a:ext uri="{FF2B5EF4-FFF2-40B4-BE49-F238E27FC236}">
-                <a16:creationId xmlns:a16="http://schemas.microsoft.com/office/drawing/2014/main" id="{FEB37A08-A2D4-4D3B-A11E-0CAACA3D57AB}"/>
+                <a16:creationId xmlns:a16="http://schemas.microsoft.com/office/drawing/2014/main" id="{42228BFC-4F67-4DF2-B4A1-AA5EE6DE4743}"/>
               </a:ext>
             </a:extLst>
           </p:cNvPr>
@@ -2887,8 +2880,8 @@
         </p:nvSpPr>
         <p:spPr>
           <a:xfrm xmlns:a="http://schemas.openxmlformats.org/drawingml/2006/main">
-            <a:off x="666750" y="4857750"/>
-            <a:ext cx="10096500" cy="885825"/>
+            <a:off x="685800" y="5676900"/>
+            <a:ext cx="9763125" cy="409575"/>
           </a:xfrm>
           <a:prstGeom xmlns:a="http://schemas.openxmlformats.org/drawingml/2006/main" prst="rect">
             <a:avLst/>
@@ -2905,7 +2898,7 @@
           <a:lstStyle xmlns:a="http://schemas.openxmlformats.org/drawingml/2006/main"/>
           <a:p xmlns:a="http://schemas.openxmlformats.org/drawingml/2006/main">
             <a:pPr algn="l">
-              <a:defRPr sz="2550" b="0">
+              <a:defRPr sz="1950" b="0">
                 <a:solidFill>
                   <a:srgbClr val="F6F5F1"/>
                 </a:solidFill>
@@ -2915,7 +2908,7 @@
               </a:defRPr>
             </a:pPr>
             <a:r>
-              <a:rPr sz="2550" b="0">
+              <a:rPr sz="1950" b="0">
                 <a:solidFill>
                   <a:srgbClr val="F6F5F1"/>
                 </a:solidFill>
@@ -2923,87 +2916,7 @@
                 <a:ea typeface="Inter"/>
                 <a:cs typeface="Inter"/>
               </a:rPr>
-              <a:t>Erfassung mit der Zielgruppe testen.</a:t>
-            </a:r>
-          </a:p>
-          <a:p xmlns:a="http://schemas.openxmlformats.org/drawingml/2006/main">
-            <a:pPr algn="l">
-              <a:defRPr sz="2550" b="0">
-                <a:solidFill>
-                  <a:srgbClr val="F6F5F1"/>
-                </a:solidFill>
-                <a:latin typeface="Inter"/>
-                <a:ea typeface="Inter"/>
-                <a:cs typeface="Inter"/>
-              </a:defRPr>
-            </a:pPr>
-            <a:r>
-              <a:rPr sz="2550" b="0">
-                <a:solidFill>
-                  <a:srgbClr val="F6F5F1"/>
-                </a:solidFill>
-                <a:latin typeface="Inter"/>
-                <a:ea typeface="Inter"/>
-                <a:cs typeface="Inter"/>
-              </a:rPr>
-              <a:t>Zeitbedarf und Verständlichkeit messen.</a:t>
-            </a:r>
-          </a:p>
-        </p:txBody>
-      </p:sp>
-      <p:sp>
-        <p:nvSpPr>
-          <p:cNvPr id="6" name="">
-            <a:extLst xmlns:a="http://schemas.openxmlformats.org/drawingml/2006/main">
-              <a:ext uri="{FF2B5EF4-FFF2-40B4-BE49-F238E27FC236}">
-                <a16:creationId xmlns:a16="http://schemas.microsoft.com/office/drawing/2014/main" id="{50138AAF-EFB5-4F2E-9281-748F6D90A2A1}"/>
-              </a:ext>
-            </a:extLst>
-          </p:cNvPr>
-          <p:cNvSpPr>
-            <a:spLocks xmlns:a="http://schemas.openxmlformats.org/drawingml/2006/main" noGrp="1"/>
-          </p:cNvSpPr>
-          <p:nvPr/>
-        </p:nvSpPr>
-        <p:spPr>
-          <a:xfrm xmlns:a="http://schemas.openxmlformats.org/drawingml/2006/main">
-            <a:off x="10315575" y="5905500"/>
-            <a:ext cx="1219200" cy="342900"/>
-          </a:xfrm>
-          <a:prstGeom xmlns:a="http://schemas.openxmlformats.org/drawingml/2006/main" prst="rect">
-            <a:avLst/>
-          </a:prstGeom>
-          <a:noFill xmlns:a="http://schemas.openxmlformats.org/drawingml/2006/main"/>
-          <a:ln xmlns:a="http://schemas.openxmlformats.org/drawingml/2006/main" w="0">
-            <a:noFill/>
-          </a:ln>
-        </p:spPr>
-        <p:txBody>
-          <a:bodyPr xmlns:a="http://schemas.openxmlformats.org/drawingml/2006/main" wrap="square" lIns="0" tIns="0" rIns="0" bIns="0" anchor="t">
-            <a:noAutofit/>
-          </a:bodyPr>
-          <a:lstStyle xmlns:a="http://schemas.openxmlformats.org/drawingml/2006/main"/>
-          <a:p xmlns:a="http://schemas.openxmlformats.org/drawingml/2006/main">
-            <a:pPr algn="r">
-              <a:defRPr sz="1800" b="0">
-                <a:solidFill>
-                  <a:srgbClr val="DCEBE2"/>
-                </a:solidFill>
-                <a:latin typeface="Inter"/>
-                <a:ea typeface="Inter"/>
-                <a:cs typeface="Inter"/>
-              </a:defRPr>
-            </a:pPr>
-            <a:r>
-              <a:rPr sz="1800" b="0">
-                <a:solidFill>
-                  <a:srgbClr val="DCEBE2"/>
-                </a:solidFill>
-                <a:latin typeface="Inter"/>
-                <a:ea typeface="Inter"/>
-                <a:cs typeface="Inter"/>
-              </a:rPr>
-              <a:t>Fragen</a:t>
+              <a:t>Wie würdet ihr Spendly im Alltag nutzen?</a:t>
             </a:r>
           </a:p>
         </p:txBody>
@@ -3011,7 +2924,7 @@
     </p:spTree>
     <p:extLst>
       <p:ext uri="{BB962C8B-B14F-4D97-AF65-F5344CB8AC3E}">
-        <p14:creationId xmlns:p14="http://schemas.microsoft.com/office/powerpoint/2010/main" val="721524083"/>
+        <p14:creationId xmlns:p14="http://schemas.microsoft.com/office/powerpoint/2010/main" val="527983319"/>
       </p:ext>
     </p:extLst>
   </p:cSld>
@@ -3039,10 +2952,10 @@
       </p:grpSpPr>
       <p:sp>
         <p:nvSpPr>
-          <p:cNvPr id="8" name="">
+          <p:cNvPr id="18" name="">
             <a:extLst xmlns:a="http://schemas.openxmlformats.org/drawingml/2006/main">
               <a:ext uri="{FF2B5EF4-FFF2-40B4-BE49-F238E27FC236}">
-                <a16:creationId xmlns:a16="http://schemas.microsoft.com/office/drawing/2014/main" id="{47405619-96D0-43A1-B3C8-8F302AC85B37}"/>
+                <a16:creationId xmlns:a16="http://schemas.microsoft.com/office/drawing/2014/main" id="{AE1242BA-E8F0-4A6A-9D69-35FD128A9DCB}"/>
               </a:ext>
             </a:extLst>
           </p:cNvPr>
@@ -3099,7 +3012,7 @@
           <p:cNvPr id="2" name="">
             <a:extLst xmlns:a="http://schemas.openxmlformats.org/drawingml/2006/main">
               <a:ext uri="{FF2B5EF4-FFF2-40B4-BE49-F238E27FC236}">
-                <a16:creationId xmlns:a16="http://schemas.microsoft.com/office/drawing/2014/main" id="{4573AFCD-DC73-4FC4-96DE-3C42C5BA54C5}"/>
+                <a16:creationId xmlns:a16="http://schemas.microsoft.com/office/drawing/2014/main" id="{0037DD46-AF23-4563-B80D-5AB63F24B9E4}"/>
               </a:ext>
             </a:extLst>
           </p:cNvPr>
@@ -3146,7 +3059,7 @@
                 <a:ea typeface="Newsreader"/>
                 <a:cs typeface="Newsreader"/>
               </a:rPr>
-              <a:t>Ausgaben im Alltag</a:t>
+              <a:t>Kleine Ausgaben summieren sich</a:t>
             </a:r>
           </a:p>
         </p:txBody>
@@ -3156,7 +3069,7 @@
           <p:cNvPr id="3" name="">
             <a:extLst xmlns:a="http://schemas.openxmlformats.org/drawingml/2006/main">
               <a:ext uri="{FF2B5EF4-FFF2-40B4-BE49-F238E27FC236}">
-                <a16:creationId xmlns:a16="http://schemas.microsoft.com/office/drawing/2014/main" id="{841939FE-9098-4B90-BE51-286E0474BAF2}"/>
+                <a16:creationId xmlns:a16="http://schemas.microsoft.com/office/drawing/2014/main" id="{19822F18-16FC-4F23-A6CF-A885F7198A07}"/>
               </a:ext>
             </a:extLst>
           </p:cNvPr>
@@ -3167,8 +3080,8 @@
         </p:nvSpPr>
         <p:spPr>
           <a:xfrm xmlns:a="http://schemas.openxmlformats.org/drawingml/2006/main">
-            <a:off x="609600" y="1619250"/>
-            <a:ext cx="6667500" cy="1104900"/>
+            <a:off x="609600" y="1743075"/>
+            <a:ext cx="5905500" cy="1123950"/>
           </a:xfrm>
           <a:prstGeom xmlns:a="http://schemas.openxmlformats.org/drawingml/2006/main" prst="rect">
             <a:avLst/>
@@ -3185,7 +3098,7 @@
           <a:lstStyle xmlns:a="http://schemas.openxmlformats.org/drawingml/2006/main"/>
           <a:p xmlns:a="http://schemas.openxmlformats.org/drawingml/2006/main">
             <a:pPr algn="l">
-              <a:defRPr sz="6600" b="0">
+              <a:defRPr sz="6300" b="0">
                 <a:solidFill>
                   <a:srgbClr val="1F5A45"/>
                 </a:solidFill>
@@ -3195,7 +3108,7 @@
               </a:defRPr>
             </a:pPr>
             <a:r>
-              <a:rPr sz="6600" b="0">
+              <a:rPr sz="6300" b="0">
                 <a:solidFill>
                   <a:srgbClr val="1F5A45"/>
                 </a:solidFill>
@@ -3203,7 +3116,7 @@
                 <a:ea typeface="Newsreader"/>
                 <a:cs typeface="Newsreader"/>
               </a:rPr>
-              <a:t>CHF 14.80</a:t>
+              <a:t>CHF 31.25</a:t>
             </a:r>
           </a:p>
         </p:txBody>
@@ -3213,7 +3126,7 @@
           <p:cNvPr id="4" name="">
             <a:extLst xmlns:a="http://schemas.openxmlformats.org/drawingml/2006/main">
               <a:ext uri="{FF2B5EF4-FFF2-40B4-BE49-F238E27FC236}">
-                <a16:creationId xmlns:a16="http://schemas.microsoft.com/office/drawing/2014/main" id="{96295501-FA66-48FA-92D6-DB19113433AD}"/>
+                <a16:creationId xmlns:a16="http://schemas.microsoft.com/office/drawing/2014/main" id="{5E1DFACB-B485-4ADD-B55D-1A36442B8EFB}"/>
               </a:ext>
             </a:extLst>
           </p:cNvPr>
@@ -3224,8 +3137,8 @@
         </p:nvSpPr>
         <p:spPr>
           <a:xfrm xmlns:a="http://schemas.openxmlformats.org/drawingml/2006/main">
-            <a:off x="647700" y="2905125"/>
-            <a:ext cx="6572250" cy="1028700"/>
+            <a:off x="657225" y="3162300"/>
+            <a:ext cx="5762625" cy="1152525"/>
           </a:xfrm>
           <a:prstGeom xmlns:a="http://schemas.openxmlformats.org/drawingml/2006/main" prst="rect">
             <a:avLst/>
@@ -3260,7 +3173,7 @@
                 <a:ea typeface="Inter"/>
                 <a:cs typeface="Inter"/>
               </a:rPr>
-              <a:t>Kleine Zahlungen summieren sich.</a:t>
+              <a:t>Drei kleine Zahlungen.</a:t>
             </a:r>
           </a:p>
           <a:p xmlns:a="http://schemas.openxmlformats.org/drawingml/2006/main">
@@ -3283,7 +3196,7 @@
                 <a:ea typeface="Inter"/>
                 <a:cs typeface="Inter"/>
               </a:rPr>
-              <a:t>Spendly zeigt das restliche Budget.</a:t>
+              <a:t>Ein Stück vom Monatsbudget.</a:t>
             </a:r>
           </a:p>
         </p:txBody>
@@ -3293,7 +3206,7 @@
           <p:cNvPr id="5" name="">
             <a:extLst xmlns:a="http://schemas.openxmlformats.org/drawingml/2006/main">
               <a:ext uri="{FF2B5EF4-FFF2-40B4-BE49-F238E27FC236}">
-                <a16:creationId xmlns:a16="http://schemas.microsoft.com/office/drawing/2014/main" id="{FE620646-EF93-42D1-82AF-DA72A4D2701B}"/>
+                <a16:creationId xmlns:a16="http://schemas.microsoft.com/office/drawing/2014/main" id="{FF6E1AAB-BE33-4765-A4FB-6C080E639471}"/>
               </a:ext>
             </a:extLst>
           </p:cNvPr>
@@ -3304,8 +3217,8 @@
         </p:nvSpPr>
         <p:spPr>
           <a:xfrm xmlns:a="http://schemas.openxmlformats.org/drawingml/2006/main">
-            <a:off x="647700" y="4457700"/>
-            <a:ext cx="6572250" cy="809625"/>
+            <a:off x="657225" y="4943475"/>
+            <a:ext cx="5619750" cy="838200"/>
           </a:xfrm>
           <a:prstGeom xmlns:a="http://schemas.openxmlformats.org/drawingml/2006/main" prst="rect">
             <a:avLst/>
@@ -3322,7 +3235,7 @@
           <a:lstStyle xmlns:a="http://schemas.openxmlformats.org/drawingml/2006/main"/>
           <a:p xmlns:a="http://schemas.openxmlformats.org/drawingml/2006/main">
             <a:pPr algn="l">
-              <a:defRPr sz="2025" b="0">
+              <a:defRPr sz="1875" b="0">
                 <a:solidFill>
                   <a:srgbClr val="6E6D68"/>
                 </a:solidFill>
@@ -3332,7 +3245,7 @@
               </a:defRPr>
             </a:pPr>
             <a:r>
-              <a:rPr sz="2025" b="0">
+              <a:rPr sz="1875" b="0">
                 <a:solidFill>
                   <a:srgbClr val="6E6D68"/>
                 </a:solidFill>
@@ -3345,7 +3258,7 @@
           </a:p>
           <a:p xmlns:a="http://schemas.openxmlformats.org/drawingml/2006/main">
             <a:pPr algn="l">
-              <a:defRPr sz="2025" b="0">
+              <a:defRPr sz="1875" b="0">
                 <a:solidFill>
                   <a:srgbClr val="6E6D68"/>
                 </a:solidFill>
@@ -3355,7 +3268,7 @@
               </a:defRPr>
             </a:pPr>
             <a:r>
-              <a:rPr sz="2025" b="0">
+              <a:rPr sz="1875" b="0">
                 <a:solidFill>
                   <a:srgbClr val="6E6D68"/>
                 </a:solidFill>
@@ -3363,7 +3276,7 @@
                 <a:ea typeface="Inter"/>
                 <a:cs typeface="Inter"/>
               </a:rPr>
-              <a:t>Ausgaben in CHF, ein Budget pro Monat</a:t>
+              <a:t>mit einem eigenen Monatsbudget</a:t>
             </a:r>
           </a:p>
         </p:txBody>
@@ -3373,7 +3286,7 @@
           <p:cNvPr id="6" name="">
             <a:extLst xmlns:a="http://schemas.openxmlformats.org/drawingml/2006/main">
               <a:ext uri="{FF2B5EF4-FFF2-40B4-BE49-F238E27FC236}">
-                <a16:creationId xmlns:a16="http://schemas.microsoft.com/office/drawing/2014/main" id="{40BE945F-481E-46D0-AC90-9D486C4F49FE}"/>
+                <a16:creationId xmlns:a16="http://schemas.microsoft.com/office/drawing/2014/main" id="{55008F34-A9A2-4D88-869E-9AB516B3770A}"/>
               </a:ext>
             </a:extLst>
           </p:cNvPr>
@@ -3384,8 +3297,8 @@
         </p:nvSpPr>
         <p:spPr>
           <a:xfrm xmlns:a="http://schemas.openxmlformats.org/drawingml/2006/main">
-            <a:off x="647700" y="5629275"/>
-            <a:ext cx="6762750" cy="381000"/>
+            <a:off x="7429500" y="1790700"/>
+            <a:ext cx="4124325" cy="400050"/>
           </a:xfrm>
           <a:prstGeom xmlns:a="http://schemas.openxmlformats.org/drawingml/2006/main" prst="rect">
             <a:avLst/>
@@ -3402,7 +3315,7 @@
           <a:lstStyle xmlns:a="http://schemas.openxmlformats.org/drawingml/2006/main"/>
           <a:p xmlns:a="http://schemas.openxmlformats.org/drawingml/2006/main">
             <a:pPr algn="l">
-              <a:defRPr sz="1875" b="0">
+              <a:defRPr sz="1875" b="1">
                 <a:solidFill>
                   <a:srgbClr val="1F5A45"/>
                 </a:solidFill>
@@ -3412,7 +3325,7 @@
               </a:defRPr>
             </a:pPr>
             <a:r>
-              <a:rPr sz="1875" b="0">
+              <a:rPr sz="1875" b="1">
                 <a:solidFill>
                   <a:srgbClr val="1F5A45"/>
                 </a:solidFill>
@@ -3420,37 +3333,561 @@
                 <a:ea typeface="Inter"/>
                 <a:cs typeface="Inter"/>
               </a:rPr>
-              <a:t>Ohne Konto und ohne Bankanbindung</a:t>
-            </a:r>
-          </a:p>
-        </p:txBody>
-      </p:sp>
-      <p:pic>
-        <p:nvPicPr>
-          <p:cNvPr id="14" name=""/>
-          <p:cNvPicPr>
-            <a:picLocks xmlns:a="http://schemas.openxmlformats.org/drawingml/2006/main" noChangeAspect="1"/>
-          </p:cNvPicPr>
-          <p:nvPr/>
-        </p:nvPicPr>
-        <p:blipFill>
-          <a:blip xmlns:r="http://schemas.openxmlformats.org/officeDocument/2006/relationships" xmlns:a="http://schemas.openxmlformats.org/drawingml/2006/main" r:embed="Rf5e07adff08f4cc3"/>
-          <a:stretch xmlns:a="http://schemas.openxmlformats.org/drawingml/2006/main"/>
-        </p:blipFill>
+              <a:t>Beispiel aus dem Alltag</a:t>
+            </a:r>
+          </a:p>
+        </p:txBody>
+      </p:sp>
+      <p:sp>
+        <p:nvSpPr>
+          <p:cNvPr id="7" name="">
+            <a:extLst xmlns:a="http://schemas.openxmlformats.org/drawingml/2006/main">
+              <a:ext uri="{FF2B5EF4-FFF2-40B4-BE49-F238E27FC236}">
+                <a16:creationId xmlns:a16="http://schemas.microsoft.com/office/drawing/2014/main" id="{2AF23667-D615-4AAD-A71B-9715DE5A1403}"/>
+              </a:ext>
+            </a:extLst>
+          </p:cNvPr>
+          <p:cNvSpPr>
+            <a:spLocks xmlns:a="http://schemas.openxmlformats.org/drawingml/2006/main" noGrp="1"/>
+          </p:cNvSpPr>
+          <p:nvPr/>
+        </p:nvSpPr>
         <p:spPr>
           <a:xfrm xmlns:a="http://schemas.openxmlformats.org/drawingml/2006/main">
-            <a:off x="8472978" y="1343025"/>
-            <a:ext cx="2199294" cy="4781550"/>
+            <a:off x="7429500" y="2571750"/>
+            <a:ext cx="2571750" cy="400050"/>
           </a:xfrm>
           <a:prstGeom xmlns:a="http://schemas.openxmlformats.org/drawingml/2006/main" prst="rect">
             <a:avLst/>
           </a:prstGeom>
-        </p:spPr>
-      </p:pic>
+          <a:noFill xmlns:a="http://schemas.openxmlformats.org/drawingml/2006/main"/>
+          <a:ln xmlns:a="http://schemas.openxmlformats.org/drawingml/2006/main" w="0">
+            <a:noFill/>
+          </a:ln>
+        </p:spPr>
+        <p:txBody>
+          <a:bodyPr xmlns:a="http://schemas.openxmlformats.org/drawingml/2006/main" wrap="square" lIns="0" tIns="0" rIns="0" bIns="0" anchor="t">
+            <a:noAutofit/>
+          </a:bodyPr>
+          <a:lstStyle xmlns:a="http://schemas.openxmlformats.org/drawingml/2006/main"/>
+          <a:p xmlns:a="http://schemas.openxmlformats.org/drawingml/2006/main">
+            <a:pPr algn="l">
+              <a:defRPr sz="2025" b="0">
+                <a:solidFill>
+                  <a:srgbClr val="15171A"/>
+                </a:solidFill>
+                <a:latin typeface="Inter"/>
+                <a:ea typeface="Inter"/>
+                <a:cs typeface="Inter"/>
+              </a:defRPr>
+            </a:pPr>
+            <a:r>
+              <a:rPr sz="2025" b="0">
+                <a:solidFill>
+                  <a:srgbClr val="15171A"/>
+                </a:solidFill>
+                <a:latin typeface="Inter"/>
+                <a:ea typeface="Inter"/>
+                <a:cs typeface="Inter"/>
+              </a:rPr>
+              <a:t>Kaffee</a:t>
+            </a:r>
+          </a:p>
+        </p:txBody>
+      </p:sp>
+      <p:sp>
+        <p:nvSpPr>
+          <p:cNvPr id="8" name="">
+            <a:extLst xmlns:a="http://schemas.openxmlformats.org/drawingml/2006/main">
+              <a:ext uri="{FF2B5EF4-FFF2-40B4-BE49-F238E27FC236}">
+                <a16:creationId xmlns:a16="http://schemas.microsoft.com/office/drawing/2014/main" id="{B758581B-26DF-458A-9381-B71E5EFB2D94}"/>
+              </a:ext>
+            </a:extLst>
+          </p:cNvPr>
+          <p:cNvSpPr>
+            <a:spLocks xmlns:a="http://schemas.openxmlformats.org/drawingml/2006/main" noGrp="1"/>
+          </p:cNvSpPr>
+          <p:nvPr/>
+        </p:nvSpPr>
+        <p:spPr>
+          <a:xfrm xmlns:a="http://schemas.openxmlformats.org/drawingml/2006/main">
+            <a:off x="9667875" y="2571750"/>
+            <a:ext cx="1885950" cy="400050"/>
+          </a:xfrm>
+          <a:prstGeom xmlns:a="http://schemas.openxmlformats.org/drawingml/2006/main" prst="rect">
+            <a:avLst/>
+          </a:prstGeom>
+          <a:noFill xmlns:a="http://schemas.openxmlformats.org/drawingml/2006/main"/>
+          <a:ln xmlns:a="http://schemas.openxmlformats.org/drawingml/2006/main" w="0">
+            <a:noFill/>
+          </a:ln>
+        </p:spPr>
+        <p:txBody>
+          <a:bodyPr xmlns:a="http://schemas.openxmlformats.org/drawingml/2006/main" wrap="square" lIns="0" tIns="0" rIns="0" bIns="0" anchor="t">
+            <a:noAutofit/>
+          </a:bodyPr>
+          <a:lstStyle xmlns:a="http://schemas.openxmlformats.org/drawingml/2006/main"/>
+          <a:p xmlns:a="http://schemas.openxmlformats.org/drawingml/2006/main">
+            <a:pPr algn="r">
+              <a:defRPr sz="2025" b="0">
+                <a:solidFill>
+                  <a:srgbClr val="15171A"/>
+                </a:solidFill>
+                <a:latin typeface="Inter"/>
+                <a:ea typeface="Inter"/>
+                <a:cs typeface="Inter"/>
+              </a:defRPr>
+            </a:pPr>
+            <a:r>
+              <a:rPr sz="2025" b="0">
+                <a:solidFill>
+                  <a:srgbClr val="15171A"/>
+                </a:solidFill>
+                <a:latin typeface="Inter"/>
+                <a:ea typeface="Inter"/>
+                <a:cs typeface="Inter"/>
+              </a:rPr>
+              <a:t>CHF 4.50</a:t>
+            </a:r>
+          </a:p>
+        </p:txBody>
+      </p:sp>
+      <p:sp>
+        <p:nvSpPr>
+          <p:cNvPr id="9" name="">
+            <a:extLst xmlns:a="http://schemas.openxmlformats.org/drawingml/2006/main">
+              <a:ext uri="{FF2B5EF4-FFF2-40B4-BE49-F238E27FC236}">
+                <a16:creationId xmlns:a16="http://schemas.microsoft.com/office/drawing/2014/main" id="{D3E67FBC-2152-42AD-88C1-F9FA3EA8332D}"/>
+              </a:ext>
+            </a:extLst>
+          </p:cNvPr>
+          <p:cNvSpPr>
+            <a:spLocks xmlns:a="http://schemas.openxmlformats.org/drawingml/2006/main" noGrp="1"/>
+          </p:cNvSpPr>
+          <p:nvPr/>
+        </p:nvSpPr>
+        <p:spPr>
+          <a:xfrm xmlns:a="http://schemas.openxmlformats.org/drawingml/2006/main">
+            <a:off x="7429500" y="3124200"/>
+            <a:ext cx="4124325" cy="14288"/>
+          </a:xfrm>
+          <a:prstGeom xmlns:a="http://schemas.openxmlformats.org/drawingml/2006/main" prst="rect">
+            <a:avLst/>
+          </a:prstGeom>
+          <a:solidFill xmlns:a="http://schemas.openxmlformats.org/drawingml/2006/main">
+            <a:srgbClr val="D6D8D0"/>
+          </a:solidFill>
+          <a:ln xmlns:a="http://schemas.openxmlformats.org/drawingml/2006/main" w="0">
+            <a:noFill/>
+          </a:ln>
+        </p:spPr>
+      </p:sp>
+      <p:sp>
+        <p:nvSpPr>
+          <p:cNvPr id="10" name="">
+            <a:extLst xmlns:a="http://schemas.openxmlformats.org/drawingml/2006/main">
+              <a:ext uri="{FF2B5EF4-FFF2-40B4-BE49-F238E27FC236}">
+                <a16:creationId xmlns:a16="http://schemas.microsoft.com/office/drawing/2014/main" id="{6CFBD7A3-C2B3-45AC-BC34-224BDD519C2D}"/>
+              </a:ext>
+            </a:extLst>
+          </p:cNvPr>
+          <p:cNvSpPr>
+            <a:spLocks xmlns:a="http://schemas.openxmlformats.org/drawingml/2006/main" noGrp="1"/>
+          </p:cNvSpPr>
+          <p:nvPr/>
+        </p:nvSpPr>
+        <p:spPr>
+          <a:xfrm xmlns:a="http://schemas.openxmlformats.org/drawingml/2006/main">
+            <a:off x="7429500" y="3371850"/>
+            <a:ext cx="2571750" cy="400050"/>
+          </a:xfrm>
+          <a:prstGeom xmlns:a="http://schemas.openxmlformats.org/drawingml/2006/main" prst="rect">
+            <a:avLst/>
+          </a:prstGeom>
+          <a:noFill xmlns:a="http://schemas.openxmlformats.org/drawingml/2006/main"/>
+          <a:ln xmlns:a="http://schemas.openxmlformats.org/drawingml/2006/main" w="0">
+            <a:noFill/>
+          </a:ln>
+        </p:spPr>
+        <p:txBody>
+          <a:bodyPr xmlns:a="http://schemas.openxmlformats.org/drawingml/2006/main" wrap="square" lIns="0" tIns="0" rIns="0" bIns="0" anchor="t">
+            <a:noAutofit/>
+          </a:bodyPr>
+          <a:lstStyle xmlns:a="http://schemas.openxmlformats.org/drawingml/2006/main"/>
+          <a:p xmlns:a="http://schemas.openxmlformats.org/drawingml/2006/main">
+            <a:pPr algn="l">
+              <a:defRPr sz="2025" b="0">
+                <a:solidFill>
+                  <a:srgbClr val="15171A"/>
+                </a:solidFill>
+                <a:latin typeface="Inter"/>
+                <a:ea typeface="Inter"/>
+                <a:cs typeface="Inter"/>
+              </a:defRPr>
+            </a:pPr>
+            <a:r>
+              <a:rPr sz="2025" b="0">
+                <a:solidFill>
+                  <a:srgbClr val="15171A"/>
+                </a:solidFill>
+                <a:latin typeface="Inter"/>
+                <a:ea typeface="Inter"/>
+                <a:cs typeface="Inter"/>
+              </a:rPr>
+              <a:t>Mittagessen</a:t>
+            </a:r>
+          </a:p>
+        </p:txBody>
+      </p:sp>
+      <p:sp>
+        <p:nvSpPr>
+          <p:cNvPr id="11" name="">
+            <a:extLst xmlns:a="http://schemas.openxmlformats.org/drawingml/2006/main">
+              <a:ext uri="{FF2B5EF4-FFF2-40B4-BE49-F238E27FC236}">
+                <a16:creationId xmlns:a16="http://schemas.microsoft.com/office/drawing/2014/main" id="{61E51398-A0D6-4389-8D09-CE75394994BF}"/>
+              </a:ext>
+            </a:extLst>
+          </p:cNvPr>
+          <p:cNvSpPr>
+            <a:spLocks xmlns:a="http://schemas.openxmlformats.org/drawingml/2006/main" noGrp="1"/>
+          </p:cNvSpPr>
+          <p:nvPr/>
+        </p:nvSpPr>
+        <p:spPr>
+          <a:xfrm xmlns:a="http://schemas.openxmlformats.org/drawingml/2006/main">
+            <a:off x="9667875" y="3371850"/>
+            <a:ext cx="1885950" cy="400050"/>
+          </a:xfrm>
+          <a:prstGeom xmlns:a="http://schemas.openxmlformats.org/drawingml/2006/main" prst="rect">
+            <a:avLst/>
+          </a:prstGeom>
+          <a:noFill xmlns:a="http://schemas.openxmlformats.org/drawingml/2006/main"/>
+          <a:ln xmlns:a="http://schemas.openxmlformats.org/drawingml/2006/main" w="0">
+            <a:noFill/>
+          </a:ln>
+        </p:spPr>
+        <p:txBody>
+          <a:bodyPr xmlns:a="http://schemas.openxmlformats.org/drawingml/2006/main" wrap="square" lIns="0" tIns="0" rIns="0" bIns="0" anchor="t">
+            <a:noAutofit/>
+          </a:bodyPr>
+          <a:lstStyle xmlns:a="http://schemas.openxmlformats.org/drawingml/2006/main"/>
+          <a:p xmlns:a="http://schemas.openxmlformats.org/drawingml/2006/main">
+            <a:pPr algn="r">
+              <a:defRPr sz="2025" b="0">
+                <a:solidFill>
+                  <a:srgbClr val="15171A"/>
+                </a:solidFill>
+                <a:latin typeface="Inter"/>
+                <a:ea typeface="Inter"/>
+                <a:cs typeface="Inter"/>
+              </a:defRPr>
+            </a:pPr>
+            <a:r>
+              <a:rPr sz="2025" b="0">
+                <a:solidFill>
+                  <a:srgbClr val="15171A"/>
+                </a:solidFill>
+                <a:latin typeface="Inter"/>
+                <a:ea typeface="Inter"/>
+                <a:cs typeface="Inter"/>
+              </a:rPr>
+              <a:t>CHF 12.80</a:t>
+            </a:r>
+          </a:p>
+        </p:txBody>
+      </p:sp>
+      <p:sp>
+        <p:nvSpPr>
+          <p:cNvPr id="12" name="">
+            <a:extLst xmlns:a="http://schemas.openxmlformats.org/drawingml/2006/main">
+              <a:ext uri="{FF2B5EF4-FFF2-40B4-BE49-F238E27FC236}">
+                <a16:creationId xmlns:a16="http://schemas.microsoft.com/office/drawing/2014/main" id="{20EC5BCF-7A67-48A5-81C9-3ECE251EA8EC}"/>
+              </a:ext>
+            </a:extLst>
+          </p:cNvPr>
+          <p:cNvSpPr>
+            <a:spLocks xmlns:a="http://schemas.openxmlformats.org/drawingml/2006/main" noGrp="1"/>
+          </p:cNvSpPr>
+          <p:nvPr/>
+        </p:nvSpPr>
+        <p:spPr>
+          <a:xfrm xmlns:a="http://schemas.openxmlformats.org/drawingml/2006/main">
+            <a:off x="7429500" y="3924300"/>
+            <a:ext cx="4124325" cy="14288"/>
+          </a:xfrm>
+          <a:prstGeom xmlns:a="http://schemas.openxmlformats.org/drawingml/2006/main" prst="rect">
+            <a:avLst/>
+          </a:prstGeom>
+          <a:solidFill xmlns:a="http://schemas.openxmlformats.org/drawingml/2006/main">
+            <a:srgbClr val="D6D8D0"/>
+          </a:solidFill>
+          <a:ln xmlns:a="http://schemas.openxmlformats.org/drawingml/2006/main" w="0">
+            <a:noFill/>
+          </a:ln>
+        </p:spPr>
+      </p:sp>
+      <p:sp>
+        <p:nvSpPr>
+          <p:cNvPr id="13" name="">
+            <a:extLst xmlns:a="http://schemas.openxmlformats.org/drawingml/2006/main">
+              <a:ext uri="{FF2B5EF4-FFF2-40B4-BE49-F238E27FC236}">
+                <a16:creationId xmlns:a16="http://schemas.microsoft.com/office/drawing/2014/main" id="{C84DD131-01C7-4EF8-B053-93AE31762F2C}"/>
+              </a:ext>
+            </a:extLst>
+          </p:cNvPr>
+          <p:cNvSpPr>
+            <a:spLocks xmlns:a="http://schemas.openxmlformats.org/drawingml/2006/main" noGrp="1"/>
+          </p:cNvSpPr>
+          <p:nvPr/>
+        </p:nvSpPr>
+        <p:spPr>
+          <a:xfrm xmlns:a="http://schemas.openxmlformats.org/drawingml/2006/main">
+            <a:off x="7429500" y="4171950"/>
+            <a:ext cx="2571750" cy="400050"/>
+          </a:xfrm>
+          <a:prstGeom xmlns:a="http://schemas.openxmlformats.org/drawingml/2006/main" prst="rect">
+            <a:avLst/>
+          </a:prstGeom>
+          <a:noFill xmlns:a="http://schemas.openxmlformats.org/drawingml/2006/main"/>
+          <a:ln xmlns:a="http://schemas.openxmlformats.org/drawingml/2006/main" w="0">
+            <a:noFill/>
+          </a:ln>
+        </p:spPr>
+        <p:txBody>
+          <a:bodyPr xmlns:a="http://schemas.openxmlformats.org/drawingml/2006/main" wrap="square" lIns="0" tIns="0" rIns="0" bIns="0" anchor="t">
+            <a:noAutofit/>
+          </a:bodyPr>
+          <a:lstStyle xmlns:a="http://schemas.openxmlformats.org/drawingml/2006/main"/>
+          <a:p xmlns:a="http://schemas.openxmlformats.org/drawingml/2006/main">
+            <a:pPr algn="l">
+              <a:defRPr sz="2025" b="0">
+                <a:solidFill>
+                  <a:srgbClr val="15171A"/>
+                </a:solidFill>
+                <a:latin typeface="Inter"/>
+                <a:ea typeface="Inter"/>
+                <a:cs typeface="Inter"/>
+              </a:defRPr>
+            </a:pPr>
+            <a:r>
+              <a:rPr sz="2025" b="0">
+                <a:solidFill>
+                  <a:srgbClr val="15171A"/>
+                </a:solidFill>
+                <a:latin typeface="Inter"/>
+                <a:ea typeface="Inter"/>
+                <a:cs typeface="Inter"/>
+              </a:rPr>
+              <a:t>Musikabo</a:t>
+            </a:r>
+          </a:p>
+        </p:txBody>
+      </p:sp>
+      <p:sp>
+        <p:nvSpPr>
+          <p:cNvPr id="14" name="">
+            <a:extLst xmlns:a="http://schemas.openxmlformats.org/drawingml/2006/main">
+              <a:ext uri="{FF2B5EF4-FFF2-40B4-BE49-F238E27FC236}">
+                <a16:creationId xmlns:a16="http://schemas.microsoft.com/office/drawing/2014/main" id="{CC263790-A3F9-45C1-AA32-AA555B65DBDC}"/>
+              </a:ext>
+            </a:extLst>
+          </p:cNvPr>
+          <p:cNvSpPr>
+            <a:spLocks xmlns:a="http://schemas.openxmlformats.org/drawingml/2006/main" noGrp="1"/>
+          </p:cNvSpPr>
+          <p:nvPr/>
+        </p:nvSpPr>
+        <p:spPr>
+          <a:xfrm xmlns:a="http://schemas.openxmlformats.org/drawingml/2006/main">
+            <a:off x="9667875" y="4171950"/>
+            <a:ext cx="1885950" cy="400050"/>
+          </a:xfrm>
+          <a:prstGeom xmlns:a="http://schemas.openxmlformats.org/drawingml/2006/main" prst="rect">
+            <a:avLst/>
+          </a:prstGeom>
+          <a:noFill xmlns:a="http://schemas.openxmlformats.org/drawingml/2006/main"/>
+          <a:ln xmlns:a="http://schemas.openxmlformats.org/drawingml/2006/main" w="0">
+            <a:noFill/>
+          </a:ln>
+        </p:spPr>
+        <p:txBody>
+          <a:bodyPr xmlns:a="http://schemas.openxmlformats.org/drawingml/2006/main" wrap="square" lIns="0" tIns="0" rIns="0" bIns="0" anchor="t">
+            <a:noAutofit/>
+          </a:bodyPr>
+          <a:lstStyle xmlns:a="http://schemas.openxmlformats.org/drawingml/2006/main"/>
+          <a:p xmlns:a="http://schemas.openxmlformats.org/drawingml/2006/main">
+            <a:pPr algn="r">
+              <a:defRPr sz="2025" b="0">
+                <a:solidFill>
+                  <a:srgbClr val="15171A"/>
+                </a:solidFill>
+                <a:latin typeface="Inter"/>
+                <a:ea typeface="Inter"/>
+                <a:cs typeface="Inter"/>
+              </a:defRPr>
+            </a:pPr>
+            <a:r>
+              <a:rPr sz="2025" b="0">
+                <a:solidFill>
+                  <a:srgbClr val="15171A"/>
+                </a:solidFill>
+                <a:latin typeface="Inter"/>
+                <a:ea typeface="Inter"/>
+                <a:cs typeface="Inter"/>
+              </a:rPr>
+              <a:t>CHF 13.95</a:t>
+            </a:r>
+          </a:p>
+        </p:txBody>
+      </p:sp>
+      <p:sp>
+        <p:nvSpPr>
+          <p:cNvPr id="15" name="">
+            <a:extLst xmlns:a="http://schemas.openxmlformats.org/drawingml/2006/main">
+              <a:ext uri="{FF2B5EF4-FFF2-40B4-BE49-F238E27FC236}">
+                <a16:creationId xmlns:a16="http://schemas.microsoft.com/office/drawing/2014/main" id="{218E6417-7731-4BBC-B21C-8531163718F1}"/>
+              </a:ext>
+            </a:extLst>
+          </p:cNvPr>
+          <p:cNvSpPr>
+            <a:spLocks xmlns:a="http://schemas.openxmlformats.org/drawingml/2006/main" noGrp="1"/>
+          </p:cNvSpPr>
+          <p:nvPr/>
+        </p:nvSpPr>
+        <p:spPr>
+          <a:xfrm xmlns:a="http://schemas.openxmlformats.org/drawingml/2006/main">
+            <a:off x="7429500" y="4724400"/>
+            <a:ext cx="4124325" cy="14288"/>
+          </a:xfrm>
+          <a:prstGeom xmlns:a="http://schemas.openxmlformats.org/drawingml/2006/main" prst="rect">
+            <a:avLst/>
+          </a:prstGeom>
+          <a:solidFill xmlns:a="http://schemas.openxmlformats.org/drawingml/2006/main">
+            <a:srgbClr val="D6D8D0"/>
+          </a:solidFill>
+          <a:ln xmlns:a="http://schemas.openxmlformats.org/drawingml/2006/main" w="0">
+            <a:noFill/>
+          </a:ln>
+        </p:spPr>
+      </p:sp>
+      <p:sp>
+        <p:nvSpPr>
+          <p:cNvPr id="16" name="">
+            <a:extLst xmlns:a="http://schemas.openxmlformats.org/drawingml/2006/main">
+              <a:ext uri="{FF2B5EF4-FFF2-40B4-BE49-F238E27FC236}">
+                <a16:creationId xmlns:a16="http://schemas.microsoft.com/office/drawing/2014/main" id="{E6AAA21B-AA6D-43E4-8E09-01924FC3ACB4}"/>
+              </a:ext>
+            </a:extLst>
+          </p:cNvPr>
+          <p:cNvSpPr>
+            <a:spLocks xmlns:a="http://schemas.openxmlformats.org/drawingml/2006/main" noGrp="1"/>
+          </p:cNvSpPr>
+          <p:nvPr/>
+        </p:nvSpPr>
+        <p:spPr>
+          <a:xfrm xmlns:a="http://schemas.openxmlformats.org/drawingml/2006/main">
+            <a:off x="7429500" y="5200650"/>
+            <a:ext cx="2219325" cy="400050"/>
+          </a:xfrm>
+          <a:prstGeom xmlns:a="http://schemas.openxmlformats.org/drawingml/2006/main" prst="rect">
+            <a:avLst/>
+          </a:prstGeom>
+          <a:noFill xmlns:a="http://schemas.openxmlformats.org/drawingml/2006/main"/>
+          <a:ln xmlns:a="http://schemas.openxmlformats.org/drawingml/2006/main" w="0">
+            <a:noFill/>
+          </a:ln>
+        </p:spPr>
+        <p:txBody>
+          <a:bodyPr xmlns:a="http://schemas.openxmlformats.org/drawingml/2006/main" wrap="square" lIns="0" tIns="0" rIns="0" bIns="0" anchor="t">
+            <a:noAutofit/>
+          </a:bodyPr>
+          <a:lstStyle xmlns:a="http://schemas.openxmlformats.org/drawingml/2006/main"/>
+          <a:p xmlns:a="http://schemas.openxmlformats.org/drawingml/2006/main">
+            <a:pPr algn="l">
+              <a:defRPr sz="2025" b="1">
+                <a:solidFill>
+                  <a:srgbClr val="1F5A45"/>
+                </a:solidFill>
+                <a:latin typeface="Inter"/>
+                <a:ea typeface="Inter"/>
+                <a:cs typeface="Inter"/>
+              </a:defRPr>
+            </a:pPr>
+            <a:r>
+              <a:rPr sz="2025" b="1">
+                <a:solidFill>
+                  <a:srgbClr val="1F5A45"/>
+                </a:solidFill>
+                <a:latin typeface="Inter"/>
+                <a:ea typeface="Inter"/>
+                <a:cs typeface="Inter"/>
+              </a:rPr>
+              <a:t>Zusammen</a:t>
+            </a:r>
+          </a:p>
+        </p:txBody>
+      </p:sp>
+      <p:sp>
+        <p:nvSpPr>
+          <p:cNvPr id="17" name="">
+            <a:extLst xmlns:a="http://schemas.openxmlformats.org/drawingml/2006/main">
+              <a:ext uri="{FF2B5EF4-FFF2-40B4-BE49-F238E27FC236}">
+                <a16:creationId xmlns:a16="http://schemas.microsoft.com/office/drawing/2014/main" id="{C8F36159-58AD-4338-BC57-6A994E9A4ADF}"/>
+              </a:ext>
+            </a:extLst>
+          </p:cNvPr>
+          <p:cNvSpPr>
+            <a:spLocks xmlns:a="http://schemas.openxmlformats.org/drawingml/2006/main" noGrp="1"/>
+          </p:cNvSpPr>
+          <p:nvPr/>
+        </p:nvSpPr>
+        <p:spPr>
+          <a:xfrm xmlns:a="http://schemas.openxmlformats.org/drawingml/2006/main">
+            <a:off x="9620250" y="5114925"/>
+            <a:ext cx="1933575" cy="552450"/>
+          </a:xfrm>
+          <a:prstGeom xmlns:a="http://schemas.openxmlformats.org/drawingml/2006/main" prst="rect">
+            <a:avLst/>
+          </a:prstGeom>
+          <a:noFill xmlns:a="http://schemas.openxmlformats.org/drawingml/2006/main"/>
+          <a:ln xmlns:a="http://schemas.openxmlformats.org/drawingml/2006/main" w="0">
+            <a:noFill/>
+          </a:ln>
+        </p:spPr>
+        <p:txBody>
+          <a:bodyPr xmlns:a="http://schemas.openxmlformats.org/drawingml/2006/main" wrap="square" lIns="0" tIns="0" rIns="0" bIns="0" anchor="t">
+            <a:noAutofit/>
+          </a:bodyPr>
+          <a:lstStyle xmlns:a="http://schemas.openxmlformats.org/drawingml/2006/main"/>
+          <a:p xmlns:a="http://schemas.openxmlformats.org/drawingml/2006/main">
+            <a:pPr algn="r">
+              <a:defRPr sz="2775" b="0">
+                <a:solidFill>
+                  <a:srgbClr val="1F5A45"/>
+                </a:solidFill>
+                <a:latin typeface="Newsreader"/>
+                <a:ea typeface="Newsreader"/>
+                <a:cs typeface="Newsreader"/>
+              </a:defRPr>
+            </a:pPr>
+            <a:r>
+              <a:rPr sz="2775" b="0">
+                <a:solidFill>
+                  <a:srgbClr val="1F5A45"/>
+                </a:solidFill>
+                <a:latin typeface="Newsreader"/>
+                <a:ea typeface="Newsreader"/>
+                <a:cs typeface="Newsreader"/>
+              </a:rPr>
+              <a:t>CHF 31.25</a:t>
+            </a:r>
+          </a:p>
+        </p:txBody>
+      </p:sp>
     </p:spTree>
     <p:extLst>
       <p:ext uri="{BB962C8B-B14F-4D97-AF65-F5344CB8AC3E}">
-        <p14:creationId xmlns:p14="http://schemas.microsoft.com/office/powerpoint/2010/main" val="328255084"/>
+        <p14:creationId xmlns:p14="http://schemas.microsoft.com/office/powerpoint/2010/main" val="596746945"/>
       </p:ext>
     </p:extLst>
   </p:cSld>
@@ -3458,6 +3895,331 @@
 </file>
 
 <file path=ppt/slides/slide3.xml><?xml version="1.0" encoding="utf-8"?>
+<p:sld xmlns:p="http://schemas.openxmlformats.org/presentationml/2006/main">
+  <p:cSld>
+    <p:bg>
+      <p:bgPr>
+        <a:solidFill xmlns:a="http://schemas.openxmlformats.org/drawingml/2006/main">
+          <a:srgbClr val="1F5A45"/>
+        </a:solidFill>
+      </p:bgPr>
+    </p:bg>
+    <p:spTree>
+      <p:nvGrpSpPr>
+        <p:cNvPr id="1" name=""/>
+        <p:cNvGrpSpPr/>
+        <p:nvPr/>
+      </p:nvGrpSpPr>
+      <p:grpSpPr>
+        <a:xfrm xmlns:a="http://schemas.openxmlformats.org/drawingml/2006/main"/>
+      </p:grpSpPr>
+      <p:sp>
+        <p:nvSpPr>
+          <p:cNvPr id="6" name="">
+            <a:extLst xmlns:a="http://schemas.openxmlformats.org/drawingml/2006/main">
+              <a:ext uri="{FF2B5EF4-FFF2-40B4-BE49-F238E27FC236}">
+                <a16:creationId xmlns:a16="http://schemas.microsoft.com/office/drawing/2014/main" id="{CD8318F3-B2DA-4292-A8FC-CC8ACCFBC529}"/>
+              </a:ext>
+            </a:extLst>
+          </p:cNvPr>
+          <p:cNvSpPr>
+            <a:spLocks xmlns:a="http://schemas.openxmlformats.org/drawingml/2006/main" noGrp="1"/>
+          </p:cNvSpPr>
+          <p:nvPr/>
+        </p:nvSpPr>
+        <p:spPr>
+          <a:xfrm xmlns:a="http://schemas.openxmlformats.org/drawingml/2006/main">
+            <a:off x="11334750" y="6296025"/>
+            <a:ext cx="333375" cy="219075"/>
+          </a:xfrm>
+          <a:prstGeom xmlns:a="http://schemas.openxmlformats.org/drawingml/2006/main" prst="rect">
+            <a:avLst/>
+          </a:prstGeom>
+          <a:noFill xmlns:a="http://schemas.openxmlformats.org/drawingml/2006/main"/>
+          <a:ln xmlns:a="http://schemas.openxmlformats.org/drawingml/2006/main" w="0">
+            <a:noFill/>
+          </a:ln>
+        </p:spPr>
+        <p:txBody>
+          <a:bodyPr xmlns:a="http://schemas.openxmlformats.org/drawingml/2006/main" wrap="square" lIns="0" tIns="0" rIns="0" bIns="0" anchor="t">
+            <a:noAutofit/>
+          </a:bodyPr>
+          <a:lstStyle xmlns:a="http://schemas.openxmlformats.org/drawingml/2006/main"/>
+          <a:p xmlns:a="http://schemas.openxmlformats.org/drawingml/2006/main">
+            <a:pPr algn="r">
+              <a:defRPr sz="1275" b="0">
+                <a:solidFill>
+                  <a:srgbClr val="DCEBE2"/>
+                </a:solidFill>
+                <a:latin typeface="Inter"/>
+                <a:ea typeface="Inter"/>
+                <a:cs typeface="Inter"/>
+              </a:defRPr>
+            </a:pPr>
+            <a:r>
+              <a:rPr sz="1275" b="0">
+                <a:solidFill>
+                  <a:srgbClr val="DCEBE2"/>
+                </a:solidFill>
+                <a:latin typeface="Inter"/>
+                <a:ea typeface="Inter"/>
+                <a:cs typeface="Inter"/>
+              </a:rPr>
+              <a:t>3</a:t>
+            </a:r>
+          </a:p>
+        </p:txBody>
+      </p:sp>
+      <p:sp>
+        <p:nvSpPr>
+          <p:cNvPr id="2" name="">
+            <a:extLst xmlns:a="http://schemas.openxmlformats.org/drawingml/2006/main">
+              <a:ext uri="{FF2B5EF4-FFF2-40B4-BE49-F238E27FC236}">
+                <a16:creationId xmlns:a16="http://schemas.microsoft.com/office/drawing/2014/main" id="{5E0DC381-CD30-448A-87C7-52B841FF608E}"/>
+              </a:ext>
+            </a:extLst>
+          </p:cNvPr>
+          <p:cNvSpPr>
+            <a:spLocks xmlns:a="http://schemas.openxmlformats.org/drawingml/2006/main" noGrp="1"/>
+          </p:cNvSpPr>
+          <p:nvPr/>
+        </p:nvSpPr>
+        <p:spPr>
+          <a:xfrm xmlns:a="http://schemas.openxmlformats.org/drawingml/2006/main">
+            <a:off x="609600" y="1295400"/>
+            <a:ext cx="8001000" cy="1543050"/>
+          </a:xfrm>
+          <a:prstGeom xmlns:a="http://schemas.openxmlformats.org/drawingml/2006/main" prst="rect">
+            <a:avLst/>
+          </a:prstGeom>
+          <a:noFill xmlns:a="http://schemas.openxmlformats.org/drawingml/2006/main"/>
+          <a:ln xmlns:a="http://schemas.openxmlformats.org/drawingml/2006/main" w="0">
+            <a:noFill/>
+          </a:ln>
+        </p:spPr>
+        <p:txBody>
+          <a:bodyPr xmlns:a="http://schemas.openxmlformats.org/drawingml/2006/main" wrap="square" lIns="0" tIns="0" rIns="0" bIns="0" anchor="t">
+            <a:noAutofit/>
+          </a:bodyPr>
+          <a:lstStyle xmlns:a="http://schemas.openxmlformats.org/drawingml/2006/main"/>
+          <a:p xmlns:a="http://schemas.openxmlformats.org/drawingml/2006/main">
+            <a:pPr algn="l">
+              <a:defRPr sz="10200" b="0">
+                <a:solidFill>
+                  <a:srgbClr val="F6F5F1"/>
+                </a:solidFill>
+                <a:latin typeface="Newsreader"/>
+                <a:ea typeface="Newsreader"/>
+                <a:cs typeface="Newsreader"/>
+              </a:defRPr>
+            </a:pPr>
+            <a:r>
+              <a:rPr sz="10200" b="0">
+                <a:solidFill>
+                  <a:srgbClr val="F6F5F1"/>
+                </a:solidFill>
+                <a:latin typeface="Newsreader"/>
+                <a:ea typeface="Newsreader"/>
+                <a:cs typeface="Newsreader"/>
+              </a:rPr>
+              <a:t>spendly.</a:t>
+            </a:r>
+          </a:p>
+        </p:txBody>
+      </p:sp>
+      <p:sp>
+        <p:nvSpPr>
+          <p:cNvPr id="3" name="">
+            <a:extLst xmlns:a="http://schemas.openxmlformats.org/drawingml/2006/main">
+              <a:ext uri="{FF2B5EF4-FFF2-40B4-BE49-F238E27FC236}">
+                <a16:creationId xmlns:a16="http://schemas.microsoft.com/office/drawing/2014/main" id="{DD141019-32B9-43E8-AD8F-CA8F87DE369D}"/>
+              </a:ext>
+            </a:extLst>
+          </p:cNvPr>
+          <p:cNvSpPr>
+            <a:spLocks xmlns:a="http://schemas.openxmlformats.org/drawingml/2006/main" noGrp="1"/>
+          </p:cNvSpPr>
+          <p:nvPr/>
+        </p:nvSpPr>
+        <p:spPr>
+          <a:xfrm xmlns:a="http://schemas.openxmlformats.org/drawingml/2006/main">
+            <a:off x="666750" y="3133725"/>
+            <a:ext cx="7572375" cy="1190625"/>
+          </a:xfrm>
+          <a:prstGeom xmlns:a="http://schemas.openxmlformats.org/drawingml/2006/main" prst="rect">
+            <a:avLst/>
+          </a:prstGeom>
+          <a:noFill xmlns:a="http://schemas.openxmlformats.org/drawingml/2006/main"/>
+          <a:ln xmlns:a="http://schemas.openxmlformats.org/drawingml/2006/main" w="0">
+            <a:noFill/>
+          </a:ln>
+        </p:spPr>
+        <p:txBody>
+          <a:bodyPr xmlns:a="http://schemas.openxmlformats.org/drawingml/2006/main" wrap="square" lIns="0" tIns="0" rIns="0" bIns="0" anchor="t">
+            <a:noAutofit/>
+          </a:bodyPr>
+          <a:lstStyle xmlns:a="http://schemas.openxmlformats.org/drawingml/2006/main"/>
+          <a:p xmlns:a="http://schemas.openxmlformats.org/drawingml/2006/main">
+            <a:pPr algn="l">
+              <a:defRPr sz="3225" b="0">
+                <a:solidFill>
+                  <a:srgbClr val="F6F5F1"/>
+                </a:solidFill>
+                <a:latin typeface="Inter"/>
+                <a:ea typeface="Inter"/>
+                <a:cs typeface="Inter"/>
+              </a:defRPr>
+            </a:pPr>
+            <a:r>
+              <a:rPr sz="3225" b="0">
+                <a:solidFill>
+                  <a:srgbClr val="F6F5F1"/>
+                </a:solidFill>
+                <a:latin typeface="Inter"/>
+                <a:ea typeface="Inter"/>
+                <a:cs typeface="Inter"/>
+              </a:rPr>
+              <a:t>Dein Budget für heute.</a:t>
+            </a:r>
+          </a:p>
+          <a:p xmlns:a="http://schemas.openxmlformats.org/drawingml/2006/main">
+            <a:pPr algn="l">
+              <a:defRPr sz="3225" b="0">
+                <a:solidFill>
+                  <a:srgbClr val="F6F5F1"/>
+                </a:solidFill>
+                <a:latin typeface="Inter"/>
+                <a:ea typeface="Inter"/>
+                <a:cs typeface="Inter"/>
+              </a:defRPr>
+            </a:pPr>
+            <a:r>
+              <a:rPr sz="3225" b="0">
+                <a:solidFill>
+                  <a:srgbClr val="F6F5F1"/>
+                </a:solidFill>
+                <a:latin typeface="Inter"/>
+                <a:ea typeface="Inter"/>
+                <a:cs typeface="Inter"/>
+              </a:rPr>
+              <a:t>Direkt im Blick.</a:t>
+            </a:r>
+          </a:p>
+        </p:txBody>
+      </p:sp>
+      <p:sp>
+        <p:nvSpPr>
+          <p:cNvPr id="4" name="">
+            <a:extLst xmlns:a="http://schemas.openxmlformats.org/drawingml/2006/main">
+              <a:ext uri="{FF2B5EF4-FFF2-40B4-BE49-F238E27FC236}">
+                <a16:creationId xmlns:a16="http://schemas.microsoft.com/office/drawing/2014/main" id="{12121166-973F-4EBD-84AC-19DEE884CBE4}"/>
+              </a:ext>
+            </a:extLst>
+          </p:cNvPr>
+          <p:cNvSpPr>
+            <a:spLocks xmlns:a="http://schemas.openxmlformats.org/drawingml/2006/main" noGrp="1"/>
+          </p:cNvSpPr>
+          <p:nvPr/>
+        </p:nvSpPr>
+        <p:spPr>
+          <a:xfrm xmlns:a="http://schemas.openxmlformats.org/drawingml/2006/main">
+            <a:off x="685800" y="4895850"/>
+            <a:ext cx="7258050" cy="819150"/>
+          </a:xfrm>
+          <a:prstGeom xmlns:a="http://schemas.openxmlformats.org/drawingml/2006/main" prst="rect">
+            <a:avLst/>
+          </a:prstGeom>
+          <a:noFill xmlns:a="http://schemas.openxmlformats.org/drawingml/2006/main"/>
+          <a:ln xmlns:a="http://schemas.openxmlformats.org/drawingml/2006/main" w="0">
+            <a:noFill/>
+          </a:ln>
+        </p:spPr>
+        <p:txBody>
+          <a:bodyPr xmlns:a="http://schemas.openxmlformats.org/drawingml/2006/main" wrap="square" lIns="0" tIns="0" rIns="0" bIns="0" anchor="t">
+            <a:noAutofit/>
+          </a:bodyPr>
+          <a:lstStyle xmlns:a="http://schemas.openxmlformats.org/drawingml/2006/main"/>
+          <a:p xmlns:a="http://schemas.openxmlformats.org/drawingml/2006/main">
+            <a:pPr algn="l">
+              <a:defRPr sz="2025" b="0">
+                <a:solidFill>
+                  <a:srgbClr val="DCEBE2"/>
+                </a:solidFill>
+                <a:latin typeface="Inter"/>
+                <a:ea typeface="Inter"/>
+                <a:cs typeface="Inter"/>
+              </a:defRPr>
+            </a:pPr>
+            <a:r>
+              <a:rPr sz="2025" b="0">
+                <a:solidFill>
+                  <a:srgbClr val="DCEBE2"/>
+                </a:solidFill>
+                <a:latin typeface="Inter"/>
+                <a:ea typeface="Inter"/>
+                <a:cs typeface="Inter"/>
+              </a:rPr>
+              <a:t>Ausgaben erfassen und korrigieren.</a:t>
+            </a:r>
+          </a:p>
+          <a:p xmlns:a="http://schemas.openxmlformats.org/drawingml/2006/main">
+            <a:pPr algn="l">
+              <a:defRPr sz="2025" b="0">
+                <a:solidFill>
+                  <a:srgbClr val="DCEBE2"/>
+                </a:solidFill>
+                <a:latin typeface="Inter"/>
+                <a:ea typeface="Inter"/>
+                <a:cs typeface="Inter"/>
+              </a:defRPr>
+            </a:pPr>
+            <a:r>
+              <a:rPr sz="2025" b="0">
+                <a:solidFill>
+                  <a:srgbClr val="DCEBE2"/>
+                </a:solidFill>
+                <a:latin typeface="Inter"/>
+                <a:ea typeface="Inter"/>
+                <a:cs typeface="Inter"/>
+              </a:rPr>
+              <a:t>Das restliche Monatsbudget sehen.</a:t>
+            </a:r>
+          </a:p>
+        </p:txBody>
+      </p:sp>
+      <p:pic>
+        <p:nvPicPr>
+          <p:cNvPr id="10" name=""/>
+          <p:cNvPicPr>
+            <a:picLocks xmlns:a="http://schemas.openxmlformats.org/drawingml/2006/main" noChangeAspect="1"/>
+          </p:cNvPicPr>
+          <p:nvPr/>
+        </p:nvPicPr>
+        <p:blipFill>
+          <a:blip xmlns:r="http://schemas.openxmlformats.org/officeDocument/2006/relationships" xmlns:a="http://schemas.openxmlformats.org/drawingml/2006/main" r:embed="R718d75720fe94779"/>
+          <a:stretch xmlns:a="http://schemas.openxmlformats.org/drawingml/2006/main"/>
+        </p:blipFill>
+        <p:spPr>
+          <a:xfrm xmlns:a="http://schemas.openxmlformats.org/drawingml/2006/main">
+            <a:off x="8877300" y="753660"/>
+            <a:ext cx="2447925" cy="5322106"/>
+          </a:xfrm>
+          <a:prstGeom xmlns:a="http://schemas.openxmlformats.org/drawingml/2006/main" prst="rect">
+            <a:avLst/>
+          </a:prstGeom>
+        </p:spPr>
+      </p:pic>
+    </p:spTree>
+    <p:extLst>
+      <p:ext uri="{BB962C8B-B14F-4D97-AF65-F5344CB8AC3E}">
+        <p14:creationId xmlns:p14="http://schemas.microsoft.com/office/powerpoint/2010/main" val="742497724"/>
+      </p:ext>
+    </p:extLst>
+  </p:cSld>
+</p:sld>
+</file>
+
+<file path=ppt/slides/slide4.xml><?xml version="1.0" encoding="utf-8"?>
 <p:sld xmlns:p="http://schemas.openxmlformats.org/presentationml/2006/main">
   <p:cSld>
     <p:bg>
@@ -3478,10 +4240,10 @@
       </p:grpSpPr>
       <p:sp>
         <p:nvSpPr>
-          <p:cNvPr id="11" name="">
+          <p:cNvPr id="13" name="">
             <a:extLst xmlns:a="http://schemas.openxmlformats.org/drawingml/2006/main">
               <a:ext uri="{FF2B5EF4-FFF2-40B4-BE49-F238E27FC236}">
-                <a16:creationId xmlns:a16="http://schemas.microsoft.com/office/drawing/2014/main" id="{C3B1AC61-F739-470D-9295-DF926D9E72DE}"/>
+                <a16:creationId xmlns:a16="http://schemas.microsoft.com/office/drawing/2014/main" id="{D86CFC74-AD06-45C8-8CC4-7B3057A1B7EB}"/>
               </a:ext>
             </a:extLst>
           </p:cNvPr>
@@ -3528,7 +4290,7 @@
                 <a:ea typeface="Inter"/>
                 <a:cs typeface="Inter"/>
               </a:rPr>
-              <a:t>3</a:t>
+              <a:t>4</a:t>
             </a:r>
           </a:p>
         </p:txBody>
@@ -3538,7 +4300,7 @@
           <p:cNvPr id="2" name="">
             <a:extLst xmlns:a="http://schemas.openxmlformats.org/drawingml/2006/main">
               <a:ext uri="{FF2B5EF4-FFF2-40B4-BE49-F238E27FC236}">
-                <a16:creationId xmlns:a16="http://schemas.microsoft.com/office/drawing/2014/main" id="{0BB43B96-CF9B-4999-BE0A-DB5EAE8DE4A8}"/>
+                <a16:creationId xmlns:a16="http://schemas.microsoft.com/office/drawing/2014/main" id="{FFB28E15-0CC1-4210-8EEF-1D779A586259}"/>
               </a:ext>
             </a:extLst>
           </p:cNvPr>
@@ -3585,7 +4347,7 @@
                 <a:ea typeface="Newsreader"/>
                 <a:cs typeface="Newsreader"/>
               </a:rPr>
-              <a:t>Konzept und Design</a:t>
+              <a:t>Spendly im Alltag</a:t>
             </a:r>
           </a:p>
         </p:txBody>
@@ -3595,7 +4357,7 @@
           <p:cNvPr id="3" name="">
             <a:extLst xmlns:a="http://schemas.openxmlformats.org/drawingml/2006/main">
               <a:ext uri="{FF2B5EF4-FFF2-40B4-BE49-F238E27FC236}">
-                <a16:creationId xmlns:a16="http://schemas.microsoft.com/office/drawing/2014/main" id="{88F4F4C2-293D-4E83-8031-ABD530A8B2EE}"/>
+                <a16:creationId xmlns:a16="http://schemas.microsoft.com/office/drawing/2014/main" id="{C10D774C-ED74-460F-A803-FFF49F245C33}"/>
               </a:ext>
             </a:extLst>
           </p:cNvPr>
@@ -3606,8 +4368,8 @@
         </p:nvSpPr>
         <p:spPr>
           <a:xfrm xmlns:a="http://schemas.openxmlformats.org/drawingml/2006/main">
-            <a:off x="609600" y="1762125"/>
-            <a:ext cx="5048250" cy="571500"/>
+            <a:off x="638175" y="1847850"/>
+            <a:ext cx="857250" cy="666750"/>
           </a:xfrm>
           <a:prstGeom xmlns:a="http://schemas.openxmlformats.org/drawingml/2006/main" prst="rect">
             <a:avLst/>
@@ -3624,7 +4386,7 @@
           <a:lstStyle xmlns:a="http://schemas.openxmlformats.org/drawingml/2006/main"/>
           <a:p xmlns:a="http://schemas.openxmlformats.org/drawingml/2006/main">
             <a:pPr algn="l">
-              <a:defRPr sz="2850" b="0">
+              <a:defRPr sz="3375" b="0">
                 <a:solidFill>
                   <a:srgbClr val="1F5A45"/>
                 </a:solidFill>
@@ -3634,7 +4396,7 @@
               </a:defRPr>
             </a:pPr>
             <a:r>
-              <a:rPr sz="2850" b="0">
+              <a:rPr sz="3375" b="0">
                 <a:solidFill>
                   <a:srgbClr val="1F5A45"/>
                 </a:solidFill>
@@ -3642,7 +4404,7 @@
                 <a:ea typeface="Newsreader"/>
                 <a:cs typeface="Newsreader"/>
               </a:rPr>
-              <a:t>Budget im Fokus</a:t>
+              <a:t>01</a:t>
             </a:r>
           </a:p>
         </p:txBody>
@@ -3652,7 +4414,7 @@
           <p:cNvPr id="4" name="">
             <a:extLst xmlns:a="http://schemas.openxmlformats.org/drawingml/2006/main">
               <a:ext uri="{FF2B5EF4-FFF2-40B4-BE49-F238E27FC236}">
-                <a16:creationId xmlns:a16="http://schemas.microsoft.com/office/drawing/2014/main" id="{B00C9683-948E-41B4-A016-AD0E6AD5C0E7}"/>
+                <a16:creationId xmlns:a16="http://schemas.microsoft.com/office/drawing/2014/main" id="{8C5FAB98-6F66-4C8D-8FDF-2101ED6D3B68}"/>
               </a:ext>
             </a:extLst>
           </p:cNvPr>
@@ -3663,8 +4425,8 @@
         </p:nvSpPr>
         <p:spPr>
           <a:xfrm xmlns:a="http://schemas.openxmlformats.org/drawingml/2006/main">
-            <a:off x="638175" y="2533650"/>
-            <a:ext cx="4667250" cy="1457325"/>
+            <a:off x="1609725" y="1847850"/>
+            <a:ext cx="6191250" cy="561975"/>
           </a:xfrm>
           <a:prstGeom xmlns:a="http://schemas.openxmlformats.org/drawingml/2006/main" prst="rect">
             <a:avLst/>
@@ -3681,71 +4443,25 @@
           <a:lstStyle xmlns:a="http://schemas.openxmlformats.org/drawingml/2006/main"/>
           <a:p xmlns:a="http://schemas.openxmlformats.org/drawingml/2006/main">
             <a:pPr algn="l">
-              <a:defRPr sz="2250" b="0">
-                <a:solidFill>
-                  <a:srgbClr val="15171A"/>
-                </a:solidFill>
-                <a:latin typeface="Inter"/>
-                <a:ea typeface="Inter"/>
-                <a:cs typeface="Inter"/>
-              </a:defRPr>
-            </a:pPr>
-            <a:r>
-              <a:rPr sz="2250" b="0">
-                <a:solidFill>
-                  <a:srgbClr val="15171A"/>
-                </a:solidFill>
-                <a:latin typeface="Inter"/>
-                <a:ea typeface="Inter"/>
-                <a:cs typeface="Inter"/>
-              </a:rPr>
-              <a:t>Grosse Beträge</a:t>
-            </a:r>
-          </a:p>
-          <a:p xmlns:a="http://schemas.openxmlformats.org/drawingml/2006/main">
-            <a:pPr algn="l">
-              <a:defRPr sz="2250" b="0">
-                <a:solidFill>
-                  <a:srgbClr val="15171A"/>
-                </a:solidFill>
-                <a:latin typeface="Inter"/>
-                <a:ea typeface="Inter"/>
-                <a:cs typeface="Inter"/>
-              </a:defRPr>
-            </a:pPr>
-            <a:r>
-              <a:rPr sz="2250" b="0">
-                <a:solidFill>
-                  <a:srgbClr val="15171A"/>
-                </a:solidFill>
-                <a:latin typeface="Inter"/>
-                <a:ea typeface="Inter"/>
-                <a:cs typeface="Inter"/>
-              </a:rPr>
-              <a:t>Ruhige Farben</a:t>
-            </a:r>
-          </a:p>
-          <a:p xmlns:a="http://schemas.openxmlformats.org/drawingml/2006/main">
-            <a:pPr algn="l">
-              <a:defRPr sz="2250" b="0">
-                <a:solidFill>
-                  <a:srgbClr val="15171A"/>
-                </a:solidFill>
-                <a:latin typeface="Inter"/>
-                <a:ea typeface="Inter"/>
-                <a:cs typeface="Inter"/>
-              </a:defRPr>
-            </a:pPr>
-            <a:r>
-              <a:rPr sz="2250" b="0">
-                <a:solidFill>
-                  <a:srgbClr val="15171A"/>
-                </a:solidFill>
-                <a:latin typeface="Inter"/>
-                <a:ea typeface="Inter"/>
-                <a:cs typeface="Inter"/>
-              </a:rPr>
-              <a:t>Kurze Wege</a:t>
+              <a:defRPr sz="2850" b="0">
+                <a:solidFill>
+                  <a:srgbClr val="1F5A45"/>
+                </a:solidFill>
+                <a:latin typeface="Newsreader"/>
+                <a:ea typeface="Newsreader"/>
+                <a:cs typeface="Newsreader"/>
+              </a:defRPr>
+            </a:pPr>
+            <a:r>
+              <a:rPr sz="2850" b="0">
+                <a:solidFill>
+                  <a:srgbClr val="1F5A45"/>
+                </a:solidFill>
+                <a:latin typeface="Newsreader"/>
+                <a:ea typeface="Newsreader"/>
+                <a:cs typeface="Newsreader"/>
+              </a:rPr>
+              <a:t>Eintragen</a:t>
             </a:r>
           </a:p>
         </p:txBody>
@@ -3755,7 +4471,7 @@
           <p:cNvPr id="5" name="">
             <a:extLst xmlns:a="http://schemas.openxmlformats.org/drawingml/2006/main">
               <a:ext uri="{FF2B5EF4-FFF2-40B4-BE49-F238E27FC236}">
-                <a16:creationId xmlns:a16="http://schemas.microsoft.com/office/drawing/2014/main" id="{FD2EB3EF-4FA7-4E5B-A258-1868F1F1B251}"/>
+                <a16:creationId xmlns:a16="http://schemas.microsoft.com/office/drawing/2014/main" id="{16DA37FE-50AC-47AA-B9FA-8BC94E6C6B11}"/>
               </a:ext>
             </a:extLst>
           </p:cNvPr>
@@ -3766,8 +4482,8 @@
         </p:nvSpPr>
         <p:spPr>
           <a:xfrm xmlns:a="http://schemas.openxmlformats.org/drawingml/2006/main">
-            <a:off x="638175" y="4400550"/>
-            <a:ext cx="4667250" cy="342900"/>
+            <a:off x="1628775" y="2447925"/>
+            <a:ext cx="6238875" cy="457200"/>
           </a:xfrm>
           <a:prstGeom xmlns:a="http://schemas.openxmlformats.org/drawingml/2006/main" prst="rect">
             <a:avLst/>
@@ -3784,25 +4500,25 @@
           <a:lstStyle xmlns:a="http://schemas.openxmlformats.org/drawingml/2006/main"/>
           <a:p xmlns:a="http://schemas.openxmlformats.org/drawingml/2006/main">
             <a:pPr algn="l">
-              <a:defRPr sz="1725" b="1">
-                <a:solidFill>
-                  <a:srgbClr val="1F5A45"/>
-                </a:solidFill>
-                <a:latin typeface="Inter"/>
-                <a:ea typeface="Inter"/>
-                <a:cs typeface="Inter"/>
-              </a:defRPr>
-            </a:pPr>
-            <a:r>
-              <a:rPr sz="1725" b="1">
-                <a:solidFill>
-                  <a:srgbClr val="1F5A45"/>
-                </a:solidFill>
-                <a:latin typeface="Inter"/>
-                <a:ea typeface="Inter"/>
-                <a:cs typeface="Inter"/>
-              </a:rPr>
-              <a:t>Vorgehen</a:t>
+              <a:defRPr sz="1875" b="0">
+                <a:solidFill>
+                  <a:srgbClr val="15171A"/>
+                </a:solidFill>
+                <a:latin typeface="Inter"/>
+                <a:ea typeface="Inter"/>
+                <a:cs typeface="Inter"/>
+              </a:defRPr>
+            </a:pPr>
+            <a:r>
+              <a:rPr sz="1875" b="0">
+                <a:solidFill>
+                  <a:srgbClr val="15171A"/>
+                </a:solidFill>
+                <a:latin typeface="Inter"/>
+                <a:ea typeface="Inter"/>
+                <a:cs typeface="Inter"/>
+              </a:rPr>
+              <a:t>CHF 14.80 für ein Mittagessen</a:t>
             </a:r>
           </a:p>
         </p:txBody>
@@ -3812,7 +4528,7 @@
           <p:cNvPr id="6" name="">
             <a:extLst xmlns:a="http://schemas.openxmlformats.org/drawingml/2006/main">
               <a:ext uri="{FF2B5EF4-FFF2-40B4-BE49-F238E27FC236}">
-                <a16:creationId xmlns:a16="http://schemas.microsoft.com/office/drawing/2014/main" id="{49192D9C-0148-4C39-BED5-B6A640AA55DD}"/>
+                <a16:creationId xmlns:a16="http://schemas.microsoft.com/office/drawing/2014/main" id="{FF5C0B8A-ADE5-49BF-97D5-6A1AF8F0928C}"/>
               </a:ext>
             </a:extLst>
           </p:cNvPr>
@@ -3823,8 +4539,8 @@
         </p:nvSpPr>
         <p:spPr>
           <a:xfrm xmlns:a="http://schemas.openxmlformats.org/drawingml/2006/main">
-            <a:off x="638175" y="4895850"/>
-            <a:ext cx="4762500" cy="1085850"/>
+            <a:off x="638175" y="3228975"/>
+            <a:ext cx="857250" cy="666750"/>
           </a:xfrm>
           <a:prstGeom xmlns:a="http://schemas.openxmlformats.org/drawingml/2006/main" prst="rect">
             <a:avLst/>
@@ -3841,71 +4557,25 @@
           <a:lstStyle xmlns:a="http://schemas.openxmlformats.org/drawingml/2006/main"/>
           <a:p xmlns:a="http://schemas.openxmlformats.org/drawingml/2006/main">
             <a:pPr algn="l">
-              <a:defRPr sz="1800" b="0">
-                <a:solidFill>
-                  <a:srgbClr val="6E6D68"/>
-                </a:solidFill>
-                <a:latin typeface="Inter"/>
-                <a:ea typeface="Inter"/>
-                <a:cs typeface="Inter"/>
-              </a:defRPr>
-            </a:pPr>
-            <a:r>
-              <a:rPr sz="1800" b="0">
-                <a:solidFill>
-                  <a:srgbClr val="6E6D68"/>
-                </a:solidFill>
-                <a:latin typeface="Inter"/>
-                <a:ea typeface="Inter"/>
-                <a:cs typeface="Inter"/>
-              </a:rPr>
-              <a:t>23.9.  Oberfläche und Navigation</a:t>
-            </a:r>
-          </a:p>
-          <a:p xmlns:a="http://schemas.openxmlformats.org/drawingml/2006/main">
-            <a:pPr algn="l">
-              <a:defRPr sz="1800" b="0">
-                <a:solidFill>
-                  <a:srgbClr val="6E6D68"/>
-                </a:solidFill>
-                <a:latin typeface="Inter"/>
-                <a:ea typeface="Inter"/>
-                <a:cs typeface="Inter"/>
-              </a:defRPr>
-            </a:pPr>
-            <a:r>
-              <a:rPr sz="1800" b="0">
-                <a:solidFill>
-                  <a:srgbClr val="6E6D68"/>
-                </a:solidFill>
-                <a:latin typeface="Inter"/>
-                <a:ea typeface="Inter"/>
-                <a:cs typeface="Inter"/>
-              </a:rPr>
-              <a:t>24.9.  Speicherung und Biometrie</a:t>
-            </a:r>
-          </a:p>
-          <a:p xmlns:a="http://schemas.openxmlformats.org/drawingml/2006/main">
-            <a:pPr algn="l">
-              <a:defRPr sz="1800" b="0">
-                <a:solidFill>
-                  <a:srgbClr val="6E6D68"/>
-                </a:solidFill>
-                <a:latin typeface="Inter"/>
-                <a:ea typeface="Inter"/>
-                <a:cs typeface="Inter"/>
-              </a:defRPr>
-            </a:pPr>
-            <a:r>
-              <a:rPr sz="1800" b="0">
-                <a:solidFill>
-                  <a:srgbClr val="6E6D68"/>
-                </a:solidFill>
-                <a:latin typeface="Inter"/>
-                <a:ea typeface="Inter"/>
-                <a:cs typeface="Inter"/>
-              </a:rPr>
-              <a:t>25.9.  Fehlerfälle und Tests</a:t>
+              <a:defRPr sz="3375" b="0">
+                <a:solidFill>
+                  <a:srgbClr val="1F5A45"/>
+                </a:solidFill>
+                <a:latin typeface="Newsreader"/>
+                <a:ea typeface="Newsreader"/>
+                <a:cs typeface="Newsreader"/>
+              </a:defRPr>
+            </a:pPr>
+            <a:r>
+              <a:rPr sz="3375" b="0">
+                <a:solidFill>
+                  <a:srgbClr val="1F5A45"/>
+                </a:solidFill>
+                <a:latin typeface="Newsreader"/>
+                <a:ea typeface="Newsreader"/>
+                <a:cs typeface="Newsreader"/>
+              </a:rPr>
+              <a:t>02</a:t>
             </a:r>
           </a:p>
         </p:txBody>
@@ -3915,7 +4585,7 @@
           <p:cNvPr id="7" name="">
             <a:extLst xmlns:a="http://schemas.openxmlformats.org/drawingml/2006/main">
               <a:ext uri="{FF2B5EF4-FFF2-40B4-BE49-F238E27FC236}">
-                <a16:creationId xmlns:a16="http://schemas.microsoft.com/office/drawing/2014/main" id="{E21355EB-1E10-465A-BCAB-1310B95B39D0}"/>
+                <a16:creationId xmlns:a16="http://schemas.microsoft.com/office/drawing/2014/main" id="{75E524BD-60C0-4F27-AEE0-F883BC60A1DA}"/>
               </a:ext>
             </a:extLst>
           </p:cNvPr>
@@ -3926,8 +4596,8 @@
         </p:nvSpPr>
         <p:spPr>
           <a:xfrm xmlns:a="http://schemas.openxmlformats.org/drawingml/2006/main">
-            <a:off x="6000750" y="1390650"/>
-            <a:ext cx="2343150" cy="295275"/>
+            <a:off x="1609725" y="3228975"/>
+            <a:ext cx="6191250" cy="561975"/>
           </a:xfrm>
           <a:prstGeom xmlns:a="http://schemas.openxmlformats.org/drawingml/2006/main" prst="rect">
             <a:avLst/>
@@ -3944,25 +4614,25 @@
           <a:lstStyle xmlns:a="http://schemas.openxmlformats.org/drawingml/2006/main"/>
           <a:p xmlns:a="http://schemas.openxmlformats.org/drawingml/2006/main">
             <a:pPr algn="l">
-              <a:defRPr sz="1500" b="1">
-                <a:solidFill>
-                  <a:srgbClr val="6E6D68"/>
-                </a:solidFill>
-                <a:latin typeface="Inter"/>
-                <a:ea typeface="Inter"/>
-                <a:cs typeface="Inter"/>
-              </a:defRPr>
-            </a:pPr>
-            <a:r>
-              <a:rPr sz="1500" b="1">
-                <a:solidFill>
-                  <a:srgbClr val="6E6D68"/>
-                </a:solidFill>
-                <a:latin typeface="Inter"/>
-                <a:ea typeface="Inter"/>
-                <a:cs typeface="Inter"/>
-              </a:rPr>
-              <a:t>LB1-Mockup</a:t>
+              <a:defRPr sz="2850" b="0">
+                <a:solidFill>
+                  <a:srgbClr val="1F5A45"/>
+                </a:solidFill>
+                <a:latin typeface="Newsreader"/>
+                <a:ea typeface="Newsreader"/>
+                <a:cs typeface="Newsreader"/>
+              </a:defRPr>
+            </a:pPr>
+            <a:r>
+              <a:rPr sz="2850" b="0">
+                <a:solidFill>
+                  <a:srgbClr val="1F5A45"/>
+                </a:solidFill>
+                <a:latin typeface="Newsreader"/>
+                <a:ea typeface="Newsreader"/>
+                <a:cs typeface="Newsreader"/>
+              </a:rPr>
+              <a:t>Entscheiden</a:t>
             </a:r>
           </a:p>
         </p:txBody>
@@ -3972,7 +4642,7 @@
           <p:cNvPr id="8" name="">
             <a:extLst xmlns:a="http://schemas.openxmlformats.org/drawingml/2006/main">
               <a:ext uri="{FF2B5EF4-FFF2-40B4-BE49-F238E27FC236}">
-                <a16:creationId xmlns:a16="http://schemas.microsoft.com/office/drawing/2014/main" id="{532ED6AD-38E9-4CC5-80FC-305A2A6B8842}"/>
+                <a16:creationId xmlns:a16="http://schemas.microsoft.com/office/drawing/2014/main" id="{A598BD24-89D5-477D-A39A-BBEF9138498C}"/>
               </a:ext>
             </a:extLst>
           </p:cNvPr>
@@ -3983,8 +4653,8 @@
         </p:nvSpPr>
         <p:spPr>
           <a:xfrm xmlns:a="http://schemas.openxmlformats.org/drawingml/2006/main">
-            <a:off x="8924925" y="1390650"/>
-            <a:ext cx="2343150" cy="295275"/>
+            <a:off x="1628775" y="3829050"/>
+            <a:ext cx="6238875" cy="457200"/>
           </a:xfrm>
           <a:prstGeom xmlns:a="http://schemas.openxmlformats.org/drawingml/2006/main" prst="rect">
             <a:avLst/>
@@ -4001,108 +4671,35 @@
           <a:lstStyle xmlns:a="http://schemas.openxmlformats.org/drawingml/2006/main"/>
           <a:p xmlns:a="http://schemas.openxmlformats.org/drawingml/2006/main">
             <a:pPr algn="l">
-              <a:defRPr sz="1500" b="1">
-                <a:solidFill>
-                  <a:srgbClr val="1F5A45"/>
-                </a:solidFill>
-                <a:latin typeface="Inter"/>
-                <a:ea typeface="Inter"/>
-                <a:cs typeface="Inter"/>
-              </a:defRPr>
-            </a:pPr>
-            <a:r>
-              <a:rPr sz="1500" b="1">
-                <a:solidFill>
-                  <a:srgbClr val="1F5A45"/>
-                </a:solidFill>
-                <a:latin typeface="Inter"/>
-                <a:ea typeface="Inter"/>
-                <a:cs typeface="Inter"/>
-              </a:rPr>
-              <a:t>App heute</a:t>
-            </a:r>
-          </a:p>
-        </p:txBody>
-      </p:sp>
-      <p:pic>
-        <p:nvPicPr>
-          <p:cNvPr id="19" name=""/>
-          <p:cNvPicPr>
-            <a:picLocks xmlns:a="http://schemas.openxmlformats.org/drawingml/2006/main" noChangeAspect="1"/>
-          </p:cNvPicPr>
-          <p:nvPr/>
-        </p:nvPicPr>
-        <p:blipFill>
-          <a:blip xmlns:r="http://schemas.openxmlformats.org/officeDocument/2006/relationships" xmlns:a="http://schemas.openxmlformats.org/drawingml/2006/main" r:embed="Rf9705ec11896454b"/>
-          <a:stretch xmlns:a="http://schemas.openxmlformats.org/drawingml/2006/main"/>
-        </p:blipFill>
-        <p:spPr>
-          <a:xfrm xmlns:a="http://schemas.openxmlformats.org/drawingml/2006/main">
-            <a:off x="6098460" y="1809750"/>
-            <a:ext cx="2033430" cy="4400550"/>
-          </a:xfrm>
-          <a:prstGeom xmlns:a="http://schemas.openxmlformats.org/drawingml/2006/main" prst="rect">
-            <a:avLst/>
-          </a:prstGeom>
-        </p:spPr>
-      </p:pic>
-      <p:pic>
-        <p:nvPicPr>
-          <p:cNvPr id="20" name=""/>
-          <p:cNvPicPr>
-            <a:picLocks xmlns:a="http://schemas.openxmlformats.org/drawingml/2006/main" noChangeAspect="1"/>
-          </p:cNvPicPr>
-          <p:nvPr/>
-        </p:nvPicPr>
-        <p:blipFill>
-          <a:blip xmlns:r="http://schemas.openxmlformats.org/officeDocument/2006/relationships" xmlns:a="http://schemas.openxmlformats.org/drawingml/2006/main" r:embed="R4a626e0c26324f0e"/>
-          <a:stretch xmlns:a="http://schemas.openxmlformats.org/drawingml/2006/main"/>
-        </p:blipFill>
-        <p:spPr>
-          <a:xfrm xmlns:a="http://schemas.openxmlformats.org/drawingml/2006/main">
-            <a:off x="9027324" y="1809750"/>
-            <a:ext cx="2024052" cy="4400550"/>
-          </a:xfrm>
-          <a:prstGeom xmlns:a="http://schemas.openxmlformats.org/drawingml/2006/main" prst="rect">
-            <a:avLst/>
-          </a:prstGeom>
-        </p:spPr>
-      </p:pic>
-    </p:spTree>
-    <p:extLst>
-      <p:ext uri="{BB962C8B-B14F-4D97-AF65-F5344CB8AC3E}">
-        <p14:creationId xmlns:p14="http://schemas.microsoft.com/office/powerpoint/2010/main" val="688257642"/>
-      </p:ext>
-    </p:extLst>
-  </p:cSld>
-</p:sld>
-</file>
-
-<file path=ppt/slides/slide4.xml><?xml version="1.0" encoding="utf-8"?>
-<p:sld xmlns:p="http://schemas.openxmlformats.org/presentationml/2006/main">
-  <p:cSld>
-    <p:bg>
-      <p:bgPr>
-        <a:solidFill xmlns:a="http://schemas.openxmlformats.org/drawingml/2006/main">
-          <a:srgbClr val="1F5A45"/>
-        </a:solidFill>
-      </p:bgPr>
-    </p:bg>
-    <p:spTree>
-      <p:nvGrpSpPr>
-        <p:cNvPr id="1" name=""/>
-        <p:cNvGrpSpPr/>
-        <p:nvPr/>
-      </p:nvGrpSpPr>
-      <p:grpSpPr>
-        <a:xfrm xmlns:a="http://schemas.openxmlformats.org/drawingml/2006/main"/>
-      </p:grpSpPr>
-      <p:sp>
-        <p:nvSpPr>
-          <p:cNvPr id="13" name="">
+              <a:defRPr sz="1875" b="0">
+                <a:solidFill>
+                  <a:srgbClr val="15171A"/>
+                </a:solidFill>
+                <a:latin typeface="Inter"/>
+                <a:ea typeface="Inter"/>
+                <a:cs typeface="Inter"/>
+              </a:defRPr>
+            </a:pPr>
+            <a:r>
+              <a:rPr sz="1875" b="0">
+                <a:solidFill>
+                  <a:srgbClr val="15171A"/>
+                </a:solidFill>
+                <a:latin typeface="Inter"/>
+                <a:ea typeface="Inter"/>
+                <a:cs typeface="Inter"/>
+              </a:rPr>
+              <a:t>Das verfügbare Budget aktualisiert sich</a:t>
+            </a:r>
+          </a:p>
+        </p:txBody>
+      </p:sp>
+      <p:sp>
+        <p:nvSpPr>
+          <p:cNvPr id="9" name="">
             <a:extLst xmlns:a="http://schemas.openxmlformats.org/drawingml/2006/main">
               <a:ext uri="{FF2B5EF4-FFF2-40B4-BE49-F238E27FC236}">
-                <a16:creationId xmlns:a16="http://schemas.microsoft.com/office/drawing/2014/main" id="{61402DC1-627B-4DA9-8316-1CDE4F4B0900}"/>
+                <a16:creationId xmlns:a16="http://schemas.microsoft.com/office/drawing/2014/main" id="{2FA564D6-5725-4EFD-82FC-4A7ABECEC1B2}"/>
               </a:ext>
             </a:extLst>
           </p:cNvPr>
@@ -4113,8 +4710,8 @@
         </p:nvSpPr>
         <p:spPr>
           <a:xfrm xmlns:a="http://schemas.openxmlformats.org/drawingml/2006/main">
-            <a:off x="11334750" y="6296025"/>
-            <a:ext cx="333375" cy="219075"/>
+            <a:off x="638175" y="4610100"/>
+            <a:ext cx="857250" cy="666750"/>
           </a:xfrm>
           <a:prstGeom xmlns:a="http://schemas.openxmlformats.org/drawingml/2006/main" prst="rect">
             <a:avLst/>
@@ -4130,36 +4727,36 @@
           </a:bodyPr>
           <a:lstStyle xmlns:a="http://schemas.openxmlformats.org/drawingml/2006/main"/>
           <a:p xmlns:a="http://schemas.openxmlformats.org/drawingml/2006/main">
-            <a:pPr algn="r">
-              <a:defRPr sz="1275" b="0">
-                <a:solidFill>
-                  <a:srgbClr val="DCEBE2"/>
-                </a:solidFill>
-                <a:latin typeface="Inter"/>
-                <a:ea typeface="Inter"/>
-                <a:cs typeface="Inter"/>
-              </a:defRPr>
-            </a:pPr>
-            <a:r>
-              <a:rPr sz="1275" b="0">
-                <a:solidFill>
-                  <a:srgbClr val="DCEBE2"/>
-                </a:solidFill>
-                <a:latin typeface="Inter"/>
-                <a:ea typeface="Inter"/>
-                <a:cs typeface="Inter"/>
-              </a:rPr>
-              <a:t>4</a:t>
-            </a:r>
-          </a:p>
-        </p:txBody>
-      </p:sp>
-      <p:sp>
-        <p:nvSpPr>
-          <p:cNvPr id="2" name="">
+            <a:pPr algn="l">
+              <a:defRPr sz="3375" b="0">
+                <a:solidFill>
+                  <a:srgbClr val="1F5A45"/>
+                </a:solidFill>
+                <a:latin typeface="Newsreader"/>
+                <a:ea typeface="Newsreader"/>
+                <a:cs typeface="Newsreader"/>
+              </a:defRPr>
+            </a:pPr>
+            <a:r>
+              <a:rPr sz="3375" b="0">
+                <a:solidFill>
+                  <a:srgbClr val="1F5A45"/>
+                </a:solidFill>
+                <a:latin typeface="Newsreader"/>
+                <a:ea typeface="Newsreader"/>
+                <a:cs typeface="Newsreader"/>
+              </a:rPr>
+              <a:t>03</a:t>
+            </a:r>
+          </a:p>
+        </p:txBody>
+      </p:sp>
+      <p:sp>
+        <p:nvSpPr>
+          <p:cNvPr id="10" name="">
             <a:extLst xmlns:a="http://schemas.openxmlformats.org/drawingml/2006/main">
               <a:ext uri="{FF2B5EF4-FFF2-40B4-BE49-F238E27FC236}">
-                <a16:creationId xmlns:a16="http://schemas.microsoft.com/office/drawing/2014/main" id="{51670070-7D4F-4643-907F-53A285AB415C}"/>
+                <a16:creationId xmlns:a16="http://schemas.microsoft.com/office/drawing/2014/main" id="{65665EEB-CD49-4405-9331-9CBF852B70B8}"/>
               </a:ext>
             </a:extLst>
           </p:cNvPr>
@@ -4170,8 +4767,8 @@
         </p:nvSpPr>
         <p:spPr>
           <a:xfrm xmlns:a="http://schemas.openxmlformats.org/drawingml/2006/main">
-            <a:off x="609600" y="476250"/>
-            <a:ext cx="10934700" cy="742950"/>
+            <a:off x="1609725" y="4610100"/>
+            <a:ext cx="6191250" cy="561975"/>
           </a:xfrm>
           <a:prstGeom xmlns:a="http://schemas.openxmlformats.org/drawingml/2006/main" prst="rect">
             <a:avLst/>
@@ -4188,9 +4785,9 @@
           <a:lstStyle xmlns:a="http://schemas.openxmlformats.org/drawingml/2006/main"/>
           <a:p xmlns:a="http://schemas.openxmlformats.org/drawingml/2006/main">
             <a:pPr algn="l">
-              <a:defRPr sz="3975" b="0">
-                <a:solidFill>
-                  <a:srgbClr val="F6F5F1"/>
+              <a:defRPr sz="2850" b="0">
+                <a:solidFill>
+                  <a:srgbClr val="1F5A45"/>
                 </a:solidFill>
                 <a:latin typeface="Newsreader"/>
                 <a:ea typeface="Newsreader"/>
@@ -4198,25 +4795,25 @@
               </a:defRPr>
             </a:pPr>
             <a:r>
-              <a:rPr sz="3975" b="0">
-                <a:solidFill>
-                  <a:srgbClr val="F6F5F1"/>
+              <a:rPr sz="2850" b="0">
+                <a:solidFill>
+                  <a:srgbClr val="1F5A45"/>
                 </a:solidFill>
                 <a:latin typeface="Newsreader"/>
                 <a:ea typeface="Newsreader"/>
                 <a:cs typeface="Newsreader"/>
               </a:rPr>
-              <a:t>Live-Demo</a:t>
-            </a:r>
-          </a:p>
-        </p:txBody>
-      </p:sp>
-      <p:sp>
-        <p:nvSpPr>
-          <p:cNvPr id="3" name="">
+              <a:t>Korrigieren</a:t>
+            </a:r>
+          </a:p>
+        </p:txBody>
+      </p:sp>
+      <p:sp>
+        <p:nvSpPr>
+          <p:cNvPr id="11" name="">
             <a:extLst xmlns:a="http://schemas.openxmlformats.org/drawingml/2006/main">
               <a:ext uri="{FF2B5EF4-FFF2-40B4-BE49-F238E27FC236}">
-                <a16:creationId xmlns:a16="http://schemas.microsoft.com/office/drawing/2014/main" id="{03B94287-C734-4244-8E7F-A1390CF7754D}"/>
+                <a16:creationId xmlns:a16="http://schemas.microsoft.com/office/drawing/2014/main" id="{356271E0-78E1-44A6-A4BD-655AD4784374}"/>
               </a:ext>
             </a:extLst>
           </p:cNvPr>
@@ -4227,8 +4824,8 @@
         </p:nvSpPr>
         <p:spPr>
           <a:xfrm xmlns:a="http://schemas.openxmlformats.org/drawingml/2006/main">
-            <a:off x="638175" y="1847850"/>
-            <a:ext cx="857250" cy="666750"/>
+            <a:off x="1628775" y="5210175"/>
+            <a:ext cx="6238875" cy="457200"/>
           </a:xfrm>
           <a:prstGeom xmlns:a="http://schemas.openxmlformats.org/drawingml/2006/main" prst="rect">
             <a:avLst/>
@@ -4245,123 +4842,9 @@
           <a:lstStyle xmlns:a="http://schemas.openxmlformats.org/drawingml/2006/main"/>
           <a:p xmlns:a="http://schemas.openxmlformats.org/drawingml/2006/main">
             <a:pPr algn="l">
-              <a:defRPr sz="3375" b="0">
-                <a:solidFill>
-                  <a:srgbClr val="DCEBE2"/>
-                </a:solidFill>
-                <a:latin typeface="Newsreader"/>
-                <a:ea typeface="Newsreader"/>
-                <a:cs typeface="Newsreader"/>
-              </a:defRPr>
-            </a:pPr>
-            <a:r>
-              <a:rPr sz="3375" b="0">
-                <a:solidFill>
-                  <a:srgbClr val="DCEBE2"/>
-                </a:solidFill>
-                <a:latin typeface="Newsreader"/>
-                <a:ea typeface="Newsreader"/>
-                <a:cs typeface="Newsreader"/>
-              </a:rPr>
-              <a:t>01</a:t>
-            </a:r>
-          </a:p>
-        </p:txBody>
-      </p:sp>
-      <p:sp>
-        <p:nvSpPr>
-          <p:cNvPr id="4" name="">
-            <a:extLst xmlns:a="http://schemas.openxmlformats.org/drawingml/2006/main">
-              <a:ext uri="{FF2B5EF4-FFF2-40B4-BE49-F238E27FC236}">
-                <a16:creationId xmlns:a16="http://schemas.microsoft.com/office/drawing/2014/main" id="{1AFFA326-9F41-45AD-918A-4A53316F36A9}"/>
-              </a:ext>
-            </a:extLst>
-          </p:cNvPr>
-          <p:cNvSpPr>
-            <a:spLocks xmlns:a="http://schemas.openxmlformats.org/drawingml/2006/main" noGrp="1"/>
-          </p:cNvSpPr>
-          <p:nvPr/>
-        </p:nvSpPr>
-        <p:spPr>
-          <a:xfrm xmlns:a="http://schemas.openxmlformats.org/drawingml/2006/main">
-            <a:off x="1609725" y="1847850"/>
-            <a:ext cx="6191250" cy="561975"/>
-          </a:xfrm>
-          <a:prstGeom xmlns:a="http://schemas.openxmlformats.org/drawingml/2006/main" prst="rect">
-            <a:avLst/>
-          </a:prstGeom>
-          <a:noFill xmlns:a="http://schemas.openxmlformats.org/drawingml/2006/main"/>
-          <a:ln xmlns:a="http://schemas.openxmlformats.org/drawingml/2006/main" w="0">
-            <a:noFill/>
-          </a:ln>
-        </p:spPr>
-        <p:txBody>
-          <a:bodyPr xmlns:a="http://schemas.openxmlformats.org/drawingml/2006/main" wrap="square" lIns="0" tIns="0" rIns="0" bIns="0" anchor="t">
-            <a:noAutofit/>
-          </a:bodyPr>
-          <a:lstStyle xmlns:a="http://schemas.openxmlformats.org/drawingml/2006/main"/>
-          <a:p xmlns:a="http://schemas.openxmlformats.org/drawingml/2006/main">
-            <a:pPr algn="l">
-              <a:defRPr sz="2850" b="0">
-                <a:solidFill>
-                  <a:srgbClr val="F6F5F1"/>
-                </a:solidFill>
-                <a:latin typeface="Newsreader"/>
-                <a:ea typeface="Newsreader"/>
-                <a:cs typeface="Newsreader"/>
-              </a:defRPr>
-            </a:pPr>
-            <a:r>
-              <a:rPr sz="2850" b="0">
-                <a:solidFill>
-                  <a:srgbClr val="F6F5F1"/>
-                </a:solidFill>
-                <a:latin typeface="Newsreader"/>
-                <a:ea typeface="Newsreader"/>
-                <a:cs typeface="Newsreader"/>
-              </a:rPr>
-              <a:t>Erfassen</a:t>
-            </a:r>
-          </a:p>
-        </p:txBody>
-      </p:sp>
-      <p:sp>
-        <p:nvSpPr>
-          <p:cNvPr id="5" name="">
-            <a:extLst xmlns:a="http://schemas.openxmlformats.org/drawingml/2006/main">
-              <a:ext uri="{FF2B5EF4-FFF2-40B4-BE49-F238E27FC236}">
-                <a16:creationId xmlns:a16="http://schemas.microsoft.com/office/drawing/2014/main" id="{967084AE-FD5A-4A0D-B02C-D099C49083F4}"/>
-              </a:ext>
-            </a:extLst>
-          </p:cNvPr>
-          <p:cNvSpPr>
-            <a:spLocks xmlns:a="http://schemas.openxmlformats.org/drawingml/2006/main" noGrp="1"/>
-          </p:cNvSpPr>
-          <p:nvPr/>
-        </p:nvSpPr>
-        <p:spPr>
-          <a:xfrm xmlns:a="http://schemas.openxmlformats.org/drawingml/2006/main">
-            <a:off x="1628775" y="2447925"/>
-            <a:ext cx="6238875" cy="457200"/>
-          </a:xfrm>
-          <a:prstGeom xmlns:a="http://schemas.openxmlformats.org/drawingml/2006/main" prst="rect">
-            <a:avLst/>
-          </a:prstGeom>
-          <a:noFill xmlns:a="http://schemas.openxmlformats.org/drawingml/2006/main"/>
-          <a:ln xmlns:a="http://schemas.openxmlformats.org/drawingml/2006/main" w="0">
-            <a:noFill/>
-          </a:ln>
-        </p:spPr>
-        <p:txBody>
-          <a:bodyPr xmlns:a="http://schemas.openxmlformats.org/drawingml/2006/main" wrap="square" lIns="0" tIns="0" rIns="0" bIns="0" anchor="t">
-            <a:noAutofit/>
-          </a:bodyPr>
-          <a:lstStyle xmlns:a="http://schemas.openxmlformats.org/drawingml/2006/main"/>
-          <a:p xmlns:a="http://schemas.openxmlformats.org/drawingml/2006/main">
-            <a:pPr algn="l">
               <a:defRPr sz="1875" b="0">
                 <a:solidFill>
-                  <a:srgbClr val="DCEBE2"/>
+                  <a:srgbClr val="15171A"/>
                 </a:solidFill>
                 <a:latin typeface="Inter"/>
                 <a:ea typeface="Inter"/>
@@ -4371,355 +4854,13 @@
             <a:r>
               <a:rPr sz="1875" b="0">
                 <a:solidFill>
-                  <a:srgbClr val="DCEBE2"/>
-                </a:solidFill>
-                <a:latin typeface="Inter"/>
-                <a:ea typeface="Inter"/>
-                <a:cs typeface="Inter"/>
-              </a:rPr>
-              <a:t>CHF 14.80, Essen &amp; Trinken</a:t>
-            </a:r>
-          </a:p>
-        </p:txBody>
-      </p:sp>
-      <p:sp>
-        <p:nvSpPr>
-          <p:cNvPr id="6" name="">
-            <a:extLst xmlns:a="http://schemas.openxmlformats.org/drawingml/2006/main">
-              <a:ext uri="{FF2B5EF4-FFF2-40B4-BE49-F238E27FC236}">
-                <a16:creationId xmlns:a16="http://schemas.microsoft.com/office/drawing/2014/main" id="{1DB20EC5-7C51-4BD4-96DC-68F936D97E6E}"/>
-              </a:ext>
-            </a:extLst>
-          </p:cNvPr>
-          <p:cNvSpPr>
-            <a:spLocks xmlns:a="http://schemas.openxmlformats.org/drawingml/2006/main" noGrp="1"/>
-          </p:cNvSpPr>
-          <p:nvPr/>
-        </p:nvSpPr>
-        <p:spPr>
-          <a:xfrm xmlns:a="http://schemas.openxmlformats.org/drawingml/2006/main">
-            <a:off x="638175" y="3228975"/>
-            <a:ext cx="857250" cy="666750"/>
-          </a:xfrm>
-          <a:prstGeom xmlns:a="http://schemas.openxmlformats.org/drawingml/2006/main" prst="rect">
-            <a:avLst/>
-          </a:prstGeom>
-          <a:noFill xmlns:a="http://schemas.openxmlformats.org/drawingml/2006/main"/>
-          <a:ln xmlns:a="http://schemas.openxmlformats.org/drawingml/2006/main" w="0">
-            <a:noFill/>
-          </a:ln>
-        </p:spPr>
-        <p:txBody>
-          <a:bodyPr xmlns:a="http://schemas.openxmlformats.org/drawingml/2006/main" wrap="square" lIns="0" tIns="0" rIns="0" bIns="0" anchor="t">
-            <a:noAutofit/>
-          </a:bodyPr>
-          <a:lstStyle xmlns:a="http://schemas.openxmlformats.org/drawingml/2006/main"/>
-          <a:p xmlns:a="http://schemas.openxmlformats.org/drawingml/2006/main">
-            <a:pPr algn="l">
-              <a:defRPr sz="3375" b="0">
-                <a:solidFill>
-                  <a:srgbClr val="DCEBE2"/>
-                </a:solidFill>
-                <a:latin typeface="Newsreader"/>
-                <a:ea typeface="Newsreader"/>
-                <a:cs typeface="Newsreader"/>
-              </a:defRPr>
-            </a:pPr>
-            <a:r>
-              <a:rPr sz="3375" b="0">
-                <a:solidFill>
-                  <a:srgbClr val="DCEBE2"/>
-                </a:solidFill>
-                <a:latin typeface="Newsreader"/>
-                <a:ea typeface="Newsreader"/>
-                <a:cs typeface="Newsreader"/>
-              </a:rPr>
-              <a:t>02</a:t>
-            </a:r>
-          </a:p>
-        </p:txBody>
-      </p:sp>
-      <p:sp>
-        <p:nvSpPr>
-          <p:cNvPr id="7" name="">
-            <a:extLst xmlns:a="http://schemas.openxmlformats.org/drawingml/2006/main">
-              <a:ext uri="{FF2B5EF4-FFF2-40B4-BE49-F238E27FC236}">
-                <a16:creationId xmlns:a16="http://schemas.microsoft.com/office/drawing/2014/main" id="{9FAC46F8-41DB-4EA8-8CC0-06CD6870450E}"/>
-              </a:ext>
-            </a:extLst>
-          </p:cNvPr>
-          <p:cNvSpPr>
-            <a:spLocks xmlns:a="http://schemas.openxmlformats.org/drawingml/2006/main" noGrp="1"/>
-          </p:cNvSpPr>
-          <p:nvPr/>
-        </p:nvSpPr>
-        <p:spPr>
-          <a:xfrm xmlns:a="http://schemas.openxmlformats.org/drawingml/2006/main">
-            <a:off x="1609725" y="3228975"/>
-            <a:ext cx="6191250" cy="561975"/>
-          </a:xfrm>
-          <a:prstGeom xmlns:a="http://schemas.openxmlformats.org/drawingml/2006/main" prst="rect">
-            <a:avLst/>
-          </a:prstGeom>
-          <a:noFill xmlns:a="http://schemas.openxmlformats.org/drawingml/2006/main"/>
-          <a:ln xmlns:a="http://schemas.openxmlformats.org/drawingml/2006/main" w="0">
-            <a:noFill/>
-          </a:ln>
-        </p:spPr>
-        <p:txBody>
-          <a:bodyPr xmlns:a="http://schemas.openxmlformats.org/drawingml/2006/main" wrap="square" lIns="0" tIns="0" rIns="0" bIns="0" anchor="t">
-            <a:noAutofit/>
-          </a:bodyPr>
-          <a:lstStyle xmlns:a="http://schemas.openxmlformats.org/drawingml/2006/main"/>
-          <a:p xmlns:a="http://schemas.openxmlformats.org/drawingml/2006/main">
-            <a:pPr algn="l">
-              <a:defRPr sz="2850" b="0">
-                <a:solidFill>
-                  <a:srgbClr val="F6F5F1"/>
-                </a:solidFill>
-                <a:latin typeface="Newsreader"/>
-                <a:ea typeface="Newsreader"/>
-                <a:cs typeface="Newsreader"/>
-              </a:defRPr>
-            </a:pPr>
-            <a:r>
-              <a:rPr sz="2850" b="0">
-                <a:solidFill>
-                  <a:srgbClr val="F6F5F1"/>
-                </a:solidFill>
-                <a:latin typeface="Newsreader"/>
-                <a:ea typeface="Newsreader"/>
-                <a:cs typeface="Newsreader"/>
-              </a:rPr>
-              <a:t>Prüfen</a:t>
-            </a:r>
-          </a:p>
-        </p:txBody>
-      </p:sp>
-      <p:sp>
-        <p:nvSpPr>
-          <p:cNvPr id="8" name="">
-            <a:extLst xmlns:a="http://schemas.openxmlformats.org/drawingml/2006/main">
-              <a:ext uri="{FF2B5EF4-FFF2-40B4-BE49-F238E27FC236}">
-                <a16:creationId xmlns:a16="http://schemas.microsoft.com/office/drawing/2014/main" id="{9A5DE003-D6E6-4B14-A69A-332427F4412D}"/>
-              </a:ext>
-            </a:extLst>
-          </p:cNvPr>
-          <p:cNvSpPr>
-            <a:spLocks xmlns:a="http://schemas.openxmlformats.org/drawingml/2006/main" noGrp="1"/>
-          </p:cNvSpPr>
-          <p:nvPr/>
-        </p:nvSpPr>
-        <p:spPr>
-          <a:xfrm xmlns:a="http://schemas.openxmlformats.org/drawingml/2006/main">
-            <a:off x="1628775" y="3829050"/>
-            <a:ext cx="6238875" cy="457200"/>
-          </a:xfrm>
-          <a:prstGeom xmlns:a="http://schemas.openxmlformats.org/drawingml/2006/main" prst="rect">
-            <a:avLst/>
-          </a:prstGeom>
-          <a:noFill xmlns:a="http://schemas.openxmlformats.org/drawingml/2006/main"/>
-          <a:ln xmlns:a="http://schemas.openxmlformats.org/drawingml/2006/main" w="0">
-            <a:noFill/>
-          </a:ln>
-        </p:spPr>
-        <p:txBody>
-          <a:bodyPr xmlns:a="http://schemas.openxmlformats.org/drawingml/2006/main" wrap="square" lIns="0" tIns="0" rIns="0" bIns="0" anchor="t">
-            <a:noAutofit/>
-          </a:bodyPr>
-          <a:lstStyle xmlns:a="http://schemas.openxmlformats.org/drawingml/2006/main"/>
-          <a:p xmlns:a="http://schemas.openxmlformats.org/drawingml/2006/main">
-            <a:pPr algn="l">
-              <a:defRPr sz="1875" b="0">
-                <a:solidFill>
-                  <a:srgbClr val="DCEBE2"/>
-                </a:solidFill>
-                <a:latin typeface="Inter"/>
-                <a:ea typeface="Inter"/>
-                <a:cs typeface="Inter"/>
-              </a:defRPr>
-            </a:pPr>
-            <a:r>
-              <a:rPr sz="1875" b="0">
-                <a:solidFill>
-                  <a:srgbClr val="DCEBE2"/>
-                </a:solidFill>
-                <a:latin typeface="Inter"/>
-                <a:ea typeface="Inter"/>
-                <a:cs typeface="Inter"/>
-              </a:rPr>
-              <a:t>Budget und Verlauf aktualisieren sich</a:t>
-            </a:r>
-          </a:p>
-        </p:txBody>
-      </p:sp>
-      <p:sp>
-        <p:nvSpPr>
-          <p:cNvPr id="9" name="">
-            <a:extLst xmlns:a="http://schemas.openxmlformats.org/drawingml/2006/main">
-              <a:ext uri="{FF2B5EF4-FFF2-40B4-BE49-F238E27FC236}">
-                <a16:creationId xmlns:a16="http://schemas.microsoft.com/office/drawing/2014/main" id="{2F0E4CF4-B579-4A15-9E44-33B60F9EBAE2}"/>
-              </a:ext>
-            </a:extLst>
-          </p:cNvPr>
-          <p:cNvSpPr>
-            <a:spLocks xmlns:a="http://schemas.openxmlformats.org/drawingml/2006/main" noGrp="1"/>
-          </p:cNvSpPr>
-          <p:nvPr/>
-        </p:nvSpPr>
-        <p:spPr>
-          <a:xfrm xmlns:a="http://schemas.openxmlformats.org/drawingml/2006/main">
-            <a:off x="638175" y="4610100"/>
-            <a:ext cx="857250" cy="666750"/>
-          </a:xfrm>
-          <a:prstGeom xmlns:a="http://schemas.openxmlformats.org/drawingml/2006/main" prst="rect">
-            <a:avLst/>
-          </a:prstGeom>
-          <a:noFill xmlns:a="http://schemas.openxmlformats.org/drawingml/2006/main"/>
-          <a:ln xmlns:a="http://schemas.openxmlformats.org/drawingml/2006/main" w="0">
-            <a:noFill/>
-          </a:ln>
-        </p:spPr>
-        <p:txBody>
-          <a:bodyPr xmlns:a="http://schemas.openxmlformats.org/drawingml/2006/main" wrap="square" lIns="0" tIns="0" rIns="0" bIns="0" anchor="t">
-            <a:noAutofit/>
-          </a:bodyPr>
-          <a:lstStyle xmlns:a="http://schemas.openxmlformats.org/drawingml/2006/main"/>
-          <a:p xmlns:a="http://schemas.openxmlformats.org/drawingml/2006/main">
-            <a:pPr algn="l">
-              <a:defRPr sz="3375" b="0">
-                <a:solidFill>
-                  <a:srgbClr val="DCEBE2"/>
-                </a:solidFill>
-                <a:latin typeface="Newsreader"/>
-                <a:ea typeface="Newsreader"/>
-                <a:cs typeface="Newsreader"/>
-              </a:defRPr>
-            </a:pPr>
-            <a:r>
-              <a:rPr sz="3375" b="0">
-                <a:solidFill>
-                  <a:srgbClr val="DCEBE2"/>
-                </a:solidFill>
-                <a:latin typeface="Newsreader"/>
-                <a:ea typeface="Newsreader"/>
-                <a:cs typeface="Newsreader"/>
-              </a:rPr>
-              <a:t>03</a:t>
-            </a:r>
-          </a:p>
-        </p:txBody>
-      </p:sp>
-      <p:sp>
-        <p:nvSpPr>
-          <p:cNvPr id="10" name="">
-            <a:extLst xmlns:a="http://schemas.openxmlformats.org/drawingml/2006/main">
-              <a:ext uri="{FF2B5EF4-FFF2-40B4-BE49-F238E27FC236}">
-                <a16:creationId xmlns:a16="http://schemas.microsoft.com/office/drawing/2014/main" id="{0C14AAAE-2565-4098-888F-5B35B0940823}"/>
-              </a:ext>
-            </a:extLst>
-          </p:cNvPr>
-          <p:cNvSpPr>
-            <a:spLocks xmlns:a="http://schemas.openxmlformats.org/drawingml/2006/main" noGrp="1"/>
-          </p:cNvSpPr>
-          <p:nvPr/>
-        </p:nvSpPr>
-        <p:spPr>
-          <a:xfrm xmlns:a="http://schemas.openxmlformats.org/drawingml/2006/main">
-            <a:off x="1609725" y="4610100"/>
-            <a:ext cx="6191250" cy="561975"/>
-          </a:xfrm>
-          <a:prstGeom xmlns:a="http://schemas.openxmlformats.org/drawingml/2006/main" prst="rect">
-            <a:avLst/>
-          </a:prstGeom>
-          <a:noFill xmlns:a="http://schemas.openxmlformats.org/drawingml/2006/main"/>
-          <a:ln xmlns:a="http://schemas.openxmlformats.org/drawingml/2006/main" w="0">
-            <a:noFill/>
-          </a:ln>
-        </p:spPr>
-        <p:txBody>
-          <a:bodyPr xmlns:a="http://schemas.openxmlformats.org/drawingml/2006/main" wrap="square" lIns="0" tIns="0" rIns="0" bIns="0" anchor="t">
-            <a:noAutofit/>
-          </a:bodyPr>
-          <a:lstStyle xmlns:a="http://schemas.openxmlformats.org/drawingml/2006/main"/>
-          <a:p xmlns:a="http://schemas.openxmlformats.org/drawingml/2006/main">
-            <a:pPr algn="l">
-              <a:defRPr sz="2850" b="0">
-                <a:solidFill>
-                  <a:srgbClr val="F6F5F1"/>
-                </a:solidFill>
-                <a:latin typeface="Newsreader"/>
-                <a:ea typeface="Newsreader"/>
-                <a:cs typeface="Newsreader"/>
-              </a:defRPr>
-            </a:pPr>
-            <a:r>
-              <a:rPr sz="2850" b="0">
-                <a:solidFill>
-                  <a:srgbClr val="F6F5F1"/>
-                </a:solidFill>
-                <a:latin typeface="Newsreader"/>
-                <a:ea typeface="Newsreader"/>
-                <a:cs typeface="Newsreader"/>
-              </a:rPr>
-              <a:t>Korrigieren</a:t>
-            </a:r>
-          </a:p>
-        </p:txBody>
-      </p:sp>
-      <p:sp>
-        <p:nvSpPr>
-          <p:cNvPr id="11" name="">
-            <a:extLst xmlns:a="http://schemas.openxmlformats.org/drawingml/2006/main">
-              <a:ext uri="{FF2B5EF4-FFF2-40B4-BE49-F238E27FC236}">
-                <a16:creationId xmlns:a16="http://schemas.microsoft.com/office/drawing/2014/main" id="{AF855224-CB03-48F1-9F24-51AC3ACC1182}"/>
-              </a:ext>
-            </a:extLst>
-          </p:cNvPr>
-          <p:cNvSpPr>
-            <a:spLocks xmlns:a="http://schemas.openxmlformats.org/drawingml/2006/main" noGrp="1"/>
-          </p:cNvSpPr>
-          <p:nvPr/>
-        </p:nvSpPr>
-        <p:spPr>
-          <a:xfrm xmlns:a="http://schemas.openxmlformats.org/drawingml/2006/main">
-            <a:off x="1628775" y="5210175"/>
-            <a:ext cx="6238875" cy="457200"/>
-          </a:xfrm>
-          <a:prstGeom xmlns:a="http://schemas.openxmlformats.org/drawingml/2006/main" prst="rect">
-            <a:avLst/>
-          </a:prstGeom>
-          <a:noFill xmlns:a="http://schemas.openxmlformats.org/drawingml/2006/main"/>
-          <a:ln xmlns:a="http://schemas.openxmlformats.org/drawingml/2006/main" w="0">
-            <a:noFill/>
-          </a:ln>
-        </p:spPr>
-        <p:txBody>
-          <a:bodyPr xmlns:a="http://schemas.openxmlformats.org/drawingml/2006/main" wrap="square" lIns="0" tIns="0" rIns="0" bIns="0" anchor="t">
-            <a:noAutofit/>
-          </a:bodyPr>
-          <a:lstStyle xmlns:a="http://schemas.openxmlformats.org/drawingml/2006/main"/>
-          <a:p xmlns:a="http://schemas.openxmlformats.org/drawingml/2006/main">
-            <a:pPr algn="l">
-              <a:defRPr sz="1875" b="0">
-                <a:solidFill>
-                  <a:srgbClr val="DCEBE2"/>
-                </a:solidFill>
-                <a:latin typeface="Inter"/>
-                <a:ea typeface="Inter"/>
-                <a:cs typeface="Inter"/>
-              </a:defRPr>
-            </a:pPr>
-            <a:r>
-              <a:rPr sz="1875" b="0">
-                <a:solidFill>
-                  <a:srgbClr val="DCEBE2"/>
-                </a:solidFill>
-                <a:latin typeface="Inter"/>
-                <a:ea typeface="Inter"/>
-                <a:cs typeface="Inter"/>
-              </a:rPr>
-              <a:t>Bearbeiten, löschen und rückgängig</a:t>
+                  <a:srgbClr val="15171A"/>
+                </a:solidFill>
+                <a:latin typeface="Inter"/>
+                <a:ea typeface="Inter"/>
+                <a:cs typeface="Inter"/>
+              </a:rPr>
+              <a:t>Ändern und eine Löschung zurückholen</a:t>
             </a:r>
           </a:p>
         </p:txBody>
@@ -4733,7 +4874,7 @@
           <p:nvPr/>
         </p:nvPicPr>
         <p:blipFill>
-          <a:blip xmlns:r="http://schemas.openxmlformats.org/officeDocument/2006/relationships" xmlns:a="http://schemas.openxmlformats.org/drawingml/2006/main" r:embed="R6e959dc4f8304831"/>
+          <a:blip xmlns:r="http://schemas.openxmlformats.org/officeDocument/2006/relationships" xmlns:a="http://schemas.openxmlformats.org/drawingml/2006/main" r:embed="R5852119e8f974801"/>
           <a:stretch xmlns:a="http://schemas.openxmlformats.org/drawingml/2006/main"/>
         </p:blipFill>
         <p:spPr>
@@ -4749,7 +4890,7 @@
     </p:spTree>
     <p:extLst>
       <p:ext uri="{BB962C8B-B14F-4D97-AF65-F5344CB8AC3E}">
-        <p14:creationId xmlns:p14="http://schemas.microsoft.com/office/powerpoint/2010/main" val="443689025"/>
+        <p14:creationId xmlns:p14="http://schemas.microsoft.com/office/powerpoint/2010/main" val="107173139"/>
       </p:ext>
     </p:extLst>
   </p:cSld>
@@ -4777,10 +4918,10 @@
       </p:grpSpPr>
       <p:sp>
         <p:nvSpPr>
-          <p:cNvPr id="8" name="">
+          <p:cNvPr id="9" name="">
             <a:extLst xmlns:a="http://schemas.openxmlformats.org/drawingml/2006/main">
               <a:ext uri="{FF2B5EF4-FFF2-40B4-BE49-F238E27FC236}">
-                <a16:creationId xmlns:a16="http://schemas.microsoft.com/office/drawing/2014/main" id="{DFA63C0C-960B-4057-B7EA-8034A1DFF560}"/>
+                <a16:creationId xmlns:a16="http://schemas.microsoft.com/office/drawing/2014/main" id="{D773C7CB-28A9-4B06-84DD-EF528635B5DC}"/>
               </a:ext>
             </a:extLst>
           </p:cNvPr>
@@ -4837,7 +4978,7 @@
           <p:cNvPr id="2" name="">
             <a:extLst xmlns:a="http://schemas.openxmlformats.org/drawingml/2006/main">
               <a:ext uri="{FF2B5EF4-FFF2-40B4-BE49-F238E27FC236}">
-                <a16:creationId xmlns:a16="http://schemas.microsoft.com/office/drawing/2014/main" id="{B9B9030D-C564-4492-AF5A-8B0CD7CF8205}"/>
+                <a16:creationId xmlns:a16="http://schemas.microsoft.com/office/drawing/2014/main" id="{87E68AD8-BD60-45CC-A263-048DCF748BC3}"/>
               </a:ext>
             </a:extLst>
           </p:cNvPr>
@@ -4884,27 +5025,27 @@
                 <a:ea typeface="Newsreader"/>
                 <a:cs typeface="Newsreader"/>
               </a:rPr>
-              <a:t>Biometrische App-Sperre</a:t>
+              <a:t>Deine Ausgaben bleiben bei dir</a:t>
             </a:r>
           </a:p>
         </p:txBody>
       </p:sp>
       <p:pic>
         <p:nvPicPr>
-          <p:cNvPr id="10" name=""/>
+          <p:cNvPr id="11" name=""/>
           <p:cNvPicPr>
             <a:picLocks xmlns:a="http://schemas.openxmlformats.org/drawingml/2006/main" noChangeAspect="1"/>
           </p:cNvPicPr>
           <p:nvPr/>
         </p:nvPicPr>
         <p:blipFill>
-          <a:blip xmlns:r="http://schemas.openxmlformats.org/officeDocument/2006/relationships" xmlns:a="http://schemas.openxmlformats.org/drawingml/2006/main" r:embed="R06270efb88894c9d"/>
+          <a:blip xmlns:r="http://schemas.openxmlformats.org/officeDocument/2006/relationships" xmlns:a="http://schemas.openxmlformats.org/drawingml/2006/main" r:embed="R7d329a19980543ea"/>
           <a:stretch xmlns:a="http://schemas.openxmlformats.org/drawingml/2006/main"/>
         </p:blipFill>
         <p:spPr>
           <a:xfrm xmlns:a="http://schemas.openxmlformats.org/drawingml/2006/main">
-            <a:off x="928121" y="1600200"/>
-            <a:ext cx="2010908" cy="4371975"/>
+            <a:off x="882120" y="1581150"/>
+            <a:ext cx="2102911" cy="4572000"/>
           </a:xfrm>
           <a:prstGeom xmlns:a="http://schemas.openxmlformats.org/drawingml/2006/main" prst="rect">
             <a:avLst/>
@@ -4916,7 +5057,7 @@
           <p:cNvPr id="4" name="">
             <a:extLst xmlns:a="http://schemas.openxmlformats.org/drawingml/2006/main">
               <a:ext uri="{FF2B5EF4-FFF2-40B4-BE49-F238E27FC236}">
-                <a16:creationId xmlns:a16="http://schemas.microsoft.com/office/drawing/2014/main" id="{73AD83F6-8A2D-4F11-95D1-8EE9C9D05287}"/>
+                <a16:creationId xmlns:a16="http://schemas.microsoft.com/office/drawing/2014/main" id="{B77F73EB-064E-4052-9BDF-602413D7278C}"/>
               </a:ext>
             </a:extLst>
           </p:cNvPr>
@@ -4927,8 +5068,8 @@
         </p:nvSpPr>
         <p:spPr>
           <a:xfrm xmlns:a="http://schemas.openxmlformats.org/drawingml/2006/main">
-            <a:off x="4048125" y="1762125"/>
-            <a:ext cx="7181850" cy="647700"/>
+            <a:off x="4048125" y="1657350"/>
+            <a:ext cx="7143750" cy="552450"/>
           </a:xfrm>
           <a:prstGeom xmlns:a="http://schemas.openxmlformats.org/drawingml/2006/main" prst="rect">
             <a:avLst/>
@@ -4963,7 +5104,7 @@
                 <a:ea typeface="Newsreader"/>
                 <a:cs typeface="Newsreader"/>
               </a:rPr>
-              <a:t>Das Gerät prüft die Person</a:t>
+              <a:t>Lokal gespeichert</a:t>
             </a:r>
           </a:p>
         </p:txBody>
@@ -4973,7 +5114,7 @@
           <p:cNvPr id="5" name="">
             <a:extLst xmlns:a="http://schemas.openxmlformats.org/drawingml/2006/main">
               <a:ext uri="{FF2B5EF4-FFF2-40B4-BE49-F238E27FC236}">
-                <a16:creationId xmlns:a16="http://schemas.microsoft.com/office/drawing/2014/main" id="{2B4A0CEB-A1F2-46B6-A0A8-AC993FF54F4A}"/>
+                <a16:creationId xmlns:a16="http://schemas.microsoft.com/office/drawing/2014/main" id="{7F10ED19-21D6-4CDF-8E4B-FBE04E08CFDF}"/>
               </a:ext>
             </a:extLst>
           </p:cNvPr>
@@ -4984,8 +5125,8 @@
         </p:nvSpPr>
         <p:spPr>
           <a:xfrm xmlns:a="http://schemas.openxmlformats.org/drawingml/2006/main">
-            <a:off x="4095750" y="2790825"/>
-            <a:ext cx="7191375" cy="1714500"/>
+            <a:off x="4095750" y="2371725"/>
+            <a:ext cx="7191375" cy="914400"/>
           </a:xfrm>
           <a:prstGeom xmlns:a="http://schemas.openxmlformats.org/drawingml/2006/main" prst="rect">
             <a:avLst/>
@@ -5002,7 +5143,7 @@
           <a:lstStyle xmlns:a="http://schemas.openxmlformats.org/drawingml/2006/main"/>
           <a:p xmlns:a="http://schemas.openxmlformats.org/drawingml/2006/main">
             <a:pPr algn="l">
-              <a:defRPr sz="2250" b="0">
+              <a:defRPr sz="2175" b="0">
                 <a:solidFill>
                   <a:srgbClr val="15171A"/>
                 </a:solidFill>
@@ -5012,7 +5153,7 @@
               </a:defRPr>
             </a:pPr>
             <a:r>
-              <a:rPr sz="2250" b="0">
+              <a:rPr sz="2175" b="0">
                 <a:solidFill>
                   <a:srgbClr val="15171A"/>
                 </a:solidFill>
@@ -5020,12 +5161,12 @@
                 <a:ea typeface="Inter"/>
                 <a:cs typeface="Inter"/>
               </a:rPr>
-              <a:t>Spendly fragt das Betriebssystem an.</a:t>
+              <a:t>Kein Benutzerkonto.</a:t>
             </a:r>
           </a:p>
           <a:p xmlns:a="http://schemas.openxmlformats.org/drawingml/2006/main">
             <a:pPr algn="l">
-              <a:defRPr sz="2250" b="0">
+              <a:defRPr sz="2175" b="0">
                 <a:solidFill>
                   <a:srgbClr val="15171A"/>
                 </a:solidFill>
@@ -5035,7 +5176,7 @@
               </a:defRPr>
             </a:pPr>
             <a:r>
-              <a:rPr sz="2250" b="0">
+              <a:rPr sz="2175" b="0">
                 <a:solidFill>
                   <a:srgbClr val="15171A"/>
                 </a:solidFill>
@@ -5043,30 +5184,7 @@
                 <a:ea typeface="Inter"/>
                 <a:cs typeface="Inter"/>
               </a:rPr>
-              <a:t>Face ID oder Fingerabdruck prüft den Zugang.</a:t>
-            </a:r>
-          </a:p>
-          <a:p xmlns:a="http://schemas.openxmlformats.org/drawingml/2006/main">
-            <a:pPr algn="l">
-              <a:defRPr sz="2250" b="0">
-                <a:solidFill>
-                  <a:srgbClr val="15171A"/>
-                </a:solidFill>
-                <a:latin typeface="Inter"/>
-                <a:ea typeface="Inter"/>
-                <a:cs typeface="Inter"/>
-              </a:defRPr>
-            </a:pPr>
-            <a:r>
-              <a:rPr sz="2250" b="0">
-                <a:solidFill>
-                  <a:srgbClr val="15171A"/>
-                </a:solidFill>
-                <a:latin typeface="Inter"/>
-                <a:ea typeface="Inter"/>
-                <a:cs typeface="Inter"/>
-              </a:rPr>
-              <a:t>Die App erhält das Ergebnis.</a:t>
+              <a:t>Kein Server für deine Ausgaben.</a:t>
             </a:r>
           </a:p>
         </p:txBody>
@@ -5076,7 +5194,7 @@
           <p:cNvPr id="6" name="">
             <a:extLst xmlns:a="http://schemas.openxmlformats.org/drawingml/2006/main">
               <a:ext uri="{FF2B5EF4-FFF2-40B4-BE49-F238E27FC236}">
-                <a16:creationId xmlns:a16="http://schemas.microsoft.com/office/drawing/2014/main" id="{00C9839F-1850-428C-A126-433F0233B337}"/>
+                <a16:creationId xmlns:a16="http://schemas.microsoft.com/office/drawing/2014/main" id="{42441686-4C47-4854-AAAA-82C9CBCAD9A8}"/>
               </a:ext>
             </a:extLst>
           </p:cNvPr>
@@ -5087,8 +5205,8 @@
         </p:nvSpPr>
         <p:spPr>
           <a:xfrm xmlns:a="http://schemas.openxmlformats.org/drawingml/2006/main">
-            <a:off x="4095750" y="4857750"/>
-            <a:ext cx="7191375" cy="438150"/>
+            <a:off x="4048125" y="3819525"/>
+            <a:ext cx="7191375" cy="552450"/>
           </a:xfrm>
           <a:prstGeom xmlns:a="http://schemas.openxmlformats.org/drawingml/2006/main" prst="rect">
             <a:avLst/>
@@ -5105,25 +5223,25 @@
           <a:lstStyle xmlns:a="http://schemas.openxmlformats.org/drawingml/2006/main"/>
           <a:p xmlns:a="http://schemas.openxmlformats.org/drawingml/2006/main">
             <a:pPr algn="l">
-              <a:defRPr sz="2100" b="0">
+              <a:defRPr sz="2775" b="0">
                 <a:solidFill>
                   <a:srgbClr val="1F5A45"/>
                 </a:solidFill>
-                <a:latin typeface="Inter"/>
-                <a:ea typeface="Inter"/>
-                <a:cs typeface="Inter"/>
-              </a:defRPr>
-            </a:pPr>
-            <a:r>
-              <a:rPr sz="2100" b="0">
+                <a:latin typeface="Newsreader"/>
+                <a:ea typeface="Newsreader"/>
+                <a:cs typeface="Newsreader"/>
+              </a:defRPr>
+            </a:pPr>
+            <a:r>
+              <a:rPr sz="2775" b="0">
                 <a:solidFill>
                   <a:srgbClr val="1F5A45"/>
                 </a:solidFill>
-                <a:latin typeface="Inter"/>
-                <a:ea typeface="Inter"/>
-                <a:cs typeface="Inter"/>
-              </a:rPr>
-              <a:t>Alternativ: eigener 6-stelliger App-Code</a:t>
+                <a:latin typeface="Newsreader"/>
+                <a:ea typeface="Newsreader"/>
+                <a:cs typeface="Newsreader"/>
+              </a:rPr>
+              <a:t>Das Gerät prüft den Zugang</a:t>
             </a:r>
           </a:p>
         </p:txBody>
@@ -5133,7 +5251,7 @@
           <p:cNvPr id="7" name="">
             <a:extLst xmlns:a="http://schemas.openxmlformats.org/drawingml/2006/main">
               <a:ext uri="{FF2B5EF4-FFF2-40B4-BE49-F238E27FC236}">
-                <a16:creationId xmlns:a16="http://schemas.microsoft.com/office/drawing/2014/main" id="{8CFB3388-62CA-4727-BCAE-59E6D8C818E5}"/>
+                <a16:creationId xmlns:a16="http://schemas.microsoft.com/office/drawing/2014/main" id="{1331FE2D-6DD1-489D-BE5C-016991701A68}"/>
               </a:ext>
             </a:extLst>
           </p:cNvPr>
@@ -5144,8 +5262,8 @@
         </p:nvSpPr>
         <p:spPr>
           <a:xfrm xmlns:a="http://schemas.openxmlformats.org/drawingml/2006/main">
-            <a:off x="4095750" y="5562600"/>
-            <a:ext cx="7191375" cy="590550"/>
+            <a:off x="4095750" y="4514850"/>
+            <a:ext cx="7191375" cy="914400"/>
           </a:xfrm>
           <a:prstGeom xmlns:a="http://schemas.openxmlformats.org/drawingml/2006/main" prst="rect">
             <a:avLst/>
@@ -5162,7 +5280,87 @@
           <a:lstStyle xmlns:a="http://schemas.openxmlformats.org/drawingml/2006/main"/>
           <a:p xmlns:a="http://schemas.openxmlformats.org/drawingml/2006/main">
             <a:pPr algn="l">
-              <a:defRPr sz="1650" b="0">
+              <a:defRPr sz="2175" b="0">
+                <a:solidFill>
+                  <a:srgbClr val="15171A"/>
+                </a:solidFill>
+                <a:latin typeface="Inter"/>
+                <a:ea typeface="Inter"/>
+                <a:cs typeface="Inter"/>
+              </a:defRPr>
+            </a:pPr>
+            <a:r>
+              <a:rPr sz="2175" b="0">
+                <a:solidFill>
+                  <a:srgbClr val="15171A"/>
+                </a:solidFill>
+                <a:latin typeface="Inter"/>
+                <a:ea typeface="Inter"/>
+                <a:cs typeface="Inter"/>
+              </a:rPr>
+              <a:t>Face ID oder Fingerabdruck.</a:t>
+            </a:r>
+          </a:p>
+          <a:p xmlns:a="http://schemas.openxmlformats.org/drawingml/2006/main">
+            <a:pPr algn="l">
+              <a:defRPr sz="2175" b="0">
+                <a:solidFill>
+                  <a:srgbClr val="15171A"/>
+                </a:solidFill>
+                <a:latin typeface="Inter"/>
+                <a:ea typeface="Inter"/>
+                <a:cs typeface="Inter"/>
+              </a:defRPr>
+            </a:pPr>
+            <a:r>
+              <a:rPr sz="2175" b="0">
+                <a:solidFill>
+                  <a:srgbClr val="15171A"/>
+                </a:solidFill>
+                <a:latin typeface="Inter"/>
+                <a:ea typeface="Inter"/>
+                <a:cs typeface="Inter"/>
+              </a:rPr>
+              <a:t>Spendly erhält nur das Ergebnis.</a:t>
+            </a:r>
+          </a:p>
+        </p:txBody>
+      </p:sp>
+      <p:sp>
+        <p:nvSpPr>
+          <p:cNvPr id="8" name="">
+            <a:extLst xmlns:a="http://schemas.openxmlformats.org/drawingml/2006/main">
+              <a:ext uri="{FF2B5EF4-FFF2-40B4-BE49-F238E27FC236}">
+                <a16:creationId xmlns:a16="http://schemas.microsoft.com/office/drawing/2014/main" id="{CBBB48BB-002A-4091-8F30-7A22FDE30AFD}"/>
+              </a:ext>
+            </a:extLst>
+          </p:cNvPr>
+          <p:cNvSpPr>
+            <a:spLocks xmlns:a="http://schemas.openxmlformats.org/drawingml/2006/main" noGrp="1"/>
+          </p:cNvSpPr>
+          <p:nvPr/>
+        </p:nvSpPr>
+        <p:spPr>
+          <a:xfrm xmlns:a="http://schemas.openxmlformats.org/drawingml/2006/main">
+            <a:off x="4095750" y="5772150"/>
+            <a:ext cx="7191375" cy="457200"/>
+          </a:xfrm>
+          <a:prstGeom xmlns:a="http://schemas.openxmlformats.org/drawingml/2006/main" prst="rect">
+            <a:avLst/>
+          </a:prstGeom>
+          <a:noFill xmlns:a="http://schemas.openxmlformats.org/drawingml/2006/main"/>
+          <a:ln xmlns:a="http://schemas.openxmlformats.org/drawingml/2006/main" w="0">
+            <a:noFill/>
+          </a:ln>
+        </p:spPr>
+        <p:txBody>
+          <a:bodyPr xmlns:a="http://schemas.openxmlformats.org/drawingml/2006/main" wrap="square" lIns="0" tIns="0" rIns="0" bIns="0" anchor="t">
+            <a:noAutofit/>
+          </a:bodyPr>
+          <a:lstStyle xmlns:a="http://schemas.openxmlformats.org/drawingml/2006/main"/>
+          <a:p xmlns:a="http://schemas.openxmlformats.org/drawingml/2006/main">
+            <a:pPr algn="l">
+              <a:defRPr sz="1575" b="0">
                 <a:solidFill>
                   <a:srgbClr val="6E6D68"/>
                 </a:solidFill>
@@ -5172,7 +5370,7 @@
               </a:defRPr>
             </a:pPr>
             <a:r>
-              <a:rPr sz="1650" b="0">
+              <a:rPr sz="1575" b="0">
                 <a:solidFill>
                   <a:srgbClr val="6E6D68"/>
                 </a:solidFill>
@@ -5180,7 +5378,7 @@
                 <a:ea typeface="Inter"/>
                 <a:cs typeface="Inter"/>
               </a:rPr>
-              <a:t>Face ID im Simulator geprüft · echter Scan offen</a:t>
+              <a:t>Alternativ: eigener App-Code. Echter Face-ID-Scan offen.</a:t>
             </a:r>
           </a:p>
         </p:txBody>
@@ -5188,7 +5386,7 @@
     </p:spTree>
     <p:extLst>
       <p:ext uri="{BB962C8B-B14F-4D97-AF65-F5344CB8AC3E}">
-        <p14:creationId xmlns:p14="http://schemas.microsoft.com/office/powerpoint/2010/main" val="925703176"/>
+        <p14:creationId xmlns:p14="http://schemas.microsoft.com/office/powerpoint/2010/main" val="1993725369"/>
       </p:ext>
     </p:extLst>
   </p:cSld>
@@ -5216,10 +5414,10 @@
       </p:grpSpPr>
       <p:sp>
         <p:nvSpPr>
-          <p:cNvPr id="17" name="">
+          <p:cNvPr id="10" name="">
             <a:extLst xmlns:a="http://schemas.openxmlformats.org/drawingml/2006/main">
               <a:ext uri="{FF2B5EF4-FFF2-40B4-BE49-F238E27FC236}">
-                <a16:creationId xmlns:a16="http://schemas.microsoft.com/office/drawing/2014/main" id="{A72105B5-5476-4797-AF78-13BD4DE60990}"/>
+                <a16:creationId xmlns:a16="http://schemas.microsoft.com/office/drawing/2014/main" id="{806B799D-A825-4717-B6A6-59326CD0AF62}"/>
               </a:ext>
             </a:extLst>
           </p:cNvPr>
@@ -5276,7 +5474,7 @@
           <p:cNvPr id="2" name="">
             <a:extLst xmlns:a="http://schemas.openxmlformats.org/drawingml/2006/main">
               <a:ext uri="{FF2B5EF4-FFF2-40B4-BE49-F238E27FC236}">
-                <a16:creationId xmlns:a16="http://schemas.microsoft.com/office/drawing/2014/main" id="{437CAFB6-10BD-4742-A077-7A5A502920A8}"/>
+                <a16:creationId xmlns:a16="http://schemas.microsoft.com/office/drawing/2014/main" id="{8A1FBF07-C94F-40AE-8F36-87957254C0C7}"/>
               </a:ext>
             </a:extLst>
           </p:cNvPr>
@@ -5323,7 +5521,7 @@
                 <a:ea typeface="Newsreader"/>
                 <a:cs typeface="Newsreader"/>
               </a:rPr>
-              <a:t>Der Weg einer Ausgabe</a:t>
+              <a:t>Vom Entwurf zur nutzbaren App</a:t>
             </a:r>
           </a:p>
         </p:txBody>
@@ -5333,7 +5531,7 @@
           <p:cNvPr id="3" name="">
             <a:extLst xmlns:a="http://schemas.openxmlformats.org/drawingml/2006/main">
               <a:ext uri="{FF2B5EF4-FFF2-40B4-BE49-F238E27FC236}">
-                <a16:creationId xmlns:a16="http://schemas.microsoft.com/office/drawing/2014/main" id="{420BF2D3-BFA5-40FB-BD29-70442A98C040}"/>
+                <a16:creationId xmlns:a16="http://schemas.microsoft.com/office/drawing/2014/main" id="{B1620CFC-AA2C-49C4-A5E8-F214A01A2C71}"/>
               </a:ext>
             </a:extLst>
           </p:cNvPr>
@@ -5344,8 +5542,8 @@
         </p:nvSpPr>
         <p:spPr>
           <a:xfrm xmlns:a="http://schemas.openxmlformats.org/drawingml/2006/main">
-            <a:off x="609600" y="1438275"/>
-            <a:ext cx="6191250" cy="381000"/>
+            <a:off x="609600" y="1733550"/>
+            <a:ext cx="5048250" cy="1076325"/>
           </a:xfrm>
           <a:prstGeom xmlns:a="http://schemas.openxmlformats.org/drawingml/2006/main" prst="rect">
             <a:avLst/>
@@ -5362,25 +5560,25 @@
           <a:lstStyle xmlns:a="http://schemas.openxmlformats.org/drawingml/2006/main"/>
           <a:p xmlns:a="http://schemas.openxmlformats.org/drawingml/2006/main">
             <a:pPr algn="l">
-              <a:defRPr sz="1875" b="1">
+              <a:defRPr sz="3000" b="0">
                 <a:solidFill>
                   <a:srgbClr val="1F5A45"/>
                 </a:solidFill>
-                <a:latin typeface="Inter"/>
-                <a:ea typeface="Inter"/>
-                <a:cs typeface="Inter"/>
-              </a:defRPr>
-            </a:pPr>
-            <a:r>
-              <a:rPr sz="1875" b="1">
+                <a:latin typeface="Newsreader"/>
+                <a:ea typeface="Newsreader"/>
+                <a:cs typeface="Newsreader"/>
+              </a:defRPr>
+            </a:pPr>
+            <a:r>
+              <a:rPr sz="3000" b="0">
                 <a:solidFill>
                   <a:srgbClr val="1F5A45"/>
                 </a:solidFill>
-                <a:latin typeface="Inter"/>
-                <a:ea typeface="Inter"/>
-                <a:cs typeface="Inter"/>
-              </a:rPr>
-              <a:t>React Native + Expo</a:t>
+                <a:latin typeface="Newsreader"/>
+                <a:ea typeface="Newsreader"/>
+                <a:cs typeface="Newsreader"/>
+              </a:rPr>
+              <a:t>Die Eingabe bleibt einfach</a:t>
             </a:r>
           </a:p>
         </p:txBody>
@@ -5390,7 +5588,7 @@
           <p:cNvPr id="4" name="">
             <a:extLst xmlns:a="http://schemas.openxmlformats.org/drawingml/2006/main">
               <a:ext uri="{FF2B5EF4-FFF2-40B4-BE49-F238E27FC236}">
-                <a16:creationId xmlns:a16="http://schemas.microsoft.com/office/drawing/2014/main" id="{AFC23572-0087-4B2A-A9C2-19E2FC6428E5}"/>
+                <a16:creationId xmlns:a16="http://schemas.microsoft.com/office/drawing/2014/main" id="{977F866A-1DF0-4370-99A6-F085E133A387}"/>
               </a:ext>
             </a:extLst>
           </p:cNvPr>
@@ -5401,8 +5599,8 @@
         </p:nvSpPr>
         <p:spPr>
           <a:xfrm xmlns:a="http://schemas.openxmlformats.org/drawingml/2006/main">
-            <a:off x="628650" y="2200275"/>
-            <a:ext cx="495300" cy="561975"/>
+            <a:off x="638175" y="3000375"/>
+            <a:ext cx="4886325" cy="1428750"/>
           </a:xfrm>
           <a:prstGeom xmlns:a="http://schemas.openxmlformats.org/drawingml/2006/main" prst="rect">
             <a:avLst/>
@@ -5419,25 +5617,71 @@
           <a:lstStyle xmlns:a="http://schemas.openxmlformats.org/drawingml/2006/main"/>
           <a:p xmlns:a="http://schemas.openxmlformats.org/drawingml/2006/main">
             <a:pPr algn="l">
-              <a:defRPr sz="2700" b="0">
-                <a:solidFill>
-                  <a:srgbClr val="1F5A45"/>
-                </a:solidFill>
-                <a:latin typeface="Newsreader"/>
-                <a:ea typeface="Newsreader"/>
-                <a:cs typeface="Newsreader"/>
-              </a:defRPr>
-            </a:pPr>
-            <a:r>
-              <a:rPr sz="2700" b="0">
-                <a:solidFill>
-                  <a:srgbClr val="1F5A45"/>
-                </a:solidFill>
-                <a:latin typeface="Newsreader"/>
-                <a:ea typeface="Newsreader"/>
-                <a:cs typeface="Newsreader"/>
-              </a:rPr>
-              <a:t>1</a:t>
+              <a:defRPr sz="2175" b="0">
+                <a:solidFill>
+                  <a:srgbClr val="15171A"/>
+                </a:solidFill>
+                <a:latin typeface="Inter"/>
+                <a:ea typeface="Inter"/>
+                <a:cs typeface="Inter"/>
+              </a:defRPr>
+            </a:pPr>
+            <a:r>
+              <a:rPr sz="2175" b="0">
+                <a:solidFill>
+                  <a:srgbClr val="15171A"/>
+                </a:solidFill>
+                <a:latin typeface="Inter"/>
+                <a:ea typeface="Inter"/>
+                <a:cs typeface="Inter"/>
+              </a:rPr>
+              <a:t>Betrag im Mittelpunkt</a:t>
+            </a:r>
+          </a:p>
+          <a:p xmlns:a="http://schemas.openxmlformats.org/drawingml/2006/main">
+            <a:pPr algn="l">
+              <a:defRPr sz="2175" b="0">
+                <a:solidFill>
+                  <a:srgbClr val="15171A"/>
+                </a:solidFill>
+                <a:latin typeface="Inter"/>
+                <a:ea typeface="Inter"/>
+                <a:cs typeface="Inter"/>
+              </a:defRPr>
+            </a:pPr>
+            <a:r>
+              <a:rPr sz="2175" b="0">
+                <a:solidFill>
+                  <a:srgbClr val="15171A"/>
+                </a:solidFill>
+                <a:latin typeface="Inter"/>
+                <a:ea typeface="Inter"/>
+                <a:cs typeface="Inter"/>
+              </a:rPr>
+              <a:t>Kategorie direkt auswählen</a:t>
+            </a:r>
+          </a:p>
+          <a:p xmlns:a="http://schemas.openxmlformats.org/drawingml/2006/main">
+            <a:pPr algn="l">
+              <a:defRPr sz="2175" b="0">
+                <a:solidFill>
+                  <a:srgbClr val="15171A"/>
+                </a:solidFill>
+                <a:latin typeface="Inter"/>
+                <a:ea typeface="Inter"/>
+                <a:cs typeface="Inter"/>
+              </a:defRPr>
+            </a:pPr>
+            <a:r>
+              <a:rPr sz="2175" b="0">
+                <a:solidFill>
+                  <a:srgbClr val="15171A"/>
+                </a:solidFill>
+                <a:latin typeface="Inter"/>
+                <a:ea typeface="Inter"/>
+                <a:cs typeface="Inter"/>
+              </a:rPr>
+              <a:t>Fehler am richtigen Feld</a:t>
             </a:r>
           </a:p>
         </p:txBody>
@@ -5447,7 +5691,7 @@
           <p:cNvPr id="5" name="">
             <a:extLst xmlns:a="http://schemas.openxmlformats.org/drawingml/2006/main">
               <a:ext uri="{FF2B5EF4-FFF2-40B4-BE49-F238E27FC236}">
-                <a16:creationId xmlns:a16="http://schemas.microsoft.com/office/drawing/2014/main" id="{F79F8DCA-E2A0-48FE-98D9-49937431801C}"/>
+                <a16:creationId xmlns:a16="http://schemas.microsoft.com/office/drawing/2014/main" id="{A0956D3D-D5BB-41B1-80B8-5E34281D0AAE}"/>
               </a:ext>
             </a:extLst>
           </p:cNvPr>
@@ -5458,8 +5702,8 @@
         </p:nvSpPr>
         <p:spPr>
           <a:xfrm xmlns:a="http://schemas.openxmlformats.org/drawingml/2006/main">
-            <a:off x="1343025" y="2200275"/>
-            <a:ext cx="9810750" cy="428625"/>
+            <a:off x="638175" y="4933950"/>
+            <a:ext cx="4914900" cy="1047750"/>
           </a:xfrm>
           <a:prstGeom xmlns:a="http://schemas.openxmlformats.org/drawingml/2006/main" prst="rect">
             <a:avLst/>
@@ -5476,25 +5720,71 @@
           <a:lstStyle xmlns:a="http://schemas.openxmlformats.org/drawingml/2006/main"/>
           <a:p xmlns:a="http://schemas.openxmlformats.org/drawingml/2006/main">
             <a:pPr algn="l">
-              <a:defRPr sz="2175" b="0">
-                <a:solidFill>
-                  <a:srgbClr val="15171A"/>
-                </a:solidFill>
-                <a:latin typeface="Inter"/>
-                <a:ea typeface="Inter"/>
-                <a:cs typeface="Inter"/>
-              </a:defRPr>
-            </a:pPr>
-            <a:r>
-              <a:rPr sz="2175" b="0">
-                <a:solidFill>
-                  <a:srgbClr val="15171A"/>
-                </a:solidFill>
-                <a:latin typeface="Inter"/>
-                <a:ea typeface="Inter"/>
-                <a:cs typeface="Inter"/>
-              </a:rPr>
-              <a:t>Formular prüft Eingaben</a:t>
+              <a:defRPr sz="1725" b="0">
+                <a:solidFill>
+                  <a:srgbClr val="6E6D68"/>
+                </a:solidFill>
+                <a:latin typeface="Inter"/>
+                <a:ea typeface="Inter"/>
+                <a:cs typeface="Inter"/>
+              </a:defRPr>
+            </a:pPr>
+            <a:r>
+              <a:rPr sz="1725" b="0">
+                <a:solidFill>
+                  <a:srgbClr val="6E6D68"/>
+                </a:solidFill>
+                <a:latin typeface="Inter"/>
+                <a:ea typeface="Inter"/>
+                <a:cs typeface="Inter"/>
+              </a:rPr>
+              <a:t>Oberfläche und Navigation</a:t>
+            </a:r>
+          </a:p>
+          <a:p xmlns:a="http://schemas.openxmlformats.org/drawingml/2006/main">
+            <a:pPr algn="l">
+              <a:defRPr sz="1725" b="0">
+                <a:solidFill>
+                  <a:srgbClr val="6E6D68"/>
+                </a:solidFill>
+                <a:latin typeface="Inter"/>
+                <a:ea typeface="Inter"/>
+                <a:cs typeface="Inter"/>
+              </a:defRPr>
+            </a:pPr>
+            <a:r>
+              <a:rPr sz="1725" b="0">
+                <a:solidFill>
+                  <a:srgbClr val="6E6D68"/>
+                </a:solidFill>
+                <a:latin typeface="Inter"/>
+                <a:ea typeface="Inter"/>
+                <a:cs typeface="Inter"/>
+              </a:rPr>
+              <a:t>Speicherung und Gerätesperre</a:t>
+            </a:r>
+          </a:p>
+          <a:p xmlns:a="http://schemas.openxmlformats.org/drawingml/2006/main">
+            <a:pPr algn="l">
+              <a:defRPr sz="1725" b="0">
+                <a:solidFill>
+                  <a:srgbClr val="6E6D68"/>
+                </a:solidFill>
+                <a:latin typeface="Inter"/>
+                <a:ea typeface="Inter"/>
+                <a:cs typeface="Inter"/>
+              </a:defRPr>
+            </a:pPr>
+            <a:r>
+              <a:rPr sz="1725" b="0">
+                <a:solidFill>
+                  <a:srgbClr val="6E6D68"/>
+                </a:solidFill>
+                <a:latin typeface="Inter"/>
+                <a:ea typeface="Inter"/>
+                <a:cs typeface="Inter"/>
+              </a:rPr>
+              <a:t>Fehlerfälle und Tests</a:t>
             </a:r>
           </a:p>
         </p:txBody>
@@ -5504,7 +5794,7 @@
           <p:cNvPr id="6" name="">
             <a:extLst xmlns:a="http://schemas.openxmlformats.org/drawingml/2006/main">
               <a:ext uri="{FF2B5EF4-FFF2-40B4-BE49-F238E27FC236}">
-                <a16:creationId xmlns:a16="http://schemas.microsoft.com/office/drawing/2014/main" id="{62DB6AC1-200D-48CE-B48D-5033527BB535}"/>
+                <a16:creationId xmlns:a16="http://schemas.microsoft.com/office/drawing/2014/main" id="{592D95B3-1D23-4518-9D70-004C95878DA4}"/>
               </a:ext>
             </a:extLst>
           </p:cNvPr>
@@ -5515,8 +5805,8 @@
         </p:nvSpPr>
         <p:spPr>
           <a:xfrm xmlns:a="http://schemas.openxmlformats.org/drawingml/2006/main">
-            <a:off x="1362075" y="2619375"/>
-            <a:ext cx="9525000" cy="295275"/>
+            <a:off x="6000750" y="1390650"/>
+            <a:ext cx="2343150" cy="295275"/>
           </a:xfrm>
           <a:prstGeom xmlns:a="http://schemas.openxmlformats.org/drawingml/2006/main" prst="rect">
             <a:avLst/>
@@ -5533,7 +5823,7 @@
           <a:lstStyle xmlns:a="http://schemas.openxmlformats.org/drawingml/2006/main"/>
           <a:p xmlns:a="http://schemas.openxmlformats.org/drawingml/2006/main">
             <a:pPr algn="l">
-              <a:defRPr sz="1575" b="0">
+              <a:defRPr sz="1500" b="1">
                 <a:solidFill>
                   <a:srgbClr val="6E6D68"/>
                 </a:solidFill>
@@ -5543,7 +5833,7 @@
               </a:defRPr>
             </a:pPr>
             <a:r>
-              <a:rPr sz="1575" b="0">
+              <a:rPr sz="1500" b="1">
                 <a:solidFill>
                   <a:srgbClr val="6E6D68"/>
                 </a:solidFill>
@@ -5551,7 +5841,7 @@
                 <a:ea typeface="Inter"/>
                 <a:cs typeface="Inter"/>
               </a:rPr>
-              <a:t>NewExpenseScreen + validateExpense</a:t>
+              <a:t>LB1-Mockup</a:t>
             </a:r>
           </a:p>
         </p:txBody>
@@ -5561,7 +5851,7 @@
           <p:cNvPr id="7" name="">
             <a:extLst xmlns:a="http://schemas.openxmlformats.org/drawingml/2006/main">
               <a:ext uri="{FF2B5EF4-FFF2-40B4-BE49-F238E27FC236}">
-                <a16:creationId xmlns:a16="http://schemas.microsoft.com/office/drawing/2014/main" id="{AD39DCC4-4D70-4F0B-9D53-24D8FEC66E4D}"/>
+                <a16:creationId xmlns:a16="http://schemas.microsoft.com/office/drawing/2014/main" id="{2DADDDAC-1865-449B-B532-8A269C51F85C}"/>
               </a:ext>
             </a:extLst>
           </p:cNvPr>
@@ -5572,8 +5862,8 @@
         </p:nvSpPr>
         <p:spPr>
           <a:xfrm xmlns:a="http://schemas.openxmlformats.org/drawingml/2006/main">
-            <a:off x="628650" y="3048000"/>
-            <a:ext cx="495300" cy="561975"/>
+            <a:off x="8924925" y="1390650"/>
+            <a:ext cx="2343150" cy="295275"/>
           </a:xfrm>
           <a:prstGeom xmlns:a="http://schemas.openxmlformats.org/drawingml/2006/main" prst="rect">
             <a:avLst/>
@@ -5590,546 +5880,77 @@
           <a:lstStyle xmlns:a="http://schemas.openxmlformats.org/drawingml/2006/main"/>
           <a:p xmlns:a="http://schemas.openxmlformats.org/drawingml/2006/main">
             <a:pPr algn="l">
-              <a:defRPr sz="2700" b="0">
+              <a:defRPr sz="1500" b="1">
                 <a:solidFill>
                   <a:srgbClr val="1F5A45"/>
                 </a:solidFill>
-                <a:latin typeface="Newsreader"/>
-                <a:ea typeface="Newsreader"/>
-                <a:cs typeface="Newsreader"/>
-              </a:defRPr>
-            </a:pPr>
-            <a:r>
-              <a:rPr sz="2700" b="0">
+                <a:latin typeface="Inter"/>
+                <a:ea typeface="Inter"/>
+                <a:cs typeface="Inter"/>
+              </a:defRPr>
+            </a:pPr>
+            <a:r>
+              <a:rPr sz="1500" b="1">
                 <a:solidFill>
                   <a:srgbClr val="1F5A45"/>
                 </a:solidFill>
-                <a:latin typeface="Newsreader"/>
-                <a:ea typeface="Newsreader"/>
-                <a:cs typeface="Newsreader"/>
-              </a:rPr>
-              <a:t>2</a:t>
-            </a:r>
-          </a:p>
-        </p:txBody>
-      </p:sp>
-      <p:sp>
-        <p:nvSpPr>
-          <p:cNvPr id="8" name="">
-            <a:extLst xmlns:a="http://schemas.openxmlformats.org/drawingml/2006/main">
-              <a:ext uri="{FF2B5EF4-FFF2-40B4-BE49-F238E27FC236}">
-                <a16:creationId xmlns:a16="http://schemas.microsoft.com/office/drawing/2014/main" id="{E56C1F6D-A070-46A2-A6DF-5C539D4FA7A0}"/>
-              </a:ext>
-            </a:extLst>
-          </p:cNvPr>
-          <p:cNvSpPr>
-            <a:spLocks xmlns:a="http://schemas.openxmlformats.org/drawingml/2006/main" noGrp="1"/>
-          </p:cNvSpPr>
-          <p:nvPr/>
-        </p:nvSpPr>
+                <a:latin typeface="Inter"/>
+                <a:ea typeface="Inter"/>
+                <a:cs typeface="Inter"/>
+              </a:rPr>
+              <a:t>App heute</a:t>
+            </a:r>
+          </a:p>
+        </p:txBody>
+      </p:sp>
+      <p:pic>
+        <p:nvPicPr>
+          <p:cNvPr id="17" name=""/>
+          <p:cNvPicPr>
+            <a:picLocks xmlns:a="http://schemas.openxmlformats.org/drawingml/2006/main" noChangeAspect="1"/>
+          </p:cNvPicPr>
+          <p:nvPr/>
+        </p:nvPicPr>
+        <p:blipFill>
+          <a:blip xmlns:r="http://schemas.openxmlformats.org/officeDocument/2006/relationships" xmlns:a="http://schemas.openxmlformats.org/drawingml/2006/main" r:embed="R806e8e1e1c1c4200"/>
+          <a:stretch xmlns:a="http://schemas.openxmlformats.org/drawingml/2006/main"/>
+        </p:blipFill>
         <p:spPr>
           <a:xfrm xmlns:a="http://schemas.openxmlformats.org/drawingml/2006/main">
-            <a:off x="1343025" y="3048000"/>
-            <a:ext cx="9810750" cy="428625"/>
+            <a:off x="6098460" y="1809750"/>
+            <a:ext cx="2033430" cy="4400550"/>
           </a:xfrm>
           <a:prstGeom xmlns:a="http://schemas.openxmlformats.org/drawingml/2006/main" prst="rect">
             <a:avLst/>
           </a:prstGeom>
-          <a:noFill xmlns:a="http://schemas.openxmlformats.org/drawingml/2006/main"/>
-          <a:ln xmlns:a="http://schemas.openxmlformats.org/drawingml/2006/main" w="0">
-            <a:noFill/>
-          </a:ln>
-        </p:spPr>
-        <p:txBody>
-          <a:bodyPr xmlns:a="http://schemas.openxmlformats.org/drawingml/2006/main" wrap="square" lIns="0" tIns="0" rIns="0" bIns="0" anchor="t">
-            <a:noAutofit/>
-          </a:bodyPr>
-          <a:lstStyle xmlns:a="http://schemas.openxmlformats.org/drawingml/2006/main"/>
-          <a:p xmlns:a="http://schemas.openxmlformats.org/drawingml/2006/main">
-            <a:pPr algn="l">
-              <a:defRPr sz="2175" b="0">
-                <a:solidFill>
-                  <a:srgbClr val="15171A"/>
-                </a:solidFill>
-                <a:latin typeface="Inter"/>
-                <a:ea typeface="Inter"/>
-                <a:cs typeface="Inter"/>
-              </a:defRPr>
-            </a:pPr>
-            <a:r>
-              <a:rPr sz="2175" b="0">
-                <a:solidFill>
-                  <a:srgbClr val="15171A"/>
-                </a:solidFill>
-                <a:latin typeface="Inter"/>
-                <a:ea typeface="Inter"/>
-                <a:cs typeface="Inter"/>
-              </a:rPr>
-              <a:t>Context koordiniert die Änderung</a:t>
-            </a:r>
-          </a:p>
-        </p:txBody>
-      </p:sp>
-      <p:sp>
-        <p:nvSpPr>
-          <p:cNvPr id="9" name="">
-            <a:extLst xmlns:a="http://schemas.openxmlformats.org/drawingml/2006/main">
-              <a:ext uri="{FF2B5EF4-FFF2-40B4-BE49-F238E27FC236}">
-                <a16:creationId xmlns:a16="http://schemas.microsoft.com/office/drawing/2014/main" id="{365C5A58-E7C4-43D1-8A36-CF48A79EC0DE}"/>
-              </a:ext>
-            </a:extLst>
-          </p:cNvPr>
-          <p:cNvSpPr>
-            <a:spLocks xmlns:a="http://schemas.openxmlformats.org/drawingml/2006/main" noGrp="1"/>
-          </p:cNvSpPr>
-          <p:nvPr/>
-        </p:nvSpPr>
+        </p:spPr>
+      </p:pic>
+      <p:pic>
+        <p:nvPicPr>
+          <p:cNvPr id="18" name=""/>
+          <p:cNvPicPr>
+            <a:picLocks xmlns:a="http://schemas.openxmlformats.org/drawingml/2006/main" noChangeAspect="1"/>
+          </p:cNvPicPr>
+          <p:nvPr/>
+        </p:nvPicPr>
+        <p:blipFill>
+          <a:blip xmlns:r="http://schemas.openxmlformats.org/officeDocument/2006/relationships" xmlns:a="http://schemas.openxmlformats.org/drawingml/2006/main" r:embed="R26ac0357b1264b0b"/>
+          <a:stretch xmlns:a="http://schemas.openxmlformats.org/drawingml/2006/main"/>
+        </p:blipFill>
         <p:spPr>
           <a:xfrm xmlns:a="http://schemas.openxmlformats.org/drawingml/2006/main">
-            <a:off x="1362075" y="3467100"/>
-            <a:ext cx="9525000" cy="295275"/>
+            <a:off x="9027324" y="1809750"/>
+            <a:ext cx="2024052" cy="4400550"/>
           </a:xfrm>
           <a:prstGeom xmlns:a="http://schemas.openxmlformats.org/drawingml/2006/main" prst="rect">
             <a:avLst/>
           </a:prstGeom>
-          <a:noFill xmlns:a="http://schemas.openxmlformats.org/drawingml/2006/main"/>
-          <a:ln xmlns:a="http://schemas.openxmlformats.org/drawingml/2006/main" w="0">
-            <a:noFill/>
-          </a:ln>
-        </p:spPr>
-        <p:txBody>
-          <a:bodyPr xmlns:a="http://schemas.openxmlformats.org/drawingml/2006/main" wrap="square" lIns="0" tIns="0" rIns="0" bIns="0" anchor="t">
-            <a:noAutofit/>
-          </a:bodyPr>
-          <a:lstStyle xmlns:a="http://schemas.openxmlformats.org/drawingml/2006/main"/>
-          <a:p xmlns:a="http://schemas.openxmlformats.org/drawingml/2006/main">
-            <a:pPr algn="l">
-              <a:defRPr sz="1575" b="0">
-                <a:solidFill>
-                  <a:srgbClr val="6E6D68"/>
-                </a:solidFill>
-                <a:latin typeface="Inter"/>
-                <a:ea typeface="Inter"/>
-                <a:cs typeface="Inter"/>
-              </a:defRPr>
-            </a:pPr>
-            <a:r>
-              <a:rPr sz="1575" b="0">
-                <a:solidFill>
-                  <a:srgbClr val="6E6D68"/>
-                </a:solidFill>
-                <a:latin typeface="Inter"/>
-                <a:ea typeface="Inter"/>
-                <a:cs typeface="Inter"/>
-              </a:rPr>
-              <a:t>DataContext</a:t>
-            </a:r>
-          </a:p>
-        </p:txBody>
-      </p:sp>
-      <p:sp>
-        <p:nvSpPr>
-          <p:cNvPr id="10" name="">
-            <a:extLst xmlns:a="http://schemas.openxmlformats.org/drawingml/2006/main">
-              <a:ext uri="{FF2B5EF4-FFF2-40B4-BE49-F238E27FC236}">
-                <a16:creationId xmlns:a16="http://schemas.microsoft.com/office/drawing/2014/main" id="{A3894776-FE4A-4F2E-A97D-C3B72E5FE465}"/>
-              </a:ext>
-            </a:extLst>
-          </p:cNvPr>
-          <p:cNvSpPr>
-            <a:spLocks xmlns:a="http://schemas.openxmlformats.org/drawingml/2006/main" noGrp="1"/>
-          </p:cNvSpPr>
-          <p:nvPr/>
-        </p:nvSpPr>
-        <p:spPr>
-          <a:xfrm xmlns:a="http://schemas.openxmlformats.org/drawingml/2006/main">
-            <a:off x="628650" y="3895725"/>
-            <a:ext cx="495300" cy="561975"/>
-          </a:xfrm>
-          <a:prstGeom xmlns:a="http://schemas.openxmlformats.org/drawingml/2006/main" prst="rect">
-            <a:avLst/>
-          </a:prstGeom>
-          <a:noFill xmlns:a="http://schemas.openxmlformats.org/drawingml/2006/main"/>
-          <a:ln xmlns:a="http://schemas.openxmlformats.org/drawingml/2006/main" w="0">
-            <a:noFill/>
-          </a:ln>
-        </p:spPr>
-        <p:txBody>
-          <a:bodyPr xmlns:a="http://schemas.openxmlformats.org/drawingml/2006/main" wrap="square" lIns="0" tIns="0" rIns="0" bIns="0" anchor="t">
-            <a:noAutofit/>
-          </a:bodyPr>
-          <a:lstStyle xmlns:a="http://schemas.openxmlformats.org/drawingml/2006/main"/>
-          <a:p xmlns:a="http://schemas.openxmlformats.org/drawingml/2006/main">
-            <a:pPr algn="l">
-              <a:defRPr sz="2700" b="0">
-                <a:solidFill>
-                  <a:srgbClr val="1F5A45"/>
-                </a:solidFill>
-                <a:latin typeface="Newsreader"/>
-                <a:ea typeface="Newsreader"/>
-                <a:cs typeface="Newsreader"/>
-              </a:defRPr>
-            </a:pPr>
-            <a:r>
-              <a:rPr sz="2700" b="0">
-                <a:solidFill>
-                  <a:srgbClr val="1F5A45"/>
-                </a:solidFill>
-                <a:latin typeface="Newsreader"/>
-                <a:ea typeface="Newsreader"/>
-                <a:cs typeface="Newsreader"/>
-              </a:rPr>
-              <a:t>3</a:t>
-            </a:r>
-          </a:p>
-        </p:txBody>
-      </p:sp>
-      <p:sp>
-        <p:nvSpPr>
-          <p:cNvPr id="11" name="">
-            <a:extLst xmlns:a="http://schemas.openxmlformats.org/drawingml/2006/main">
-              <a:ext uri="{FF2B5EF4-FFF2-40B4-BE49-F238E27FC236}">
-                <a16:creationId xmlns:a16="http://schemas.microsoft.com/office/drawing/2014/main" id="{916DAC25-F7D0-422D-BD91-72F942083BEE}"/>
-              </a:ext>
-            </a:extLst>
-          </p:cNvPr>
-          <p:cNvSpPr>
-            <a:spLocks xmlns:a="http://schemas.openxmlformats.org/drawingml/2006/main" noGrp="1"/>
-          </p:cNvSpPr>
-          <p:nvPr/>
-        </p:nvSpPr>
-        <p:spPr>
-          <a:xfrm xmlns:a="http://schemas.openxmlformats.org/drawingml/2006/main">
-            <a:off x="1343025" y="3895725"/>
-            <a:ext cx="9810750" cy="428625"/>
-          </a:xfrm>
-          <a:prstGeom xmlns:a="http://schemas.openxmlformats.org/drawingml/2006/main" prst="rect">
-            <a:avLst/>
-          </a:prstGeom>
-          <a:noFill xmlns:a="http://schemas.openxmlformats.org/drawingml/2006/main"/>
-          <a:ln xmlns:a="http://schemas.openxmlformats.org/drawingml/2006/main" w="0">
-            <a:noFill/>
-          </a:ln>
-        </p:spPr>
-        <p:txBody>
-          <a:bodyPr xmlns:a="http://schemas.openxmlformats.org/drawingml/2006/main" wrap="square" lIns="0" tIns="0" rIns="0" bIns="0" anchor="t">
-            <a:noAutofit/>
-          </a:bodyPr>
-          <a:lstStyle xmlns:a="http://schemas.openxmlformats.org/drawingml/2006/main"/>
-          <a:p xmlns:a="http://schemas.openxmlformats.org/drawingml/2006/main">
-            <a:pPr algn="l">
-              <a:defRPr sz="2175" b="0">
-                <a:solidFill>
-                  <a:srgbClr val="15171A"/>
-                </a:solidFill>
-                <a:latin typeface="Inter"/>
-                <a:ea typeface="Inter"/>
-                <a:cs typeface="Inter"/>
-              </a:defRPr>
-            </a:pPr>
-            <a:r>
-              <a:rPr sz="2175" b="0">
-                <a:solidFill>
-                  <a:srgbClr val="15171A"/>
-                </a:solidFill>
-                <a:latin typeface="Inter"/>
-                <a:ea typeface="Inter"/>
-                <a:cs typeface="Inter"/>
-              </a:rPr>
-              <a:t>SQLite speichert den Eintrag</a:t>
-            </a:r>
-          </a:p>
-        </p:txBody>
-      </p:sp>
-      <p:sp>
-        <p:nvSpPr>
-          <p:cNvPr id="12" name="">
-            <a:extLst xmlns:a="http://schemas.openxmlformats.org/drawingml/2006/main">
-              <a:ext uri="{FF2B5EF4-FFF2-40B4-BE49-F238E27FC236}">
-                <a16:creationId xmlns:a16="http://schemas.microsoft.com/office/drawing/2014/main" id="{9D2E9B2E-F109-48A3-87FD-CDE921AB159F}"/>
-              </a:ext>
-            </a:extLst>
-          </p:cNvPr>
-          <p:cNvSpPr>
-            <a:spLocks xmlns:a="http://schemas.openxmlformats.org/drawingml/2006/main" noGrp="1"/>
-          </p:cNvSpPr>
-          <p:nvPr/>
-        </p:nvSpPr>
-        <p:spPr>
-          <a:xfrm xmlns:a="http://schemas.openxmlformats.org/drawingml/2006/main">
-            <a:off x="1362075" y="4314825"/>
-            <a:ext cx="9525000" cy="295275"/>
-          </a:xfrm>
-          <a:prstGeom xmlns:a="http://schemas.openxmlformats.org/drawingml/2006/main" prst="rect">
-            <a:avLst/>
-          </a:prstGeom>
-          <a:noFill xmlns:a="http://schemas.openxmlformats.org/drawingml/2006/main"/>
-          <a:ln xmlns:a="http://schemas.openxmlformats.org/drawingml/2006/main" w="0">
-            <a:noFill/>
-          </a:ln>
-        </p:spPr>
-        <p:txBody>
-          <a:bodyPr xmlns:a="http://schemas.openxmlformats.org/drawingml/2006/main" wrap="square" lIns="0" tIns="0" rIns="0" bIns="0" anchor="t">
-            <a:noAutofit/>
-          </a:bodyPr>
-          <a:lstStyle xmlns:a="http://schemas.openxmlformats.org/drawingml/2006/main"/>
-          <a:p xmlns:a="http://schemas.openxmlformats.org/drawingml/2006/main">
-            <a:pPr algn="l">
-              <a:defRPr sz="1575" b="0">
-                <a:solidFill>
-                  <a:srgbClr val="6E6D68"/>
-                </a:solidFill>
-                <a:latin typeface="Inter"/>
-                <a:ea typeface="Inter"/>
-                <a:cs typeface="Inter"/>
-              </a:defRPr>
-            </a:pPr>
-            <a:r>
-              <a:rPr sz="1575" b="0">
-                <a:solidFill>
-                  <a:srgbClr val="6E6D68"/>
-                </a:solidFill>
-                <a:latin typeface="Inter"/>
-                <a:ea typeface="Inter"/>
-                <a:cs typeface="Inter"/>
-              </a:rPr>
-              <a:t>expenses.js + db.js</a:t>
-            </a:r>
-          </a:p>
-        </p:txBody>
-      </p:sp>
-      <p:sp>
-        <p:nvSpPr>
-          <p:cNvPr id="13" name="">
-            <a:extLst xmlns:a="http://schemas.openxmlformats.org/drawingml/2006/main">
-              <a:ext uri="{FF2B5EF4-FFF2-40B4-BE49-F238E27FC236}">
-                <a16:creationId xmlns:a16="http://schemas.microsoft.com/office/drawing/2014/main" id="{0627361B-3A21-4E5E-ADC1-66AD8EA645B0}"/>
-              </a:ext>
-            </a:extLst>
-          </p:cNvPr>
-          <p:cNvSpPr>
-            <a:spLocks xmlns:a="http://schemas.openxmlformats.org/drawingml/2006/main" noGrp="1"/>
-          </p:cNvSpPr>
-          <p:nvPr/>
-        </p:nvSpPr>
-        <p:spPr>
-          <a:xfrm xmlns:a="http://schemas.openxmlformats.org/drawingml/2006/main">
-            <a:off x="628650" y="4743450"/>
-            <a:ext cx="495300" cy="561975"/>
-          </a:xfrm>
-          <a:prstGeom xmlns:a="http://schemas.openxmlformats.org/drawingml/2006/main" prst="rect">
-            <a:avLst/>
-          </a:prstGeom>
-          <a:noFill xmlns:a="http://schemas.openxmlformats.org/drawingml/2006/main"/>
-          <a:ln xmlns:a="http://schemas.openxmlformats.org/drawingml/2006/main" w="0">
-            <a:noFill/>
-          </a:ln>
-        </p:spPr>
-        <p:txBody>
-          <a:bodyPr xmlns:a="http://schemas.openxmlformats.org/drawingml/2006/main" wrap="square" lIns="0" tIns="0" rIns="0" bIns="0" anchor="t">
-            <a:noAutofit/>
-          </a:bodyPr>
-          <a:lstStyle xmlns:a="http://schemas.openxmlformats.org/drawingml/2006/main"/>
-          <a:p xmlns:a="http://schemas.openxmlformats.org/drawingml/2006/main">
-            <a:pPr algn="l">
-              <a:defRPr sz="2700" b="0">
-                <a:solidFill>
-                  <a:srgbClr val="1F5A45"/>
-                </a:solidFill>
-                <a:latin typeface="Newsreader"/>
-                <a:ea typeface="Newsreader"/>
-                <a:cs typeface="Newsreader"/>
-              </a:defRPr>
-            </a:pPr>
-            <a:r>
-              <a:rPr sz="2700" b="0">
-                <a:solidFill>
-                  <a:srgbClr val="1F5A45"/>
-                </a:solidFill>
-                <a:latin typeface="Newsreader"/>
-                <a:ea typeface="Newsreader"/>
-                <a:cs typeface="Newsreader"/>
-              </a:rPr>
-              <a:t>4</a:t>
-            </a:r>
-          </a:p>
-        </p:txBody>
-      </p:sp>
-      <p:sp>
-        <p:nvSpPr>
-          <p:cNvPr id="14" name="">
-            <a:extLst xmlns:a="http://schemas.openxmlformats.org/drawingml/2006/main">
-              <a:ext uri="{FF2B5EF4-FFF2-40B4-BE49-F238E27FC236}">
-                <a16:creationId xmlns:a16="http://schemas.microsoft.com/office/drawing/2014/main" id="{AEC96999-3334-41AC-BBD8-477CF900639A}"/>
-              </a:ext>
-            </a:extLst>
-          </p:cNvPr>
-          <p:cNvSpPr>
-            <a:spLocks xmlns:a="http://schemas.openxmlformats.org/drawingml/2006/main" noGrp="1"/>
-          </p:cNvSpPr>
-          <p:nvPr/>
-        </p:nvSpPr>
-        <p:spPr>
-          <a:xfrm xmlns:a="http://schemas.openxmlformats.org/drawingml/2006/main">
-            <a:off x="1343025" y="4743450"/>
-            <a:ext cx="9810750" cy="428625"/>
-          </a:xfrm>
-          <a:prstGeom xmlns:a="http://schemas.openxmlformats.org/drawingml/2006/main" prst="rect">
-            <a:avLst/>
-          </a:prstGeom>
-          <a:noFill xmlns:a="http://schemas.openxmlformats.org/drawingml/2006/main"/>
-          <a:ln xmlns:a="http://schemas.openxmlformats.org/drawingml/2006/main" w="0">
-            <a:noFill/>
-          </a:ln>
-        </p:spPr>
-        <p:txBody>
-          <a:bodyPr xmlns:a="http://schemas.openxmlformats.org/drawingml/2006/main" wrap="square" lIns="0" tIns="0" rIns="0" bIns="0" anchor="t">
-            <a:noAutofit/>
-          </a:bodyPr>
-          <a:lstStyle xmlns:a="http://schemas.openxmlformats.org/drawingml/2006/main"/>
-          <a:p xmlns:a="http://schemas.openxmlformats.org/drawingml/2006/main">
-            <a:pPr algn="l">
-              <a:defRPr sz="2175" b="0">
-                <a:solidFill>
-                  <a:srgbClr val="15171A"/>
-                </a:solidFill>
-                <a:latin typeface="Inter"/>
-                <a:ea typeface="Inter"/>
-                <a:cs typeface="Inter"/>
-              </a:defRPr>
-            </a:pPr>
-            <a:r>
-              <a:rPr sz="2175" b="0">
-                <a:solidFill>
-                  <a:srgbClr val="15171A"/>
-                </a:solidFill>
-                <a:latin typeface="Inter"/>
-                <a:ea typeface="Inter"/>
-                <a:cs typeface="Inter"/>
-              </a:rPr>
-              <a:t>Übersicht berechnet das Budget neu</a:t>
-            </a:r>
-          </a:p>
-        </p:txBody>
-      </p:sp>
-      <p:sp>
-        <p:nvSpPr>
-          <p:cNvPr id="15" name="">
-            <a:extLst xmlns:a="http://schemas.openxmlformats.org/drawingml/2006/main">
-              <a:ext uri="{FF2B5EF4-FFF2-40B4-BE49-F238E27FC236}">
-                <a16:creationId xmlns:a16="http://schemas.microsoft.com/office/drawing/2014/main" id="{B1E7D155-1E57-43D3-9AD3-560A6CF5616A}"/>
-              </a:ext>
-            </a:extLst>
-          </p:cNvPr>
-          <p:cNvSpPr>
-            <a:spLocks xmlns:a="http://schemas.openxmlformats.org/drawingml/2006/main" noGrp="1"/>
-          </p:cNvSpPr>
-          <p:nvPr/>
-        </p:nvSpPr>
-        <p:spPr>
-          <a:xfrm xmlns:a="http://schemas.openxmlformats.org/drawingml/2006/main">
-            <a:off x="1362075" y="5162550"/>
-            <a:ext cx="9525000" cy="295275"/>
-          </a:xfrm>
-          <a:prstGeom xmlns:a="http://schemas.openxmlformats.org/drawingml/2006/main" prst="rect">
-            <a:avLst/>
-          </a:prstGeom>
-          <a:noFill xmlns:a="http://schemas.openxmlformats.org/drawingml/2006/main"/>
-          <a:ln xmlns:a="http://schemas.openxmlformats.org/drawingml/2006/main" w="0">
-            <a:noFill/>
-          </a:ln>
-        </p:spPr>
-        <p:txBody>
-          <a:bodyPr xmlns:a="http://schemas.openxmlformats.org/drawingml/2006/main" wrap="square" lIns="0" tIns="0" rIns="0" bIns="0" anchor="t">
-            <a:noAutofit/>
-          </a:bodyPr>
-          <a:lstStyle xmlns:a="http://schemas.openxmlformats.org/drawingml/2006/main"/>
-          <a:p xmlns:a="http://schemas.openxmlformats.org/drawingml/2006/main">
-            <a:pPr algn="l">
-              <a:defRPr sz="1575" b="0">
-                <a:solidFill>
-                  <a:srgbClr val="6E6D68"/>
-                </a:solidFill>
-                <a:latin typeface="Inter"/>
-                <a:ea typeface="Inter"/>
-                <a:cs typeface="Inter"/>
-              </a:defRPr>
-            </a:pPr>
-            <a:r>
-              <a:rPr sz="1575" b="0">
-                <a:solidFill>
-                  <a:srgbClr val="6E6D68"/>
-                </a:solidFill>
-                <a:latin typeface="Inter"/>
-                <a:ea typeface="Inter"/>
-                <a:cs typeface="Inter"/>
-              </a:rPr>
-              <a:t>OverviewScreen + getBudgetStatus</a:t>
-            </a:r>
-          </a:p>
-        </p:txBody>
-      </p:sp>
-      <p:sp>
-        <p:nvSpPr>
-          <p:cNvPr id="16" name="">
-            <a:extLst xmlns:a="http://schemas.openxmlformats.org/drawingml/2006/main">
-              <a:ext uri="{FF2B5EF4-FFF2-40B4-BE49-F238E27FC236}">
-                <a16:creationId xmlns:a16="http://schemas.microsoft.com/office/drawing/2014/main" id="{1597DC7C-FAD4-4FBD-881D-EF604F14FAF4}"/>
-              </a:ext>
-            </a:extLst>
-          </p:cNvPr>
-          <p:cNvSpPr>
-            <a:spLocks xmlns:a="http://schemas.openxmlformats.org/drawingml/2006/main" noGrp="1"/>
-          </p:cNvSpPr>
-          <p:nvPr/>
-        </p:nvSpPr>
-        <p:spPr>
-          <a:xfrm xmlns:a="http://schemas.openxmlformats.org/drawingml/2006/main">
-            <a:off x="7343775" y="1485900"/>
-            <a:ext cx="4124325" cy="419100"/>
-          </a:xfrm>
-          <a:prstGeom xmlns:a="http://schemas.openxmlformats.org/drawingml/2006/main" prst="rect">
-            <a:avLst/>
-          </a:prstGeom>
-          <a:noFill xmlns:a="http://schemas.openxmlformats.org/drawingml/2006/main"/>
-          <a:ln xmlns:a="http://schemas.openxmlformats.org/drawingml/2006/main" w="0">
-            <a:noFill/>
-          </a:ln>
-        </p:spPr>
-        <p:txBody>
-          <a:bodyPr xmlns:a="http://schemas.openxmlformats.org/drawingml/2006/main" wrap="square" lIns="0" tIns="0" rIns="0" bIns="0" anchor="t">
-            <a:noAutofit/>
-          </a:bodyPr>
-          <a:lstStyle xmlns:a="http://schemas.openxmlformats.org/drawingml/2006/main"/>
-          <a:p xmlns:a="http://schemas.openxmlformats.org/drawingml/2006/main">
-            <a:pPr algn="r">
-              <a:defRPr sz="2025" b="0">
-                <a:solidFill>
-                  <a:srgbClr val="1F5A45"/>
-                </a:solidFill>
-                <a:latin typeface="Newsreader"/>
-                <a:ea typeface="Newsreader"/>
-                <a:cs typeface="Newsreader"/>
-              </a:defRPr>
-            </a:pPr>
-            <a:r>
-              <a:rPr sz="2025" b="0">
-                <a:solidFill>
-                  <a:srgbClr val="1F5A45"/>
-                </a:solidFill>
-                <a:latin typeface="Newsreader"/>
-                <a:ea typeface="Newsreader"/>
-                <a:cs typeface="Newsreader"/>
-              </a:rPr>
-              <a:t>CHF 14.80 = 1480 Rappen</a:t>
-            </a:r>
-          </a:p>
-        </p:txBody>
-      </p:sp>
+        </p:spPr>
+      </p:pic>
     </p:spTree>
     <p:extLst>
       <p:ext uri="{BB962C8B-B14F-4D97-AF65-F5344CB8AC3E}">
-        <p14:creationId xmlns:p14="http://schemas.microsoft.com/office/powerpoint/2010/main" val="816071995"/>
+        <p14:creationId xmlns:p14="http://schemas.microsoft.com/office/powerpoint/2010/main" val="351427784"/>
       </p:ext>
     </p:extLst>
   </p:cSld>
@@ -6157,10 +5978,10 @@
       </p:grpSpPr>
       <p:sp>
         <p:nvSpPr>
-          <p:cNvPr id="5" name="">
+          <p:cNvPr id="6" name="">
             <a:extLst xmlns:a="http://schemas.openxmlformats.org/drawingml/2006/main">
               <a:ext uri="{FF2B5EF4-FFF2-40B4-BE49-F238E27FC236}">
-                <a16:creationId xmlns:a16="http://schemas.microsoft.com/office/drawing/2014/main" id="{C56F8B8F-BB3B-4BED-8B04-22544C2DA07E}"/>
+                <a16:creationId xmlns:a16="http://schemas.microsoft.com/office/drawing/2014/main" id="{4EE7C5B4-8525-4812-AF5F-1C45AEE2FB6D}"/>
               </a:ext>
             </a:extLst>
           </p:cNvPr>
@@ -6217,7 +6038,7 @@
           <p:cNvPr id="2" name="">
             <a:extLst xmlns:a="http://schemas.openxmlformats.org/drawingml/2006/main">
               <a:ext uri="{FF2B5EF4-FFF2-40B4-BE49-F238E27FC236}">
-                <a16:creationId xmlns:a16="http://schemas.microsoft.com/office/drawing/2014/main" id="{A282006B-0F60-4F4A-8534-0F242F77AF0B}"/>
+                <a16:creationId xmlns:a16="http://schemas.microsoft.com/office/drawing/2014/main" id="{8AC3A208-B26D-4EDC-8453-63833FF1F763}"/>
               </a:ext>
             </a:extLst>
           </p:cNvPr>
@@ -6264,20 +6085,77 @@
                 <a:ea typeface="Newsreader"/>
                 <a:cs typeface="Newsreader"/>
               </a:rPr>
-              <a:t>Konzept und Umsetzung</a:t>
+              <a:t>Die Technik hinter Spendly</a:t>
+            </a:r>
+          </a:p>
+        </p:txBody>
+      </p:sp>
+      <p:sp>
+        <p:nvSpPr>
+          <p:cNvPr id="3" name="">
+            <a:extLst xmlns:a="http://schemas.openxmlformats.org/drawingml/2006/main">
+              <a:ext uri="{FF2B5EF4-FFF2-40B4-BE49-F238E27FC236}">
+                <a16:creationId xmlns:a16="http://schemas.microsoft.com/office/drawing/2014/main" id="{25E6438F-AD48-40A5-BB46-864AB0188D07}"/>
+              </a:ext>
+            </a:extLst>
+          </p:cNvPr>
+          <p:cNvSpPr>
+            <a:spLocks xmlns:a="http://schemas.openxmlformats.org/drawingml/2006/main" noGrp="1"/>
+          </p:cNvSpPr>
+          <p:nvPr/>
+        </p:nvSpPr>
+        <p:spPr>
+          <a:xfrm xmlns:a="http://schemas.openxmlformats.org/drawingml/2006/main">
+            <a:off x="619125" y="1362075"/>
+            <a:ext cx="10953750" cy="381000"/>
+          </a:xfrm>
+          <a:prstGeom xmlns:a="http://schemas.openxmlformats.org/drawingml/2006/main" prst="rect">
+            <a:avLst/>
+          </a:prstGeom>
+          <a:noFill xmlns:a="http://schemas.openxmlformats.org/drawingml/2006/main"/>
+          <a:ln xmlns:a="http://schemas.openxmlformats.org/drawingml/2006/main" w="0">
+            <a:noFill/>
+          </a:ln>
+        </p:spPr>
+        <p:txBody>
+          <a:bodyPr xmlns:a="http://schemas.openxmlformats.org/drawingml/2006/main" wrap="square" lIns="0" tIns="0" rIns="0" bIns="0" anchor="t">
+            <a:noAutofit/>
+          </a:bodyPr>
+          <a:lstStyle xmlns:a="http://schemas.openxmlformats.org/drawingml/2006/main"/>
+          <a:p xmlns:a="http://schemas.openxmlformats.org/drawingml/2006/main">
+            <a:pPr algn="l">
+              <a:defRPr sz="1875" b="0">
+                <a:solidFill>
+                  <a:srgbClr val="1F5A45"/>
+                </a:solidFill>
+                <a:latin typeface="Inter"/>
+                <a:ea typeface="Inter"/>
+                <a:cs typeface="Inter"/>
+              </a:defRPr>
+            </a:pPr>
+            <a:r>
+              <a:rPr sz="1875" b="0">
+                <a:solidFill>
+                  <a:srgbClr val="1F5A45"/>
+                </a:solidFill>
+                <a:latin typeface="Inter"/>
+                <a:ea typeface="Inter"/>
+                <a:cs typeface="Inter"/>
+              </a:rPr>
+              <a:t>React Native und Expo, lokale SQLite-Datenbank</a:t>
             </a:r>
           </a:p>
         </p:txBody>
       </p:sp>
       <p:graphicFrame>
         <p:nvGraphicFramePr>
-          <p:cNvPr id="7" name=""/>
+          <p:cNvPr id="9" name=""/>
           <p:cNvGraphicFramePr/>
           <p:nvPr/>
         </p:nvGraphicFramePr>
         <p:xfrm>
-          <a:off xmlns:a="http://schemas.openxmlformats.org/drawingml/2006/main" x="609600" y="1581150"/>
-          <a:ext xmlns:a="http://schemas.openxmlformats.org/drawingml/2006/main" cx="10953750" cy="4038600"/>
+          <a:off xmlns:a="http://schemas.openxmlformats.org/drawingml/2006/main" x="609600" y="2019300"/>
+          <a:ext xmlns:a="http://schemas.openxmlformats.org/drawingml/2006/main" cx="10953750" cy="3638550"/>
         </p:xfrm>
         <a:graphic xmlns:a="http://schemas.openxmlformats.org/drawingml/2006/main">
           <a:graphicData uri="http://schemas.openxmlformats.org/drawingml/2006/table">
@@ -6288,7 +6166,7 @@
                 <a:gridCol w="3810000"/>
                 <a:gridCol w="4143375"/>
               </a:tblGrid>
-              <a:tr h="609600">
+              <a:tr h="590550">
                 <a:tc>
                   <a:txBody>
                     <a:bodyPr/>
@@ -6303,11 +6181,11 @@
                           <a:ea typeface="Inter"/>
                           <a:cs typeface="Inter"/>
                         </a:rPr>
-                        <a:t>LB1-Konzept</a:t>
+                        <a:t>Aus LB1</a:t>
                       </a:r>
                     </a:p>
                   </a:txBody>
-                  <a:tcPr marL="171450" marR="171450" marT="142875" marB="142875" anchor="ctr">
+                  <a:tcPr marL="171450" marR="171450" marT="114300" marB="114300" anchor="ctr">
                     <a:lnL w="0">
                       <a:noFill/>
                     </a:lnL>
@@ -6339,7 +6217,7 @@
                       </a:r>
                     </a:p>
                   </a:txBody>
-                  <a:tcPr marL="171450" marR="171450" marT="142875" marB="142875" anchor="ctr">
+                  <a:tcPr marL="171450" marR="171450" marT="114300" marB="114300" anchor="ctr">
                     <a:lnT w="6191">
                       <a:solidFill>
                         <a:srgbClr val="D6D8D0"/>
@@ -6364,11 +6242,11 @@
                           <a:ea typeface="Inter"/>
                           <a:cs typeface="Inter"/>
                         </a:rPr>
-                        <a:t>Einordnung</a:t>
+                        <a:t>Ergebnis</a:t>
                       </a:r>
                     </a:p>
                   </a:txBody>
-                  <a:tcPr marL="171450" marR="171450" marT="142875" marB="142875" anchor="ctr">
+                  <a:tcPr marL="171450" marR="171450" marT="114300" marB="114300" anchor="ctr">
                     <a:lnR w="0">
                       <a:noFill/>
                     </a:lnR>
@@ -6383,7 +6261,7 @@
                   </a:tcPr>
                 </a:tc>
               </a:tr>
-              <a:tr h="857250">
+              <a:tr h="762000">
                 <a:tc>
                   <a:txBody>
                     <a:bodyPr/>
@@ -6402,7 +6280,7 @@
                       </a:r>
                     </a:p>
                   </a:txBody>
-                  <a:tcPr marL="171450" marR="171450" marT="142875" marB="142875" anchor="ctr">
+                  <a:tcPr marL="171450" marR="171450" marT="114300" marB="114300" anchor="ctr">
                     <a:lnL w="0">
                       <a:noFill/>
                     </a:lnL>
@@ -6425,11 +6303,171 @@
                           <a:ea typeface="Inter"/>
                           <a:cs typeface="Inter"/>
                         </a:rPr>
-                        <a:t>Monatswerte und Standard</a:t>
+                        <a:t>Eigene Monatswerte</a:t>
                       </a:r>
                     </a:p>
                   </a:txBody>
-                  <a:tcPr marL="171450" marR="171450" marT="142875" marB="142875" anchor="ctr">
+                  <a:tcPr marL="171450" marR="171450" marT="114300" marB="114300" anchor="ctr">
+                    <a:solidFill>
+                      <a:srgbClr val="F6F5F1"/>
+                    </a:solidFill>
+                  </a:tcPr>
+                </a:tc>
+                <a:tc>
+                  <a:txBody>
+                    <a:bodyPr/>
+                    <a:lstStyle/>
+                    <a:p>
+                      <a:r>
+                        <a:rPr sz="1875">
+                          <a:solidFill>
+                            <a:srgbClr val="15171A"/>
+                          </a:solidFill>
+                          <a:latin typeface="Inter"/>
+                          <a:ea typeface="Inter"/>
+                          <a:cs typeface="Inter"/>
+                        </a:rPr>
+                        <a:t>Alte Budgets bleiben erhalten</a:t>
+                      </a:r>
+                    </a:p>
+                  </a:txBody>
+                  <a:tcPr marL="171450" marR="171450" marT="114300" marB="114300" anchor="ctr">
+                    <a:lnR w="0">
+                      <a:noFill/>
+                    </a:lnR>
+                    <a:solidFill>
+                      <a:srgbClr val="F6F5F1"/>
+                    </a:solidFill>
+                  </a:tcPr>
+                </a:tc>
+              </a:tr>
+              <a:tr h="762000">
+                <a:tc>
+                  <a:txBody>
+                    <a:bodyPr/>
+                    <a:lstStyle/>
+                    <a:p>
+                      <a:r>
+                        <a:rPr sz="1875">
+                          <a:solidFill>
+                            <a:srgbClr val="15171A"/>
+                          </a:solidFill>
+                          <a:latin typeface="Inter"/>
+                          <a:ea typeface="Inter"/>
+                          <a:cs typeface="Inter"/>
+                        </a:rPr>
+                        <a:t>Rückgängig für 5 Sekunden</a:t>
+                      </a:r>
+                    </a:p>
+                  </a:txBody>
+                  <a:tcPr marL="171450" marR="171450" marT="114300" marB="114300" anchor="ctr">
+                    <a:lnL w="0">
+                      <a:noFill/>
+                    </a:lnL>
+                    <a:solidFill>
+                      <a:srgbClr val="F6F5F1"/>
+                    </a:solidFill>
+                  </a:tcPr>
+                </a:tc>
+                <a:tc>
+                  <a:txBody>
+                    <a:bodyPr/>
+                    <a:lstStyle/>
+                    <a:p>
+                      <a:r>
+                        <a:rPr sz="1875">
+                          <a:solidFill>
+                            <a:srgbClr val="15171A"/>
+                          </a:solidFill>
+                          <a:latin typeface="Inter"/>
+                          <a:ea typeface="Inter"/>
+                          <a:cs typeface="Inter"/>
+                        </a:rPr>
+                        <a:t>Frist in SQLite</a:t>
+                      </a:r>
+                    </a:p>
+                  </a:txBody>
+                  <a:tcPr marL="171450" marR="171450" marT="114300" marB="114300" anchor="ctr">
+                    <a:solidFill>
+                      <a:srgbClr val="F6F5F1"/>
+                    </a:solidFill>
+                  </a:tcPr>
+                </a:tc>
+                <a:tc>
+                  <a:txBody>
+                    <a:bodyPr/>
+                    <a:lstStyle/>
+                    <a:p>
+                      <a:r>
+                        <a:rPr sz="1875">
+                          <a:solidFill>
+                            <a:srgbClr val="15171A"/>
+                          </a:solidFill>
+                          <a:latin typeface="Inter"/>
+                          <a:ea typeface="Inter"/>
+                          <a:cs typeface="Inter"/>
+                        </a:rPr>
+                        <a:t>Bleibt nach Neustart gültig</a:t>
+                      </a:r>
+                    </a:p>
+                  </a:txBody>
+                  <a:tcPr marL="171450" marR="171450" marT="114300" marB="114300" anchor="ctr">
+                    <a:lnR w="0">
+                      <a:noFill/>
+                    </a:lnR>
+                    <a:solidFill>
+                      <a:srgbClr val="F6F5F1"/>
+                    </a:solidFill>
+                  </a:tcPr>
+                </a:tc>
+              </a:tr>
+              <a:tr h="762000">
+                <a:tc>
+                  <a:txBody>
+                    <a:bodyPr/>
+                    <a:lstStyle/>
+                    <a:p>
+                      <a:r>
+                        <a:rPr sz="1875">
+                          <a:solidFill>
+                            <a:srgbClr val="15171A"/>
+                          </a:solidFill>
+                          <a:latin typeface="Inter"/>
+                          <a:ea typeface="Inter"/>
+                          <a:cs typeface="Inter"/>
+                        </a:rPr>
+                        <a:t>Geld in ganzen Rappen</a:t>
+                      </a:r>
+                    </a:p>
+                  </a:txBody>
+                  <a:tcPr marL="171450" marR="171450" marT="114300" marB="114300" anchor="ctr">
+                    <a:lnL w="0">
+                      <a:noFill/>
+                    </a:lnL>
+                    <a:solidFill>
+                      <a:srgbClr val="F6F5F1"/>
+                    </a:solidFill>
+                  </a:tcPr>
+                </a:tc>
+                <a:tc>
+                  <a:txBody>
+                    <a:bodyPr/>
+                    <a:lstStyle/>
+                    <a:p>
+                      <a:r>
+                        <a:rPr sz="1875">
+                          <a:solidFill>
+                            <a:srgbClr val="15171A"/>
+                          </a:solidFill>
+                          <a:latin typeface="Inter"/>
+                          <a:ea typeface="Inter"/>
+                          <a:cs typeface="Inter"/>
+                        </a:rPr>
+                        <a:t>CHF 14.80 = 1480</a:t>
+                      </a:r>
+                    </a:p>
+                  </a:txBody>
+                  <a:tcPr marL="171450" marR="171450" marT="114300" marB="114300" anchor="ctr">
                     <a:solidFill>
                       <a:srgbClr val="F6F5F1"/>
                     </a:solidFill>
@@ -6453,7 +6491,7 @@
                       </a:r>
                     </a:p>
                   </a:txBody>
-                  <a:tcPr marL="171450" marR="171450" marT="142875" marB="142875" anchor="ctr">
+                  <a:tcPr marL="171450" marR="171450" marT="114300" marB="114300" anchor="ctr">
                     <a:lnR w="0">
                       <a:noFill/>
                     </a:lnR>
@@ -6463,87 +6501,7 @@
                   </a:tcPr>
                 </a:tc>
               </a:tr>
-              <a:tr h="857250">
-                <a:tc>
-                  <a:txBody>
-                    <a:bodyPr/>
-                    <a:lstStyle/>
-                    <a:p>
-                      <a:r>
-                        <a:rPr sz="1875">
-                          <a:solidFill>
-                            <a:srgbClr val="15171A"/>
-                          </a:solidFill>
-                          <a:latin typeface="Inter"/>
-                          <a:ea typeface="Inter"/>
-                          <a:cs typeface="Inter"/>
-                        </a:rPr>
-                        <a:t>Rückgängig für 5 Sekunden</a:t>
-                      </a:r>
-                    </a:p>
-                  </a:txBody>
-                  <a:tcPr marL="171450" marR="171450" marT="142875" marB="142875" anchor="ctr">
-                    <a:lnL w="0">
-                      <a:noFill/>
-                    </a:lnL>
-                    <a:solidFill>
-                      <a:srgbClr val="F6F5F1"/>
-                    </a:solidFill>
-                  </a:tcPr>
-                </a:tc>
-                <a:tc>
-                  <a:txBody>
-                    <a:bodyPr/>
-                    <a:lstStyle/>
-                    <a:p>
-                      <a:r>
-                        <a:rPr sz="1875">
-                          <a:solidFill>
-                            <a:srgbClr val="15171A"/>
-                          </a:solidFill>
-                          <a:latin typeface="Inter"/>
-                          <a:ea typeface="Inter"/>
-                          <a:cs typeface="Inter"/>
-                        </a:rPr>
-                        <a:t>Löschfrist in SQLite</a:t>
-                      </a:r>
-                    </a:p>
-                  </a:txBody>
-                  <a:tcPr marL="171450" marR="171450" marT="142875" marB="142875" anchor="ctr">
-                    <a:solidFill>
-                      <a:srgbClr val="F6F5F1"/>
-                    </a:solidFill>
-                  </a:tcPr>
-                </a:tc>
-                <a:tc>
-                  <a:txBody>
-                    <a:bodyPr/>
-                    <a:lstStyle/>
-                    <a:p>
-                      <a:r>
-                        <a:rPr sz="1875">
-                          <a:solidFill>
-                            <a:srgbClr val="15171A"/>
-                          </a:solidFill>
-                          <a:latin typeface="Inter"/>
-                          <a:ea typeface="Inter"/>
-                          <a:cs typeface="Inter"/>
-                        </a:rPr>
-                        <a:t>Frist bleibt gespeichert</a:t>
-                      </a:r>
-                    </a:p>
-                  </a:txBody>
-                  <a:tcPr marL="171450" marR="171450" marT="142875" marB="142875" anchor="ctr">
-                    <a:lnR w="0">
-                      <a:noFill/>
-                    </a:lnR>
-                    <a:solidFill>
-                      <a:srgbClr val="F6F5F1"/>
-                    </a:solidFill>
-                  </a:tcPr>
-                </a:tc>
-              </a:tr>
-              <a:tr h="857250">
+              <a:tr h="762000">
                 <a:tc>
                   <a:txBody>
                     <a:bodyPr/>
@@ -6562,87 +6520,7 @@
                       </a:r>
                     </a:p>
                   </a:txBody>
-                  <a:tcPr marL="171450" marR="171450" marT="142875" marB="142875" anchor="ctr">
-                    <a:lnL w="0">
-                      <a:noFill/>
-                    </a:lnL>
-                    <a:solidFill>
-                      <a:srgbClr val="F6F5F1"/>
-                    </a:solidFill>
-                  </a:tcPr>
-                </a:tc>
-                <a:tc>
-                  <a:txBody>
-                    <a:bodyPr/>
-                    <a:lstStyle/>
-                    <a:p>
-                      <a:r>
-                        <a:rPr sz="1875">
-                          <a:solidFill>
-                            <a:srgbClr val="15171A"/>
-                          </a:solidFill>
-                          <a:latin typeface="Inter"/>
-                          <a:ea typeface="Inter"/>
-                          <a:cs typeface="Inter"/>
-                        </a:rPr>
-                        <a:t>SHA-256 mit Salt</a:t>
-                      </a:r>
-                    </a:p>
-                  </a:txBody>
-                  <a:tcPr marL="171450" marR="171450" marT="142875" marB="142875" anchor="ctr">
-                    <a:solidFill>
-                      <a:srgbClr val="F6F5F1"/>
-                    </a:solidFill>
-                  </a:tcPr>
-                </a:tc>
-                <a:tc>
-                  <a:txBody>
-                    <a:bodyPr/>
-                    <a:lstStyle/>
-                    <a:p>
-                      <a:r>
-                        <a:rPr sz="1875">
-                          <a:solidFill>
-                            <a:srgbClr val="15171A"/>
-                          </a:solidFill>
-                          <a:latin typeface="Inter"/>
-                          <a:ea typeface="Inter"/>
-                          <a:cs typeface="Inter"/>
-                        </a:rPr>
-                        <a:t>Einfacher als geplant</a:t>
-                      </a:r>
-                    </a:p>
-                  </a:txBody>
-                  <a:tcPr marL="171450" marR="171450" marT="142875" marB="142875" anchor="ctr">
-                    <a:lnR w="0">
-                      <a:noFill/>
-                    </a:lnR>
-                    <a:solidFill>
-                      <a:srgbClr val="F6F5F1"/>
-                    </a:solidFill>
-                  </a:tcPr>
-                </a:tc>
-              </a:tr>
-              <a:tr h="857250">
-                <a:tc>
-                  <a:txBody>
-                    <a:bodyPr/>
-                    <a:lstStyle/>
-                    <a:p>
-                      <a:r>
-                        <a:rPr sz="1875">
-                          <a:solidFill>
-                            <a:srgbClr val="15171A"/>
-                          </a:solidFill>
-                          <a:latin typeface="Inter"/>
-                          <a:ea typeface="Inter"/>
-                          <a:cs typeface="Inter"/>
-                        </a:rPr>
-                        <a:t>Dark Mode optional</a:t>
-                      </a:r>
-                    </a:p>
-                  </a:txBody>
-                  <a:tcPr marL="171450" marR="171450" marT="142875" marB="142875" anchor="ctr">
+                  <a:tcPr marL="171450" marR="171450" marT="114300" marB="114300" anchor="ctr">
                     <a:lnL w="0">
                       <a:noFill/>
                     </a:lnL>
@@ -6670,11 +6548,11 @@
                           <a:ea typeface="Inter"/>
                           <a:cs typeface="Inter"/>
                         </a:rPr>
-                        <a:t>Hell, Dunkel und System</a:t>
+                        <a:t>SHA-256 mit Salt</a:t>
                       </a:r>
                     </a:p>
                   </a:txBody>
-                  <a:tcPr marL="171450" marR="171450" marT="142875" marB="142875" anchor="ctr">
+                  <a:tcPr marL="171450" marR="171450" marT="114300" marB="114300" anchor="ctr">
                     <a:lnB w="6191">
                       <a:solidFill>
                         <a:srgbClr val="D6D8D0"/>
@@ -6699,11 +6577,11 @@
                           <a:ea typeface="Inter"/>
                           <a:cs typeface="Inter"/>
                         </a:rPr>
-                        <a:t>Zusätzlicher Umfang</a:t>
+                        <a:t>Einfacher als geplant</a:t>
                       </a:r>
                     </a:p>
                   </a:txBody>
-                  <a:tcPr marL="171450" marR="171450" marT="142875" marB="142875" anchor="ctr">
+                  <a:tcPr marL="171450" marR="171450" marT="114300" marB="114300" anchor="ctr">
                     <a:lnR w="0">
                       <a:noFill/>
                     </a:lnR>
@@ -6724,10 +6602,10 @@
       </p:graphicFrame>
       <p:sp>
         <p:nvSpPr>
-          <p:cNvPr id="4" name="">
+          <p:cNvPr id="5" name="">
             <a:extLst xmlns:a="http://schemas.openxmlformats.org/drawingml/2006/main">
               <a:ext uri="{FF2B5EF4-FFF2-40B4-BE49-F238E27FC236}">
-                <a16:creationId xmlns:a16="http://schemas.microsoft.com/office/drawing/2014/main" id="{9E8E28FA-CE20-4D04-A46C-C8E5297CCED2}"/>
+                <a16:creationId xmlns:a16="http://schemas.microsoft.com/office/drawing/2014/main" id="{AA30CCE4-EF7E-4B06-83BE-AF56F77B764A}"/>
               </a:ext>
             </a:extLst>
           </p:cNvPr>
@@ -6738,8 +6616,8 @@
         </p:nvSpPr>
         <p:spPr>
           <a:xfrm xmlns:a="http://schemas.openxmlformats.org/drawingml/2006/main">
-            <a:off x="628650" y="5953125"/>
-            <a:ext cx="10363200" cy="371475"/>
+            <a:off x="628650" y="5962650"/>
+            <a:ext cx="10363200" cy="342900"/>
           </a:xfrm>
           <a:prstGeom xmlns:a="http://schemas.openxmlformats.org/drawingml/2006/main" prst="rect">
             <a:avLst/>
@@ -6756,7 +6634,7 @@
           <a:lstStyle xmlns:a="http://schemas.openxmlformats.org/drawingml/2006/main"/>
           <a:p xmlns:a="http://schemas.openxmlformats.org/drawingml/2006/main">
             <a:pPr algn="l">
-              <a:defRPr sz="1875" b="0">
+              <a:defRPr sz="1725" b="0">
                 <a:solidFill>
                   <a:srgbClr val="1F5A45"/>
                 </a:solidFill>
@@ -6766,7 +6644,7 @@
               </a:defRPr>
             </a:pPr>
             <a:r>
-              <a:rPr sz="1875" b="0">
+              <a:rPr sz="1725" b="0">
                 <a:solidFill>
                   <a:srgbClr val="1F5A45"/>
                 </a:solidFill>
@@ -6774,7 +6652,7 @@
                 <a:ea typeface="Inter"/>
                 <a:cs typeface="Inter"/>
               </a:rPr>
-              <a:t>Lokale App mit fünf Hauptscreens bleibt der Kern</a:t>
+              <a:t>Formular prüft. Context koordiniert. SQLite speichert.</a:t>
             </a:r>
           </a:p>
         </p:txBody>
@@ -6782,7 +6660,7 @@
     </p:spTree>
     <p:extLst>
       <p:ext uri="{BB962C8B-B14F-4D97-AF65-F5344CB8AC3E}">
-        <p14:creationId xmlns:p14="http://schemas.microsoft.com/office/powerpoint/2010/main" val="1996201185"/>
+        <p14:creationId xmlns:p14="http://schemas.microsoft.com/office/powerpoint/2010/main" val="2086168124"/>
       </p:ext>
     </p:extLst>
   </p:cSld>
@@ -6813,7 +6691,7 @@
           <p:cNvPr id="9" name="">
             <a:extLst xmlns:a="http://schemas.openxmlformats.org/drawingml/2006/main">
               <a:ext uri="{FF2B5EF4-FFF2-40B4-BE49-F238E27FC236}">
-                <a16:creationId xmlns:a16="http://schemas.microsoft.com/office/drawing/2014/main" id="{3764DF07-043F-44FA-B162-302E08EFDFD5}"/>
+                <a16:creationId xmlns:a16="http://schemas.microsoft.com/office/drawing/2014/main" id="{063416A6-8014-4252-BAB3-2023F0DCE510}"/>
               </a:ext>
             </a:extLst>
           </p:cNvPr>
@@ -6870,7 +6748,7 @@
           <p:cNvPr id="2" name="">
             <a:extLst xmlns:a="http://schemas.openxmlformats.org/drawingml/2006/main">
               <a:ext uri="{FF2B5EF4-FFF2-40B4-BE49-F238E27FC236}">
-                <a16:creationId xmlns:a16="http://schemas.microsoft.com/office/drawing/2014/main" id="{69160282-A708-437A-8F80-DB2DA30DC705}"/>
+                <a16:creationId xmlns:a16="http://schemas.microsoft.com/office/drawing/2014/main" id="{DA7D1D0B-F4D5-4938-9E3A-E87D8658C438}"/>
               </a:ext>
             </a:extLst>
           </p:cNvPr>
@@ -6917,7 +6795,7 @@
                 <a:ea typeface="Newsreader"/>
                 <a:cs typeface="Newsreader"/>
               </a:rPr>
-              <a:t>Qualität und Tests</a:t>
+              <a:t>Der Kern funktioniert</a:t>
             </a:r>
           </a:p>
         </p:txBody>
@@ -6927,7 +6805,7 @@
           <p:cNvPr id="3" name="">
             <a:extLst xmlns:a="http://schemas.openxmlformats.org/drawingml/2006/main">
               <a:ext uri="{FF2B5EF4-FFF2-40B4-BE49-F238E27FC236}">
-                <a16:creationId xmlns:a16="http://schemas.microsoft.com/office/drawing/2014/main" id="{1B34B693-BDDF-409B-9795-608DA9110D39}"/>
+                <a16:creationId xmlns:a16="http://schemas.microsoft.com/office/drawing/2014/main" id="{52E7DB7D-70D5-44A6-8DF5-A136BF48DB2E}"/>
               </a:ext>
             </a:extLst>
           </p:cNvPr>
@@ -6938,8 +6816,8 @@
         </p:nvSpPr>
         <p:spPr>
           <a:xfrm xmlns:a="http://schemas.openxmlformats.org/drawingml/2006/main">
-            <a:off x="609600" y="1628775"/>
-            <a:ext cx="3733800" cy="1562100"/>
+            <a:off x="609600" y="1581150"/>
+            <a:ext cx="4143375" cy="1704975"/>
           </a:xfrm>
           <a:prstGeom xmlns:a="http://schemas.openxmlformats.org/drawingml/2006/main" prst="rect">
             <a:avLst/>
@@ -6956,7 +6834,7 @@
           <a:lstStyle xmlns:a="http://schemas.openxmlformats.org/drawingml/2006/main"/>
           <a:p xmlns:a="http://schemas.openxmlformats.org/drawingml/2006/main">
             <a:pPr algn="l">
-              <a:defRPr sz="9825" b="0">
+              <a:defRPr sz="10575" b="0">
                 <a:solidFill>
                   <a:srgbClr val="1F5A45"/>
                 </a:solidFill>
@@ -6966,7 +6844,7 @@
               </a:defRPr>
             </a:pPr>
             <a:r>
-              <a:rPr sz="9825" b="0">
+              <a:rPr sz="10575" b="0">
                 <a:solidFill>
                   <a:srgbClr val="1F5A45"/>
                 </a:solidFill>
@@ -6984,7 +6862,7 @@
           <p:cNvPr id="4" name="">
             <a:extLst xmlns:a="http://schemas.openxmlformats.org/drawingml/2006/main">
               <a:ext uri="{FF2B5EF4-FFF2-40B4-BE49-F238E27FC236}">
-                <a16:creationId xmlns:a16="http://schemas.microsoft.com/office/drawing/2014/main" id="{4F9B26D0-8C86-43F5-8D80-DFAB495520C2}"/>
+                <a16:creationId xmlns:a16="http://schemas.microsoft.com/office/drawing/2014/main" id="{8D2C342F-07F6-41A2-BDE2-B8E11691007F}"/>
               </a:ext>
             </a:extLst>
           </p:cNvPr>
@@ -6995,8 +6873,8 @@
         </p:nvSpPr>
         <p:spPr>
           <a:xfrm xmlns:a="http://schemas.openxmlformats.org/drawingml/2006/main">
-            <a:off x="647700" y="3333750"/>
-            <a:ext cx="5048250" cy="704850"/>
+            <a:off x="647700" y="3419475"/>
+            <a:ext cx="5238750" cy="752475"/>
           </a:xfrm>
           <a:prstGeom xmlns:a="http://schemas.openxmlformats.org/drawingml/2006/main" prst="rect">
             <a:avLst/>
@@ -7041,7 +6919,7 @@
           <p:cNvPr id="5" name="">
             <a:extLst xmlns:a="http://schemas.openxmlformats.org/drawingml/2006/main">
               <a:ext uri="{FF2B5EF4-FFF2-40B4-BE49-F238E27FC236}">
-                <a16:creationId xmlns:a16="http://schemas.microsoft.com/office/drawing/2014/main" id="{3A62F4EE-4B2A-42AF-A881-F1B3F5770BF8}"/>
+                <a16:creationId xmlns:a16="http://schemas.microsoft.com/office/drawing/2014/main" id="{F957634E-C5EB-4984-8CDD-ECF315387FC0}"/>
               </a:ext>
             </a:extLst>
           </p:cNvPr>
@@ -7052,8 +6930,8 @@
         </p:nvSpPr>
         <p:spPr>
           <a:xfrm xmlns:a="http://schemas.openxmlformats.org/drawingml/2006/main">
-            <a:off x="647700" y="4419600"/>
-            <a:ext cx="5305425" cy="1457325"/>
+            <a:off x="647700" y="4552950"/>
+            <a:ext cx="5524500" cy="1190625"/>
           </a:xfrm>
           <a:prstGeom xmlns:a="http://schemas.openxmlformats.org/drawingml/2006/main" prst="rect">
             <a:avLst/>
@@ -7111,7 +6989,7 @@
                 <a:ea typeface="Inter"/>
                 <a:cs typeface="Inter"/>
               </a:rPr>
-              <a:t>Rechenlogik und Sicherheitsregeln</a:t>
+              <a:t>Echtes SQLite in den Regressionen</a:t>
             </a:r>
           </a:p>
           <a:p xmlns:a="http://schemas.openxmlformats.org/drawingml/2006/main">
@@ -7134,7 +7012,7 @@
                 <a:ea typeface="Inter"/>
                 <a:cs typeface="Inter"/>
               </a:rPr>
-              <a:t>SQLite-Regressionen und ESLint</a:t>
+              <a:t>ESLint ohne Fehler</a:t>
             </a:r>
           </a:p>
         </p:txBody>
@@ -7144,7 +7022,7 @@
           <p:cNvPr id="6" name="">
             <a:extLst xmlns:a="http://schemas.openxmlformats.org/drawingml/2006/main">
               <a:ext uri="{FF2B5EF4-FFF2-40B4-BE49-F238E27FC236}">
-                <a16:creationId xmlns:a16="http://schemas.microsoft.com/office/drawing/2014/main" id="{8D14CC06-CD8A-4062-8797-088EE21F12E1}"/>
+                <a16:creationId xmlns:a16="http://schemas.microsoft.com/office/drawing/2014/main" id="{7B2CF585-AD2D-4C64-821F-C4FA2A6C6894}"/>
               </a:ext>
             </a:extLst>
           </p:cNvPr>
@@ -7156,7 +7034,7 @@
         <p:spPr>
           <a:xfrm xmlns:a="http://schemas.openxmlformats.org/drawingml/2006/main">
             <a:off x="6838950" y="1819275"/>
-            <a:ext cx="4572000" cy="523875"/>
+            <a:ext cx="4667250" cy="790575"/>
           </a:xfrm>
           <a:prstGeom xmlns:a="http://schemas.openxmlformats.org/drawingml/2006/main" prst="rect">
             <a:avLst/>
@@ -7191,7 +7069,7 @@
                 <a:ea typeface="Newsreader"/>
                 <a:cs typeface="Newsreader"/>
               </a:rPr>
-              <a:t>Nachweis an der App</a:t>
+              <a:t>Eigener iOS-Release-Build</a:t>
             </a:r>
           </a:p>
         </p:txBody>
@@ -7201,7 +7079,7 @@
           <p:cNvPr id="7" name="">
             <a:extLst xmlns:a="http://schemas.openxmlformats.org/drawingml/2006/main">
               <a:ext uri="{FF2B5EF4-FFF2-40B4-BE49-F238E27FC236}">
-                <a16:creationId xmlns:a16="http://schemas.microsoft.com/office/drawing/2014/main" id="{19DD42BB-74B0-462F-822E-30F1BECBFB3E}"/>
+                <a16:creationId xmlns:a16="http://schemas.microsoft.com/office/drawing/2014/main" id="{620EC957-E466-4276-835A-DAB1AFF847A5}"/>
               </a:ext>
             </a:extLst>
           </p:cNvPr>
@@ -7212,8 +7090,8 @@
         </p:nvSpPr>
         <p:spPr>
           <a:xfrm xmlns:a="http://schemas.openxmlformats.org/drawingml/2006/main">
-            <a:off x="6886575" y="2647950"/>
-            <a:ext cx="4572000" cy="2571750"/>
+            <a:off x="6886575" y="2952750"/>
+            <a:ext cx="4572000" cy="1943100"/>
           </a:xfrm>
           <a:prstGeom xmlns:a="http://schemas.openxmlformats.org/drawingml/2006/main" prst="rect">
             <a:avLst/>
@@ -7248,7 +7126,7 @@
                 <a:ea typeface="Inter"/>
                 <a:cs typeface="Inter"/>
               </a:rPr>
-              <a:t>Erstellen, bearbeiten und suchen</a:t>
+              <a:t>Erfassen und korrigieren</a:t>
             </a:r>
           </a:p>
           <a:p xmlns:a="http://schemas.openxmlformats.org/drawingml/2006/main">
@@ -7271,7 +7149,7 @@
                 <a:ea typeface="Inter"/>
                 <a:cs typeface="Inter"/>
               </a:rPr>
-              <a:t>Löschen und wiederherstellen</a:t>
+              <a:t>Löschen und zurückholen</a:t>
             </a:r>
           </a:p>
           <a:p xmlns:a="http://schemas.openxmlformats.org/drawingml/2006/main">
@@ -7294,7 +7172,7 @@
                 <a:ea typeface="Inter"/>
                 <a:cs typeface="Inter"/>
               </a:rPr>
-              <a:t>Neustart ohne Entwicklungsserver</a:t>
+              <a:t>Nach Neustart wiederfinden</a:t>
             </a:r>
           </a:p>
           <a:p xmlns:a="http://schemas.openxmlformats.org/drawingml/2006/main">
@@ -7317,7 +7195,7 @@
                 <a:ea typeface="Inter"/>
                 <a:cs typeface="Inter"/>
               </a:rPr>
-              <a:t>Getrennte Monatsbudgets</a:t>
+              <a:t>Ohne Entwicklungsserver</a:t>
             </a:r>
           </a:p>
         </p:txBody>
@@ -7327,7 +7205,7 @@
           <p:cNvPr id="8" name="">
             <a:extLst xmlns:a="http://schemas.openxmlformats.org/drawingml/2006/main">
               <a:ext uri="{FF2B5EF4-FFF2-40B4-BE49-F238E27FC236}">
-                <a16:creationId xmlns:a16="http://schemas.microsoft.com/office/drawing/2014/main" id="{5CB2FAD3-95D4-4AA4-A899-BD8AEC9341EE}"/>
+                <a16:creationId xmlns:a16="http://schemas.microsoft.com/office/drawing/2014/main" id="{5E517A13-DED6-4C7B-AE1D-4F3AE45EB982}"/>
               </a:ext>
             </a:extLst>
           </p:cNvPr>
@@ -7338,8 +7216,8 @@
         </p:nvSpPr>
         <p:spPr>
           <a:xfrm xmlns:a="http://schemas.openxmlformats.org/drawingml/2006/main">
-            <a:off x="6877050" y="5429250"/>
-            <a:ext cx="4543425" cy="638175"/>
+            <a:off x="6877050" y="5476875"/>
+            <a:ext cx="4572000" cy="638175"/>
           </a:xfrm>
           <a:prstGeom xmlns:a="http://schemas.openxmlformats.org/drawingml/2006/main" prst="rect">
             <a:avLst/>
@@ -7356,7 +7234,7 @@
           <a:lstStyle xmlns:a="http://schemas.openxmlformats.org/drawingml/2006/main"/>
           <a:p xmlns:a="http://schemas.openxmlformats.org/drawingml/2006/main">
             <a:pPr algn="l">
-              <a:defRPr sz="1650" b="0">
+              <a:defRPr sz="1575" b="0">
                 <a:solidFill>
                   <a:srgbClr val="6E6D68"/>
                 </a:solidFill>
@@ -7366,7 +7244,7 @@
               </a:defRPr>
             </a:pPr>
             <a:r>
-              <a:rPr sz="1650" b="0">
+              <a:rPr sz="1575" b="0">
                 <a:solidFill>
                   <a:srgbClr val="6E6D68"/>
                 </a:solidFill>
@@ -7374,7 +7252,30 @@
                 <a:ea typeface="Inter"/>
                 <a:cs typeface="Inter"/>
               </a:rPr>
-              <a:t>Physischer Face-ID-Scan und Nutzertest offen</a:t>
+              <a:t>Face ID simuliert geprüft.</a:t>
+            </a:r>
+          </a:p>
+          <a:p xmlns:a="http://schemas.openxmlformats.org/drawingml/2006/main">
+            <a:pPr algn="l">
+              <a:defRPr sz="1575" b="0">
+                <a:solidFill>
+                  <a:srgbClr val="6E6D68"/>
+                </a:solidFill>
+                <a:latin typeface="Inter"/>
+                <a:ea typeface="Inter"/>
+                <a:cs typeface="Inter"/>
+              </a:defRPr>
+            </a:pPr>
+            <a:r>
+              <a:rPr sz="1575" b="0">
+                <a:solidFill>
+                  <a:srgbClr val="6E6D68"/>
+                </a:solidFill>
+                <a:latin typeface="Inter"/>
+                <a:ea typeface="Inter"/>
+                <a:cs typeface="Inter"/>
+              </a:rPr>
+              <a:t>Physischer Scan und Nutzertest offen.</a:t>
             </a:r>
           </a:p>
         </p:txBody>
@@ -7382,7 +7283,7 @@
     </p:spTree>
     <p:extLst>
       <p:ext uri="{BB962C8B-B14F-4D97-AF65-F5344CB8AC3E}">
-        <p14:creationId xmlns:p14="http://schemas.microsoft.com/office/powerpoint/2010/main" val="1933120105"/>
+        <p14:creationId xmlns:p14="http://schemas.microsoft.com/office/powerpoint/2010/main" val="662198175"/>
       </p:ext>
     </p:extLst>
   </p:cSld>
@@ -7410,10 +7311,10 @@
       </p:grpSpPr>
       <p:sp>
         <p:nvSpPr>
-          <p:cNvPr id="8" name="">
+          <p:cNvPr id="12" name="">
             <a:extLst xmlns:a="http://schemas.openxmlformats.org/drawingml/2006/main">
               <a:ext uri="{FF2B5EF4-FFF2-40B4-BE49-F238E27FC236}">
-                <a16:creationId xmlns:a16="http://schemas.microsoft.com/office/drawing/2014/main" id="{AE02D11F-E3B8-47E7-BB16-C4FAD6C1234B}"/>
+                <a16:creationId xmlns:a16="http://schemas.microsoft.com/office/drawing/2014/main" id="{E3AB3D0D-9869-4890-8D07-CA4CEBC4DEE7}"/>
               </a:ext>
             </a:extLst>
           </p:cNvPr>
@@ -7470,7 +7371,7 @@
           <p:cNvPr id="2" name="">
             <a:extLst xmlns:a="http://schemas.openxmlformats.org/drawingml/2006/main">
               <a:ext uri="{FF2B5EF4-FFF2-40B4-BE49-F238E27FC236}">
-                <a16:creationId xmlns:a16="http://schemas.microsoft.com/office/drawing/2014/main" id="{ADCD3D4D-28D0-44EB-AA8A-1AC47FDEA845}"/>
+                <a16:creationId xmlns:a16="http://schemas.microsoft.com/office/drawing/2014/main" id="{A09BDF87-4E87-4F20-9F74-863E3B0B97BC}"/>
               </a:ext>
             </a:extLst>
           </p:cNvPr>
@@ -7517,7 +7418,7 @@
                 <a:ea typeface="Newsreader"/>
                 <a:cs typeface="Newsreader"/>
               </a:rPr>
-              <a:t>Herausforderungen</a:t>
+              <a:t>Der nächste Beweis: Alltag</a:t>
             </a:r>
           </a:p>
         </p:txBody>
@@ -7527,7 +7428,7 @@
           <p:cNvPr id="3" name="">
             <a:extLst xmlns:a="http://schemas.openxmlformats.org/drawingml/2006/main">
               <a:ext uri="{FF2B5EF4-FFF2-40B4-BE49-F238E27FC236}">
-                <a16:creationId xmlns:a16="http://schemas.microsoft.com/office/drawing/2014/main" id="{9B2C36E3-D346-4A2B-A838-0BCD39191A81}"/>
+                <a16:creationId xmlns:a16="http://schemas.microsoft.com/office/drawing/2014/main" id="{65C7381F-A525-4B91-9EF9-428FB348608B}"/>
               </a:ext>
             </a:extLst>
           </p:cNvPr>
@@ -7538,8 +7439,8 @@
         </p:nvSpPr>
         <p:spPr>
           <a:xfrm xmlns:a="http://schemas.openxmlformats.org/drawingml/2006/main">
-            <a:off x="609600" y="1724025"/>
-            <a:ext cx="7000875" cy="600075"/>
+            <a:off x="628650" y="1638300"/>
+            <a:ext cx="3429000" cy="1685925"/>
           </a:xfrm>
           <a:prstGeom xmlns:a="http://schemas.openxmlformats.org/drawingml/2006/main" prst="rect">
             <a:avLst/>
@@ -7556,7 +7457,7 @@
           <a:lstStyle xmlns:a="http://schemas.openxmlformats.org/drawingml/2006/main"/>
           <a:p xmlns:a="http://schemas.openxmlformats.org/drawingml/2006/main">
             <a:pPr algn="l">
-              <a:defRPr sz="2775" b="0">
+              <a:defRPr sz="10575" b="0">
                 <a:solidFill>
                   <a:srgbClr val="1F5A45"/>
                 </a:solidFill>
@@ -7566,7 +7467,7 @@
               </a:defRPr>
             </a:pPr>
             <a:r>
-              <a:rPr sz="2775" b="0">
+              <a:rPr sz="10575" b="0">
                 <a:solidFill>
                   <a:srgbClr val="1F5A45"/>
                 </a:solidFill>
@@ -7574,7 +7475,7 @@
                 <a:ea typeface="Newsreader"/>
                 <a:cs typeface="Newsreader"/>
               </a:rPr>
-              <a:t>Monate sauber trennen</a:t>
+              <a:t>5</a:t>
             </a:r>
           </a:p>
         </p:txBody>
@@ -7584,7 +7485,7 @@
           <p:cNvPr id="4" name="">
             <a:extLst xmlns:a="http://schemas.openxmlformats.org/drawingml/2006/main">
               <a:ext uri="{FF2B5EF4-FFF2-40B4-BE49-F238E27FC236}">
-                <a16:creationId xmlns:a16="http://schemas.microsoft.com/office/drawing/2014/main" id="{80773235-AF5A-4909-8B84-4A6A4486AEEB}"/>
+                <a16:creationId xmlns:a16="http://schemas.microsoft.com/office/drawing/2014/main" id="{20F42D9B-CE39-48AA-8E8A-88ED37CC2D38}"/>
               </a:ext>
             </a:extLst>
           </p:cNvPr>
@@ -7595,8 +7496,8 @@
         </p:nvSpPr>
         <p:spPr>
           <a:xfrm xmlns:a="http://schemas.openxmlformats.org/drawingml/2006/main">
-            <a:off x="647700" y="2457450"/>
-            <a:ext cx="6667500" cy="1066800"/>
+            <a:off x="666750" y="3429000"/>
+            <a:ext cx="5172075" cy="685800"/>
           </a:xfrm>
           <a:prstGeom xmlns:a="http://schemas.openxmlformats.org/drawingml/2006/main" prst="rect">
             <a:avLst/>
@@ -7613,7 +7514,7 @@
           <a:lstStyle xmlns:a="http://schemas.openxmlformats.org/drawingml/2006/main"/>
           <a:p xmlns:a="http://schemas.openxmlformats.org/drawingml/2006/main">
             <a:pPr algn="l">
-              <a:defRPr sz="2100" b="0">
+              <a:defRPr sz="2175" b="0">
                 <a:solidFill>
                   <a:srgbClr val="15171A"/>
                 </a:solidFill>
@@ -7623,7 +7524,7 @@
               </a:defRPr>
             </a:pPr>
             <a:r>
-              <a:rPr sz="2100" b="0">
+              <a:rPr sz="2175" b="0">
                 <a:solidFill>
                   <a:srgbClr val="15171A"/>
                 </a:solidFill>
@@ -7631,30 +7532,7 @@
                 <a:ea typeface="Inter"/>
                 <a:cs typeface="Inter"/>
               </a:rPr>
-              <a:t>Ein Budget gehört zu einem Monat.</a:t>
-            </a:r>
-          </a:p>
-          <a:p xmlns:a="http://schemas.openxmlformats.org/drawingml/2006/main">
-            <a:pPr algn="l">
-              <a:defRPr sz="2100" b="0">
-                <a:solidFill>
-                  <a:srgbClr val="15171A"/>
-                </a:solidFill>
-                <a:latin typeface="Inter"/>
-                <a:ea typeface="Inter"/>
-                <a:cs typeface="Inter"/>
-              </a:defRPr>
-            </a:pPr>
-            <a:r>
-              <a:rPr sz="2100" b="0">
-                <a:solidFill>
-                  <a:srgbClr val="15171A"/>
-                </a:solidFill>
-                <a:latin typeface="Inter"/>
-                <a:ea typeface="Inter"/>
-                <a:cs typeface="Inter"/>
-              </a:rPr>
-              <a:t>Neue Werte dürfen alte Monate nicht verändern.</a:t>
+              <a:t>Lernende oder Studierende</a:t>
             </a:r>
           </a:p>
         </p:txBody>
@@ -7664,7 +7542,7 @@
           <p:cNvPr id="5" name="">
             <a:extLst xmlns:a="http://schemas.openxmlformats.org/drawingml/2006/main">
               <a:ext uri="{FF2B5EF4-FFF2-40B4-BE49-F238E27FC236}">
-                <a16:creationId xmlns:a16="http://schemas.microsoft.com/office/drawing/2014/main" id="{EEA28210-CE7F-4087-AD13-54281C01F6FA}"/>
+                <a16:creationId xmlns:a16="http://schemas.microsoft.com/office/drawing/2014/main" id="{70E3F2B8-E084-4E3B-BA19-72B1DE7BDD7C}"/>
               </a:ext>
             </a:extLst>
           </p:cNvPr>
@@ -7675,8 +7553,8 @@
         </p:nvSpPr>
         <p:spPr>
           <a:xfrm xmlns:a="http://schemas.openxmlformats.org/drawingml/2006/main">
-            <a:off x="609600" y="3981450"/>
-            <a:ext cx="7000875" cy="590550"/>
+            <a:off x="666750" y="4419600"/>
+            <a:ext cx="5133975" cy="542925"/>
           </a:xfrm>
           <a:prstGeom xmlns:a="http://schemas.openxmlformats.org/drawingml/2006/main" prst="rect">
             <a:avLst/>
@@ -7693,7 +7571,7 @@
           <a:lstStyle xmlns:a="http://schemas.openxmlformats.org/drawingml/2006/main"/>
           <a:p xmlns:a="http://schemas.openxmlformats.org/drawingml/2006/main">
             <a:pPr algn="l">
-              <a:defRPr sz="2775" b="0">
+              <a:defRPr sz="2550" b="0">
                 <a:solidFill>
                   <a:srgbClr val="1F5A45"/>
                 </a:solidFill>
@@ -7703,7 +7581,7 @@
               </a:defRPr>
             </a:pPr>
             <a:r>
-              <a:rPr sz="2775" b="0">
+              <a:rPr sz="2550" b="0">
                 <a:solidFill>
                   <a:srgbClr val="1F5A45"/>
                 </a:solidFill>
@@ -7711,7 +7589,7 @@
                 <a:ea typeface="Newsreader"/>
                 <a:cs typeface="Newsreader"/>
               </a:rPr>
-              <a:t>Fehlerfälle mitdenken</a:t>
+              <a:t>1 Woche mit Spendly</a:t>
             </a:r>
           </a:p>
         </p:txBody>
@@ -7721,7 +7599,7 @@
           <p:cNvPr id="6" name="">
             <a:extLst xmlns:a="http://schemas.openxmlformats.org/drawingml/2006/main">
               <a:ext uri="{FF2B5EF4-FFF2-40B4-BE49-F238E27FC236}">
-                <a16:creationId xmlns:a16="http://schemas.microsoft.com/office/drawing/2014/main" id="{22573CD1-8D4C-429D-818C-A20398CC3667}"/>
+                <a16:creationId xmlns:a16="http://schemas.microsoft.com/office/drawing/2014/main" id="{C0423CC8-F1BD-4D6D-AE67-37DF605EAB04}"/>
               </a:ext>
             </a:extLst>
           </p:cNvPr>
@@ -7732,8 +7610,8 @@
         </p:nvSpPr>
         <p:spPr>
           <a:xfrm xmlns:a="http://schemas.openxmlformats.org/drawingml/2006/main">
-            <a:off x="647700" y="4724400"/>
-            <a:ext cx="6667500" cy="1133475"/>
+            <a:off x="666750" y="5295900"/>
+            <a:ext cx="5076825" cy="400050"/>
           </a:xfrm>
           <a:prstGeom xmlns:a="http://schemas.openxmlformats.org/drawingml/2006/main" prst="rect">
             <a:avLst/>
@@ -7750,27 +7628,118 @@
           <a:lstStyle xmlns:a="http://schemas.openxmlformats.org/drawingml/2006/main"/>
           <a:p xmlns:a="http://schemas.openxmlformats.org/drawingml/2006/main">
             <a:pPr algn="l">
-              <a:defRPr sz="2100" b="0">
-                <a:solidFill>
-                  <a:srgbClr val="15171A"/>
-                </a:solidFill>
-                <a:latin typeface="Inter"/>
-                <a:ea typeface="Inter"/>
-                <a:cs typeface="Inter"/>
-              </a:defRPr>
-            </a:pPr>
-            <a:r>
-              <a:rPr sz="2100" b="0">
-                <a:solidFill>
-                  <a:srgbClr val="15171A"/>
-                </a:solidFill>
-                <a:latin typeface="Inter"/>
-                <a:ea typeface="Inter"/>
-                <a:cs typeface="Inter"/>
-              </a:rPr>
-              <a:t>Sperrfristen bleiben gespeichert.</a:t>
-            </a:r>
-          </a:p>
+              <a:defRPr sz="1725" b="0">
+                <a:solidFill>
+                  <a:srgbClr val="6E6D68"/>
+                </a:solidFill>
+                <a:latin typeface="Inter"/>
+                <a:ea typeface="Inter"/>
+                <a:cs typeface="Inter"/>
+              </a:defRPr>
+            </a:pPr>
+            <a:r>
+              <a:rPr sz="1725" b="0">
+                <a:solidFill>
+                  <a:srgbClr val="6E6D68"/>
+                </a:solidFill>
+                <a:latin typeface="Inter"/>
+                <a:ea typeface="Inter"/>
+                <a:cs typeface="Inter"/>
+              </a:rPr>
+              <a:t>Geplante Testphase</a:t>
+            </a:r>
+          </a:p>
+        </p:txBody>
+      </p:sp>
+      <p:sp>
+        <p:nvSpPr>
+          <p:cNvPr id="7" name="">
+            <a:extLst xmlns:a="http://schemas.openxmlformats.org/drawingml/2006/main">
+              <a:ext uri="{FF2B5EF4-FFF2-40B4-BE49-F238E27FC236}">
+                <a16:creationId xmlns:a16="http://schemas.microsoft.com/office/drawing/2014/main" id="{B738FD79-5B30-455B-99AD-9312E9D57E86}"/>
+              </a:ext>
+            </a:extLst>
+          </p:cNvPr>
+          <p:cNvSpPr>
+            <a:spLocks xmlns:a="http://schemas.openxmlformats.org/drawingml/2006/main" noGrp="1"/>
+          </p:cNvSpPr>
+          <p:nvPr/>
+        </p:nvSpPr>
+        <p:spPr>
+          <a:xfrm xmlns:a="http://schemas.openxmlformats.org/drawingml/2006/main">
+            <a:off x="6400800" y="1838325"/>
+            <a:ext cx="5143500" cy="838200"/>
+          </a:xfrm>
+          <a:prstGeom xmlns:a="http://schemas.openxmlformats.org/drawingml/2006/main" prst="rect">
+            <a:avLst/>
+          </a:prstGeom>
+          <a:noFill xmlns:a="http://schemas.openxmlformats.org/drawingml/2006/main"/>
+          <a:ln xmlns:a="http://schemas.openxmlformats.org/drawingml/2006/main" w="0">
+            <a:noFill/>
+          </a:ln>
+        </p:spPr>
+        <p:txBody>
+          <a:bodyPr xmlns:a="http://schemas.openxmlformats.org/drawingml/2006/main" wrap="square" lIns="0" tIns="0" rIns="0" bIns="0" anchor="t">
+            <a:noAutofit/>
+          </a:bodyPr>
+          <a:lstStyle xmlns:a="http://schemas.openxmlformats.org/drawingml/2006/main"/>
+          <a:p xmlns:a="http://schemas.openxmlformats.org/drawingml/2006/main">
+            <a:pPr algn="l">
+              <a:defRPr sz="2625" b="0">
+                <a:solidFill>
+                  <a:srgbClr val="1F5A45"/>
+                </a:solidFill>
+                <a:latin typeface="Newsreader"/>
+                <a:ea typeface="Newsreader"/>
+                <a:cs typeface="Newsreader"/>
+              </a:defRPr>
+            </a:pPr>
+            <a:r>
+              <a:rPr sz="2625" b="0">
+                <a:solidFill>
+                  <a:srgbClr val="1F5A45"/>
+                </a:solidFill>
+                <a:latin typeface="Newsreader"/>
+                <a:ea typeface="Newsreader"/>
+                <a:cs typeface="Newsreader"/>
+              </a:rPr>
+              <a:t>Was wir herausfinden wollen</a:t>
+            </a:r>
+          </a:p>
+        </p:txBody>
+      </p:sp>
+      <p:sp>
+        <p:nvSpPr>
+          <p:cNvPr id="8" name="">
+            <a:extLst xmlns:a="http://schemas.openxmlformats.org/drawingml/2006/main">
+              <a:ext uri="{FF2B5EF4-FFF2-40B4-BE49-F238E27FC236}">
+                <a16:creationId xmlns:a16="http://schemas.microsoft.com/office/drawing/2014/main" id="{F1DFED6A-0026-42E5-8493-24C8990E85AE}"/>
+              </a:ext>
+            </a:extLst>
+          </p:cNvPr>
+          <p:cNvSpPr>
+            <a:spLocks xmlns:a="http://schemas.openxmlformats.org/drawingml/2006/main" noGrp="1"/>
+          </p:cNvSpPr>
+          <p:nvPr/>
+        </p:nvSpPr>
+        <p:spPr>
+          <a:xfrm xmlns:a="http://schemas.openxmlformats.org/drawingml/2006/main">
+            <a:off x="6457950" y="3105150"/>
+            <a:ext cx="5095875" cy="619125"/>
+          </a:xfrm>
+          <a:prstGeom xmlns:a="http://schemas.openxmlformats.org/drawingml/2006/main" prst="rect">
+            <a:avLst/>
+          </a:prstGeom>
+          <a:noFill xmlns:a="http://schemas.openxmlformats.org/drawingml/2006/main"/>
+          <a:ln xmlns:a="http://schemas.openxmlformats.org/drawingml/2006/main" w="0">
+            <a:noFill/>
+          </a:ln>
+        </p:spPr>
+        <p:txBody>
+          <a:bodyPr xmlns:a="http://schemas.openxmlformats.org/drawingml/2006/main" wrap="square" lIns="0" tIns="0" rIns="0" bIns="0" anchor="t">
+            <a:noAutofit/>
+          </a:bodyPr>
+          <a:lstStyle xmlns:a="http://schemas.openxmlformats.org/drawingml/2006/main"/>
           <a:p xmlns:a="http://schemas.openxmlformats.org/drawingml/2006/main">
             <a:pPr algn="l">
               <a:defRPr sz="2100" b="0">
@@ -7791,37 +7760,209 @@
                 <a:ea typeface="Inter"/>
                 <a:cs typeface="Inter"/>
               </a:rPr>
-              <a:t>Abbrechen schützt ungesicherte Eingaben.</a:t>
-            </a:r>
-          </a:p>
-        </p:txBody>
-      </p:sp>
-      <p:pic>
-        <p:nvPicPr>
-          <p:cNvPr id="14" name=""/>
-          <p:cNvPicPr>
-            <a:picLocks xmlns:a="http://schemas.openxmlformats.org/drawingml/2006/main" noChangeAspect="1"/>
-          </p:cNvPicPr>
-          <p:nvPr/>
-        </p:nvPicPr>
-        <p:blipFill>
-          <a:blip xmlns:r="http://schemas.openxmlformats.org/officeDocument/2006/relationships" xmlns:a="http://schemas.openxmlformats.org/drawingml/2006/main" r:embed="R4b2356b8348344ad"/>
-          <a:stretch xmlns:a="http://schemas.openxmlformats.org/drawingml/2006/main"/>
-        </p:blipFill>
+              <a:t>Wie schnell gelingt eine Erfassung?</a:t>
+            </a:r>
+          </a:p>
+        </p:txBody>
+      </p:sp>
+      <p:sp>
+        <p:nvSpPr>
+          <p:cNvPr id="9" name="">
+            <a:extLst xmlns:a="http://schemas.openxmlformats.org/drawingml/2006/main">
+              <a:ext uri="{FF2B5EF4-FFF2-40B4-BE49-F238E27FC236}">
+                <a16:creationId xmlns:a16="http://schemas.microsoft.com/office/drawing/2014/main" id="{8D99ABDE-EAFF-4B8C-A066-840FE1F6E641}"/>
+              </a:ext>
+            </a:extLst>
+          </p:cNvPr>
+          <p:cNvSpPr>
+            <a:spLocks xmlns:a="http://schemas.openxmlformats.org/drawingml/2006/main" noGrp="1"/>
+          </p:cNvSpPr>
+          <p:nvPr/>
+        </p:nvSpPr>
         <p:spPr>
           <a:xfrm xmlns:a="http://schemas.openxmlformats.org/drawingml/2006/main">
-            <a:off x="8816445" y="1457325"/>
-            <a:ext cx="2102911" cy="4572000"/>
+            <a:off x="6457950" y="3867150"/>
+            <a:ext cx="5095875" cy="619125"/>
           </a:xfrm>
           <a:prstGeom xmlns:a="http://schemas.openxmlformats.org/drawingml/2006/main" prst="rect">
             <a:avLst/>
           </a:prstGeom>
-        </p:spPr>
-      </p:pic>
+          <a:noFill xmlns:a="http://schemas.openxmlformats.org/drawingml/2006/main"/>
+          <a:ln xmlns:a="http://schemas.openxmlformats.org/drawingml/2006/main" w="0">
+            <a:noFill/>
+          </a:ln>
+        </p:spPr>
+        <p:txBody>
+          <a:bodyPr xmlns:a="http://schemas.openxmlformats.org/drawingml/2006/main" wrap="square" lIns="0" tIns="0" rIns="0" bIns="0" anchor="t">
+            <a:noAutofit/>
+          </a:bodyPr>
+          <a:lstStyle xmlns:a="http://schemas.openxmlformats.org/drawingml/2006/main"/>
+          <a:p xmlns:a="http://schemas.openxmlformats.org/drawingml/2006/main">
+            <a:pPr algn="l">
+              <a:defRPr sz="2100" b="0">
+                <a:solidFill>
+                  <a:srgbClr val="15171A"/>
+                </a:solidFill>
+                <a:latin typeface="Inter"/>
+                <a:ea typeface="Inter"/>
+                <a:cs typeface="Inter"/>
+              </a:defRPr>
+            </a:pPr>
+            <a:r>
+              <a:rPr sz="2100" b="0">
+                <a:solidFill>
+                  <a:srgbClr val="15171A"/>
+                </a:solidFill>
+                <a:latin typeface="Inter"/>
+                <a:ea typeface="Inter"/>
+                <a:cs typeface="Inter"/>
+              </a:rPr>
+              <a:t>Wie verständlich ist der Tagesbetrag?</a:t>
+            </a:r>
+          </a:p>
+        </p:txBody>
+      </p:sp>
+      <p:sp>
+        <p:nvSpPr>
+          <p:cNvPr id="10" name="">
+            <a:extLst xmlns:a="http://schemas.openxmlformats.org/drawingml/2006/main">
+              <a:ext uri="{FF2B5EF4-FFF2-40B4-BE49-F238E27FC236}">
+                <a16:creationId xmlns:a16="http://schemas.microsoft.com/office/drawing/2014/main" id="{954EFA87-C14B-4CBD-9469-603B6BEFD81A}"/>
+              </a:ext>
+            </a:extLst>
+          </p:cNvPr>
+          <p:cNvSpPr>
+            <a:spLocks xmlns:a="http://schemas.openxmlformats.org/drawingml/2006/main" noGrp="1"/>
+          </p:cNvSpPr>
+          <p:nvPr/>
+        </p:nvSpPr>
+        <p:spPr>
+          <a:xfrm xmlns:a="http://schemas.openxmlformats.org/drawingml/2006/main">
+            <a:off x="6457950" y="4629150"/>
+            <a:ext cx="5095875" cy="619125"/>
+          </a:xfrm>
+          <a:prstGeom xmlns:a="http://schemas.openxmlformats.org/drawingml/2006/main" prst="rect">
+            <a:avLst/>
+          </a:prstGeom>
+          <a:noFill xmlns:a="http://schemas.openxmlformats.org/drawingml/2006/main"/>
+          <a:ln xmlns:a="http://schemas.openxmlformats.org/drawingml/2006/main" w="0">
+            <a:noFill/>
+          </a:ln>
+        </p:spPr>
+        <p:txBody>
+          <a:bodyPr xmlns:a="http://schemas.openxmlformats.org/drawingml/2006/main" wrap="square" lIns="0" tIns="0" rIns="0" bIns="0" anchor="t">
+            <a:noAutofit/>
+          </a:bodyPr>
+          <a:lstStyle xmlns:a="http://schemas.openxmlformats.org/drawingml/2006/main"/>
+          <a:p xmlns:a="http://schemas.openxmlformats.org/drawingml/2006/main">
+            <a:pPr algn="l">
+              <a:defRPr sz="2100" b="0">
+                <a:solidFill>
+                  <a:srgbClr val="15171A"/>
+                </a:solidFill>
+                <a:latin typeface="Inter"/>
+                <a:ea typeface="Inter"/>
+                <a:cs typeface="Inter"/>
+              </a:defRPr>
+            </a:pPr>
+            <a:r>
+              <a:rPr sz="2100" b="0">
+                <a:solidFill>
+                  <a:srgbClr val="15171A"/>
+                </a:solidFill>
+                <a:latin typeface="Inter"/>
+                <a:ea typeface="Inter"/>
+                <a:cs typeface="Inter"/>
+              </a:rPr>
+              <a:t>Wird Spendly im Alltag wieder genutzt?</a:t>
+            </a:r>
+          </a:p>
+        </p:txBody>
+      </p:sp>
+      <p:sp>
+        <p:nvSpPr>
+          <p:cNvPr id="11" name="">
+            <a:extLst xmlns:a="http://schemas.openxmlformats.org/drawingml/2006/main">
+              <a:ext uri="{FF2B5EF4-FFF2-40B4-BE49-F238E27FC236}">
+                <a16:creationId xmlns:a16="http://schemas.microsoft.com/office/drawing/2014/main" id="{DDE93F8B-34E9-48D7-A1D2-97AE9E2B1B2A}"/>
+              </a:ext>
+            </a:extLst>
+          </p:cNvPr>
+          <p:cNvSpPr>
+            <a:spLocks xmlns:a="http://schemas.openxmlformats.org/drawingml/2006/main" noGrp="1"/>
+          </p:cNvSpPr>
+          <p:nvPr/>
+        </p:nvSpPr>
+        <p:spPr>
+          <a:xfrm xmlns:a="http://schemas.openxmlformats.org/drawingml/2006/main">
+            <a:off x="6448425" y="5562600"/>
+            <a:ext cx="5095875" cy="628650"/>
+          </a:xfrm>
+          <a:prstGeom xmlns:a="http://schemas.openxmlformats.org/drawingml/2006/main" prst="rect">
+            <a:avLst/>
+          </a:prstGeom>
+          <a:noFill xmlns:a="http://schemas.openxmlformats.org/drawingml/2006/main"/>
+          <a:ln xmlns:a="http://schemas.openxmlformats.org/drawingml/2006/main" w="0">
+            <a:noFill/>
+          </a:ln>
+        </p:spPr>
+        <p:txBody>
+          <a:bodyPr xmlns:a="http://schemas.openxmlformats.org/drawingml/2006/main" wrap="square" lIns="0" tIns="0" rIns="0" bIns="0" anchor="t">
+            <a:noAutofit/>
+          </a:bodyPr>
+          <a:lstStyle xmlns:a="http://schemas.openxmlformats.org/drawingml/2006/main"/>
+          <a:p xmlns:a="http://schemas.openxmlformats.org/drawingml/2006/main">
+            <a:pPr algn="l">
+              <a:defRPr sz="1575" b="0">
+                <a:solidFill>
+                  <a:srgbClr val="6E6D68"/>
+                </a:solidFill>
+                <a:latin typeface="Inter"/>
+                <a:ea typeface="Inter"/>
+                <a:cs typeface="Inter"/>
+              </a:defRPr>
+            </a:pPr>
+            <a:r>
+              <a:rPr sz="1575" b="0">
+                <a:solidFill>
+                  <a:srgbClr val="6E6D68"/>
+                </a:solidFill>
+                <a:latin typeface="Inter"/>
+                <a:ea typeface="Inter"/>
+                <a:cs typeface="Inter"/>
+              </a:rPr>
+              <a:t>Vor einem Launch: echtes iPhone,</a:t>
+            </a:r>
+          </a:p>
+          <a:p xmlns:a="http://schemas.openxmlformats.org/drawingml/2006/main">
+            <a:pPr algn="l">
+              <a:defRPr sz="1575" b="0">
+                <a:solidFill>
+                  <a:srgbClr val="6E6D68"/>
+                </a:solidFill>
+                <a:latin typeface="Inter"/>
+                <a:ea typeface="Inter"/>
+                <a:cs typeface="Inter"/>
+              </a:defRPr>
+            </a:pPr>
+            <a:r>
+              <a:rPr sz="1575" b="0">
+                <a:solidFill>
+                  <a:srgbClr val="6E6D68"/>
+                </a:solidFill>
+                <a:latin typeface="Inter"/>
+                <a:ea typeface="Inter"/>
+                <a:cs typeface="Inter"/>
+              </a:rPr>
+              <a:t>Android und Screenreader vollständig prüfen.</a:t>
+            </a:r>
+          </a:p>
+        </p:txBody>
+      </p:sp>
     </p:spTree>
     <p:extLst>
       <p:ext uri="{BB962C8B-B14F-4D97-AF65-F5344CB8AC3E}">
-        <p14:creationId xmlns:p14="http://schemas.microsoft.com/office/powerpoint/2010/main" val="1642462663"/>
+        <p14:creationId xmlns:p14="http://schemas.microsoft.com/office/powerpoint/2010/main" val="1403174672"/>
       </p:ext>
     </p:extLst>
   </p:cSld>

--- a/docs/lb3/Spendly_LB3_Praesentation.pptx
+++ b/docs/lb3/Spendly_LB3_Praesentation.pptx
@@ -2,22 +2,22 @@
 <file path=ppt/presentation.xml><?xml version="1.0" encoding="utf-8"?>
 <p:presentation xmlns:p="http://schemas.openxmlformats.org/presentationml/2006/main">
   <p:sldMasterIdLst>
-    <p:sldMasterId xmlns:r="http://schemas.openxmlformats.org/officeDocument/2006/relationships" id="2147483648" r:id="Re5c093cf7e704b2e"/>
+    <p:sldMasterId xmlns:r="http://schemas.openxmlformats.org/officeDocument/2006/relationships" id="2147483648" r:id="R905f27b78a2547ed"/>
   </p:sldMasterIdLst>
   <p:notesMasterIdLst>
-    <p:notesMasterId xmlns:r="http://schemas.openxmlformats.org/officeDocument/2006/relationships" r:id="Ra37a072923744fd6"/>
+    <p:notesMasterId xmlns:r="http://schemas.openxmlformats.org/officeDocument/2006/relationships" r:id="R9160f916dd514fba"/>
   </p:notesMasterIdLst>
   <p:sldIdLst>
-    <p:sldId xmlns:r="http://schemas.openxmlformats.org/officeDocument/2006/relationships" id="256" r:id="R4471962a1b6a43d0"/>
-    <p:sldId xmlns:r="http://schemas.openxmlformats.org/officeDocument/2006/relationships" id="257" r:id="R81c2ca057d00470f"/>
-    <p:sldId xmlns:r="http://schemas.openxmlformats.org/officeDocument/2006/relationships" id="258" r:id="R3c93456cf0064715"/>
-    <p:sldId xmlns:r="http://schemas.openxmlformats.org/officeDocument/2006/relationships" id="259" r:id="R06c6203881f4436a"/>
-    <p:sldId xmlns:r="http://schemas.openxmlformats.org/officeDocument/2006/relationships" id="260" r:id="Rf90df02d9af1413f"/>
-    <p:sldId xmlns:r="http://schemas.openxmlformats.org/officeDocument/2006/relationships" id="261" r:id="R43e390562c0443a3"/>
-    <p:sldId xmlns:r="http://schemas.openxmlformats.org/officeDocument/2006/relationships" id="262" r:id="R81677bfd054842d2"/>
-    <p:sldId xmlns:r="http://schemas.openxmlformats.org/officeDocument/2006/relationships" id="263" r:id="Re30ae793a26445a4"/>
-    <p:sldId xmlns:r="http://schemas.openxmlformats.org/officeDocument/2006/relationships" id="264" r:id="Rc744d64de1954e20"/>
-    <p:sldId xmlns:r="http://schemas.openxmlformats.org/officeDocument/2006/relationships" id="265" r:id="R8155a8d476ee4083"/>
+    <p:sldId xmlns:r="http://schemas.openxmlformats.org/officeDocument/2006/relationships" id="256" r:id="R18d1135c92d041eb"/>
+    <p:sldId xmlns:r="http://schemas.openxmlformats.org/officeDocument/2006/relationships" id="257" r:id="R3819f78770694f92"/>
+    <p:sldId xmlns:r="http://schemas.openxmlformats.org/officeDocument/2006/relationships" id="258" r:id="R788c10c07a904d6c"/>
+    <p:sldId xmlns:r="http://schemas.openxmlformats.org/officeDocument/2006/relationships" id="259" r:id="R4e523b0372794675"/>
+    <p:sldId xmlns:r="http://schemas.openxmlformats.org/officeDocument/2006/relationships" id="260" r:id="R7746f8875cff4347"/>
+    <p:sldId xmlns:r="http://schemas.openxmlformats.org/officeDocument/2006/relationships" id="261" r:id="R3e6e46c903474093"/>
+    <p:sldId xmlns:r="http://schemas.openxmlformats.org/officeDocument/2006/relationships" id="262" r:id="R697b59f19b974977"/>
+    <p:sldId xmlns:r="http://schemas.openxmlformats.org/officeDocument/2006/relationships" id="263" r:id="R727f35eb8e5b4bde"/>
+    <p:sldId xmlns:r="http://schemas.openxmlformats.org/officeDocument/2006/relationships" id="264" r:id="Rad7334111e1d4793"/>
+    <p:sldId xmlns:r="http://schemas.openxmlformats.org/officeDocument/2006/relationships" id="265" r:id="Rdd9ba39ef87f4f2c"/>
   </p:sldIdLst>
   <p:sldSz cx="12192000" cy="6858000"/>
   <p:notesSz cx="6858000" cy="9144000"/>
@@ -581,7 +581,7 @@
           </a:p>
           <a:p xmlns:a="http://schemas.openxmlformats.org/drawingml/2006/main">
             <a:r>
-              <a:t>Darian: Am Anfang haben wir gefragt, wie ihr entscheidet, was ihr euch heute noch leisten könnt. Spendly macht einen Teil dieser Entscheidung sichtbar: eure erfassten Ausgaben und das restliche Monatsbudget. Wir haben eine funktionierende App gebaut, den Entwurf weiterentwickelt und die wichtigsten Abläufe geprüft. Jetzt interessiert uns euer Blick als mögliche Nutzerinnen und Nutzer. Welche Ausgabe würdet ihr zuerst erfassen? Und was müsste Spendly können, damit ihr es auch nächste Woche noch öffnet?</a:t>
+              <a:t>Darian: Am Anfang haben wir gefragt, wie ihr entscheidet, was ihr euch heute noch leisten könnt. Spendly macht eure erfassten Ausgaben und das restliche Monatsbudget sichtbar. Wir haben aus dem Entwurf eine funktionierende App gemacht und die wichtigsten Abläufe geprüft. Jetzt seid ihr dran: Wollt ihr Spendly ausprobieren? Welche Funktion würdet ihr euch für euren Alltag wünschen? Eure Ideen würden uns helfen, die nächste Version gezielt zu verbessern.</a:t>
             </a:r>
           </a:p>
           <a:p xmlns:a="http://schemas.openxmlformats.org/drawingml/2006/main">
@@ -591,7 +591,7 @@
           </a:p>
           <a:p xmlns:a="http://schemas.openxmlformats.org/drawingml/2006/main">
             <a:r>
-              <a:t>[Eine kurze Antwort aufnehmen und in die Fragerunde überleiten.]</a:t>
+              <a:t>[Die Einladung kurz wirken lassen und in die Fragerunde überleiten.]</a:t>
             </a:r>
           </a:p>
           <a:p xmlns:a="http://schemas.openxmlformats.org/drawingml/2006/main">
@@ -1651,7 +1651,7 @@
           </a:p>
           <a:p xmlns:a="http://schemas.openxmlformats.org/drawingml/2006/main">
             <a:r>
-              <a:t>Darian: Der nächste Schritt wäre eine kleine Alltagsprobe: fünf Lernende oder Studierende nutzen Spendly eine Woche. Das ist unser Vorschlag, kein bereits durchgeführter Pilot. Wir würden beobachten, wie schnell eine Erfassung gelingt, ob die Tagesorientierung verständlich ist und ob die Personen freiwillig wiederkommen. Erst danach lässt sich entscheiden, welche Erweiterung hilfreich ist und ob ein Geschäftsmodell Sinn ergibt. Vor einem Launch gehören auch der echte iPhone-Test, Android und Screenreader dazu. Aus der Entwicklung nehmen wir mit, Fehlerfälle früher zu planen. Ein altes Monatsbudget darf sich beim Ändern des neuen Monats nicht verschieben. Ein Neustart darf keine Sperrfrist zurücksetzen. Diese Erfahrungen würden wir im nächsten Durchgang schon beim Entwurf berücksichtigen.</a:t>
+              <a:t>Darian: Unser Rückblick ist konkret: Ein Monatsbudget braucht eine feste Zuordnung zum Monat. Sonst verändert ein neuer Wert auch die Vergangenheit. Auch die Rückgängig-Frist und die PIN-Sperre müssen einen Neustart überstehen. Das waren Herausforderungen, für die wir dauerhafte Zustände speichern mussten. Beim nächsten Projekt würden wir solche Fehlerfälle früher im Entwurf planen. Im Ausblick könnten wir Spendly um einen CSV-Export für Ausgaben oder Statistiken nach Kategorien erweitern. Diese Funktionen sind Ideen für spätere Versionen und noch nicht umgesetzt. Zuerst würden wir mit Lernenden prüfen, ob sie die Tagesorientierung verstehen und welche Erweiterung ihnen hilft. Die offenen Geräte- und Barrierefreiheitstests bleiben ebenfalls wichtig.</a:t>
             </a:r>
           </a:p>
           <a:p xmlns:a="http://schemas.openxmlformats.org/drawingml/2006/main">
@@ -1691,12 +1691,17 @@
           </a:p>
           <a:p xmlns:a="http://schemas.openxmlformats.org/drawingml/2006/main">
             <a:r>
+              <a:t>Datei: storage/expenses.js</a:t>
+            </a:r>
+          </a:p>
+          <a:p xmlns:a="http://schemas.openxmlformats.org/drawingml/2006/main">
+            <a:r>
               <a:t>Datei: screens/NewExpenseScreen.js</a:t>
             </a:r>
           </a:p>
           <a:p xmlns:a="http://schemas.openxmlformats.org/drawingml/2006/main">
             <a:r>
-              <a:t>Die fünf Personen und eine Woche sind ein vorgeschlagener Nutzertest. Keine bestätigten Nutzer, Umsätze oder Finanzierungsrunde.</a:t>
+              <a:t>CSV-Export und Kategorie-Statistiken sind mögliche Erweiterungen, keine vorhandenen Funktionen. Kein Nutzertest ist als durchgeführt behauptet.</a:t>
             </a:r>
           </a:p>
         </p:txBody>
@@ -1764,7 +1769,7 @@
   </p:cSld>
   <p:clrMap bg1="lt1" tx1="dk1" bg2="lt2" tx2="dk2" accent1="accent1" accent2="accent2" accent3="accent3" accent4="accent4" accent5="accent5" accent6="accent6" hlink="hlink" folHlink="folHlink"/>
   <p:sldLayoutIdLst>
-    <p:sldLayoutId xmlns:r="http://schemas.openxmlformats.org/officeDocument/2006/relationships" id="2147483649" r:id="Re0ffd5f4382140cf"/>
+    <p:sldLayoutId xmlns:r="http://schemas.openxmlformats.org/officeDocument/2006/relationships" id="2147483649" r:id="R7d5d39f4492243d5"/>
   </p:sldLayoutIdLst>
   <p:txStyles>
     <p:titleStyle>
@@ -2315,7 +2320,7 @@
           <p:cNvPr id="5" name="">
             <a:extLst xmlns:a="http://schemas.openxmlformats.org/drawingml/2006/main">
               <a:ext uri="{FF2B5EF4-FFF2-40B4-BE49-F238E27FC236}">
-                <a16:creationId xmlns:a16="http://schemas.microsoft.com/office/drawing/2014/main" id="{CE6DC4BD-200B-4336-8706-1A8D3EE7F618}"/>
+                <a16:creationId xmlns:a16="http://schemas.microsoft.com/office/drawing/2014/main" id="{DF3A51FC-3D1F-41DA-A75F-1260A7DD0444}"/>
               </a:ext>
             </a:extLst>
           </p:cNvPr>
@@ -2372,7 +2377,7 @@
           <p:cNvPr id="2" name="">
             <a:extLst xmlns:a="http://schemas.openxmlformats.org/drawingml/2006/main">
               <a:ext uri="{FF2B5EF4-FFF2-40B4-BE49-F238E27FC236}">
-                <a16:creationId xmlns:a16="http://schemas.microsoft.com/office/drawing/2014/main" id="{AAA9DDFC-1119-402F-BE0B-8F77200840BB}"/>
+                <a16:creationId xmlns:a16="http://schemas.microsoft.com/office/drawing/2014/main" id="{EE5BBF72-7284-415D-AE5F-0D6D24405CB0}"/>
               </a:ext>
             </a:extLst>
           </p:cNvPr>
@@ -2475,7 +2480,7 @@
           <p:cNvPr id="3" name="">
             <a:extLst xmlns:a="http://schemas.openxmlformats.org/drawingml/2006/main">
               <a:ext uri="{FF2B5EF4-FFF2-40B4-BE49-F238E27FC236}">
-                <a16:creationId xmlns:a16="http://schemas.microsoft.com/office/drawing/2014/main" id="{25CC1988-9CBB-4818-B922-168AF33DA6BB}"/>
+                <a16:creationId xmlns:a16="http://schemas.microsoft.com/office/drawing/2014/main" id="{2E53050E-AE18-4178-BE98-3478382D158D}"/>
               </a:ext>
             </a:extLst>
           </p:cNvPr>
@@ -2532,7 +2537,7 @@
           <p:cNvPr id="4" name="">
             <a:extLst xmlns:a="http://schemas.openxmlformats.org/drawingml/2006/main">
               <a:ext uri="{FF2B5EF4-FFF2-40B4-BE49-F238E27FC236}">
-                <a16:creationId xmlns:a16="http://schemas.microsoft.com/office/drawing/2014/main" id="{D73F961F-B116-4AB2-BC0B-C77F07D486B7}"/>
+                <a16:creationId xmlns:a16="http://schemas.microsoft.com/office/drawing/2014/main" id="{C2882339-009A-49AC-8975-204B55A229A8}"/>
               </a:ext>
             </a:extLst>
           </p:cNvPr>
@@ -2587,7 +2592,7 @@
     </p:spTree>
     <p:extLst>
       <p:ext uri="{BB962C8B-B14F-4D97-AF65-F5344CB8AC3E}">
-        <p14:creationId xmlns:p14="http://schemas.microsoft.com/office/powerpoint/2010/main" val="1363150488"/>
+        <p14:creationId xmlns:p14="http://schemas.microsoft.com/office/powerpoint/2010/main" val="635395001"/>
       </p:ext>
     </p:extLst>
   </p:cSld>
@@ -2618,7 +2623,7 @@
           <p:cNvPr id="6" name="">
             <a:extLst xmlns:a="http://schemas.openxmlformats.org/drawingml/2006/main">
               <a:ext uri="{FF2B5EF4-FFF2-40B4-BE49-F238E27FC236}">
-                <a16:creationId xmlns:a16="http://schemas.microsoft.com/office/drawing/2014/main" id="{BA6CDA79-18A7-4EDB-978A-27F44232B2A9}"/>
+                <a16:creationId xmlns:a16="http://schemas.microsoft.com/office/drawing/2014/main" id="{D95ADF76-9522-4A6C-BADD-9CC95660778F}"/>
               </a:ext>
             </a:extLst>
           </p:cNvPr>
@@ -2675,7 +2680,7 @@
           <p:cNvPr id="2" name="">
             <a:extLst xmlns:a="http://schemas.openxmlformats.org/drawingml/2006/main">
               <a:ext uri="{FF2B5EF4-FFF2-40B4-BE49-F238E27FC236}">
-                <a16:creationId xmlns:a16="http://schemas.microsoft.com/office/drawing/2014/main" id="{06D1F899-5E30-4E77-84C7-0D2F8C426A8D}"/>
+                <a16:creationId xmlns:a16="http://schemas.microsoft.com/office/drawing/2014/main" id="{8FAE1233-6347-4535-95BE-4E65492C23AB}"/>
               </a:ext>
             </a:extLst>
           </p:cNvPr>
@@ -2732,7 +2737,7 @@
           <p:cNvPr id="3" name="">
             <a:extLst xmlns:a="http://schemas.openxmlformats.org/drawingml/2006/main">
               <a:ext uri="{FF2B5EF4-FFF2-40B4-BE49-F238E27FC236}">
-                <a16:creationId xmlns:a16="http://schemas.microsoft.com/office/drawing/2014/main" id="{E6B79EE1-6EBE-4831-BF50-BAF411DA366A}"/>
+                <a16:creationId xmlns:a16="http://schemas.microsoft.com/office/drawing/2014/main" id="{792F2C18-9124-46A0-9E2D-4D0BB1DF9786}"/>
               </a:ext>
             </a:extLst>
           </p:cNvPr>
@@ -2779,7 +2784,7 @@
                 <a:ea typeface="Newsreader"/>
                 <a:cs typeface="Newsreader"/>
               </a:rPr>
-              <a:t>Was kannst du dir</a:t>
+              <a:t>Wollt ihr Spendly</a:t>
             </a:r>
           </a:p>
           <a:p xmlns:a="http://schemas.openxmlformats.org/drawingml/2006/main">
@@ -2802,7 +2807,7 @@
                 <a:ea typeface="Newsreader"/>
                 <a:cs typeface="Newsreader"/>
               </a:rPr>
-              <a:t>heute noch leisten?</a:t>
+              <a:t>ausprobieren?</a:t>
             </a:r>
           </a:p>
         </p:txBody>
@@ -2812,7 +2817,7 @@
           <p:cNvPr id="4" name="">
             <a:extLst xmlns:a="http://schemas.openxmlformats.org/drawingml/2006/main">
               <a:ext uri="{FF2B5EF4-FFF2-40B4-BE49-F238E27FC236}">
-                <a16:creationId xmlns:a16="http://schemas.microsoft.com/office/drawing/2014/main" id="{1F4AAE30-6F1B-4893-A608-54F9A9073B71}"/>
+                <a16:creationId xmlns:a16="http://schemas.microsoft.com/office/drawing/2014/main" id="{ADA78005-BD70-4871-99CC-E5AAE7708A0B}"/>
               </a:ext>
             </a:extLst>
           </p:cNvPr>
@@ -2869,7 +2874,7 @@
           <p:cNvPr id="5" name="">
             <a:extLst xmlns:a="http://schemas.openxmlformats.org/drawingml/2006/main">
               <a:ext uri="{FF2B5EF4-FFF2-40B4-BE49-F238E27FC236}">
-                <a16:creationId xmlns:a16="http://schemas.microsoft.com/office/drawing/2014/main" id="{42228BFC-4F67-4DF2-B4A1-AA5EE6DE4743}"/>
+                <a16:creationId xmlns:a16="http://schemas.microsoft.com/office/drawing/2014/main" id="{3852645F-FAA0-40B4-B2BD-1DCE54E40C4B}"/>
               </a:ext>
             </a:extLst>
           </p:cNvPr>
@@ -2881,7 +2886,7 @@
         <p:spPr>
           <a:xfrm xmlns:a="http://schemas.openxmlformats.org/drawingml/2006/main">
             <a:off x="685800" y="5676900"/>
-            <a:ext cx="9763125" cy="409575"/>
+            <a:ext cx="10639425" cy="409575"/>
           </a:xfrm>
           <a:prstGeom xmlns:a="http://schemas.openxmlformats.org/drawingml/2006/main" prst="rect">
             <a:avLst/>
@@ -2916,7 +2921,7 @@
                 <a:ea typeface="Inter"/>
                 <a:cs typeface="Inter"/>
               </a:rPr>
-              <a:t>Wie würdet ihr Spendly im Alltag nutzen?</a:t>
+              <a:t>Euer Feedback hilft uns bei der nächsten Version.</a:t>
             </a:r>
           </a:p>
         </p:txBody>
@@ -2924,7 +2929,7 @@
     </p:spTree>
     <p:extLst>
       <p:ext uri="{BB962C8B-B14F-4D97-AF65-F5344CB8AC3E}">
-        <p14:creationId xmlns:p14="http://schemas.microsoft.com/office/powerpoint/2010/main" val="527983319"/>
+        <p14:creationId xmlns:p14="http://schemas.microsoft.com/office/powerpoint/2010/main" val="2100802997"/>
       </p:ext>
     </p:extLst>
   </p:cSld>
@@ -2955,7 +2960,7 @@
           <p:cNvPr id="18" name="">
             <a:extLst xmlns:a="http://schemas.openxmlformats.org/drawingml/2006/main">
               <a:ext uri="{FF2B5EF4-FFF2-40B4-BE49-F238E27FC236}">
-                <a16:creationId xmlns:a16="http://schemas.microsoft.com/office/drawing/2014/main" id="{AE1242BA-E8F0-4A6A-9D69-35FD128A9DCB}"/>
+                <a16:creationId xmlns:a16="http://schemas.microsoft.com/office/drawing/2014/main" id="{6C0F7888-F29E-4C58-A84F-BB51F3B37752}"/>
               </a:ext>
             </a:extLst>
           </p:cNvPr>
@@ -3012,7 +3017,7 @@
           <p:cNvPr id="2" name="">
             <a:extLst xmlns:a="http://schemas.openxmlformats.org/drawingml/2006/main">
               <a:ext uri="{FF2B5EF4-FFF2-40B4-BE49-F238E27FC236}">
-                <a16:creationId xmlns:a16="http://schemas.microsoft.com/office/drawing/2014/main" id="{0037DD46-AF23-4563-B80D-5AB63F24B9E4}"/>
+                <a16:creationId xmlns:a16="http://schemas.microsoft.com/office/drawing/2014/main" id="{0EF394B1-3DF4-460A-B2F4-346C4CD2D43C}"/>
               </a:ext>
             </a:extLst>
           </p:cNvPr>
@@ -3069,7 +3074,7 @@
           <p:cNvPr id="3" name="">
             <a:extLst xmlns:a="http://schemas.openxmlformats.org/drawingml/2006/main">
               <a:ext uri="{FF2B5EF4-FFF2-40B4-BE49-F238E27FC236}">
-                <a16:creationId xmlns:a16="http://schemas.microsoft.com/office/drawing/2014/main" id="{19822F18-16FC-4F23-A6CF-A885F7198A07}"/>
+                <a16:creationId xmlns:a16="http://schemas.microsoft.com/office/drawing/2014/main" id="{B919C897-AE9C-46A2-B103-2CD78F9E92F8}"/>
               </a:ext>
             </a:extLst>
           </p:cNvPr>
@@ -3126,7 +3131,7 @@
           <p:cNvPr id="4" name="">
             <a:extLst xmlns:a="http://schemas.openxmlformats.org/drawingml/2006/main">
               <a:ext uri="{FF2B5EF4-FFF2-40B4-BE49-F238E27FC236}">
-                <a16:creationId xmlns:a16="http://schemas.microsoft.com/office/drawing/2014/main" id="{5E1DFACB-B485-4ADD-B55D-1A36442B8EFB}"/>
+                <a16:creationId xmlns:a16="http://schemas.microsoft.com/office/drawing/2014/main" id="{B9FCC955-71CB-428C-86D6-6DEA58BE8210}"/>
               </a:ext>
             </a:extLst>
           </p:cNvPr>
@@ -3206,7 +3211,7 @@
           <p:cNvPr id="5" name="">
             <a:extLst xmlns:a="http://schemas.openxmlformats.org/drawingml/2006/main">
               <a:ext uri="{FF2B5EF4-FFF2-40B4-BE49-F238E27FC236}">
-                <a16:creationId xmlns:a16="http://schemas.microsoft.com/office/drawing/2014/main" id="{FF6E1AAB-BE33-4765-A4FB-6C080E639471}"/>
+                <a16:creationId xmlns:a16="http://schemas.microsoft.com/office/drawing/2014/main" id="{83D50D7B-7C4D-481A-A0B2-04F8767A33D1}"/>
               </a:ext>
             </a:extLst>
           </p:cNvPr>
@@ -3286,7 +3291,7 @@
           <p:cNvPr id="6" name="">
             <a:extLst xmlns:a="http://schemas.openxmlformats.org/drawingml/2006/main">
               <a:ext uri="{FF2B5EF4-FFF2-40B4-BE49-F238E27FC236}">
-                <a16:creationId xmlns:a16="http://schemas.microsoft.com/office/drawing/2014/main" id="{55008F34-A9A2-4D88-869E-9AB516B3770A}"/>
+                <a16:creationId xmlns:a16="http://schemas.microsoft.com/office/drawing/2014/main" id="{F3C9C272-AC0F-49C5-B4C6-64ACD5F2ABAA}"/>
               </a:ext>
             </a:extLst>
           </p:cNvPr>
@@ -3343,7 +3348,7 @@
           <p:cNvPr id="7" name="">
             <a:extLst xmlns:a="http://schemas.openxmlformats.org/drawingml/2006/main">
               <a:ext uri="{FF2B5EF4-FFF2-40B4-BE49-F238E27FC236}">
-                <a16:creationId xmlns:a16="http://schemas.microsoft.com/office/drawing/2014/main" id="{2AF23667-D615-4AAD-A71B-9715DE5A1403}"/>
+                <a16:creationId xmlns:a16="http://schemas.microsoft.com/office/drawing/2014/main" id="{5DCCB865-5041-41EA-B7DF-08BD22754B4B}"/>
               </a:ext>
             </a:extLst>
           </p:cNvPr>
@@ -3400,7 +3405,7 @@
           <p:cNvPr id="8" name="">
             <a:extLst xmlns:a="http://schemas.openxmlformats.org/drawingml/2006/main">
               <a:ext uri="{FF2B5EF4-FFF2-40B4-BE49-F238E27FC236}">
-                <a16:creationId xmlns:a16="http://schemas.microsoft.com/office/drawing/2014/main" id="{B758581B-26DF-458A-9381-B71E5EFB2D94}"/>
+                <a16:creationId xmlns:a16="http://schemas.microsoft.com/office/drawing/2014/main" id="{560815B4-A802-4289-81EE-B61D830A7DDA}"/>
               </a:ext>
             </a:extLst>
           </p:cNvPr>
@@ -3457,7 +3462,7 @@
           <p:cNvPr id="9" name="">
             <a:extLst xmlns:a="http://schemas.openxmlformats.org/drawingml/2006/main">
               <a:ext uri="{FF2B5EF4-FFF2-40B4-BE49-F238E27FC236}">
-                <a16:creationId xmlns:a16="http://schemas.microsoft.com/office/drawing/2014/main" id="{D3E67FBC-2152-42AD-88C1-F9FA3EA8332D}"/>
+                <a16:creationId xmlns:a16="http://schemas.microsoft.com/office/drawing/2014/main" id="{7ADDFBC4-A2D2-4282-9EA7-9429E5C48490}"/>
               </a:ext>
             </a:extLst>
           </p:cNvPr>
@@ -3487,7 +3492,7 @@
           <p:cNvPr id="10" name="">
             <a:extLst xmlns:a="http://schemas.openxmlformats.org/drawingml/2006/main">
               <a:ext uri="{FF2B5EF4-FFF2-40B4-BE49-F238E27FC236}">
-                <a16:creationId xmlns:a16="http://schemas.microsoft.com/office/drawing/2014/main" id="{6CFBD7A3-C2B3-45AC-BC34-224BDD519C2D}"/>
+                <a16:creationId xmlns:a16="http://schemas.microsoft.com/office/drawing/2014/main" id="{457F66BF-DEDF-42A2-80C3-CF576D29269E}"/>
               </a:ext>
             </a:extLst>
           </p:cNvPr>
@@ -3544,7 +3549,7 @@
           <p:cNvPr id="11" name="">
             <a:extLst xmlns:a="http://schemas.openxmlformats.org/drawingml/2006/main">
               <a:ext uri="{FF2B5EF4-FFF2-40B4-BE49-F238E27FC236}">
-                <a16:creationId xmlns:a16="http://schemas.microsoft.com/office/drawing/2014/main" id="{61E51398-A0D6-4389-8D09-CE75394994BF}"/>
+                <a16:creationId xmlns:a16="http://schemas.microsoft.com/office/drawing/2014/main" id="{6C512A3B-5C91-4E89-89C1-CF5839E7A0B8}"/>
               </a:ext>
             </a:extLst>
           </p:cNvPr>
@@ -3601,7 +3606,7 @@
           <p:cNvPr id="12" name="">
             <a:extLst xmlns:a="http://schemas.openxmlformats.org/drawingml/2006/main">
               <a:ext uri="{FF2B5EF4-FFF2-40B4-BE49-F238E27FC236}">
-                <a16:creationId xmlns:a16="http://schemas.microsoft.com/office/drawing/2014/main" id="{20EC5BCF-7A67-48A5-81C9-3ECE251EA8EC}"/>
+                <a16:creationId xmlns:a16="http://schemas.microsoft.com/office/drawing/2014/main" id="{EE7A38C9-64AD-4989-ACCB-9C8F9F4A68C9}"/>
               </a:ext>
             </a:extLst>
           </p:cNvPr>
@@ -3631,7 +3636,7 @@
           <p:cNvPr id="13" name="">
             <a:extLst xmlns:a="http://schemas.openxmlformats.org/drawingml/2006/main">
               <a:ext uri="{FF2B5EF4-FFF2-40B4-BE49-F238E27FC236}">
-                <a16:creationId xmlns:a16="http://schemas.microsoft.com/office/drawing/2014/main" id="{C84DD131-01C7-4EF8-B053-93AE31762F2C}"/>
+                <a16:creationId xmlns:a16="http://schemas.microsoft.com/office/drawing/2014/main" id="{C0F87CED-1EF4-43CC-8696-00957CA05603}"/>
               </a:ext>
             </a:extLst>
           </p:cNvPr>
@@ -3688,7 +3693,7 @@
           <p:cNvPr id="14" name="">
             <a:extLst xmlns:a="http://schemas.openxmlformats.org/drawingml/2006/main">
               <a:ext uri="{FF2B5EF4-FFF2-40B4-BE49-F238E27FC236}">
-                <a16:creationId xmlns:a16="http://schemas.microsoft.com/office/drawing/2014/main" id="{CC263790-A3F9-45C1-AA32-AA555B65DBDC}"/>
+                <a16:creationId xmlns:a16="http://schemas.microsoft.com/office/drawing/2014/main" id="{25288B9D-5C00-4047-88A6-4335E22A4C61}"/>
               </a:ext>
             </a:extLst>
           </p:cNvPr>
@@ -3745,7 +3750,7 @@
           <p:cNvPr id="15" name="">
             <a:extLst xmlns:a="http://schemas.openxmlformats.org/drawingml/2006/main">
               <a:ext uri="{FF2B5EF4-FFF2-40B4-BE49-F238E27FC236}">
-                <a16:creationId xmlns:a16="http://schemas.microsoft.com/office/drawing/2014/main" id="{218E6417-7731-4BBC-B21C-8531163718F1}"/>
+                <a16:creationId xmlns:a16="http://schemas.microsoft.com/office/drawing/2014/main" id="{70BDA0D1-0CB9-4DFC-99BD-30B8C30DBA19}"/>
               </a:ext>
             </a:extLst>
           </p:cNvPr>
@@ -3775,7 +3780,7 @@
           <p:cNvPr id="16" name="">
             <a:extLst xmlns:a="http://schemas.openxmlformats.org/drawingml/2006/main">
               <a:ext uri="{FF2B5EF4-FFF2-40B4-BE49-F238E27FC236}">
-                <a16:creationId xmlns:a16="http://schemas.microsoft.com/office/drawing/2014/main" id="{E6AAA21B-AA6D-43E4-8E09-01924FC3ACB4}"/>
+                <a16:creationId xmlns:a16="http://schemas.microsoft.com/office/drawing/2014/main" id="{29753486-5213-445A-BA03-F85892CF8DF1}"/>
               </a:ext>
             </a:extLst>
           </p:cNvPr>
@@ -3832,7 +3837,7 @@
           <p:cNvPr id="17" name="">
             <a:extLst xmlns:a="http://schemas.openxmlformats.org/drawingml/2006/main">
               <a:ext uri="{FF2B5EF4-FFF2-40B4-BE49-F238E27FC236}">
-                <a16:creationId xmlns:a16="http://schemas.microsoft.com/office/drawing/2014/main" id="{C8F36159-58AD-4338-BC57-6A994E9A4ADF}"/>
+                <a16:creationId xmlns:a16="http://schemas.microsoft.com/office/drawing/2014/main" id="{325FDE3B-8062-4D01-A8D6-D3F6BC3020FB}"/>
               </a:ext>
             </a:extLst>
           </p:cNvPr>
@@ -3887,7 +3892,7 @@
     </p:spTree>
     <p:extLst>
       <p:ext uri="{BB962C8B-B14F-4D97-AF65-F5344CB8AC3E}">
-        <p14:creationId xmlns:p14="http://schemas.microsoft.com/office/powerpoint/2010/main" val="596746945"/>
+        <p14:creationId xmlns:p14="http://schemas.microsoft.com/office/powerpoint/2010/main" val="321554564"/>
       </p:ext>
     </p:extLst>
   </p:cSld>
@@ -3918,7 +3923,7 @@
           <p:cNvPr id="6" name="">
             <a:extLst xmlns:a="http://schemas.openxmlformats.org/drawingml/2006/main">
               <a:ext uri="{FF2B5EF4-FFF2-40B4-BE49-F238E27FC236}">
-                <a16:creationId xmlns:a16="http://schemas.microsoft.com/office/drawing/2014/main" id="{CD8318F3-B2DA-4292-A8FC-CC8ACCFBC529}"/>
+                <a16:creationId xmlns:a16="http://schemas.microsoft.com/office/drawing/2014/main" id="{EDB886B4-82BE-4C72-A3ED-EC03D6421526}"/>
               </a:ext>
             </a:extLst>
           </p:cNvPr>
@@ -3975,7 +3980,7 @@
           <p:cNvPr id="2" name="">
             <a:extLst xmlns:a="http://schemas.openxmlformats.org/drawingml/2006/main">
               <a:ext uri="{FF2B5EF4-FFF2-40B4-BE49-F238E27FC236}">
-                <a16:creationId xmlns:a16="http://schemas.microsoft.com/office/drawing/2014/main" id="{5E0DC381-CD30-448A-87C7-52B841FF608E}"/>
+                <a16:creationId xmlns:a16="http://schemas.microsoft.com/office/drawing/2014/main" id="{131EE3C7-47B2-430E-99C1-6E15C60D081C}"/>
               </a:ext>
             </a:extLst>
           </p:cNvPr>
@@ -4032,7 +4037,7 @@
           <p:cNvPr id="3" name="">
             <a:extLst xmlns:a="http://schemas.openxmlformats.org/drawingml/2006/main">
               <a:ext uri="{FF2B5EF4-FFF2-40B4-BE49-F238E27FC236}">
-                <a16:creationId xmlns:a16="http://schemas.microsoft.com/office/drawing/2014/main" id="{DD141019-32B9-43E8-AD8F-CA8F87DE369D}"/>
+                <a16:creationId xmlns:a16="http://schemas.microsoft.com/office/drawing/2014/main" id="{71B52AD9-9DBB-4CF0-96DE-45D26BB5D422}"/>
               </a:ext>
             </a:extLst>
           </p:cNvPr>
@@ -4112,7 +4117,7 @@
           <p:cNvPr id="4" name="">
             <a:extLst xmlns:a="http://schemas.openxmlformats.org/drawingml/2006/main">
               <a:ext uri="{FF2B5EF4-FFF2-40B4-BE49-F238E27FC236}">
-                <a16:creationId xmlns:a16="http://schemas.microsoft.com/office/drawing/2014/main" id="{12121166-973F-4EBD-84AC-19DEE884CBE4}"/>
+                <a16:creationId xmlns:a16="http://schemas.microsoft.com/office/drawing/2014/main" id="{E1ABB24C-E9CC-4800-B0FA-717FCA770C4B}"/>
               </a:ext>
             </a:extLst>
           </p:cNvPr>
@@ -4196,7 +4201,7 @@
           <p:nvPr/>
         </p:nvPicPr>
         <p:blipFill>
-          <a:blip xmlns:r="http://schemas.openxmlformats.org/officeDocument/2006/relationships" xmlns:a="http://schemas.openxmlformats.org/drawingml/2006/main" r:embed="R718d75720fe94779"/>
+          <a:blip xmlns:r="http://schemas.openxmlformats.org/officeDocument/2006/relationships" xmlns:a="http://schemas.openxmlformats.org/drawingml/2006/main" r:embed="Re3aaa20c8a2a4e9e"/>
           <a:stretch xmlns:a="http://schemas.openxmlformats.org/drawingml/2006/main"/>
         </p:blipFill>
         <p:spPr>
@@ -4212,7 +4217,7 @@
     </p:spTree>
     <p:extLst>
       <p:ext uri="{BB962C8B-B14F-4D97-AF65-F5344CB8AC3E}">
-        <p14:creationId xmlns:p14="http://schemas.microsoft.com/office/powerpoint/2010/main" val="742497724"/>
+        <p14:creationId xmlns:p14="http://schemas.microsoft.com/office/powerpoint/2010/main" val="1908114061"/>
       </p:ext>
     </p:extLst>
   </p:cSld>
@@ -4243,7 +4248,7 @@
           <p:cNvPr id="13" name="">
             <a:extLst xmlns:a="http://schemas.openxmlformats.org/drawingml/2006/main">
               <a:ext uri="{FF2B5EF4-FFF2-40B4-BE49-F238E27FC236}">
-                <a16:creationId xmlns:a16="http://schemas.microsoft.com/office/drawing/2014/main" id="{D86CFC74-AD06-45C8-8CC4-7B3057A1B7EB}"/>
+                <a16:creationId xmlns:a16="http://schemas.microsoft.com/office/drawing/2014/main" id="{F8F4E52C-9CF9-4C29-8D36-D3ABBEF08CFB}"/>
               </a:ext>
             </a:extLst>
           </p:cNvPr>
@@ -4300,7 +4305,7 @@
           <p:cNvPr id="2" name="">
             <a:extLst xmlns:a="http://schemas.openxmlformats.org/drawingml/2006/main">
               <a:ext uri="{FF2B5EF4-FFF2-40B4-BE49-F238E27FC236}">
-                <a16:creationId xmlns:a16="http://schemas.microsoft.com/office/drawing/2014/main" id="{FFB28E15-0CC1-4210-8EEF-1D779A586259}"/>
+                <a16:creationId xmlns:a16="http://schemas.microsoft.com/office/drawing/2014/main" id="{6140DD78-48BF-4EDC-93CC-1570BEAEEDA4}"/>
               </a:ext>
             </a:extLst>
           </p:cNvPr>
@@ -4357,7 +4362,7 @@
           <p:cNvPr id="3" name="">
             <a:extLst xmlns:a="http://schemas.openxmlformats.org/drawingml/2006/main">
               <a:ext uri="{FF2B5EF4-FFF2-40B4-BE49-F238E27FC236}">
-                <a16:creationId xmlns:a16="http://schemas.microsoft.com/office/drawing/2014/main" id="{C10D774C-ED74-460F-A803-FFF49F245C33}"/>
+                <a16:creationId xmlns:a16="http://schemas.microsoft.com/office/drawing/2014/main" id="{67E1032C-AF94-408D-B33C-BF95AE01E560}"/>
               </a:ext>
             </a:extLst>
           </p:cNvPr>
@@ -4414,7 +4419,7 @@
           <p:cNvPr id="4" name="">
             <a:extLst xmlns:a="http://schemas.openxmlformats.org/drawingml/2006/main">
               <a:ext uri="{FF2B5EF4-FFF2-40B4-BE49-F238E27FC236}">
-                <a16:creationId xmlns:a16="http://schemas.microsoft.com/office/drawing/2014/main" id="{8C5FAB98-6F66-4C8D-8FDF-2101ED6D3B68}"/>
+                <a16:creationId xmlns:a16="http://schemas.microsoft.com/office/drawing/2014/main" id="{73483E75-818D-4E41-A03E-2B25AB7FD293}"/>
               </a:ext>
             </a:extLst>
           </p:cNvPr>
@@ -4471,7 +4476,7 @@
           <p:cNvPr id="5" name="">
             <a:extLst xmlns:a="http://schemas.openxmlformats.org/drawingml/2006/main">
               <a:ext uri="{FF2B5EF4-FFF2-40B4-BE49-F238E27FC236}">
-                <a16:creationId xmlns:a16="http://schemas.microsoft.com/office/drawing/2014/main" id="{16DA37FE-50AC-47AA-B9FA-8BC94E6C6B11}"/>
+                <a16:creationId xmlns:a16="http://schemas.microsoft.com/office/drawing/2014/main" id="{97A8EE6C-EBE6-4F9A-93B9-DED340130183}"/>
               </a:ext>
             </a:extLst>
           </p:cNvPr>
@@ -4528,7 +4533,7 @@
           <p:cNvPr id="6" name="">
             <a:extLst xmlns:a="http://schemas.openxmlformats.org/drawingml/2006/main">
               <a:ext uri="{FF2B5EF4-FFF2-40B4-BE49-F238E27FC236}">
-                <a16:creationId xmlns:a16="http://schemas.microsoft.com/office/drawing/2014/main" id="{FF5C0B8A-ADE5-49BF-97D5-6A1AF8F0928C}"/>
+                <a16:creationId xmlns:a16="http://schemas.microsoft.com/office/drawing/2014/main" id="{BE649C59-8F46-4672-A57B-ACCCA1A841DA}"/>
               </a:ext>
             </a:extLst>
           </p:cNvPr>
@@ -4585,7 +4590,7 @@
           <p:cNvPr id="7" name="">
             <a:extLst xmlns:a="http://schemas.openxmlformats.org/drawingml/2006/main">
               <a:ext uri="{FF2B5EF4-FFF2-40B4-BE49-F238E27FC236}">
-                <a16:creationId xmlns:a16="http://schemas.microsoft.com/office/drawing/2014/main" id="{75E524BD-60C0-4F27-AEE0-F883BC60A1DA}"/>
+                <a16:creationId xmlns:a16="http://schemas.microsoft.com/office/drawing/2014/main" id="{5A567AFF-2B3E-42D6-BD28-EACA0747825C}"/>
               </a:ext>
             </a:extLst>
           </p:cNvPr>
@@ -4642,7 +4647,7 @@
           <p:cNvPr id="8" name="">
             <a:extLst xmlns:a="http://schemas.openxmlformats.org/drawingml/2006/main">
               <a:ext uri="{FF2B5EF4-FFF2-40B4-BE49-F238E27FC236}">
-                <a16:creationId xmlns:a16="http://schemas.microsoft.com/office/drawing/2014/main" id="{A598BD24-89D5-477D-A39A-BBEF9138498C}"/>
+                <a16:creationId xmlns:a16="http://schemas.microsoft.com/office/drawing/2014/main" id="{F41F2844-5F6F-4D12-9FE8-EA821222F4E5}"/>
               </a:ext>
             </a:extLst>
           </p:cNvPr>
@@ -4699,7 +4704,7 @@
           <p:cNvPr id="9" name="">
             <a:extLst xmlns:a="http://schemas.openxmlformats.org/drawingml/2006/main">
               <a:ext uri="{FF2B5EF4-FFF2-40B4-BE49-F238E27FC236}">
-                <a16:creationId xmlns:a16="http://schemas.microsoft.com/office/drawing/2014/main" id="{2FA564D6-5725-4EFD-82FC-4A7ABECEC1B2}"/>
+                <a16:creationId xmlns:a16="http://schemas.microsoft.com/office/drawing/2014/main" id="{3815FF2B-31EB-46E7-BCA5-9AC13DCB6897}"/>
               </a:ext>
             </a:extLst>
           </p:cNvPr>
@@ -4756,7 +4761,7 @@
           <p:cNvPr id="10" name="">
             <a:extLst xmlns:a="http://schemas.openxmlformats.org/drawingml/2006/main">
               <a:ext uri="{FF2B5EF4-FFF2-40B4-BE49-F238E27FC236}">
-                <a16:creationId xmlns:a16="http://schemas.microsoft.com/office/drawing/2014/main" id="{65665EEB-CD49-4405-9331-9CBF852B70B8}"/>
+                <a16:creationId xmlns:a16="http://schemas.microsoft.com/office/drawing/2014/main" id="{F6C67F9A-E203-4227-8209-FE27C86848EF}"/>
               </a:ext>
             </a:extLst>
           </p:cNvPr>
@@ -4813,7 +4818,7 @@
           <p:cNvPr id="11" name="">
             <a:extLst xmlns:a="http://schemas.openxmlformats.org/drawingml/2006/main">
               <a:ext uri="{FF2B5EF4-FFF2-40B4-BE49-F238E27FC236}">
-                <a16:creationId xmlns:a16="http://schemas.microsoft.com/office/drawing/2014/main" id="{356271E0-78E1-44A6-A4BD-655AD4784374}"/>
+                <a16:creationId xmlns:a16="http://schemas.microsoft.com/office/drawing/2014/main" id="{9031C2FF-BC8B-4962-A75C-8DD398FA777F}"/>
               </a:ext>
             </a:extLst>
           </p:cNvPr>
@@ -4874,7 +4879,7 @@
           <p:nvPr/>
         </p:nvPicPr>
         <p:blipFill>
-          <a:blip xmlns:r="http://schemas.openxmlformats.org/officeDocument/2006/relationships" xmlns:a="http://schemas.openxmlformats.org/drawingml/2006/main" r:embed="R5852119e8f974801"/>
+          <a:blip xmlns:r="http://schemas.openxmlformats.org/officeDocument/2006/relationships" xmlns:a="http://schemas.openxmlformats.org/drawingml/2006/main" r:embed="R9b21d559252a4e6e"/>
           <a:stretch xmlns:a="http://schemas.openxmlformats.org/drawingml/2006/main"/>
         </p:blipFill>
         <p:spPr>
@@ -4890,7 +4895,7 @@
     </p:spTree>
     <p:extLst>
       <p:ext uri="{BB962C8B-B14F-4D97-AF65-F5344CB8AC3E}">
-        <p14:creationId xmlns:p14="http://schemas.microsoft.com/office/powerpoint/2010/main" val="107173139"/>
+        <p14:creationId xmlns:p14="http://schemas.microsoft.com/office/powerpoint/2010/main" val="1776169237"/>
       </p:ext>
     </p:extLst>
   </p:cSld>
@@ -4921,7 +4926,7 @@
           <p:cNvPr id="9" name="">
             <a:extLst xmlns:a="http://schemas.openxmlformats.org/drawingml/2006/main">
               <a:ext uri="{FF2B5EF4-FFF2-40B4-BE49-F238E27FC236}">
-                <a16:creationId xmlns:a16="http://schemas.microsoft.com/office/drawing/2014/main" id="{D773C7CB-28A9-4B06-84DD-EF528635B5DC}"/>
+                <a16:creationId xmlns:a16="http://schemas.microsoft.com/office/drawing/2014/main" id="{E452B5A5-6FF8-4109-B85B-A1274E408FDA}"/>
               </a:ext>
             </a:extLst>
           </p:cNvPr>
@@ -4978,7 +4983,7 @@
           <p:cNvPr id="2" name="">
             <a:extLst xmlns:a="http://schemas.openxmlformats.org/drawingml/2006/main">
               <a:ext uri="{FF2B5EF4-FFF2-40B4-BE49-F238E27FC236}">
-                <a16:creationId xmlns:a16="http://schemas.microsoft.com/office/drawing/2014/main" id="{87E68AD8-BD60-45CC-A263-048DCF748BC3}"/>
+                <a16:creationId xmlns:a16="http://schemas.microsoft.com/office/drawing/2014/main" id="{38B97356-6AC7-4A45-B37C-AE177D8AD53D}"/>
               </a:ext>
             </a:extLst>
           </p:cNvPr>
@@ -5039,7 +5044,7 @@
           <p:nvPr/>
         </p:nvPicPr>
         <p:blipFill>
-          <a:blip xmlns:r="http://schemas.openxmlformats.org/officeDocument/2006/relationships" xmlns:a="http://schemas.openxmlformats.org/drawingml/2006/main" r:embed="R7d329a19980543ea"/>
+          <a:blip xmlns:r="http://schemas.openxmlformats.org/officeDocument/2006/relationships" xmlns:a="http://schemas.openxmlformats.org/drawingml/2006/main" r:embed="Rca5d987e79d64527"/>
           <a:stretch xmlns:a="http://schemas.openxmlformats.org/drawingml/2006/main"/>
         </p:blipFill>
         <p:spPr>
@@ -5057,7 +5062,7 @@
           <p:cNvPr id="4" name="">
             <a:extLst xmlns:a="http://schemas.openxmlformats.org/drawingml/2006/main">
               <a:ext uri="{FF2B5EF4-FFF2-40B4-BE49-F238E27FC236}">
-                <a16:creationId xmlns:a16="http://schemas.microsoft.com/office/drawing/2014/main" id="{B77F73EB-064E-4052-9BDF-602413D7278C}"/>
+                <a16:creationId xmlns:a16="http://schemas.microsoft.com/office/drawing/2014/main" id="{E11C820E-83C4-4DFD-B982-8EA81EA045B2}"/>
               </a:ext>
             </a:extLst>
           </p:cNvPr>
@@ -5114,7 +5119,7 @@
           <p:cNvPr id="5" name="">
             <a:extLst xmlns:a="http://schemas.openxmlformats.org/drawingml/2006/main">
               <a:ext uri="{FF2B5EF4-FFF2-40B4-BE49-F238E27FC236}">
-                <a16:creationId xmlns:a16="http://schemas.microsoft.com/office/drawing/2014/main" id="{7F10ED19-21D6-4CDF-8E4B-FBE04E08CFDF}"/>
+                <a16:creationId xmlns:a16="http://schemas.microsoft.com/office/drawing/2014/main" id="{A4A4114A-2525-4E67-8CB7-F2DDD0F63A42}"/>
               </a:ext>
             </a:extLst>
           </p:cNvPr>
@@ -5194,7 +5199,7 @@
           <p:cNvPr id="6" name="">
             <a:extLst xmlns:a="http://schemas.openxmlformats.org/drawingml/2006/main">
               <a:ext uri="{FF2B5EF4-FFF2-40B4-BE49-F238E27FC236}">
-                <a16:creationId xmlns:a16="http://schemas.microsoft.com/office/drawing/2014/main" id="{42441686-4C47-4854-AAAA-82C9CBCAD9A8}"/>
+                <a16:creationId xmlns:a16="http://schemas.microsoft.com/office/drawing/2014/main" id="{19235528-7184-4B62-B09C-E15FF45481F7}"/>
               </a:ext>
             </a:extLst>
           </p:cNvPr>
@@ -5251,7 +5256,7 @@
           <p:cNvPr id="7" name="">
             <a:extLst xmlns:a="http://schemas.openxmlformats.org/drawingml/2006/main">
               <a:ext uri="{FF2B5EF4-FFF2-40B4-BE49-F238E27FC236}">
-                <a16:creationId xmlns:a16="http://schemas.microsoft.com/office/drawing/2014/main" id="{1331FE2D-6DD1-489D-BE5C-016991701A68}"/>
+                <a16:creationId xmlns:a16="http://schemas.microsoft.com/office/drawing/2014/main" id="{906902C7-37DC-4A2A-A9DA-547D6C414782}"/>
               </a:ext>
             </a:extLst>
           </p:cNvPr>
@@ -5331,7 +5336,7 @@
           <p:cNvPr id="8" name="">
             <a:extLst xmlns:a="http://schemas.openxmlformats.org/drawingml/2006/main">
               <a:ext uri="{FF2B5EF4-FFF2-40B4-BE49-F238E27FC236}">
-                <a16:creationId xmlns:a16="http://schemas.microsoft.com/office/drawing/2014/main" id="{CBBB48BB-002A-4091-8F30-7A22FDE30AFD}"/>
+                <a16:creationId xmlns:a16="http://schemas.microsoft.com/office/drawing/2014/main" id="{163B4108-C04F-4871-BB2F-7F535FF4E383}"/>
               </a:ext>
             </a:extLst>
           </p:cNvPr>
@@ -5386,7 +5391,7 @@
     </p:spTree>
     <p:extLst>
       <p:ext uri="{BB962C8B-B14F-4D97-AF65-F5344CB8AC3E}">
-        <p14:creationId xmlns:p14="http://schemas.microsoft.com/office/powerpoint/2010/main" val="1993725369"/>
+        <p14:creationId xmlns:p14="http://schemas.microsoft.com/office/powerpoint/2010/main" val="114062653"/>
       </p:ext>
     </p:extLst>
   </p:cSld>
@@ -5417,7 +5422,7 @@
           <p:cNvPr id="10" name="">
             <a:extLst xmlns:a="http://schemas.openxmlformats.org/drawingml/2006/main">
               <a:ext uri="{FF2B5EF4-FFF2-40B4-BE49-F238E27FC236}">
-                <a16:creationId xmlns:a16="http://schemas.microsoft.com/office/drawing/2014/main" id="{806B799D-A825-4717-B6A6-59326CD0AF62}"/>
+                <a16:creationId xmlns:a16="http://schemas.microsoft.com/office/drawing/2014/main" id="{1269EC8B-8C81-4740-8751-B65B7121214C}"/>
               </a:ext>
             </a:extLst>
           </p:cNvPr>
@@ -5474,7 +5479,7 @@
           <p:cNvPr id="2" name="">
             <a:extLst xmlns:a="http://schemas.openxmlformats.org/drawingml/2006/main">
               <a:ext uri="{FF2B5EF4-FFF2-40B4-BE49-F238E27FC236}">
-                <a16:creationId xmlns:a16="http://schemas.microsoft.com/office/drawing/2014/main" id="{8A1FBF07-C94F-40AE-8F36-87957254C0C7}"/>
+                <a16:creationId xmlns:a16="http://schemas.microsoft.com/office/drawing/2014/main" id="{CFD6C13A-351B-48D2-8244-FC6C254B0594}"/>
               </a:ext>
             </a:extLst>
           </p:cNvPr>
@@ -5531,7 +5536,7 @@
           <p:cNvPr id="3" name="">
             <a:extLst xmlns:a="http://schemas.openxmlformats.org/drawingml/2006/main">
               <a:ext uri="{FF2B5EF4-FFF2-40B4-BE49-F238E27FC236}">
-                <a16:creationId xmlns:a16="http://schemas.microsoft.com/office/drawing/2014/main" id="{B1620CFC-AA2C-49C4-A5E8-F214A01A2C71}"/>
+                <a16:creationId xmlns:a16="http://schemas.microsoft.com/office/drawing/2014/main" id="{67E7E3B2-7059-4F51-8ECA-A0BCF997CC29}"/>
               </a:ext>
             </a:extLst>
           </p:cNvPr>
@@ -5588,7 +5593,7 @@
           <p:cNvPr id="4" name="">
             <a:extLst xmlns:a="http://schemas.openxmlformats.org/drawingml/2006/main">
               <a:ext uri="{FF2B5EF4-FFF2-40B4-BE49-F238E27FC236}">
-                <a16:creationId xmlns:a16="http://schemas.microsoft.com/office/drawing/2014/main" id="{977F866A-1DF0-4370-99A6-F085E133A387}"/>
+                <a16:creationId xmlns:a16="http://schemas.microsoft.com/office/drawing/2014/main" id="{16C6F91B-6D13-4945-9983-200AA9556546}"/>
               </a:ext>
             </a:extLst>
           </p:cNvPr>
@@ -5691,7 +5696,7 @@
           <p:cNvPr id="5" name="">
             <a:extLst xmlns:a="http://schemas.openxmlformats.org/drawingml/2006/main">
               <a:ext uri="{FF2B5EF4-FFF2-40B4-BE49-F238E27FC236}">
-                <a16:creationId xmlns:a16="http://schemas.microsoft.com/office/drawing/2014/main" id="{A0956D3D-D5BB-41B1-80B8-5E34281D0AAE}"/>
+                <a16:creationId xmlns:a16="http://schemas.microsoft.com/office/drawing/2014/main" id="{A0BDCA5F-A620-4AD3-B5CB-C3C2D29A3A02}"/>
               </a:ext>
             </a:extLst>
           </p:cNvPr>
@@ -5794,7 +5799,7 @@
           <p:cNvPr id="6" name="">
             <a:extLst xmlns:a="http://schemas.openxmlformats.org/drawingml/2006/main">
               <a:ext uri="{FF2B5EF4-FFF2-40B4-BE49-F238E27FC236}">
-                <a16:creationId xmlns:a16="http://schemas.microsoft.com/office/drawing/2014/main" id="{592D95B3-1D23-4518-9D70-004C95878DA4}"/>
+                <a16:creationId xmlns:a16="http://schemas.microsoft.com/office/drawing/2014/main" id="{4AD9FF0E-1DB5-489B-9857-AC7F292E5169}"/>
               </a:ext>
             </a:extLst>
           </p:cNvPr>
@@ -5851,7 +5856,7 @@
           <p:cNvPr id="7" name="">
             <a:extLst xmlns:a="http://schemas.openxmlformats.org/drawingml/2006/main">
               <a:ext uri="{FF2B5EF4-FFF2-40B4-BE49-F238E27FC236}">
-                <a16:creationId xmlns:a16="http://schemas.microsoft.com/office/drawing/2014/main" id="{2DADDDAC-1865-449B-B532-8A269C51F85C}"/>
+                <a16:creationId xmlns:a16="http://schemas.microsoft.com/office/drawing/2014/main" id="{17C31F1D-B092-469F-A249-6C98E1EDC663}"/>
               </a:ext>
             </a:extLst>
           </p:cNvPr>
@@ -5912,7 +5917,7 @@
           <p:nvPr/>
         </p:nvPicPr>
         <p:blipFill>
-          <a:blip xmlns:r="http://schemas.openxmlformats.org/officeDocument/2006/relationships" xmlns:a="http://schemas.openxmlformats.org/drawingml/2006/main" r:embed="R806e8e1e1c1c4200"/>
+          <a:blip xmlns:r="http://schemas.openxmlformats.org/officeDocument/2006/relationships" xmlns:a="http://schemas.openxmlformats.org/drawingml/2006/main" r:embed="R7864bcd7f33344e6"/>
           <a:stretch xmlns:a="http://schemas.openxmlformats.org/drawingml/2006/main"/>
         </p:blipFill>
         <p:spPr>
@@ -5934,7 +5939,7 @@
           <p:nvPr/>
         </p:nvPicPr>
         <p:blipFill>
-          <a:blip xmlns:r="http://schemas.openxmlformats.org/officeDocument/2006/relationships" xmlns:a="http://schemas.openxmlformats.org/drawingml/2006/main" r:embed="R26ac0357b1264b0b"/>
+          <a:blip xmlns:r="http://schemas.openxmlformats.org/officeDocument/2006/relationships" xmlns:a="http://schemas.openxmlformats.org/drawingml/2006/main" r:embed="R8ab18a4f01b74859"/>
           <a:stretch xmlns:a="http://schemas.openxmlformats.org/drawingml/2006/main"/>
         </p:blipFill>
         <p:spPr>
@@ -5950,7 +5955,7 @@
     </p:spTree>
     <p:extLst>
       <p:ext uri="{BB962C8B-B14F-4D97-AF65-F5344CB8AC3E}">
-        <p14:creationId xmlns:p14="http://schemas.microsoft.com/office/powerpoint/2010/main" val="351427784"/>
+        <p14:creationId xmlns:p14="http://schemas.microsoft.com/office/powerpoint/2010/main" val="1736987920"/>
       </p:ext>
     </p:extLst>
   </p:cSld>
@@ -5981,7 +5986,7 @@
           <p:cNvPr id="6" name="">
             <a:extLst xmlns:a="http://schemas.openxmlformats.org/drawingml/2006/main">
               <a:ext uri="{FF2B5EF4-FFF2-40B4-BE49-F238E27FC236}">
-                <a16:creationId xmlns:a16="http://schemas.microsoft.com/office/drawing/2014/main" id="{4EE7C5B4-8525-4812-AF5F-1C45AEE2FB6D}"/>
+                <a16:creationId xmlns:a16="http://schemas.microsoft.com/office/drawing/2014/main" id="{19271203-F32E-44D5-8393-3ECA3B6542B0}"/>
               </a:ext>
             </a:extLst>
           </p:cNvPr>
@@ -6038,7 +6043,7 @@
           <p:cNvPr id="2" name="">
             <a:extLst xmlns:a="http://schemas.openxmlformats.org/drawingml/2006/main">
               <a:ext uri="{FF2B5EF4-FFF2-40B4-BE49-F238E27FC236}">
-                <a16:creationId xmlns:a16="http://schemas.microsoft.com/office/drawing/2014/main" id="{8AC3A208-B26D-4EDC-8453-63833FF1F763}"/>
+                <a16:creationId xmlns:a16="http://schemas.microsoft.com/office/drawing/2014/main" id="{307053AE-BC77-4BDD-9C32-0F0124B3C134}"/>
               </a:ext>
             </a:extLst>
           </p:cNvPr>
@@ -6095,7 +6100,7 @@
           <p:cNvPr id="3" name="">
             <a:extLst xmlns:a="http://schemas.openxmlformats.org/drawingml/2006/main">
               <a:ext uri="{FF2B5EF4-FFF2-40B4-BE49-F238E27FC236}">
-                <a16:creationId xmlns:a16="http://schemas.microsoft.com/office/drawing/2014/main" id="{25E6438F-AD48-40A5-BB46-864AB0188D07}"/>
+                <a16:creationId xmlns:a16="http://schemas.microsoft.com/office/drawing/2014/main" id="{034C2A89-26E3-4F17-AA89-340A3DE3DD26}"/>
               </a:ext>
             </a:extLst>
           </p:cNvPr>
@@ -6605,7 +6610,7 @@
           <p:cNvPr id="5" name="">
             <a:extLst xmlns:a="http://schemas.openxmlformats.org/drawingml/2006/main">
               <a:ext uri="{FF2B5EF4-FFF2-40B4-BE49-F238E27FC236}">
-                <a16:creationId xmlns:a16="http://schemas.microsoft.com/office/drawing/2014/main" id="{AA30CCE4-EF7E-4B06-83BE-AF56F77B764A}"/>
+                <a16:creationId xmlns:a16="http://schemas.microsoft.com/office/drawing/2014/main" id="{7FE19B0E-50C9-4B73-9031-77025119B5AD}"/>
               </a:ext>
             </a:extLst>
           </p:cNvPr>
@@ -6660,7 +6665,7 @@
     </p:spTree>
     <p:extLst>
       <p:ext uri="{BB962C8B-B14F-4D97-AF65-F5344CB8AC3E}">
-        <p14:creationId xmlns:p14="http://schemas.microsoft.com/office/powerpoint/2010/main" val="2086168124"/>
+        <p14:creationId xmlns:p14="http://schemas.microsoft.com/office/powerpoint/2010/main" val="367293417"/>
       </p:ext>
     </p:extLst>
   </p:cSld>
@@ -6691,7 +6696,7 @@
           <p:cNvPr id="9" name="">
             <a:extLst xmlns:a="http://schemas.openxmlformats.org/drawingml/2006/main">
               <a:ext uri="{FF2B5EF4-FFF2-40B4-BE49-F238E27FC236}">
-                <a16:creationId xmlns:a16="http://schemas.microsoft.com/office/drawing/2014/main" id="{063416A6-8014-4252-BAB3-2023F0DCE510}"/>
+                <a16:creationId xmlns:a16="http://schemas.microsoft.com/office/drawing/2014/main" id="{349074FD-AF0F-4F58-A6C4-3E71AD344CC0}"/>
               </a:ext>
             </a:extLst>
           </p:cNvPr>
@@ -6748,7 +6753,7 @@
           <p:cNvPr id="2" name="">
             <a:extLst xmlns:a="http://schemas.openxmlformats.org/drawingml/2006/main">
               <a:ext uri="{FF2B5EF4-FFF2-40B4-BE49-F238E27FC236}">
-                <a16:creationId xmlns:a16="http://schemas.microsoft.com/office/drawing/2014/main" id="{DA7D1D0B-F4D5-4938-9E3A-E87D8658C438}"/>
+                <a16:creationId xmlns:a16="http://schemas.microsoft.com/office/drawing/2014/main" id="{B4F93783-14C7-4B1A-A136-486DCFE4E486}"/>
               </a:ext>
             </a:extLst>
           </p:cNvPr>
@@ -6805,7 +6810,7 @@
           <p:cNvPr id="3" name="">
             <a:extLst xmlns:a="http://schemas.openxmlformats.org/drawingml/2006/main">
               <a:ext uri="{FF2B5EF4-FFF2-40B4-BE49-F238E27FC236}">
-                <a16:creationId xmlns:a16="http://schemas.microsoft.com/office/drawing/2014/main" id="{52E7DB7D-70D5-44A6-8DF5-A136BF48DB2E}"/>
+                <a16:creationId xmlns:a16="http://schemas.microsoft.com/office/drawing/2014/main" id="{44ACD0C5-A593-40B2-A5CF-BA004181CDE1}"/>
               </a:ext>
             </a:extLst>
           </p:cNvPr>
@@ -6862,7 +6867,7 @@
           <p:cNvPr id="4" name="">
             <a:extLst xmlns:a="http://schemas.openxmlformats.org/drawingml/2006/main">
               <a:ext uri="{FF2B5EF4-FFF2-40B4-BE49-F238E27FC236}">
-                <a16:creationId xmlns:a16="http://schemas.microsoft.com/office/drawing/2014/main" id="{8D2C342F-07F6-41A2-BDE2-B8E11691007F}"/>
+                <a16:creationId xmlns:a16="http://schemas.microsoft.com/office/drawing/2014/main" id="{1C39F1C0-50DB-46C3-83FA-E4EA6B2E1E08}"/>
               </a:ext>
             </a:extLst>
           </p:cNvPr>
@@ -6919,7 +6924,7 @@
           <p:cNvPr id="5" name="">
             <a:extLst xmlns:a="http://schemas.openxmlformats.org/drawingml/2006/main">
               <a:ext uri="{FF2B5EF4-FFF2-40B4-BE49-F238E27FC236}">
-                <a16:creationId xmlns:a16="http://schemas.microsoft.com/office/drawing/2014/main" id="{F957634E-C5EB-4984-8CDD-ECF315387FC0}"/>
+                <a16:creationId xmlns:a16="http://schemas.microsoft.com/office/drawing/2014/main" id="{CEE4EF87-756E-46DB-8256-761233958292}"/>
               </a:ext>
             </a:extLst>
           </p:cNvPr>
@@ -7022,7 +7027,7 @@
           <p:cNvPr id="6" name="">
             <a:extLst xmlns:a="http://schemas.openxmlformats.org/drawingml/2006/main">
               <a:ext uri="{FF2B5EF4-FFF2-40B4-BE49-F238E27FC236}">
-                <a16:creationId xmlns:a16="http://schemas.microsoft.com/office/drawing/2014/main" id="{7B2CF585-AD2D-4C64-821F-C4FA2A6C6894}"/>
+                <a16:creationId xmlns:a16="http://schemas.microsoft.com/office/drawing/2014/main" id="{A4138365-6C5E-4544-8CA7-255F18B54EFC}"/>
               </a:ext>
             </a:extLst>
           </p:cNvPr>
@@ -7079,7 +7084,7 @@
           <p:cNvPr id="7" name="">
             <a:extLst xmlns:a="http://schemas.openxmlformats.org/drawingml/2006/main">
               <a:ext uri="{FF2B5EF4-FFF2-40B4-BE49-F238E27FC236}">
-                <a16:creationId xmlns:a16="http://schemas.microsoft.com/office/drawing/2014/main" id="{620EC957-E466-4276-835A-DAB1AFF847A5}"/>
+                <a16:creationId xmlns:a16="http://schemas.microsoft.com/office/drawing/2014/main" id="{B884866F-6912-4F97-9584-A900CFDE077D}"/>
               </a:ext>
             </a:extLst>
           </p:cNvPr>
@@ -7205,7 +7210,7 @@
           <p:cNvPr id="8" name="">
             <a:extLst xmlns:a="http://schemas.openxmlformats.org/drawingml/2006/main">
               <a:ext uri="{FF2B5EF4-FFF2-40B4-BE49-F238E27FC236}">
-                <a16:creationId xmlns:a16="http://schemas.microsoft.com/office/drawing/2014/main" id="{5E517A13-DED6-4C7B-AE1D-4F3AE45EB982}"/>
+                <a16:creationId xmlns:a16="http://schemas.microsoft.com/office/drawing/2014/main" id="{3153FE0A-1DA7-48F1-80E1-2A12F7404007}"/>
               </a:ext>
             </a:extLst>
           </p:cNvPr>
@@ -7283,7 +7288,7 @@
     </p:spTree>
     <p:extLst>
       <p:ext uri="{BB962C8B-B14F-4D97-AF65-F5344CB8AC3E}">
-        <p14:creationId xmlns:p14="http://schemas.microsoft.com/office/powerpoint/2010/main" val="662198175"/>
+        <p14:creationId xmlns:p14="http://schemas.microsoft.com/office/powerpoint/2010/main" val="795363001"/>
       </p:ext>
     </p:extLst>
   </p:cSld>
@@ -7311,10 +7316,10 @@
       </p:grpSpPr>
       <p:sp>
         <p:nvSpPr>
-          <p:cNvPr id="12" name="">
+          <p:cNvPr id="10" name="">
             <a:extLst xmlns:a="http://schemas.openxmlformats.org/drawingml/2006/main">
               <a:ext uri="{FF2B5EF4-FFF2-40B4-BE49-F238E27FC236}">
-                <a16:creationId xmlns:a16="http://schemas.microsoft.com/office/drawing/2014/main" id="{E3AB3D0D-9869-4890-8D07-CA4CEBC4DEE7}"/>
+                <a16:creationId xmlns:a16="http://schemas.microsoft.com/office/drawing/2014/main" id="{1306F4C5-7CE3-47D5-963F-9B056C44B1B6}"/>
               </a:ext>
             </a:extLst>
           </p:cNvPr>
@@ -7371,7 +7376,7 @@
           <p:cNvPr id="2" name="">
             <a:extLst xmlns:a="http://schemas.openxmlformats.org/drawingml/2006/main">
               <a:ext uri="{FF2B5EF4-FFF2-40B4-BE49-F238E27FC236}">
-                <a16:creationId xmlns:a16="http://schemas.microsoft.com/office/drawing/2014/main" id="{A09BDF87-4E87-4F20-9F74-863E3B0B97BC}"/>
+                <a16:creationId xmlns:a16="http://schemas.microsoft.com/office/drawing/2014/main" id="{6E9DD13E-02C7-4A2E-8F06-E410D494B1E1}"/>
               </a:ext>
             </a:extLst>
           </p:cNvPr>
@@ -7418,7 +7423,7 @@
                 <a:ea typeface="Newsreader"/>
                 <a:cs typeface="Newsreader"/>
               </a:rPr>
-              <a:t>Der nächste Beweis: Alltag</a:t>
+              <a:t>Rückblick und Ausblick</a:t>
             </a:r>
           </a:p>
         </p:txBody>
@@ -7428,7 +7433,7 @@
           <p:cNvPr id="3" name="">
             <a:extLst xmlns:a="http://schemas.openxmlformats.org/drawingml/2006/main">
               <a:ext uri="{FF2B5EF4-FFF2-40B4-BE49-F238E27FC236}">
-                <a16:creationId xmlns:a16="http://schemas.microsoft.com/office/drawing/2014/main" id="{65C7381F-A525-4B91-9EF9-428FB348608B}"/>
+                <a16:creationId xmlns:a16="http://schemas.microsoft.com/office/drawing/2014/main" id="{E0F728BB-D44F-4A52-BBCB-7F77D3AF724A}"/>
               </a:ext>
             </a:extLst>
           </p:cNvPr>
@@ -7439,8 +7444,8 @@
         </p:nvSpPr>
         <p:spPr>
           <a:xfrm xmlns:a="http://schemas.openxmlformats.org/drawingml/2006/main">
-            <a:off x="628650" y="1638300"/>
-            <a:ext cx="3429000" cy="1685925"/>
+            <a:off x="628650" y="1762125"/>
+            <a:ext cx="5162550" cy="838200"/>
           </a:xfrm>
           <a:prstGeom xmlns:a="http://schemas.openxmlformats.org/drawingml/2006/main" prst="rect">
             <a:avLst/>
@@ -7457,7 +7462,7 @@
           <a:lstStyle xmlns:a="http://schemas.openxmlformats.org/drawingml/2006/main"/>
           <a:p xmlns:a="http://schemas.openxmlformats.org/drawingml/2006/main">
             <a:pPr algn="l">
-              <a:defRPr sz="10575" b="0">
+              <a:defRPr sz="2850" b="0">
                 <a:solidFill>
                   <a:srgbClr val="1F5A45"/>
                 </a:solidFill>
@@ -7467,7 +7472,7 @@
               </a:defRPr>
             </a:pPr>
             <a:r>
-              <a:rPr sz="10575" b="0">
+              <a:rPr sz="2850" b="0">
                 <a:solidFill>
                   <a:srgbClr val="1F5A45"/>
                 </a:solidFill>
@@ -7475,7 +7480,7 @@
                 <a:ea typeface="Newsreader"/>
                 <a:cs typeface="Newsreader"/>
               </a:rPr>
-              <a:t>5</a:t>
+              <a:t>Was wir gelernt haben</a:t>
             </a:r>
           </a:p>
         </p:txBody>
@@ -7485,7 +7490,7 @@
           <p:cNvPr id="4" name="">
             <a:extLst xmlns:a="http://schemas.openxmlformats.org/drawingml/2006/main">
               <a:ext uri="{FF2B5EF4-FFF2-40B4-BE49-F238E27FC236}">
-                <a16:creationId xmlns:a16="http://schemas.microsoft.com/office/drawing/2014/main" id="{20F42D9B-CE39-48AA-8E8A-88ED37CC2D38}"/>
+                <a16:creationId xmlns:a16="http://schemas.microsoft.com/office/drawing/2014/main" id="{4EB8995F-6DC7-4C70-9431-BD3B35DD5F72}"/>
               </a:ext>
             </a:extLst>
           </p:cNvPr>
@@ -7496,8 +7501,8 @@
         </p:nvSpPr>
         <p:spPr>
           <a:xfrm xmlns:a="http://schemas.openxmlformats.org/drawingml/2006/main">
-            <a:off x="666750" y="3429000"/>
-            <a:ext cx="5172075" cy="685800"/>
+            <a:off x="666750" y="2876550"/>
+            <a:ext cx="5095875" cy="1009650"/>
           </a:xfrm>
           <a:prstGeom xmlns:a="http://schemas.openxmlformats.org/drawingml/2006/main" prst="rect">
             <a:avLst/>
@@ -7532,7 +7537,30 @@
                 <a:ea typeface="Inter"/>
                 <a:cs typeface="Inter"/>
               </a:rPr>
-              <a:t>Lernende oder Studierende</a:t>
+              <a:t>Monatsbudgets und Fristen</a:t>
+            </a:r>
+          </a:p>
+          <a:p xmlns:a="http://schemas.openxmlformats.org/drawingml/2006/main">
+            <a:pPr algn="l">
+              <a:defRPr sz="2175" b="0">
+                <a:solidFill>
+                  <a:srgbClr val="15171A"/>
+                </a:solidFill>
+                <a:latin typeface="Inter"/>
+                <a:ea typeface="Inter"/>
+                <a:cs typeface="Inter"/>
+              </a:defRPr>
+            </a:pPr>
+            <a:r>
+              <a:rPr sz="2175" b="0">
+                <a:solidFill>
+                  <a:srgbClr val="15171A"/>
+                </a:solidFill>
+                <a:latin typeface="Inter"/>
+                <a:ea typeface="Inter"/>
+                <a:cs typeface="Inter"/>
+              </a:rPr>
+              <a:t>brauchen klare Regeln.</a:t>
             </a:r>
           </a:p>
         </p:txBody>
@@ -7542,7 +7570,7 @@
           <p:cNvPr id="5" name="">
             <a:extLst xmlns:a="http://schemas.openxmlformats.org/drawingml/2006/main">
               <a:ext uri="{FF2B5EF4-FFF2-40B4-BE49-F238E27FC236}">
-                <a16:creationId xmlns:a16="http://schemas.microsoft.com/office/drawing/2014/main" id="{70E3F2B8-E084-4E3B-BA19-72B1DE7BDD7C}"/>
+                <a16:creationId xmlns:a16="http://schemas.microsoft.com/office/drawing/2014/main" id="{CE243F8F-8201-4762-B886-2D6044B448EF}"/>
               </a:ext>
             </a:extLst>
           </p:cNvPr>
@@ -7553,8 +7581,8 @@
         </p:nvSpPr>
         <p:spPr>
           <a:xfrm xmlns:a="http://schemas.openxmlformats.org/drawingml/2006/main">
-            <a:off x="666750" y="4419600"/>
-            <a:ext cx="5133975" cy="542925"/>
+            <a:off x="666750" y="4543425"/>
+            <a:ext cx="5095875" cy="1009650"/>
           </a:xfrm>
           <a:prstGeom xmlns:a="http://schemas.openxmlformats.org/drawingml/2006/main" prst="rect">
             <a:avLst/>
@@ -7571,25 +7599,48 @@
           <a:lstStyle xmlns:a="http://schemas.openxmlformats.org/drawingml/2006/main"/>
           <a:p xmlns:a="http://schemas.openxmlformats.org/drawingml/2006/main">
             <a:pPr algn="l">
-              <a:defRPr sz="2550" b="0">
-                <a:solidFill>
-                  <a:srgbClr val="1F5A45"/>
-                </a:solidFill>
-                <a:latin typeface="Newsreader"/>
-                <a:ea typeface="Newsreader"/>
-                <a:cs typeface="Newsreader"/>
-              </a:defRPr>
-            </a:pPr>
-            <a:r>
-              <a:rPr sz="2550" b="0">
-                <a:solidFill>
-                  <a:srgbClr val="1F5A45"/>
-                </a:solidFill>
-                <a:latin typeface="Newsreader"/>
-                <a:ea typeface="Newsreader"/>
-                <a:cs typeface="Newsreader"/>
-              </a:rPr>
-              <a:t>1 Woche mit Spendly</a:t>
+              <a:defRPr sz="2175" b="0">
+                <a:solidFill>
+                  <a:srgbClr val="15171A"/>
+                </a:solidFill>
+                <a:latin typeface="Inter"/>
+                <a:ea typeface="Inter"/>
+                <a:cs typeface="Inter"/>
+              </a:defRPr>
+            </a:pPr>
+            <a:r>
+              <a:rPr sz="2175" b="0">
+                <a:solidFill>
+                  <a:srgbClr val="15171A"/>
+                </a:solidFill>
+                <a:latin typeface="Inter"/>
+                <a:ea typeface="Inter"/>
+                <a:cs typeface="Inter"/>
+              </a:rPr>
+              <a:t>Fehlerfälle und Neustarts</a:t>
+            </a:r>
+          </a:p>
+          <a:p xmlns:a="http://schemas.openxmlformats.org/drawingml/2006/main">
+            <a:pPr algn="l">
+              <a:defRPr sz="2175" b="0">
+                <a:solidFill>
+                  <a:srgbClr val="15171A"/>
+                </a:solidFill>
+                <a:latin typeface="Inter"/>
+                <a:ea typeface="Inter"/>
+                <a:cs typeface="Inter"/>
+              </a:defRPr>
+            </a:pPr>
+            <a:r>
+              <a:rPr sz="2175" b="0">
+                <a:solidFill>
+                  <a:srgbClr val="15171A"/>
+                </a:solidFill>
+                <a:latin typeface="Inter"/>
+                <a:ea typeface="Inter"/>
+                <a:cs typeface="Inter"/>
+              </a:rPr>
+              <a:t>früher im Entwurf mitdenken.</a:t>
             </a:r>
           </a:p>
         </p:txBody>
@@ -7599,7 +7650,7 @@
           <p:cNvPr id="6" name="">
             <a:extLst xmlns:a="http://schemas.openxmlformats.org/drawingml/2006/main">
               <a:ext uri="{FF2B5EF4-FFF2-40B4-BE49-F238E27FC236}">
-                <a16:creationId xmlns:a16="http://schemas.microsoft.com/office/drawing/2014/main" id="{C0423CC8-F1BD-4D6D-AE67-37DF605EAB04}"/>
+                <a16:creationId xmlns:a16="http://schemas.microsoft.com/office/drawing/2014/main" id="{A4F787A6-AFC3-468A-8C03-29FBC2A8FA8D}"/>
               </a:ext>
             </a:extLst>
           </p:cNvPr>
@@ -7610,8 +7661,8 @@
         </p:nvSpPr>
         <p:spPr>
           <a:xfrm xmlns:a="http://schemas.openxmlformats.org/drawingml/2006/main">
-            <a:off x="666750" y="5295900"/>
-            <a:ext cx="5076825" cy="400050"/>
+            <a:off x="6419850" y="1762125"/>
+            <a:ext cx="5124450" cy="838200"/>
           </a:xfrm>
           <a:prstGeom xmlns:a="http://schemas.openxmlformats.org/drawingml/2006/main" prst="rect">
             <a:avLst/>
@@ -7628,25 +7679,25 @@
           <a:lstStyle xmlns:a="http://schemas.openxmlformats.org/drawingml/2006/main"/>
           <a:p xmlns:a="http://schemas.openxmlformats.org/drawingml/2006/main">
             <a:pPr algn="l">
-              <a:defRPr sz="1725" b="0">
-                <a:solidFill>
-                  <a:srgbClr val="6E6D68"/>
-                </a:solidFill>
-                <a:latin typeface="Inter"/>
-                <a:ea typeface="Inter"/>
-                <a:cs typeface="Inter"/>
-              </a:defRPr>
-            </a:pPr>
-            <a:r>
-              <a:rPr sz="1725" b="0">
-                <a:solidFill>
-                  <a:srgbClr val="6E6D68"/>
-                </a:solidFill>
-                <a:latin typeface="Inter"/>
-                <a:ea typeface="Inter"/>
-                <a:cs typeface="Inter"/>
-              </a:rPr>
-              <a:t>Geplante Testphase</a:t>
+              <a:defRPr sz="2850" b="0">
+                <a:solidFill>
+                  <a:srgbClr val="1F5A45"/>
+                </a:solidFill>
+                <a:latin typeface="Newsreader"/>
+                <a:ea typeface="Newsreader"/>
+                <a:cs typeface="Newsreader"/>
+              </a:defRPr>
+            </a:pPr>
+            <a:r>
+              <a:rPr sz="2850" b="0">
+                <a:solidFill>
+                  <a:srgbClr val="1F5A45"/>
+                </a:solidFill>
+                <a:latin typeface="Newsreader"/>
+                <a:ea typeface="Newsreader"/>
+                <a:cs typeface="Newsreader"/>
+              </a:rPr>
+              <a:t>Mögliche Erweiterungen</a:t>
             </a:r>
           </a:p>
         </p:txBody>
@@ -7656,7 +7707,7 @@
           <p:cNvPr id="7" name="">
             <a:extLst xmlns:a="http://schemas.openxmlformats.org/drawingml/2006/main">
               <a:ext uri="{FF2B5EF4-FFF2-40B4-BE49-F238E27FC236}">
-                <a16:creationId xmlns:a16="http://schemas.microsoft.com/office/drawing/2014/main" id="{B738FD79-5B30-455B-99AD-9312E9D57E86}"/>
+                <a16:creationId xmlns:a16="http://schemas.microsoft.com/office/drawing/2014/main" id="{02CD1449-9F6F-491B-B3B9-9CFB12835304}"/>
               </a:ext>
             </a:extLst>
           </p:cNvPr>
@@ -7667,8 +7718,8 @@
         </p:nvSpPr>
         <p:spPr>
           <a:xfrm xmlns:a="http://schemas.openxmlformats.org/drawingml/2006/main">
-            <a:off x="6400800" y="1838325"/>
-            <a:ext cx="5143500" cy="838200"/>
+            <a:off x="6467475" y="2914650"/>
+            <a:ext cx="5076825" cy="714375"/>
           </a:xfrm>
           <a:prstGeom xmlns:a="http://schemas.openxmlformats.org/drawingml/2006/main" prst="rect">
             <a:avLst/>
@@ -7685,25 +7736,25 @@
           <a:lstStyle xmlns:a="http://schemas.openxmlformats.org/drawingml/2006/main"/>
           <a:p xmlns:a="http://schemas.openxmlformats.org/drawingml/2006/main">
             <a:pPr algn="l">
-              <a:defRPr sz="2625" b="0">
-                <a:solidFill>
-                  <a:srgbClr val="1F5A45"/>
-                </a:solidFill>
-                <a:latin typeface="Newsreader"/>
-                <a:ea typeface="Newsreader"/>
-                <a:cs typeface="Newsreader"/>
-              </a:defRPr>
-            </a:pPr>
-            <a:r>
-              <a:rPr sz="2625" b="0">
-                <a:solidFill>
-                  <a:srgbClr val="1F5A45"/>
-                </a:solidFill>
-                <a:latin typeface="Newsreader"/>
-                <a:ea typeface="Newsreader"/>
-                <a:cs typeface="Newsreader"/>
-              </a:rPr>
-              <a:t>Was wir herausfinden wollen</a:t>
+              <a:defRPr sz="2175" b="0">
+                <a:solidFill>
+                  <a:srgbClr val="15171A"/>
+                </a:solidFill>
+                <a:latin typeface="Inter"/>
+                <a:ea typeface="Inter"/>
+                <a:cs typeface="Inter"/>
+              </a:defRPr>
+            </a:pPr>
+            <a:r>
+              <a:rPr sz="2175" b="0">
+                <a:solidFill>
+                  <a:srgbClr val="15171A"/>
+                </a:solidFill>
+                <a:latin typeface="Inter"/>
+                <a:ea typeface="Inter"/>
+                <a:cs typeface="Inter"/>
+              </a:rPr>
+              <a:t>Ausgaben als CSV exportieren</a:t>
             </a:r>
           </a:p>
         </p:txBody>
@@ -7713,7 +7764,7 @@
           <p:cNvPr id="8" name="">
             <a:extLst xmlns:a="http://schemas.openxmlformats.org/drawingml/2006/main">
               <a:ext uri="{FF2B5EF4-FFF2-40B4-BE49-F238E27FC236}">
-                <a16:creationId xmlns:a16="http://schemas.microsoft.com/office/drawing/2014/main" id="{F1DFED6A-0026-42E5-8493-24C8990E85AE}"/>
+                <a16:creationId xmlns:a16="http://schemas.microsoft.com/office/drawing/2014/main" id="{43AC2C48-54AA-4595-9E3A-4BB8DB254EFE}"/>
               </a:ext>
             </a:extLst>
           </p:cNvPr>
@@ -7724,8 +7775,8 @@
         </p:nvSpPr>
         <p:spPr>
           <a:xfrm xmlns:a="http://schemas.openxmlformats.org/drawingml/2006/main">
-            <a:off x="6457950" y="3105150"/>
-            <a:ext cx="5095875" cy="619125"/>
+            <a:off x="6467475" y="4095750"/>
+            <a:ext cx="5076825" cy="714375"/>
           </a:xfrm>
           <a:prstGeom xmlns:a="http://schemas.openxmlformats.org/drawingml/2006/main" prst="rect">
             <a:avLst/>
@@ -7742,7 +7793,7 @@
           <a:lstStyle xmlns:a="http://schemas.openxmlformats.org/drawingml/2006/main"/>
           <a:p xmlns:a="http://schemas.openxmlformats.org/drawingml/2006/main">
             <a:pPr algn="l">
-              <a:defRPr sz="2100" b="0">
+              <a:defRPr sz="2175" b="0">
                 <a:solidFill>
                   <a:srgbClr val="15171A"/>
                 </a:solidFill>
@@ -7752,7 +7803,7 @@
               </a:defRPr>
             </a:pPr>
             <a:r>
-              <a:rPr sz="2100" b="0">
+              <a:rPr sz="2175" b="0">
                 <a:solidFill>
                   <a:srgbClr val="15171A"/>
                 </a:solidFill>
@@ -7760,7 +7811,7 @@
                 <a:ea typeface="Inter"/>
                 <a:cs typeface="Inter"/>
               </a:rPr>
-              <a:t>Wie schnell gelingt eine Erfassung?</a:t>
+              <a:t>Statistiken nach Kategorien</a:t>
             </a:r>
           </a:p>
         </p:txBody>
@@ -7770,7 +7821,7 @@
           <p:cNvPr id="9" name="">
             <a:extLst xmlns:a="http://schemas.openxmlformats.org/drawingml/2006/main">
               <a:ext uri="{FF2B5EF4-FFF2-40B4-BE49-F238E27FC236}">
-                <a16:creationId xmlns:a16="http://schemas.microsoft.com/office/drawing/2014/main" id="{8D99ABDE-EAFF-4B8C-A066-840FE1F6E641}"/>
+                <a16:creationId xmlns:a16="http://schemas.microsoft.com/office/drawing/2014/main" id="{438FEB1C-EB8B-4AA4-800A-5AC034B9D5CB}"/>
               </a:ext>
             </a:extLst>
           </p:cNvPr>
@@ -7781,8 +7832,8 @@
         </p:nvSpPr>
         <p:spPr>
           <a:xfrm xmlns:a="http://schemas.openxmlformats.org/drawingml/2006/main">
-            <a:off x="6457950" y="3867150"/>
-            <a:ext cx="5095875" cy="619125"/>
+            <a:off x="6457950" y="5495925"/>
+            <a:ext cx="5095875" cy="695325"/>
           </a:xfrm>
           <a:prstGeom xmlns:a="http://schemas.openxmlformats.org/drawingml/2006/main" prst="rect">
             <a:avLst/>
@@ -7799,121 +7850,30 @@
           <a:lstStyle xmlns:a="http://schemas.openxmlformats.org/drawingml/2006/main"/>
           <a:p xmlns:a="http://schemas.openxmlformats.org/drawingml/2006/main">
             <a:pPr algn="l">
-              <a:defRPr sz="2100" b="0">
-                <a:solidFill>
-                  <a:srgbClr val="15171A"/>
-                </a:solidFill>
-                <a:latin typeface="Inter"/>
-                <a:ea typeface="Inter"/>
-                <a:cs typeface="Inter"/>
-              </a:defRPr>
-            </a:pPr>
-            <a:r>
-              <a:rPr sz="2100" b="0">
-                <a:solidFill>
-                  <a:srgbClr val="15171A"/>
-                </a:solidFill>
-                <a:latin typeface="Inter"/>
-                <a:ea typeface="Inter"/>
-                <a:cs typeface="Inter"/>
-              </a:rPr>
-              <a:t>Wie verständlich ist der Tagesbetrag?</a:t>
-            </a:r>
-          </a:p>
-        </p:txBody>
-      </p:sp>
-      <p:sp>
-        <p:nvSpPr>
-          <p:cNvPr id="10" name="">
-            <a:extLst xmlns:a="http://schemas.openxmlformats.org/drawingml/2006/main">
-              <a:ext uri="{FF2B5EF4-FFF2-40B4-BE49-F238E27FC236}">
-                <a16:creationId xmlns:a16="http://schemas.microsoft.com/office/drawing/2014/main" id="{954EFA87-C14B-4CBD-9469-603B6BEFD81A}"/>
-              </a:ext>
-            </a:extLst>
-          </p:cNvPr>
-          <p:cNvSpPr>
-            <a:spLocks xmlns:a="http://schemas.openxmlformats.org/drawingml/2006/main" noGrp="1"/>
-          </p:cNvSpPr>
-          <p:nvPr/>
-        </p:nvSpPr>
-        <p:spPr>
-          <a:xfrm xmlns:a="http://schemas.openxmlformats.org/drawingml/2006/main">
-            <a:off x="6457950" y="4629150"/>
-            <a:ext cx="5095875" cy="619125"/>
-          </a:xfrm>
-          <a:prstGeom xmlns:a="http://schemas.openxmlformats.org/drawingml/2006/main" prst="rect">
-            <a:avLst/>
-          </a:prstGeom>
-          <a:noFill xmlns:a="http://schemas.openxmlformats.org/drawingml/2006/main"/>
-          <a:ln xmlns:a="http://schemas.openxmlformats.org/drawingml/2006/main" w="0">
-            <a:noFill/>
-          </a:ln>
-        </p:spPr>
-        <p:txBody>
-          <a:bodyPr xmlns:a="http://schemas.openxmlformats.org/drawingml/2006/main" wrap="square" lIns="0" tIns="0" rIns="0" bIns="0" anchor="t">
-            <a:noAutofit/>
-          </a:bodyPr>
-          <a:lstStyle xmlns:a="http://schemas.openxmlformats.org/drawingml/2006/main"/>
+              <a:defRPr sz="1650" b="0">
+                <a:solidFill>
+                  <a:srgbClr val="6E6D68"/>
+                </a:solidFill>
+                <a:latin typeface="Inter"/>
+                <a:ea typeface="Inter"/>
+                <a:cs typeface="Inter"/>
+              </a:defRPr>
+            </a:pPr>
+            <a:r>
+              <a:rPr sz="1650" b="0">
+                <a:solidFill>
+                  <a:srgbClr val="6E6D68"/>
+                </a:solidFill>
+                <a:latin typeface="Inter"/>
+                <a:ea typeface="Inter"/>
+                <a:cs typeface="Inter"/>
+              </a:rPr>
+              <a:t>Ideen für spätere Versionen.</a:t>
+            </a:r>
+          </a:p>
           <a:p xmlns:a="http://schemas.openxmlformats.org/drawingml/2006/main">
             <a:pPr algn="l">
-              <a:defRPr sz="2100" b="0">
-                <a:solidFill>
-                  <a:srgbClr val="15171A"/>
-                </a:solidFill>
-                <a:latin typeface="Inter"/>
-                <a:ea typeface="Inter"/>
-                <a:cs typeface="Inter"/>
-              </a:defRPr>
-            </a:pPr>
-            <a:r>
-              <a:rPr sz="2100" b="0">
-                <a:solidFill>
-                  <a:srgbClr val="15171A"/>
-                </a:solidFill>
-                <a:latin typeface="Inter"/>
-                <a:ea typeface="Inter"/>
-                <a:cs typeface="Inter"/>
-              </a:rPr>
-              <a:t>Wird Spendly im Alltag wieder genutzt?</a:t>
-            </a:r>
-          </a:p>
-        </p:txBody>
-      </p:sp>
-      <p:sp>
-        <p:nvSpPr>
-          <p:cNvPr id="11" name="">
-            <a:extLst xmlns:a="http://schemas.openxmlformats.org/drawingml/2006/main">
-              <a:ext uri="{FF2B5EF4-FFF2-40B4-BE49-F238E27FC236}">
-                <a16:creationId xmlns:a16="http://schemas.microsoft.com/office/drawing/2014/main" id="{DDE93F8B-34E9-48D7-A1D2-97AE9E2B1B2A}"/>
-              </a:ext>
-            </a:extLst>
-          </p:cNvPr>
-          <p:cNvSpPr>
-            <a:spLocks xmlns:a="http://schemas.openxmlformats.org/drawingml/2006/main" noGrp="1"/>
-          </p:cNvSpPr>
-          <p:nvPr/>
-        </p:nvSpPr>
-        <p:spPr>
-          <a:xfrm xmlns:a="http://schemas.openxmlformats.org/drawingml/2006/main">
-            <a:off x="6448425" y="5562600"/>
-            <a:ext cx="5095875" cy="628650"/>
-          </a:xfrm>
-          <a:prstGeom xmlns:a="http://schemas.openxmlformats.org/drawingml/2006/main" prst="rect">
-            <a:avLst/>
-          </a:prstGeom>
-          <a:noFill xmlns:a="http://schemas.openxmlformats.org/drawingml/2006/main"/>
-          <a:ln xmlns:a="http://schemas.openxmlformats.org/drawingml/2006/main" w="0">
-            <a:noFill/>
-          </a:ln>
-        </p:spPr>
-        <p:txBody>
-          <a:bodyPr xmlns:a="http://schemas.openxmlformats.org/drawingml/2006/main" wrap="square" lIns="0" tIns="0" rIns="0" bIns="0" anchor="t">
-            <a:noAutofit/>
-          </a:bodyPr>
-          <a:lstStyle xmlns:a="http://schemas.openxmlformats.org/drawingml/2006/main"/>
-          <a:p xmlns:a="http://schemas.openxmlformats.org/drawingml/2006/main">
-            <a:pPr algn="l">
-              <a:defRPr sz="1575" b="0">
+              <a:defRPr sz="1650" b="0">
                 <a:solidFill>
                   <a:srgbClr val="6E6D68"/>
                 </a:solidFill>
@@ -7923,7 +7883,7 @@
               </a:defRPr>
             </a:pPr>
             <a:r>
-              <a:rPr sz="1575" b="0">
+              <a:rPr sz="1650" b="0">
                 <a:solidFill>
                   <a:srgbClr val="6E6D68"/>
                 </a:solidFill>
@@ -7931,30 +7891,7 @@
                 <a:ea typeface="Inter"/>
                 <a:cs typeface="Inter"/>
               </a:rPr>
-              <a:t>Vor einem Launch: echtes iPhone,</a:t>
-            </a:r>
-          </a:p>
-          <a:p xmlns:a="http://schemas.openxmlformats.org/drawingml/2006/main">
-            <a:pPr algn="l">
-              <a:defRPr sz="1575" b="0">
-                <a:solidFill>
-                  <a:srgbClr val="6E6D68"/>
-                </a:solidFill>
-                <a:latin typeface="Inter"/>
-                <a:ea typeface="Inter"/>
-                <a:cs typeface="Inter"/>
-              </a:defRPr>
-            </a:pPr>
-            <a:r>
-              <a:rPr sz="1575" b="0">
-                <a:solidFill>
-                  <a:srgbClr val="6E6D68"/>
-                </a:solidFill>
-                <a:latin typeface="Inter"/>
-                <a:ea typeface="Inter"/>
-                <a:cs typeface="Inter"/>
-              </a:rPr>
-              <a:t>Android und Screenreader vollständig prüfen.</a:t>
+              <a:t>Zuerst die Bedienung mit Nutzern prüfen.</a:t>
             </a:r>
           </a:p>
         </p:txBody>
@@ -7962,7 +7899,7 @@
     </p:spTree>
     <p:extLst>
       <p:ext uri="{BB962C8B-B14F-4D97-AF65-F5344CB8AC3E}">
-        <p14:creationId xmlns:p14="http://schemas.microsoft.com/office/powerpoint/2010/main" val="1403174672"/>
+        <p14:creationId xmlns:p14="http://schemas.microsoft.com/office/powerpoint/2010/main" val="155262311"/>
       </p:ext>
     </p:extLst>
   </p:cSld>

--- a/docs/lb3/Spendly_LB3_Praesentation.pptx
+++ b/docs/lb3/Spendly_LB3_Praesentation.pptx
@@ -2,22 +2,22 @@
 <file path=ppt/presentation.xml><?xml version="1.0" encoding="utf-8"?>
 <p:presentation xmlns:p="http://schemas.openxmlformats.org/presentationml/2006/main">
   <p:sldMasterIdLst>
-    <p:sldMasterId xmlns:r="http://schemas.openxmlformats.org/officeDocument/2006/relationships" id="2147483648" r:id="Re8a4c45581214f22"/>
+    <p:sldMasterId xmlns:r="http://schemas.openxmlformats.org/officeDocument/2006/relationships" id="2147483648" r:id="R905f27b78a2547ed"/>
   </p:sldMasterIdLst>
   <p:notesMasterIdLst>
-    <p:notesMasterId xmlns:r="http://schemas.openxmlformats.org/officeDocument/2006/relationships" r:id="Ra2d01c24a59d4570"/>
+    <p:notesMasterId xmlns:r="http://schemas.openxmlformats.org/officeDocument/2006/relationships" r:id="R9160f916dd514fba"/>
   </p:notesMasterIdLst>
   <p:sldIdLst>
-    <p:sldId xmlns:r="http://schemas.openxmlformats.org/officeDocument/2006/relationships" id="256" r:id="R03b84c14dd1241fd"/>
-    <p:sldId xmlns:r="http://schemas.openxmlformats.org/officeDocument/2006/relationships" id="257" r:id="Ra709b7e7e2f44d9e"/>
-    <p:sldId xmlns:r="http://schemas.openxmlformats.org/officeDocument/2006/relationships" id="258" r:id="Rdbd142fed3754c25"/>
-    <p:sldId xmlns:r="http://schemas.openxmlformats.org/officeDocument/2006/relationships" id="259" r:id="R97d3988cf1224aa1"/>
-    <p:sldId xmlns:r="http://schemas.openxmlformats.org/officeDocument/2006/relationships" id="260" r:id="R4414f1001df94864"/>
-    <p:sldId xmlns:r="http://schemas.openxmlformats.org/officeDocument/2006/relationships" id="261" r:id="R360d6a23b7e94d1e"/>
-    <p:sldId xmlns:r="http://schemas.openxmlformats.org/officeDocument/2006/relationships" id="262" r:id="R88a9e04b8702463f"/>
-    <p:sldId xmlns:r="http://schemas.openxmlformats.org/officeDocument/2006/relationships" id="263" r:id="R64e15f4305de47eb"/>
-    <p:sldId xmlns:r="http://schemas.openxmlformats.org/officeDocument/2006/relationships" id="264" r:id="R22724b5971ac4b51"/>
-    <p:sldId xmlns:r="http://schemas.openxmlformats.org/officeDocument/2006/relationships" id="265" r:id="R47fe202aa8c04918"/>
+    <p:sldId xmlns:r="http://schemas.openxmlformats.org/officeDocument/2006/relationships" id="256" r:id="R18d1135c92d041eb"/>
+    <p:sldId xmlns:r="http://schemas.openxmlformats.org/officeDocument/2006/relationships" id="257" r:id="R3819f78770694f92"/>
+    <p:sldId xmlns:r="http://schemas.openxmlformats.org/officeDocument/2006/relationships" id="258" r:id="R788c10c07a904d6c"/>
+    <p:sldId xmlns:r="http://schemas.openxmlformats.org/officeDocument/2006/relationships" id="259" r:id="R4e523b0372794675"/>
+    <p:sldId xmlns:r="http://schemas.openxmlformats.org/officeDocument/2006/relationships" id="260" r:id="R7746f8875cff4347"/>
+    <p:sldId xmlns:r="http://schemas.openxmlformats.org/officeDocument/2006/relationships" id="261" r:id="R3e6e46c903474093"/>
+    <p:sldId xmlns:r="http://schemas.openxmlformats.org/officeDocument/2006/relationships" id="262" r:id="R697b59f19b974977"/>
+    <p:sldId xmlns:r="http://schemas.openxmlformats.org/officeDocument/2006/relationships" id="263" r:id="R727f35eb8e5b4bde"/>
+    <p:sldId xmlns:r="http://schemas.openxmlformats.org/officeDocument/2006/relationships" id="264" r:id="Rad7334111e1d4793"/>
+    <p:sldId xmlns:r="http://schemas.openxmlformats.org/officeDocument/2006/relationships" id="265" r:id="Rdd9ba39ef87f4f2c"/>
   </p:sldIdLst>
   <p:sldSz cx="12192000" cy="6858000"/>
   <p:notesSz cx="6858000" cy="9144000"/>
@@ -451,7 +451,7 @@
           <a:lstStyle xmlns:a="http://schemas.openxmlformats.org/drawingml/2006/main"/>
           <a:p xmlns:a="http://schemas.openxmlformats.org/drawingml/2006/main">
             <a:r>
-              <a:t>DAUER: 0:20</a:t>
+              <a:t>DAUER: 0:35</a:t>
             </a:r>
           </a:p>
           <a:p xmlns:a="http://schemas.openxmlformats.org/drawingml/2006/main">
@@ -461,7 +461,27 @@
           </a:p>
           <a:p xmlns:a="http://schemas.openxmlformats.org/drawingml/2006/main">
             <a:r>
-              <a:t>Darian: Wir zeigen Spendly, unsere Ausgaben-App für Lernende und Studierende. Sie sammelt kleine tägliche Ausgaben und zeigt, was vom Monatsbudget übrig bleibt. Wir vergleichen zuerst die Idee mit der fertigen App und zeigen danach die wichtigsten Funktionen direkt am Gerät.</a:t>
+              <a:t>Darian: Wie entscheidet ihr, was ihr euch heute noch leisten könnt?</a:t>
+            </a:r>
+          </a:p>
+          <a:p xmlns:a="http://schemas.openxmlformats.org/drawingml/2006/main">
+            <a:r>
+              <a:t/>
+            </a:r>
+          </a:p>
+          <a:p xmlns:a="http://schemas.openxmlformats.org/drawingml/2006/main">
+            <a:r>
+              <a:t>[Die Frage wirken lassen. Etwa fünf Sekunden warten, dann ein bis zwei kurze Antworten aufnehmen. Keine privaten Beträge verlangen.]</a:t>
+            </a:r>
+          </a:p>
+          <a:p xmlns:a="http://schemas.openxmlformats.org/drawingml/2006/main">
+            <a:r>
+              <a:t/>
+            </a:r>
+          </a:p>
+          <a:p xmlns:a="http://schemas.openxmlformats.org/drawingml/2006/main">
+            <a:r>
+              <a:t>Vielleicht schaut ihr auf den Kontostand. Vielleicht überschlagt ihr es im Kopf. Genau bei dieser Entscheidung beginnt unser Projekt. Wir wollten wissen: Wie können wir kleine Ausgaben so sichtbar machen, dass das restliche Monatsbudget verständlich bleibt?</a:t>
             </a:r>
           </a:p>
           <a:p xmlns:a="http://schemas.openxmlformats.org/drawingml/2006/main">
@@ -561,7 +581,7 @@
           </a:p>
           <a:p xmlns:a="http://schemas.openxmlformats.org/drawingml/2006/main">
             <a:r>
-              <a:t>Darian: Spendly setzt die Kernidee aus LB1 um: tägliche Ausgaben erfassen und das verfügbare Monatsbudget verständlich zeigen. Die wichtigste technische Lehre ist, Fehlerfälle früher genauso konkret zu planen wie den normalen Ablauf. Dazu gehören falsche Codes, abgebrochene Formulare und ein Neustart während einer Aktion. Als Nächstes würden wir die App mit Lernenden testen. Verstehen sie den Tagesbetrag? Finden sie die Korrektur eines Eintrags? Und gelingt die Erfassung tatsächlich in der geplanten kurzen Zeit? Erst mit diesen Beobachtungen lässt sich die Bedienung gezielt weiterentwickeln. Damit sind wir am Ende und beantworten gerne Fragen.</a:t>
+              <a:t>Darian: Am Anfang haben wir gefragt, wie ihr entscheidet, was ihr euch heute noch leisten könnt. Spendly macht eure erfassten Ausgaben und das restliche Monatsbudget sichtbar. Wir haben aus dem Entwurf eine funktionierende App gemacht und die wichtigsten Abläufe geprüft. Jetzt seid ihr dran: Wollt ihr Spendly ausprobieren? Welche Funktion würdet ihr euch für euren Alltag wünschen? Eure Ideen würden uns helfen, die nächste Version gezielt zu verbessern.</a:t>
             </a:r>
           </a:p>
           <a:p xmlns:a="http://schemas.openxmlformats.org/drawingml/2006/main">
@@ -571,6 +591,26 @@
           </a:p>
           <a:p xmlns:a="http://schemas.openxmlformats.org/drawingml/2006/main">
             <a:r>
+              <a:t>[Die Einladung kurz wirken lassen und in die Fragerunde überleiten.]</a:t>
+            </a:r>
+          </a:p>
+          <a:p xmlns:a="http://schemas.openxmlformats.org/drawingml/2006/main">
+            <a:r>
+              <a:t/>
+            </a:r>
+          </a:p>
+          <a:p xmlns:a="http://schemas.openxmlformats.org/drawingml/2006/main">
+            <a:r>
+              <a:t>Vielen Dank. Wir beantworten gerne eure Fragen zur Idee, zur App und zur technischen Umsetzung.</a:t>
+            </a:r>
+          </a:p>
+          <a:p xmlns:a="http://schemas.openxmlformats.org/drawingml/2006/main">
+            <a:r>
+              <a:t/>
+            </a:r>
+          </a:p>
+          <a:p xmlns:a="http://schemas.openxmlformats.org/drawingml/2006/main">
+            <a:r>
               <a:t>QUELLEN</a:t>
             </a:r>
           </a:p>
@@ -591,17 +631,12 @@
           </a:p>
           <a:p xmlns:a="http://schemas.openxmlformats.org/drawingml/2006/main">
             <a:r>
-              <a:t>Datei: screens/NewExpenseScreen.js</a:t>
-            </a:r>
-          </a:p>
-          <a:p xmlns:a="http://schemas.openxmlformats.org/drawingml/2006/main">
-            <a:r>
-              <a:t>Datei: screens/LockScreen.js</a:t>
-            </a:r>
-          </a:p>
-          <a:p xmlns:a="http://schemas.openxmlformats.org/drawingml/2006/main">
-            <a:r>
-              <a:t>Datei: storage/DataContext.js</a:t>
+              <a:t>Datei: screens/OverviewScreen.js</a:t>
+            </a:r>
+          </a:p>
+          <a:p xmlns:a="http://schemas.openxmlformats.org/drawingml/2006/main">
+            <a:r>
+              <a:t>Datei: utils/budget.js</a:t>
             </a:r>
           </a:p>
         </p:txBody>
@@ -671,7 +706,7 @@
           <a:lstStyle xmlns:a="http://schemas.openxmlformats.org/drawingml/2006/main"/>
           <a:p xmlns:a="http://schemas.openxmlformats.org/drawingml/2006/main">
             <a:r>
-              <a:t>DAUER: 0:45</a:t>
+              <a:t>DAUER: 0:40</a:t>
             </a:r>
           </a:p>
           <a:p xmlns:a="http://schemas.openxmlformats.org/drawingml/2006/main">
@@ -681,7 +716,7 @@
           </a:p>
           <a:p xmlns:a="http://schemas.openxmlformats.org/drawingml/2006/main">
             <a:r>
-              <a:t>Darian: Unsere Zielgruppe sind Lernende und Studierende in der Schweiz. Wer den ersten Lohn erhält, bezahlt vieles mit Karte, TWINT oder Bargeld. Einzelne Beträge wirken klein. Zusammen belasten sie das Budget. Unsere Aufgabe war deshalb eine einfache, lokale App: Betrag und Kategorie erfassen, den verbleibenden Betrag sehen und einen Eintrag später korrigieren. Die 14 Franken 80 sind unser Beispiel aus dem Konzept. Es gibt kein Benutzerkonto und keine Bankverbindung. Ein kurzer Weg durch die App war ein Designziel. Die geplanten zehn Sekunden für eine Erfassung sind noch keine gemessene Leistung.</a:t>
+              <a:t>Darian: Ein Kaffee für vier Franken fünfzig. Ein Mittagessen für zwölf Franken achtzig. Ein Musikabo für dreizehn Franken fünfundneunzig. Jede Zahlung ist für sich überschaubar. Zusammen sind es bereits einunddreissig Franken fünfundzwanzig. Das ist ein Beispiel, keine Statistik über unsere Zielgruppe. Gerade beim ersten eigenen Lohn oder einem festen Monatsbudget hilft es, diese Beträge zusammen zu sehen. Unsere Aufgabe aus LB1 war deshalb klar: eine einfache App für Lernende und Studierende, die Ausgaben in Franken erfasst und das verbleibende Budget zeigt.</a:t>
             </a:r>
           </a:p>
           <a:p xmlns:a="http://schemas.openxmlformats.org/drawingml/2006/main">
@@ -706,17 +741,7 @@
           </a:p>
           <a:p xmlns:a="http://schemas.openxmlformats.org/drawingml/2006/main">
             <a:r>
-              <a:t>Quellcode: https://github.com/germanndarian/Spendly. Prüfstand 01.10.2026, finale Quelldateien in der LB3-Abgabe.</a:t>
-            </a:r>
-          </a:p>
-          <a:p xmlns:a="http://schemas.openxmlformats.org/drawingml/2006/main">
-            <a:r>
-              <a:t>Datei: screens/NewExpenseScreen.js</a:t>
-            </a:r>
-          </a:p>
-          <a:p xmlns:a="http://schemas.openxmlformats.org/drawingml/2006/main">
-            <a:r>
-              <a:t>Datei: utils/validation.js</a:t>
+              <a:t>Beispielrechnung: CHF 4.50 + CHF 12.80 + CHF 13.95 = CHF 31.25. Keine Marktdaten oder Nutzungszahlen.</a:t>
             </a:r>
           </a:p>
         </p:txBody>
@@ -786,7 +811,7 @@
           <a:lstStyle xmlns:a="http://schemas.openxmlformats.org/drawingml/2006/main"/>
           <a:p xmlns:a="http://schemas.openxmlformats.org/drawingml/2006/main">
             <a:r>
-              <a:t>DAUER: 0:50</a:t>
+              <a:t>DAUER: 0:45</a:t>
             </a:r>
           </a:p>
           <a:p xmlns:a="http://schemas.openxmlformats.org/drawingml/2006/main">
@@ -796,7 +821,7 @@
           </a:p>
           <a:p xmlns:a="http://schemas.openxmlformats.org/drawingml/2006/main">
             <a:r>
-              <a:t>Darian: Links sehen wir das LB1-Mockup, rechts die aktuelle App. Der verfügbare Betrag bleibt im Vordergrund. Waldgrün, ein warmer Hintergrund und die Serifenschrift bei Beträgen bilden die Identität von Spendly. Übersicht, Verlauf und Einstellungen sind direkt erreichbar. Die Entwicklung verlief in Schritten: zuerst Oberfläche und Navigation, dann Speicherung und Biometrie, danach Fehlerfälle und Tests. Das zeigt auch die Historie im Repository. Für LB3 haben wir den Stand nochmals mit dem Konzept abgeglichen. Die App ergänzt native Bedienung und Dark Mode. Beide Bilder verwenden unterschiedliche Beispieldaten. Sie zeigen den Designvergleich, keinen Zahlenvergleich.</a:t>
+              <a:t>Darian: Das ist Spendly. Auf der Übersicht steht die Frage aus dem Einstieg jetzt als konkrete Zahl: Was bleibt für heute? Im gezeigten Beispiel sind es fünfundzwanzig Franken vierzehn. Spendly verteilt das restliche Monatsbudget auf die verbleibenden Kalendertage, einschliesslich heute. Diese Zahl ist eine Orientierung und reagiert auf neue Ausgaben. Betrag und Kategorie reichen für einen Eintrag. Im Verlauf könnt ihr eine Ausgabe wiederfinden und korrigieren. Ein eigenes Budget pro Monat hält ältere Werte getrennt. Für den Einstieg braucht es kein Konto und keine Verbindung zu einer Bank. Die Daten liegen auf dem Gerät. Wir zeigen euch jetzt, wie sich das im Alltag anfühlt.</a:t>
             </a:r>
           </a:p>
           <a:p xmlns:a="http://schemas.openxmlformats.org/drawingml/2006/main">
@@ -816,37 +841,32 @@
           </a:p>
           <a:p xmlns:a="http://schemas.openxmlformats.org/drawingml/2006/main">
             <a:r>
-              <a:t>Spendly_LB1.pdf, 24.09.2026, Seiten 1–11. Lokale Abgabe: LB1_Spendly/Spendly_LB1.pdf.</a:t>
-            </a:r>
-          </a:p>
-          <a:p xmlns:a="http://schemas.openxmlformats.org/drawingml/2006/main">
-            <a:r>
               <a:t>Quellcode: https://github.com/germanndarian/Spendly. Prüfstand 01.10.2026, finale Quelldateien in der LB3-Abgabe.</a:t>
             </a:r>
           </a:p>
           <a:p xmlns:a="http://schemas.openxmlformats.org/drawingml/2006/main">
             <a:r>
-              <a:t>Datei: theme/colors.js</a:t>
-            </a:r>
-          </a:p>
-          <a:p xmlns:a="http://schemas.openxmlformats.org/drawingml/2006/main">
-            <a:r>
-              <a:t>Datei: theme/typography.js</a:t>
-            </a:r>
-          </a:p>
-          <a:p xmlns:a="http://schemas.openxmlformats.org/drawingml/2006/main">
-            <a:r>
               <a:t>Datei: screens/OverviewScreen.js</a:t>
             </a:r>
           </a:p>
           <a:p xmlns:a="http://schemas.openxmlformats.org/drawingml/2006/main">
             <a:r>
-              <a:t>Vorgehen belegt durch Git-Commits: 5f4b8f3 (23.09.2026), 958eed7 (24.09.2026), 686081d und 633fb0f (25.09.2026).</a:t>
-            </a:r>
-          </a:p>
-          <a:p xmlns:a="http://schemas.openxmlformats.org/drawingml/2006/main">
-            <a:r>
-              <a:t>Bild links: LB1_Spendly/Mockups/02-uebersicht.png. Bild rechts: aktuelle Aufnahme in dieser LB3-Abgabe.</a:t>
+              <a:t>Datei: utils/budget.js</a:t>
+            </a:r>
+          </a:p>
+          <a:p xmlns:a="http://schemas.openxmlformats.org/drawingml/2006/main">
+            <a:r>
+              <a:t>Datei: screens/NewExpenseScreen.js</a:t>
+            </a:r>
+          </a:p>
+          <a:p xmlns:a="http://schemas.openxmlformats.org/drawingml/2006/main">
+            <a:r>
+              <a:t>Datei: storage/budgets.js</a:t>
+            </a:r>
+          </a:p>
+          <a:p xmlns:a="http://schemas.openxmlformats.org/drawingml/2006/main">
+            <a:r>
+              <a:t>Produktbild: tatsächlicher eigener iOS-Release-Build, Demo-Budget Oktober 2026 CHF 800.00, Ausgaben CHF 20.40, 31 Kalendertage.</a:t>
             </a:r>
           </a:p>
         </p:txBody>
@@ -926,7 +946,7 @@
           </a:p>
           <a:p xmlns:a="http://schemas.openxmlformats.org/drawingml/2006/main">
             <a:r>
-              <a:t>Darian zeigt die App, Alex erklärt kurz die Ergebnisse.</a:t>
+              <a:t>Alex erklärt, Darian bedient die App. Bei der Aufnahme erklären beide die sichtbaren Schritte.</a:t>
             </a:r>
           </a:p>
           <a:p xmlns:a="http://schemas.openxmlformats.org/drawingml/2006/main">
@@ -936,32 +956,7 @@
           </a:p>
           <a:p xmlns:a="http://schemas.openxmlformats.org/drawingml/2006/main">
             <a:r>
-              <a:t>0:00–0:15: App entsperren. Face ID nur zeigen, wenn der Test am Präsentationsgerät erfolgreich war. Sonst den eingerichteten App-Code verwenden.</a:t>
-            </a:r>
-          </a:p>
-          <a:p xmlns:a="http://schemas.openxmlformats.org/drawingml/2006/main">
-            <a:r>
-              <a:t>0:15–0:40: Neue Ausgabe erfassen: CHF 14.80, Kategorie Essen &amp; Trinken, Beschreibung «Mittagessen», heutiges Datum. Speichern.</a:t>
-            </a:r>
-          </a:p>
-          <a:p xmlns:a="http://schemas.openxmlformats.org/drawingml/2006/main">
-            <a:r>
-              <a:t>0:40–0:55: Auf der Übersicht zeigen, dass Restbudget und Tagesbetrag sinken. Der Tagesbetrag verteilt das restliche Budget auf die restlichen Kalendertage inklusive heute.</a:t>
-            </a:r>
-          </a:p>
-          <a:p xmlns:a="http://schemas.openxmlformats.org/drawingml/2006/main">
-            <a:r>
-              <a:t>0:55–1:15: Im Verlauf «Mittagessen» suchen. Den Betrag auf CHF 12.80 ändern und speichern.</a:t>
-            </a:r>
-          </a:p>
-          <a:p xmlns:a="http://schemas.openxmlformats.org/drawingml/2006/main">
-            <a:r>
-              <a:t>1:15–1:35: Den Eintrag löschen und mit «Rückgängig» wiederherstellen.</a:t>
-            </a:r>
-          </a:p>
-          <a:p xmlns:a="http://schemas.openxmlformats.org/drawingml/2006/main">
-            <a:r>
-              <a:t>1:35–2:00: App vollständig schliessen und neu öffnen. Erneut entsperren und denselben Eintrag im Verlauf zeigen. So wird die lokale Speicherung sichtbar.</a:t>
+              <a:t>Alex: Stellt euch vor, ihr kommt gerade vom Mittagessen. Wir erfassen jetzt genau diese Ausgabe.</a:t>
             </a:r>
           </a:p>
           <a:p xmlns:a="http://schemas.openxmlformats.org/drawingml/2006/main">
@@ -971,7 +966,42 @@
           </a:p>
           <a:p xmlns:a="http://schemas.openxmlformats.org/drawingml/2006/main">
             <a:r>
-              <a:t>Falls die Vorführung stockt: nach spätestens 15 Sekunden auf die mitgelieferte Aufnahme wechseln. Keine ungetestete Biometrie als erfolgreiche Demonstration ankündigen. Beispieldaten vor dem Vortrag einmal vorbereiten, nach dem Durchlauf wiederherstellen.</a:t>
+              <a:t>0:00–0:15: Spendly entsperren. Den Demo-PIN 111111 verwenden. Face ID nur als Live-Scan zeigen, wenn es am Präsentationsgerät erfolgreich geprüft wurde.</a:t>
+            </a:r>
+          </a:p>
+          <a:p xmlns:a="http://schemas.openxmlformats.org/drawingml/2006/main">
+            <a:r>
+              <a:t>0:15–0:40: CHF 14.80, Essen &amp; Trinken, «Mittagessen», heutiges Datum eingeben und speichern.</a:t>
+            </a:r>
+          </a:p>
+          <a:p xmlns:a="http://schemas.openxmlformats.org/drawingml/2006/main">
+            <a:r>
+              <a:t>0:40–0:55: Alex: Der Eintrag ist gespeichert. Gleichzeitig verändert sich die Tagesorientierung. Wir sehen direkt, was vom Monatsbudget bleibt.</a:t>
+            </a:r>
+          </a:p>
+          <a:p xmlns:a="http://schemas.openxmlformats.org/drawingml/2006/main">
+            <a:r>
+              <a:t>0:55–1:15: Im Verlauf «Mittagessen» suchen. CHF 14.80 auf CHF 12.80 ändern und speichern.</a:t>
+            </a:r>
+          </a:p>
+          <a:p xmlns:a="http://schemas.openxmlformats.org/drawingml/2006/main">
+            <a:r>
+              <a:t>1:15–1:35: Den Eintrag löschen und innerhalb der fünf Sekunden «Rückgängig» wählen.</a:t>
+            </a:r>
+          </a:p>
+          <a:p xmlns:a="http://schemas.openxmlformats.org/drawingml/2006/main">
+            <a:r>
+              <a:t>1:35–2:00: App vollständig beenden und neu öffnen. Mit PIN 111111 entsperren und den erhaltenen Eintrag zeigen. Alex: Die Ausgabe bleibt auch nach einem Neustart erhalten.</a:t>
+            </a:r>
+          </a:p>
+          <a:p xmlns:a="http://schemas.openxmlformats.org/drawingml/2006/main">
+            <a:r>
+              <a:t/>
+            </a:r>
+          </a:p>
+          <a:p xmlns:a="http://schemas.openxmlformats.org/drawingml/2006/main">
+            <a:r>
+              <a:t>Wenn die Live-Demo nach 15 Sekunden nicht läuft, auf das beigefügte Video wechseln. Die Aufnahme dauert 2:06 und hat keinen Ton. Mit Video verlängert sich die Zielzeit von 8:55 auf etwa 9:01. Vor einer neuen Live-Demo den Beispieldatensatz prüfen, damit nicht bereits ein zweiter identischer Mittagessen-Eintrag besteht.</a:t>
             </a:r>
           </a:p>
           <a:p xmlns:a="http://schemas.openxmlformats.org/drawingml/2006/main">
@@ -1096,7 +1126,7 @@
           </a:p>
           <a:p xmlns:a="http://schemas.openxmlformats.org/drawingml/2006/main">
             <a:r>
-              <a:t>Alex: Die App-Sperre ist unser Smartphone-Feature. Anschaulich ist das Betriebssystem der Türsteher. Spendly fragt, ob die Person das Gerät entsperren darf. Das Gerät prüft Gesicht oder Fingerabdruck, und die App erhält Erfolg oder einen Fehler. Spendly bekommt kein Foto und keinen Fingerabdruck. Wer Biometrie nicht verwenden kann, nutzt einen eigenen sechsstelligen Code. Dessen Prüfwert liegt zusammen mit einem zufälligen Salz in SecureStore. Nach fünf falschen Versuchen folgen 30 Sekunden Wartezeit. Weitere Fehler verlängern die Wartezeit bis auf fünf Minuten. Ein Neustart setzt diese Sperre nicht zurück. Die App-Sperre schützt den Zugang innerhalb der App. Die SQLite-Datei ist dadurch nicht zusätzlich verschlüsselt. Der native Systemdialog und die erfolgreiche Erkennung wurden im Simulator geprüft. Das physische iPhone war für Xcode nicht erreichbar. Ein echter Gesichtsscan ist deshalb noch nicht nachgewiesen.</a:t>
+              <a:t>Alex: Ausgaben können persönlich sein. Spendly speichert sie lokal, ohne Konto und ohne eigenen Server. Die App-Sperre nutzt eine Funktion des Smartphones. Stellt euch das Betriebssystem als Türsteher vor: Spendly fragt, ob die Person das Gerät entsperren darf. Das Gerät prüft Gesicht oder Fingerabdruck. Die App erhält nur das Ergebnis, kein Foto und keinen Fingerabdruck. Als Alternative gibt es einen eigenen sechsstelligen Code. Nach fünf falschen Versuchen wartet die App dreissig Sekunden. Weitere Fehler verlängern diese Zeit, und ein Neustart setzt sie nicht zurück. Die Grenze ist klar: Die App-Sperre verschlüsselt die SQLite-Datei nicht zusätzlich. Der native Face-ID-Dialog funktioniert im Simulator. Ein echter Scan bleibt offen, weil Xcode unser physisches iPhone nicht erreichen konnte.</a:t>
             </a:r>
           </a:p>
           <a:p xmlns:a="http://schemas.openxmlformats.org/drawingml/2006/main">
@@ -1126,6 +1156,11 @@
           </a:p>
           <a:p xmlns:a="http://schemas.openxmlformats.org/drawingml/2006/main">
             <a:r>
+              <a:t>Expo SQLite: https://docs.expo.dev/versions/latest/sdk/sqlite/ (abgerufen 01.10.2026).</a:t>
+            </a:r>
+          </a:p>
+          <a:p xmlns:a="http://schemas.openxmlformats.org/drawingml/2006/main">
+            <a:r>
               <a:t>Quellcode: https://github.com/germanndarian/Spendly. Prüfstand 01.10.2026, finale Quelldateien in der LB3-Abgabe.</a:t>
             </a:r>
           </a:p>
@@ -1136,12 +1171,12 @@
           </a:p>
           <a:p xmlns:a="http://schemas.openxmlformats.org/drawingml/2006/main">
             <a:r>
+              <a:t>Datei: storage/pin.js</a:t>
+            </a:r>
+          </a:p>
+          <a:p xmlns:a="http://schemas.openxmlformats.org/drawingml/2006/main">
+            <a:r>
               <a:t>Datei: screens/LockScreen.js</a:t>
-            </a:r>
-          </a:p>
-          <a:p xmlns:a="http://schemas.openxmlformats.org/drawingml/2006/main">
-            <a:r>
-              <a:t>Datei: storage/pin.js</a:t>
             </a:r>
           </a:p>
         </p:txBody>
@@ -1211,7 +1246,7 @@
           <a:lstStyle xmlns:a="http://schemas.openxmlformats.org/drawingml/2006/main"/>
           <a:p xmlns:a="http://schemas.openxmlformats.org/drawingml/2006/main">
             <a:r>
-              <a:t>DAUER: 0:55</a:t>
+              <a:t>DAUER: 0:45</a:t>
             </a:r>
           </a:p>
           <a:p xmlns:a="http://schemas.openxmlformats.org/drawingml/2006/main">
@@ -1221,7 +1256,7 @@
           </a:p>
           <a:p xmlns:a="http://schemas.openxmlformats.org/drawingml/2006/main">
             <a:r>
-              <a:t>Alex: Die App trennt Bedienung, Berechnungen und Speicherung. Das Formular prüft zuerst den Betrag und die übrigen Felder. Nur gültige Eingaben gehen an den gemeinsamen DataContext. Dieser ruft die Speicherfunktionen auf. In SQLite steht jede Ausgabe als Datensatz mit ID, Betrag, Kategorie, Beschreibung und Datum. Geld speichern wir als ganze Rappen. 14 Franken 80 sind die ganze Zahl 1480. Das verhindert typische Ungenauigkeiten mit Dezimalzahlen. Danach aktualisiert der Context die Daten, und die Übersicht berechnet das Budget neu. Reine Funktionen lassen sich unabhängig von der Oberfläche testen. Kommentare erklären etwa die Rappenrechnung und gebundene SQL-Parameter.</a:t>
+              <a:t>Darian: Rechts läuft die App, links steht der ursprüngliche Entwurf. Der Betrag ist in beiden der Mittelpunkt. Die Kategorie ist direkt erreichbar. Grün, der warme Hintergrund und die Schrift bei den Beträgen bleiben Teil des Designs. Wir haben zuerst Oberfläche und Navigation umgesetzt. Danach kamen Speicherung und Gerätesperre. Anschliessend haben wir Fehlerfälle und Tests ergänzt. Für LB3 verglichen wir den Code nochmals mit dem Konzept. Getrennte Monatsbudgets und dauerhafte Fristen haben wir vervollständigt. Dark Mode erweitert den geplanten Umfang. Dabei war eine Erkenntnis entscheidend: Die App braucht auch bei einer falschen Eingabe oder einer abgebrochenen Aktion einen klaren Zustand.</a:t>
             </a:r>
           </a:p>
           <a:p xmlns:a="http://schemas.openxmlformats.org/drawingml/2006/main">
@@ -1241,7 +1276,7 @@
           </a:p>
           <a:p xmlns:a="http://schemas.openxmlformats.org/drawingml/2006/main">
             <a:r>
-              <a:t>Expo SQLite: https://docs.expo.dev/versions/latest/sdk/sqlite/ (abgerufen 01.10.2026).</a:t>
+              <a:t>Spendly_LB1.pdf, 24.09.2026, Seiten 1–11. Lokale Abgabe: LB1_Spendly/Spendly_LB1.pdf.</a:t>
             </a:r>
           </a:p>
           <a:p xmlns:a="http://schemas.openxmlformats.org/drawingml/2006/main">
@@ -1251,37 +1286,27 @@
           </a:p>
           <a:p xmlns:a="http://schemas.openxmlformats.org/drawingml/2006/main">
             <a:r>
+              <a:t>Datei: theme/colors.js</a:t>
+            </a:r>
+          </a:p>
+          <a:p xmlns:a="http://schemas.openxmlformats.org/drawingml/2006/main">
+            <a:r>
+              <a:t>Datei: theme/typography.js</a:t>
+            </a:r>
+          </a:p>
+          <a:p xmlns:a="http://schemas.openxmlformats.org/drawingml/2006/main">
+            <a:r>
               <a:t>Datei: screens/NewExpenseScreen.js</a:t>
             </a:r>
           </a:p>
           <a:p xmlns:a="http://schemas.openxmlformats.org/drawingml/2006/main">
             <a:r>
-              <a:t>Datei: utils/validation.js</a:t>
-            </a:r>
-          </a:p>
-          <a:p xmlns:a="http://schemas.openxmlformats.org/drawingml/2006/main">
-            <a:r>
-              <a:t>Datei: storage/DataContext.js</a:t>
-            </a:r>
-          </a:p>
-          <a:p xmlns:a="http://schemas.openxmlformats.org/drawingml/2006/main">
-            <a:r>
-              <a:t>Datei: storage/expenses.js</a:t>
-            </a:r>
-          </a:p>
-          <a:p xmlns:a="http://schemas.openxmlformats.org/drawingml/2006/main">
-            <a:r>
-              <a:t>Datei: storage/db.js</a:t>
-            </a:r>
-          </a:p>
-          <a:p xmlns:a="http://schemas.openxmlformats.org/drawingml/2006/main">
-            <a:r>
-              <a:t>Datei: screens/OverviewScreen.js</a:t>
-            </a:r>
-          </a:p>
-          <a:p xmlns:a="http://schemas.openxmlformats.org/drawingml/2006/main">
-            <a:r>
-              <a:t>Datei: utils/budget.js</a:t>
+              <a:t>Vorgehen: Git-Commits 5f4b8f3 (23.09.2026), 958eed7 (24.09.2026), 686081d und 633fb0f (25.09.2026).</a:t>
+            </a:r>
+          </a:p>
+          <a:p xmlns:a="http://schemas.openxmlformats.org/drawingml/2006/main">
+            <a:r>
+              <a:t>Bild links: LB1_Spendly/Mockups/03-neue-ausgabe.png. Bild rechts: eigene native Aufnahme.</a:t>
             </a:r>
           </a:p>
         </p:txBody>
@@ -1361,7 +1386,7 @@
           </a:p>
           <a:p xmlns:a="http://schemas.openxmlformats.org/drawingml/2006/main">
             <a:r>
-              <a:t>Alex: Das finale Konzept war unsere Ausgangsbasis. Die lokale SQLite-Datenbank und ganze Rappen entsprechen bereits der Planung aus LB1. Monatsbudgets bleiben getrennt. Ein Standardbudget gilt für neue Monate. Auch die fünf Sekunden lange Löschfrist liegt dauerhaft in SQLite. Dark Mode erweitert den Mindestumfang. Eine Abweichung bleibt beim Code-Prüfwert: Die App nutzt SHA-256 mit Salt und SecureStore, keine spezielle langsame Passwortableitung. Das ist bewusst als Vereinfachung dokumentiert. Zusätzliche Funktionen wie Cloud-Synchronisierung oder Bankimport bleiben ausserhalb des Projekts. Der genaue Vergleich und die Abweichungen stehen in der technischen Dokumentation.</a:t>
+              <a:t>Alex: Hinter dem kurzen Ablauf steckt eine getrennte Struktur. Das Formular prüft die Eingabe. Der gemeinsame DataContext führt die Aktion aus. SQLite speichert sie, danach aktualisieren sich die Ansichten. Die Methoden und Kommentare erklären diese Aufgaben im Code. Geld liegt als ganze Rappen in der Datenbank. Aus vierzehn Franken achtzig wird die Zahl eintausendvierhundertachtzig. Beim Monatsbudget behalten wir für jeden Monat einen eigenen Wert. Beim Löschen speichern wir die fünf Sekunden lange Frist, damit ein Neustart sie nicht verändert. Beides entspricht dem Konzept. Eine Abweichung bleibt beim Code-Prüfwert: SHA-256 mit zufälligem Salt in SecureStore ist einfacher als die geplante langsame Passwortableitung. Diese Grenze haben wir dokumentiert.</a:t>
             </a:r>
           </a:p>
           <a:p xmlns:a="http://schemas.openxmlformats.org/drawingml/2006/main">
@@ -1386,27 +1411,47 @@
           </a:p>
           <a:p xmlns:a="http://schemas.openxmlformats.org/drawingml/2006/main">
             <a:r>
+              <a:t>Expo SQLite: https://docs.expo.dev/versions/latest/sdk/sqlite/ (abgerufen 01.10.2026).</a:t>
+            </a:r>
+          </a:p>
+          <a:p xmlns:a="http://schemas.openxmlformats.org/drawingml/2006/main">
+            <a:r>
+              <a:t>Expo SecureStore: https://docs.expo.dev/versions/latest/sdk/securestore/ (abgerufen 01.10.2026).</a:t>
+            </a:r>
+          </a:p>
+          <a:p xmlns:a="http://schemas.openxmlformats.org/drawingml/2006/main">
+            <a:r>
               <a:t>Quellcode: https://github.com/germanndarian/Spendly. Prüfstand 01.10.2026, finale Quelldateien in der LB3-Abgabe.</a:t>
             </a:r>
           </a:p>
           <a:p xmlns:a="http://schemas.openxmlformats.org/drawingml/2006/main">
             <a:r>
-              <a:t>Datei: storage/db.js</a:t>
-            </a:r>
-          </a:p>
-          <a:p xmlns:a="http://schemas.openxmlformats.org/drawingml/2006/main">
-            <a:r>
-              <a:t>Datei: storage/settings.js</a:t>
+              <a:t>Datei: screens/NewExpenseScreen.js</a:t>
+            </a:r>
+          </a:p>
+          <a:p xmlns:a="http://schemas.openxmlformats.org/drawingml/2006/main">
+            <a:r>
+              <a:t>Datei: utils/validation.js</a:t>
+            </a:r>
+          </a:p>
+          <a:p xmlns:a="http://schemas.openxmlformats.org/drawingml/2006/main">
+            <a:r>
+              <a:t>Datei: storage/DataContext.js</a:t>
+            </a:r>
+          </a:p>
+          <a:p xmlns:a="http://schemas.openxmlformats.org/drawingml/2006/main">
+            <a:r>
+              <a:t>Datei: storage/budgets.js</a:t>
+            </a:r>
+          </a:p>
+          <a:p xmlns:a="http://schemas.openxmlformats.org/drawingml/2006/main">
+            <a:r>
+              <a:t>Datei: storage/expenses.js</a:t>
             </a:r>
           </a:p>
           <a:p xmlns:a="http://schemas.openxmlformats.org/drawingml/2006/main">
             <a:r>
               <a:t>Datei: storage/pin.js</a:t>
-            </a:r>
-          </a:p>
-          <a:p xmlns:a="http://schemas.openxmlformats.org/drawingml/2006/main">
-            <a:r>
-              <a:t>Datei: storage/DataContext.js</a:t>
             </a:r>
           </a:p>
         </p:txBody>
@@ -1486,7 +1531,7 @@
           </a:p>
           <a:p xmlns:a="http://schemas.openxmlformats.org/drawingml/2006/main">
             <a:r>
-              <a:t>Alex: Der aktuelle Prüflauf umfasst 91 bestandene automatisierte Tests. Neun Testsuiten prüfen unter anderem Berechnungen, Validierung, Code-Sperren und die SQLite-Speicherung. Die Datenbanktests nutzen eine echte SQLite-Engine. Zwei Tests prüfen den tatsächlichen Ablauf bei vergessenem Code mit aktivierter und deaktivierter Biometrie. ESLint ist ebenfalls ohne Fehler durchgelaufen. Zusätzlich prüfen wir die App als Ablauf: erstellen, verändern, löschen, zurückholen und nach einem Neustart wiederfinden. Der vollständige Ablauf funktionierte im eigenen iOS-Release-Build im Simulator, auch nach dem Stoppen des Entwicklungsservers. Historische Budgets und dunkle Darstellung wurden zusätzlich geprüft. Der native Face-ID-Systemdialog konnte mit einer simulierten passenden Erkennung entsperren. Der physische Gesichtsscan bleibt offen. Ein Unit-Test beweist keinen erfolgreichen Face-ID-Vorgang. Deshalb unterscheiden wir diese Nachweise. Einen Nutzertest mit der Zielgruppe und eine gemessene Erfassungszeit haben wir noch nicht durchgeführt.</a:t>
+              <a:t>Alex: Wir können den Kern heute zeigen. Einundneunzig automatisierte Tests in neun Suiten bestehen. Sie prüfen Berechnungen, Eingaben, PIN-Sperren und die Speicherung. Die SQLite-Regressionen führen echtes SQL aus. ESLint meldet keine Fehler. Zusätzlich haben wir den vollständigen Ablauf im eigenen iOS-Release-Build geprüft: erfassen, korrigieren, löschen, zurückholen und nach einem vollständigen Neustart wiederfinden. Dabei war der Entwicklungsserver gestoppt. Auch alte Monatsbudgets und Dark Mode wurden geprüft. Das ist technischer Nachweis. Ob Lernende Spendly täglich nutzen und die Tagesorientierung verstehen, müssen wir als Nächstes mit ihnen testen. Ein erfolgreicher Simulator-Dialog ersetzt auch keinen echten Gesichtsscan.</a:t>
             </a:r>
           </a:p>
           <a:p xmlns:a="http://schemas.openxmlformats.org/drawingml/2006/main">
@@ -1526,7 +1571,7 @@
           </a:p>
           <a:p xmlns:a="http://schemas.openxmlformats.org/drawingml/2006/main">
             <a:r>
-              <a:t>Prüfprotokoll: 01.10.2026: 91/91 Tests in9Suiten, ESLint und Diff-Prüfung erfolgreich. Native Release-Builds für iOS-Simulator und iPhone erfolgreich. Simulatorablauf und simulierte Face ID im technischen Testprotokoll; echte Geräteerkennung offen.</a:t>
+              <a:t>Prüfprotokoll: 01.10.2026: 91/91 Tests in 9 Suiten, ESLint und Diff-Prüfung erfolgreich. Native Release-Builds für iOS-Simulator und iPhone erfolgreich. Simulatorablauf und simulierte Face ID im technischen Testprotokoll; echte Geräteerkennung offen.</a:t>
             </a:r>
           </a:p>
         </p:txBody>
@@ -1596,7 +1641,7 @@
           <a:lstStyle xmlns:a="http://schemas.openxmlformats.org/drawingml/2006/main"/>
           <a:p xmlns:a="http://schemas.openxmlformats.org/drawingml/2006/main">
             <a:r>
-              <a:t>DAUER: 0:50</a:t>
+              <a:t>DAUER: 0:55</a:t>
             </a:r>
           </a:p>
           <a:p xmlns:a="http://schemas.openxmlformats.org/drawingml/2006/main">
@@ -1606,7 +1651,7 @@
           </a:p>
           <a:p xmlns:a="http://schemas.openxmlformats.org/drawingml/2006/main">
             <a:r>
-              <a:t>Darian: Zwei Stellen zeigen, warum eine fertige App mehr braucht als den normalen Erfolgsfall. Ein einzelner globaler Budgetwert würde alte Monate beim Ändern verfälschen. Deshalb speichert die App Monatswerte getrennt und hält das Standardbudget zusätzlich fest. Auch ein Neustart darf die Sperrzeit nach falschen Codes nicht zurücksetzen. Dafür speichert SecureStore die Fehlversuche und den Sperrzeitpunkt. Beim Schliessen eines veränderten Formulars fragt die App vor dem Verwerfen nach. Die Folgerung ist für uns technisch klar: Jede wichtige Aktion braucht einen definierten Zustand vor der Änderung, ein Ergebnis bei Erfolg und eine verständliche Reaktion bei einem Fehler. Sonst können Oberfläche und gespeicherte Daten auseinanderlaufen.</a:t>
+              <a:t>Darian: Unser Rückblick ist konkret: Ein Monatsbudget braucht eine feste Zuordnung zum Monat. Sonst verändert ein neuer Wert auch die Vergangenheit. Auch die Rückgängig-Frist und die PIN-Sperre müssen einen Neustart überstehen. Das waren Herausforderungen, für die wir dauerhafte Zustände speichern mussten. Beim nächsten Projekt würden wir solche Fehlerfälle früher im Entwurf planen. Im Ausblick könnten wir Spendly um einen CSV-Export für Ausgaben oder Statistiken nach Kategorien erweitern. Diese Funktionen sind Ideen für spätere Versionen und noch nicht umgesetzt. Zuerst würden wir mit Lernenden prüfen, ob sie die Tagesorientierung verstehen und welche Erweiterung ihnen hilft. Die offenen Geräte- und Barrierefreiheitstests bleiben ebenfalls wichtig.</a:t>
             </a:r>
           </a:p>
           <a:p xmlns:a="http://schemas.openxmlformats.org/drawingml/2006/main">
@@ -1626,12 +1671,17 @@
           </a:p>
           <a:p xmlns:a="http://schemas.openxmlformats.org/drawingml/2006/main">
             <a:r>
+              <a:t>Spendly_LB1.pdf, 24.09.2026, Seiten 1–11. Lokale Abgabe: LB1_Spendly/Spendly_LB1.pdf.</a:t>
+            </a:r>
+          </a:p>
+          <a:p xmlns:a="http://schemas.openxmlformats.org/drawingml/2006/main">
+            <a:r>
               <a:t>Quellcode: https://github.com/germanndarian/Spendly. Prüfstand 01.10.2026, finale Quelldateien in der LB3-Abgabe.</a:t>
             </a:r>
           </a:p>
           <a:p xmlns:a="http://schemas.openxmlformats.org/drawingml/2006/main">
             <a:r>
-              <a:t>Datei: storage/settings.js</a:t>
+              <a:t>Datei: storage/budgets.js</a:t>
             </a:r>
           </a:p>
           <a:p xmlns:a="http://schemas.openxmlformats.org/drawingml/2006/main">
@@ -1641,12 +1691,17 @@
           </a:p>
           <a:p xmlns:a="http://schemas.openxmlformats.org/drawingml/2006/main">
             <a:r>
+              <a:t>Datei: storage/expenses.js</a:t>
+            </a:r>
+          </a:p>
+          <a:p xmlns:a="http://schemas.openxmlformats.org/drawingml/2006/main">
+            <a:r>
               <a:t>Datei: screens/NewExpenseScreen.js</a:t>
             </a:r>
           </a:p>
           <a:p xmlns:a="http://schemas.openxmlformats.org/drawingml/2006/main">
             <a:r>
-              <a:t>Datei: storage/DataContext.js</a:t>
+              <a:t>CSV-Export und Kategorie-Statistiken sind mögliche Erweiterungen, keine vorhandenen Funktionen. Kein Nutzertest ist als durchgeführt behauptet.</a:t>
             </a:r>
           </a:p>
         </p:txBody>
@@ -1714,7 +1769,7 @@
   </p:cSld>
   <p:clrMap bg1="lt1" tx1="dk1" bg2="lt2" tx2="dk2" accent1="accent1" accent2="accent2" accent3="accent3" accent4="accent4" accent5="accent5" accent6="accent6" hlink="hlink" folHlink="folHlink"/>
   <p:sldLayoutIdLst>
-    <p:sldLayoutId xmlns:r="http://schemas.openxmlformats.org/officeDocument/2006/relationships" id="2147483649" r:id="R0f98ca21fe7b4baa"/>
+    <p:sldLayoutId xmlns:r="http://schemas.openxmlformats.org/officeDocument/2006/relationships" id="2147483649" r:id="R7d5d39f4492243d5"/>
   </p:sldLayoutIdLst>
   <p:txStyles>
     <p:titleStyle>
@@ -2247,7 +2302,7 @@
     <p:bg>
       <p:bgPr>
         <a:solidFill xmlns:a="http://schemas.openxmlformats.org/drawingml/2006/main">
-          <a:srgbClr val="1F5A45"/>
+          <a:srgbClr val="F6F5F1"/>
         </a:solidFill>
       </p:bgPr>
     </p:bg>
@@ -2262,10 +2317,10 @@
       </p:grpSpPr>
       <p:sp>
         <p:nvSpPr>
-          <p:cNvPr id="6" name="">
+          <p:cNvPr id="5" name="">
             <a:extLst xmlns:a="http://schemas.openxmlformats.org/drawingml/2006/main">
               <a:ext uri="{FF2B5EF4-FFF2-40B4-BE49-F238E27FC236}">
-                <a16:creationId xmlns:a16="http://schemas.microsoft.com/office/drawing/2014/main" id="{136AC718-2004-4D91-98A3-10DA846CDCBC}"/>
+                <a16:creationId xmlns:a16="http://schemas.microsoft.com/office/drawing/2014/main" id="{DF3A51FC-3D1F-41DA-A75F-1260A7DD0444}"/>
               </a:ext>
             </a:extLst>
           </p:cNvPr>
@@ -2296,7 +2351,7 @@
             <a:pPr algn="r">
               <a:defRPr sz="1275" b="0">
                 <a:solidFill>
-                  <a:srgbClr val="DCEBE2"/>
+                  <a:srgbClr val="6E6D68"/>
                 </a:solidFill>
                 <a:latin typeface="Inter"/>
                 <a:ea typeface="Inter"/>
@@ -2306,7 +2361,7 @@
             <a:r>
               <a:rPr sz="1275" b="0">
                 <a:solidFill>
-                  <a:srgbClr val="DCEBE2"/>
+                  <a:srgbClr val="6E6D68"/>
                 </a:solidFill>
                 <a:latin typeface="Inter"/>
                 <a:ea typeface="Inter"/>
@@ -2322,7 +2377,7 @@
           <p:cNvPr id="2" name="">
             <a:extLst xmlns:a="http://schemas.openxmlformats.org/drawingml/2006/main">
               <a:ext uri="{FF2B5EF4-FFF2-40B4-BE49-F238E27FC236}">
-                <a16:creationId xmlns:a16="http://schemas.microsoft.com/office/drawing/2014/main" id="{2AE00056-D5F7-4ACE-A075-3BB5D9390044}"/>
+                <a16:creationId xmlns:a16="http://schemas.microsoft.com/office/drawing/2014/main" id="{EE5BBF72-7284-415D-AE5F-0D6D24405CB0}"/>
               </a:ext>
             </a:extLst>
           </p:cNvPr>
@@ -2333,8 +2388,8 @@
         </p:nvSpPr>
         <p:spPr>
           <a:xfrm xmlns:a="http://schemas.openxmlformats.org/drawingml/2006/main">
-            <a:off x="609600" y="1381125"/>
-            <a:ext cx="10906125" cy="1600200"/>
+            <a:off x="609600" y="1343025"/>
+            <a:ext cx="10668000" cy="3476625"/>
           </a:xfrm>
           <a:prstGeom xmlns:a="http://schemas.openxmlformats.org/drawingml/2006/main" prst="rect">
             <a:avLst/>
@@ -2351,9 +2406,9 @@
           <a:lstStyle xmlns:a="http://schemas.openxmlformats.org/drawingml/2006/main"/>
           <a:p xmlns:a="http://schemas.openxmlformats.org/drawingml/2006/main">
             <a:pPr algn="l">
-              <a:defRPr sz="10650" b="0">
-                <a:solidFill>
-                  <a:srgbClr val="F6F5F1"/>
+              <a:defRPr sz="6300" b="0">
+                <a:solidFill>
+                  <a:srgbClr val="1F5A45"/>
                 </a:solidFill>
                 <a:latin typeface="Newsreader"/>
                 <a:ea typeface="Newsreader"/>
@@ -2361,15 +2416,61 @@
               </a:defRPr>
             </a:pPr>
             <a:r>
-              <a:rPr sz="10650" b="0">
-                <a:solidFill>
-                  <a:srgbClr val="F6F5F1"/>
+              <a:rPr sz="6300" b="0">
+                <a:solidFill>
+                  <a:srgbClr val="1F5A45"/>
                 </a:solidFill>
                 <a:latin typeface="Newsreader"/>
                 <a:ea typeface="Newsreader"/>
                 <a:cs typeface="Newsreader"/>
               </a:rPr>
-              <a:t>spendly.</a:t>
+              <a:t>Wie entscheidest du,</a:t>
+            </a:r>
+          </a:p>
+          <a:p xmlns:a="http://schemas.openxmlformats.org/drawingml/2006/main">
+            <a:pPr algn="l">
+              <a:defRPr sz="6300" b="0">
+                <a:solidFill>
+                  <a:srgbClr val="1F5A45"/>
+                </a:solidFill>
+                <a:latin typeface="Newsreader"/>
+                <a:ea typeface="Newsreader"/>
+                <a:cs typeface="Newsreader"/>
+              </a:defRPr>
+            </a:pPr>
+            <a:r>
+              <a:rPr sz="6300" b="0">
+                <a:solidFill>
+                  <a:srgbClr val="1F5A45"/>
+                </a:solidFill>
+                <a:latin typeface="Newsreader"/>
+                <a:ea typeface="Newsreader"/>
+                <a:cs typeface="Newsreader"/>
+              </a:rPr>
+              <a:t>was du dir heute</a:t>
+            </a:r>
+          </a:p>
+          <a:p xmlns:a="http://schemas.openxmlformats.org/drawingml/2006/main">
+            <a:pPr algn="l">
+              <a:defRPr sz="6300" b="0">
+                <a:solidFill>
+                  <a:srgbClr val="1F5A45"/>
+                </a:solidFill>
+                <a:latin typeface="Newsreader"/>
+                <a:ea typeface="Newsreader"/>
+                <a:cs typeface="Newsreader"/>
+              </a:defRPr>
+            </a:pPr>
+            <a:r>
+              <a:rPr sz="6300" b="0">
+                <a:solidFill>
+                  <a:srgbClr val="1F5A45"/>
+                </a:solidFill>
+                <a:latin typeface="Newsreader"/>
+                <a:ea typeface="Newsreader"/>
+                <a:cs typeface="Newsreader"/>
+              </a:rPr>
+              <a:t>noch leisten kannst?</a:t>
             </a:r>
           </a:p>
         </p:txBody>
@@ -2379,7 +2480,7 @@
           <p:cNvPr id="3" name="">
             <a:extLst xmlns:a="http://schemas.openxmlformats.org/drawingml/2006/main">
               <a:ext uri="{FF2B5EF4-FFF2-40B4-BE49-F238E27FC236}">
-                <a16:creationId xmlns:a16="http://schemas.microsoft.com/office/drawing/2014/main" id="{F7E8A34E-8F71-49D7-B4DA-EA74094015AA}"/>
+                <a16:creationId xmlns:a16="http://schemas.microsoft.com/office/drawing/2014/main" id="{2E53050E-AE18-4178-BE98-3478382D158D}"/>
               </a:ext>
             </a:extLst>
           </p:cNvPr>
@@ -2390,8 +2491,8 @@
         </p:nvSpPr>
         <p:spPr>
           <a:xfrm xmlns:a="http://schemas.openxmlformats.org/drawingml/2006/main">
-            <a:off x="666750" y="3276600"/>
-            <a:ext cx="9334500" cy="542925"/>
+            <a:off x="657225" y="5772150"/>
+            <a:ext cx="7762875" cy="342900"/>
           </a:xfrm>
           <a:prstGeom xmlns:a="http://schemas.openxmlformats.org/drawingml/2006/main" prst="rect">
             <a:avLst/>
@@ -2408,25 +2509,25 @@
           <a:lstStyle xmlns:a="http://schemas.openxmlformats.org/drawingml/2006/main"/>
           <a:p xmlns:a="http://schemas.openxmlformats.org/drawingml/2006/main">
             <a:pPr algn="l">
-              <a:defRPr sz="2850" b="0">
-                <a:solidFill>
-                  <a:srgbClr val="F6F5F1"/>
-                </a:solidFill>
-                <a:latin typeface="Inter"/>
-                <a:ea typeface="Inter"/>
-                <a:cs typeface="Inter"/>
-              </a:defRPr>
-            </a:pPr>
-            <a:r>
-              <a:rPr sz="2850" b="0">
-                <a:solidFill>
-                  <a:srgbClr val="F6F5F1"/>
-                </a:solidFill>
-                <a:latin typeface="Inter"/>
-                <a:ea typeface="Inter"/>
-                <a:cs typeface="Inter"/>
-              </a:rPr>
-              <a:t>Ausgaben und Monatsbudget</a:t>
+              <a:defRPr sz="1725" b="0">
+                <a:solidFill>
+                  <a:srgbClr val="6E6D68"/>
+                </a:solidFill>
+                <a:latin typeface="Inter"/>
+                <a:ea typeface="Inter"/>
+                <a:cs typeface="Inter"/>
+              </a:defRPr>
+            </a:pPr>
+            <a:r>
+              <a:rPr sz="1725" b="0">
+                <a:solidFill>
+                  <a:srgbClr val="6E6D68"/>
+                </a:solidFill>
+                <a:latin typeface="Inter"/>
+                <a:ea typeface="Inter"/>
+                <a:cs typeface="Inter"/>
+              </a:rPr>
+              <a:t>Darian Germann und Alex Platret</a:t>
             </a:r>
           </a:p>
         </p:txBody>
@@ -2436,7 +2537,7 @@
           <p:cNvPr id="4" name="">
             <a:extLst xmlns:a="http://schemas.openxmlformats.org/drawingml/2006/main">
               <a:ext uri="{FF2B5EF4-FFF2-40B4-BE49-F238E27FC236}">
-                <a16:creationId xmlns:a16="http://schemas.microsoft.com/office/drawing/2014/main" id="{6A4D56D4-4668-4C7B-97BF-F99E863DFC50}"/>
+                <a16:creationId xmlns:a16="http://schemas.microsoft.com/office/drawing/2014/main" id="{C2882339-009A-49AC-8975-204B55A229A8}"/>
               </a:ext>
             </a:extLst>
           </p:cNvPr>
@@ -2447,8 +2548,8 @@
         </p:nvSpPr>
         <p:spPr>
           <a:xfrm xmlns:a="http://schemas.openxmlformats.org/drawingml/2006/main">
-            <a:off x="666750" y="5219700"/>
-            <a:ext cx="6000750" cy="762000"/>
+            <a:off x="8905875" y="5772150"/>
+            <a:ext cx="2638425" cy="342900"/>
           </a:xfrm>
           <a:prstGeom xmlns:a="http://schemas.openxmlformats.org/drawingml/2006/main" prst="rect">
             <a:avLst/>
@@ -2464,129 +2565,26 @@
           </a:bodyPr>
           <a:lstStyle xmlns:a="http://schemas.openxmlformats.org/drawingml/2006/main"/>
           <a:p xmlns:a="http://schemas.openxmlformats.org/drawingml/2006/main">
-            <a:pPr algn="l">
-              <a:defRPr sz="1950" b="0">
-                <a:solidFill>
-                  <a:srgbClr val="DCEBE2"/>
-                </a:solidFill>
-                <a:latin typeface="Inter"/>
-                <a:ea typeface="Inter"/>
-                <a:cs typeface="Inter"/>
-              </a:defRPr>
-            </a:pPr>
-            <a:r>
-              <a:rPr sz="1950" b="0">
-                <a:solidFill>
-                  <a:srgbClr val="DCEBE2"/>
-                </a:solidFill>
-                <a:latin typeface="Inter"/>
-                <a:ea typeface="Inter"/>
-                <a:cs typeface="Inter"/>
-              </a:rPr>
-              <a:t>Darian Germann</a:t>
-            </a:r>
-          </a:p>
-          <a:p xmlns:a="http://schemas.openxmlformats.org/drawingml/2006/main">
-            <a:pPr algn="l">
-              <a:defRPr sz="1950" b="0">
-                <a:solidFill>
-                  <a:srgbClr val="DCEBE2"/>
-                </a:solidFill>
-                <a:latin typeface="Inter"/>
-                <a:ea typeface="Inter"/>
-                <a:cs typeface="Inter"/>
-              </a:defRPr>
-            </a:pPr>
-            <a:r>
-              <a:rPr sz="1950" b="0">
-                <a:solidFill>
-                  <a:srgbClr val="DCEBE2"/>
-                </a:solidFill>
-                <a:latin typeface="Inter"/>
-                <a:ea typeface="Inter"/>
-                <a:cs typeface="Inter"/>
-              </a:rPr>
-              <a:t>Alex Platret</a:t>
-            </a:r>
-          </a:p>
-        </p:txBody>
-      </p:sp>
-      <p:sp>
-        <p:nvSpPr>
-          <p:cNvPr id="5" name="">
-            <a:extLst xmlns:a="http://schemas.openxmlformats.org/drawingml/2006/main">
-              <a:ext uri="{FF2B5EF4-FFF2-40B4-BE49-F238E27FC236}">
-                <a16:creationId xmlns:a16="http://schemas.microsoft.com/office/drawing/2014/main" id="{7FD7A784-F78D-4FC1-A37A-86055CC325E4}"/>
-              </a:ext>
-            </a:extLst>
-          </p:cNvPr>
-          <p:cNvSpPr>
-            <a:spLocks xmlns:a="http://schemas.openxmlformats.org/drawingml/2006/main" noGrp="1"/>
-          </p:cNvSpPr>
-          <p:nvPr/>
-        </p:nvSpPr>
-        <p:spPr>
-          <a:xfrm xmlns:a="http://schemas.openxmlformats.org/drawingml/2006/main">
-            <a:off x="7810500" y="5219700"/>
-            <a:ext cx="3743325" cy="714375"/>
-          </a:xfrm>
-          <a:prstGeom xmlns:a="http://schemas.openxmlformats.org/drawingml/2006/main" prst="rect">
-            <a:avLst/>
-          </a:prstGeom>
-          <a:noFill xmlns:a="http://schemas.openxmlformats.org/drawingml/2006/main"/>
-          <a:ln xmlns:a="http://schemas.openxmlformats.org/drawingml/2006/main" w="0">
-            <a:noFill/>
-          </a:ln>
-        </p:spPr>
-        <p:txBody>
-          <a:bodyPr xmlns:a="http://schemas.openxmlformats.org/drawingml/2006/main" wrap="square" lIns="0" tIns="0" rIns="0" bIns="0" anchor="t">
-            <a:noAutofit/>
-          </a:bodyPr>
-          <a:lstStyle xmlns:a="http://schemas.openxmlformats.org/drawingml/2006/main"/>
-          <a:p xmlns:a="http://schemas.openxmlformats.org/drawingml/2006/main">
             <a:pPr algn="r">
-              <a:defRPr sz="1725" b="0">
-                <a:solidFill>
-                  <a:srgbClr val="DCEBE2"/>
-                </a:solidFill>
-                <a:latin typeface="Inter"/>
-                <a:ea typeface="Inter"/>
-                <a:cs typeface="Inter"/>
-              </a:defRPr>
-            </a:pPr>
-            <a:r>
-              <a:rPr sz="1725" b="0">
-                <a:solidFill>
-                  <a:srgbClr val="DCEBE2"/>
-                </a:solidFill>
-                <a:latin typeface="Inter"/>
-                <a:ea typeface="Inter"/>
-                <a:cs typeface="Inter"/>
-              </a:rPr>
-              <a:t>LB3  /  Modul 335</a:t>
-            </a:r>
-          </a:p>
-          <a:p xmlns:a="http://schemas.openxmlformats.org/drawingml/2006/main">
-            <a:pPr algn="r">
-              <a:defRPr sz="1725" b="0">
-                <a:solidFill>
-                  <a:srgbClr val="DCEBE2"/>
-                </a:solidFill>
-                <a:latin typeface="Inter"/>
-                <a:ea typeface="Inter"/>
-                <a:cs typeface="Inter"/>
-              </a:defRPr>
-            </a:pPr>
-            <a:r>
-              <a:rPr sz="1725" b="0">
-                <a:solidFill>
-                  <a:srgbClr val="DCEBE2"/>
-                </a:solidFill>
-                <a:latin typeface="Inter"/>
-                <a:ea typeface="Inter"/>
-                <a:cs typeface="Inter"/>
-              </a:rPr>
-              <a:t>1. Oktober 2026</a:t>
+              <a:defRPr sz="1650" b="0">
+                <a:solidFill>
+                  <a:srgbClr val="6E6D68"/>
+                </a:solidFill>
+                <a:latin typeface="Inter"/>
+                <a:ea typeface="Inter"/>
+                <a:cs typeface="Inter"/>
+              </a:defRPr>
+            </a:pPr>
+            <a:r>
+              <a:rPr sz="1650" b="0">
+                <a:solidFill>
+                  <a:srgbClr val="6E6D68"/>
+                </a:solidFill>
+                <a:latin typeface="Inter"/>
+                <a:ea typeface="Inter"/>
+                <a:cs typeface="Inter"/>
+              </a:rPr>
+              <a:t>LB3 / Modul 335</a:t>
             </a:r>
           </a:p>
         </p:txBody>
@@ -2594,7 +2592,7 @@
     </p:spTree>
     <p:extLst>
       <p:ext uri="{BB962C8B-B14F-4D97-AF65-F5344CB8AC3E}">
-        <p14:creationId xmlns:p14="http://schemas.microsoft.com/office/powerpoint/2010/main" val="254823485"/>
+        <p14:creationId xmlns:p14="http://schemas.microsoft.com/office/powerpoint/2010/main" val="635395001"/>
       </p:ext>
     </p:extLst>
   </p:cSld>
@@ -2622,10 +2620,10 @@
       </p:grpSpPr>
       <p:sp>
         <p:nvSpPr>
-          <p:cNvPr id="7" name="">
+          <p:cNvPr id="6" name="">
             <a:extLst xmlns:a="http://schemas.openxmlformats.org/drawingml/2006/main">
               <a:ext uri="{FF2B5EF4-FFF2-40B4-BE49-F238E27FC236}">
-                <a16:creationId xmlns:a16="http://schemas.microsoft.com/office/drawing/2014/main" id="{B05039AA-3E22-4067-B7E4-FB1DA54F7AD4}"/>
+                <a16:creationId xmlns:a16="http://schemas.microsoft.com/office/drawing/2014/main" id="{D95ADF76-9522-4A6C-BADD-9CC95660778F}"/>
               </a:ext>
             </a:extLst>
           </p:cNvPr>
@@ -2682,7 +2680,7 @@
           <p:cNvPr id="2" name="">
             <a:extLst xmlns:a="http://schemas.openxmlformats.org/drawingml/2006/main">
               <a:ext uri="{FF2B5EF4-FFF2-40B4-BE49-F238E27FC236}">
-                <a16:creationId xmlns:a16="http://schemas.microsoft.com/office/drawing/2014/main" id="{0DC02941-618F-4346-A3FD-E693186224E1}"/>
+                <a16:creationId xmlns:a16="http://schemas.microsoft.com/office/drawing/2014/main" id="{8FAE1233-6347-4535-95BE-4E65492C23AB}"/>
               </a:ext>
             </a:extLst>
           </p:cNvPr>
@@ -2693,8 +2691,8 @@
         </p:nvSpPr>
         <p:spPr>
           <a:xfrm xmlns:a="http://schemas.openxmlformats.org/drawingml/2006/main">
-            <a:off x="609600" y="476250"/>
-            <a:ext cx="10934700" cy="742950"/>
+            <a:off x="628650" y="876300"/>
+            <a:ext cx="10096500" cy="1190625"/>
           </a:xfrm>
           <a:prstGeom xmlns:a="http://schemas.openxmlformats.org/drawingml/2006/main" prst="rect">
             <a:avLst/>
@@ -2711,7 +2709,7 @@
           <a:lstStyle xmlns:a="http://schemas.openxmlformats.org/drawingml/2006/main"/>
           <a:p xmlns:a="http://schemas.openxmlformats.org/drawingml/2006/main">
             <a:pPr algn="l">
-              <a:defRPr sz="3975" b="0">
+              <a:defRPr sz="7725" b="0">
                 <a:solidFill>
                   <a:srgbClr val="F6F5F1"/>
                 </a:solidFill>
@@ -2721,7 +2719,7 @@
               </a:defRPr>
             </a:pPr>
             <a:r>
-              <a:rPr sz="3975" b="0">
+              <a:rPr sz="7725" b="0">
                 <a:solidFill>
                   <a:srgbClr val="F6F5F1"/>
                 </a:solidFill>
@@ -2729,7 +2727,7 @@
                 <a:ea typeface="Newsreader"/>
                 <a:cs typeface="Newsreader"/>
               </a:rPr>
-              <a:t>Rückblick und Ausblick</a:t>
+              <a:t>spendly.</a:t>
             </a:r>
           </a:p>
         </p:txBody>
@@ -2739,7 +2737,7 @@
           <p:cNvPr id="3" name="">
             <a:extLst xmlns:a="http://schemas.openxmlformats.org/drawingml/2006/main">
               <a:ext uri="{FF2B5EF4-FFF2-40B4-BE49-F238E27FC236}">
-                <a16:creationId xmlns:a16="http://schemas.microsoft.com/office/drawing/2014/main" id="{AA6DA68F-4E4E-43B6-AA2D-783EE88EF28F}"/>
+                <a16:creationId xmlns:a16="http://schemas.microsoft.com/office/drawing/2014/main" id="{792F2C18-9124-46A0-9E2D-4D0BB1DF9786}"/>
               </a:ext>
             </a:extLst>
           </p:cNvPr>
@@ -2750,8 +2748,8 @@
         </p:nvSpPr>
         <p:spPr>
           <a:xfrm xmlns:a="http://schemas.openxmlformats.org/drawingml/2006/main">
-            <a:off x="638175" y="1752600"/>
-            <a:ext cx="10239375" cy="1685925"/>
+            <a:off x="628650" y="2466975"/>
+            <a:ext cx="10668000" cy="2047875"/>
           </a:xfrm>
           <a:prstGeom xmlns:a="http://schemas.openxmlformats.org/drawingml/2006/main" prst="rect">
             <a:avLst/>
@@ -2768,7 +2766,7 @@
           <a:lstStyle xmlns:a="http://schemas.openxmlformats.org/drawingml/2006/main"/>
           <a:p xmlns:a="http://schemas.openxmlformats.org/drawingml/2006/main">
             <a:pPr algn="l">
-              <a:defRPr sz="5250" b="0">
+              <a:defRPr sz="5850" b="0">
                 <a:solidFill>
                   <a:srgbClr val="F6F5F1"/>
                 </a:solidFill>
@@ -2778,7 +2776,7 @@
               </a:defRPr>
             </a:pPr>
             <a:r>
-              <a:rPr sz="5250" b="0">
+              <a:rPr sz="5850" b="0">
                 <a:solidFill>
                   <a:srgbClr val="F6F5F1"/>
                 </a:solidFill>
@@ -2786,12 +2784,12 @@
                 <a:ea typeface="Newsreader"/>
                 <a:cs typeface="Newsreader"/>
               </a:rPr>
-              <a:t>Fehlerfälle gehören</a:t>
+              <a:t>Wollt ihr Spendly</a:t>
             </a:r>
           </a:p>
           <a:p xmlns:a="http://schemas.openxmlformats.org/drawingml/2006/main">
             <a:pPr algn="l">
-              <a:defRPr sz="5250" b="0">
+              <a:defRPr sz="5850" b="0">
                 <a:solidFill>
                   <a:srgbClr val="F6F5F1"/>
                 </a:solidFill>
@@ -2801,7 +2799,7 @@
               </a:defRPr>
             </a:pPr>
             <a:r>
-              <a:rPr sz="5250" b="0">
+              <a:rPr sz="5850" b="0">
                 <a:solidFill>
                   <a:srgbClr val="F6F5F1"/>
                 </a:solidFill>
@@ -2809,7 +2807,7 @@
                 <a:ea typeface="Newsreader"/>
                 <a:cs typeface="Newsreader"/>
               </a:rPr>
-              <a:t>früh zum Konzept.</a:t>
+              <a:t>ausprobieren?</a:t>
             </a:r>
           </a:p>
         </p:txBody>
@@ -2819,7 +2817,7 @@
           <p:cNvPr id="4" name="">
             <a:extLst xmlns:a="http://schemas.openxmlformats.org/drawingml/2006/main">
               <a:ext uri="{FF2B5EF4-FFF2-40B4-BE49-F238E27FC236}">
-                <a16:creationId xmlns:a16="http://schemas.microsoft.com/office/drawing/2014/main" id="{0CF6C913-1825-4858-9536-A3279DACE16F}"/>
+                <a16:creationId xmlns:a16="http://schemas.microsoft.com/office/drawing/2014/main" id="{ADA78005-BD70-4871-99CC-E5AAE7708A0B}"/>
               </a:ext>
             </a:extLst>
           </p:cNvPr>
@@ -2830,8 +2828,8 @@
         </p:nvSpPr>
         <p:spPr>
           <a:xfrm xmlns:a="http://schemas.openxmlformats.org/drawingml/2006/main">
-            <a:off x="666750" y="4229100"/>
-            <a:ext cx="8572500" cy="428625"/>
+            <a:off x="676275" y="4829175"/>
+            <a:ext cx="10086975" cy="542925"/>
           </a:xfrm>
           <a:prstGeom xmlns:a="http://schemas.openxmlformats.org/drawingml/2006/main" prst="rect">
             <a:avLst/>
@@ -2848,7 +2846,7 @@
           <a:lstStyle xmlns:a="http://schemas.openxmlformats.org/drawingml/2006/main"/>
           <a:p xmlns:a="http://schemas.openxmlformats.org/drawingml/2006/main">
             <a:pPr algn="l">
-              <a:defRPr sz="2025" b="1">
+              <a:defRPr sz="2325" b="0">
                 <a:solidFill>
                   <a:srgbClr val="DCEBE2"/>
                 </a:solidFill>
@@ -2858,7 +2856,7 @@
               </a:defRPr>
             </a:pPr>
             <a:r>
-              <a:rPr sz="2025" b="1">
+              <a:rPr sz="2325" b="0">
                 <a:solidFill>
                   <a:srgbClr val="DCEBE2"/>
                 </a:solidFill>
@@ -2866,7 +2864,7 @@
                 <a:ea typeface="Inter"/>
                 <a:cs typeface="Inter"/>
               </a:rPr>
-              <a:t>Nächster Schritt</a:t>
+              <a:t>Dein restliches Budget direkt im Blick.</a:t>
             </a:r>
           </a:p>
         </p:txBody>
@@ -2876,7 +2874,7 @@
           <p:cNvPr id="5" name="">
             <a:extLst xmlns:a="http://schemas.openxmlformats.org/drawingml/2006/main">
               <a:ext uri="{FF2B5EF4-FFF2-40B4-BE49-F238E27FC236}">
-                <a16:creationId xmlns:a16="http://schemas.microsoft.com/office/drawing/2014/main" id="{FEB37A08-A2D4-4D3B-A11E-0CAACA3D57AB}"/>
+                <a16:creationId xmlns:a16="http://schemas.microsoft.com/office/drawing/2014/main" id="{3852645F-FAA0-40B4-B2BD-1DCE54E40C4B}"/>
               </a:ext>
             </a:extLst>
           </p:cNvPr>
@@ -2887,8 +2885,8 @@
         </p:nvSpPr>
         <p:spPr>
           <a:xfrm xmlns:a="http://schemas.openxmlformats.org/drawingml/2006/main">
-            <a:off x="666750" y="4857750"/>
-            <a:ext cx="10096500" cy="885825"/>
+            <a:off x="685800" y="5676900"/>
+            <a:ext cx="10639425" cy="409575"/>
           </a:xfrm>
           <a:prstGeom xmlns:a="http://schemas.openxmlformats.org/drawingml/2006/main" prst="rect">
             <a:avLst/>
@@ -2905,7 +2903,7 @@
           <a:lstStyle xmlns:a="http://schemas.openxmlformats.org/drawingml/2006/main"/>
           <a:p xmlns:a="http://schemas.openxmlformats.org/drawingml/2006/main">
             <a:pPr algn="l">
-              <a:defRPr sz="2550" b="0">
+              <a:defRPr sz="1950" b="0">
                 <a:solidFill>
                   <a:srgbClr val="F6F5F1"/>
                 </a:solidFill>
@@ -2915,7 +2913,7 @@
               </a:defRPr>
             </a:pPr>
             <a:r>
-              <a:rPr sz="2550" b="0">
+              <a:rPr sz="1950" b="0">
                 <a:solidFill>
                   <a:srgbClr val="F6F5F1"/>
                 </a:solidFill>
@@ -2923,87 +2921,7 @@
                 <a:ea typeface="Inter"/>
                 <a:cs typeface="Inter"/>
               </a:rPr>
-              <a:t>Erfassung mit der Zielgruppe testen.</a:t>
-            </a:r>
-          </a:p>
-          <a:p xmlns:a="http://schemas.openxmlformats.org/drawingml/2006/main">
-            <a:pPr algn="l">
-              <a:defRPr sz="2550" b="0">
-                <a:solidFill>
-                  <a:srgbClr val="F6F5F1"/>
-                </a:solidFill>
-                <a:latin typeface="Inter"/>
-                <a:ea typeface="Inter"/>
-                <a:cs typeface="Inter"/>
-              </a:defRPr>
-            </a:pPr>
-            <a:r>
-              <a:rPr sz="2550" b="0">
-                <a:solidFill>
-                  <a:srgbClr val="F6F5F1"/>
-                </a:solidFill>
-                <a:latin typeface="Inter"/>
-                <a:ea typeface="Inter"/>
-                <a:cs typeface="Inter"/>
-              </a:rPr>
-              <a:t>Zeitbedarf und Verständlichkeit messen.</a:t>
-            </a:r>
-          </a:p>
-        </p:txBody>
-      </p:sp>
-      <p:sp>
-        <p:nvSpPr>
-          <p:cNvPr id="6" name="">
-            <a:extLst xmlns:a="http://schemas.openxmlformats.org/drawingml/2006/main">
-              <a:ext uri="{FF2B5EF4-FFF2-40B4-BE49-F238E27FC236}">
-                <a16:creationId xmlns:a16="http://schemas.microsoft.com/office/drawing/2014/main" id="{50138AAF-EFB5-4F2E-9281-748F6D90A2A1}"/>
-              </a:ext>
-            </a:extLst>
-          </p:cNvPr>
-          <p:cNvSpPr>
-            <a:spLocks xmlns:a="http://schemas.openxmlformats.org/drawingml/2006/main" noGrp="1"/>
-          </p:cNvSpPr>
-          <p:nvPr/>
-        </p:nvSpPr>
-        <p:spPr>
-          <a:xfrm xmlns:a="http://schemas.openxmlformats.org/drawingml/2006/main">
-            <a:off x="10315575" y="5905500"/>
-            <a:ext cx="1219200" cy="342900"/>
-          </a:xfrm>
-          <a:prstGeom xmlns:a="http://schemas.openxmlformats.org/drawingml/2006/main" prst="rect">
-            <a:avLst/>
-          </a:prstGeom>
-          <a:noFill xmlns:a="http://schemas.openxmlformats.org/drawingml/2006/main"/>
-          <a:ln xmlns:a="http://schemas.openxmlformats.org/drawingml/2006/main" w="0">
-            <a:noFill/>
-          </a:ln>
-        </p:spPr>
-        <p:txBody>
-          <a:bodyPr xmlns:a="http://schemas.openxmlformats.org/drawingml/2006/main" wrap="square" lIns="0" tIns="0" rIns="0" bIns="0" anchor="t">
-            <a:noAutofit/>
-          </a:bodyPr>
-          <a:lstStyle xmlns:a="http://schemas.openxmlformats.org/drawingml/2006/main"/>
-          <a:p xmlns:a="http://schemas.openxmlformats.org/drawingml/2006/main">
-            <a:pPr algn="r">
-              <a:defRPr sz="1800" b="0">
-                <a:solidFill>
-                  <a:srgbClr val="DCEBE2"/>
-                </a:solidFill>
-                <a:latin typeface="Inter"/>
-                <a:ea typeface="Inter"/>
-                <a:cs typeface="Inter"/>
-              </a:defRPr>
-            </a:pPr>
-            <a:r>
-              <a:rPr sz="1800" b="0">
-                <a:solidFill>
-                  <a:srgbClr val="DCEBE2"/>
-                </a:solidFill>
-                <a:latin typeface="Inter"/>
-                <a:ea typeface="Inter"/>
-                <a:cs typeface="Inter"/>
-              </a:rPr>
-              <a:t>Fragen</a:t>
+              <a:t>Euer Feedback hilft uns bei der nächsten Version.</a:t>
             </a:r>
           </a:p>
         </p:txBody>
@@ -3011,7 +2929,7 @@
     </p:spTree>
     <p:extLst>
       <p:ext uri="{BB962C8B-B14F-4D97-AF65-F5344CB8AC3E}">
-        <p14:creationId xmlns:p14="http://schemas.microsoft.com/office/powerpoint/2010/main" val="721524083"/>
+        <p14:creationId xmlns:p14="http://schemas.microsoft.com/office/powerpoint/2010/main" val="2100802997"/>
       </p:ext>
     </p:extLst>
   </p:cSld>
@@ -3039,10 +2957,10 @@
       </p:grpSpPr>
       <p:sp>
         <p:nvSpPr>
-          <p:cNvPr id="8" name="">
+          <p:cNvPr id="18" name="">
             <a:extLst xmlns:a="http://schemas.openxmlformats.org/drawingml/2006/main">
               <a:ext uri="{FF2B5EF4-FFF2-40B4-BE49-F238E27FC236}">
-                <a16:creationId xmlns:a16="http://schemas.microsoft.com/office/drawing/2014/main" id="{47405619-96D0-43A1-B3C8-8F302AC85B37}"/>
+                <a16:creationId xmlns:a16="http://schemas.microsoft.com/office/drawing/2014/main" id="{6C0F7888-F29E-4C58-A84F-BB51F3B37752}"/>
               </a:ext>
             </a:extLst>
           </p:cNvPr>
@@ -3099,7 +3017,7 @@
           <p:cNvPr id="2" name="">
             <a:extLst xmlns:a="http://schemas.openxmlformats.org/drawingml/2006/main">
               <a:ext uri="{FF2B5EF4-FFF2-40B4-BE49-F238E27FC236}">
-                <a16:creationId xmlns:a16="http://schemas.microsoft.com/office/drawing/2014/main" id="{4573AFCD-DC73-4FC4-96DE-3C42C5BA54C5}"/>
+                <a16:creationId xmlns:a16="http://schemas.microsoft.com/office/drawing/2014/main" id="{0EF394B1-3DF4-460A-B2F4-346C4CD2D43C}"/>
               </a:ext>
             </a:extLst>
           </p:cNvPr>
@@ -3146,7 +3064,7 @@
                 <a:ea typeface="Newsreader"/>
                 <a:cs typeface="Newsreader"/>
               </a:rPr>
-              <a:t>Ausgaben im Alltag</a:t>
+              <a:t>Kleine Ausgaben summieren sich</a:t>
             </a:r>
           </a:p>
         </p:txBody>
@@ -3156,7 +3074,7 @@
           <p:cNvPr id="3" name="">
             <a:extLst xmlns:a="http://schemas.openxmlformats.org/drawingml/2006/main">
               <a:ext uri="{FF2B5EF4-FFF2-40B4-BE49-F238E27FC236}">
-                <a16:creationId xmlns:a16="http://schemas.microsoft.com/office/drawing/2014/main" id="{841939FE-9098-4B90-BE51-286E0474BAF2}"/>
+                <a16:creationId xmlns:a16="http://schemas.microsoft.com/office/drawing/2014/main" id="{B919C897-AE9C-46A2-B103-2CD78F9E92F8}"/>
               </a:ext>
             </a:extLst>
           </p:cNvPr>
@@ -3167,8 +3085,8 @@
         </p:nvSpPr>
         <p:spPr>
           <a:xfrm xmlns:a="http://schemas.openxmlformats.org/drawingml/2006/main">
-            <a:off x="609600" y="1619250"/>
-            <a:ext cx="6667500" cy="1104900"/>
+            <a:off x="609600" y="1743075"/>
+            <a:ext cx="5905500" cy="1123950"/>
           </a:xfrm>
           <a:prstGeom xmlns:a="http://schemas.openxmlformats.org/drawingml/2006/main" prst="rect">
             <a:avLst/>
@@ -3185,7 +3103,7 @@
           <a:lstStyle xmlns:a="http://schemas.openxmlformats.org/drawingml/2006/main"/>
           <a:p xmlns:a="http://schemas.openxmlformats.org/drawingml/2006/main">
             <a:pPr algn="l">
-              <a:defRPr sz="6600" b="0">
+              <a:defRPr sz="6300" b="0">
                 <a:solidFill>
                   <a:srgbClr val="1F5A45"/>
                 </a:solidFill>
@@ -3195,7 +3113,7 @@
               </a:defRPr>
             </a:pPr>
             <a:r>
-              <a:rPr sz="6600" b="0">
+              <a:rPr sz="6300" b="0">
                 <a:solidFill>
                   <a:srgbClr val="1F5A45"/>
                 </a:solidFill>
@@ -3203,7 +3121,7 @@
                 <a:ea typeface="Newsreader"/>
                 <a:cs typeface="Newsreader"/>
               </a:rPr>
-              <a:t>CHF 14.80</a:t>
+              <a:t>CHF 31.25</a:t>
             </a:r>
           </a:p>
         </p:txBody>
@@ -3213,7 +3131,7 @@
           <p:cNvPr id="4" name="">
             <a:extLst xmlns:a="http://schemas.openxmlformats.org/drawingml/2006/main">
               <a:ext uri="{FF2B5EF4-FFF2-40B4-BE49-F238E27FC236}">
-                <a16:creationId xmlns:a16="http://schemas.microsoft.com/office/drawing/2014/main" id="{96295501-FA66-48FA-92D6-DB19113433AD}"/>
+                <a16:creationId xmlns:a16="http://schemas.microsoft.com/office/drawing/2014/main" id="{B9FCC955-71CB-428C-86D6-6DEA58BE8210}"/>
               </a:ext>
             </a:extLst>
           </p:cNvPr>
@@ -3224,8 +3142,8 @@
         </p:nvSpPr>
         <p:spPr>
           <a:xfrm xmlns:a="http://schemas.openxmlformats.org/drawingml/2006/main">
-            <a:off x="647700" y="2905125"/>
-            <a:ext cx="6572250" cy="1028700"/>
+            <a:off x="657225" y="3162300"/>
+            <a:ext cx="5762625" cy="1152525"/>
           </a:xfrm>
           <a:prstGeom xmlns:a="http://schemas.openxmlformats.org/drawingml/2006/main" prst="rect">
             <a:avLst/>
@@ -3260,7 +3178,7 @@
                 <a:ea typeface="Inter"/>
                 <a:cs typeface="Inter"/>
               </a:rPr>
-              <a:t>Kleine Zahlungen summieren sich.</a:t>
+              <a:t>Drei kleine Zahlungen.</a:t>
             </a:r>
           </a:p>
           <a:p xmlns:a="http://schemas.openxmlformats.org/drawingml/2006/main">
@@ -3283,7 +3201,7 @@
                 <a:ea typeface="Inter"/>
                 <a:cs typeface="Inter"/>
               </a:rPr>
-              <a:t>Spendly zeigt das restliche Budget.</a:t>
+              <a:t>Ein Stück vom Monatsbudget.</a:t>
             </a:r>
           </a:p>
         </p:txBody>
@@ -3293,7 +3211,7 @@
           <p:cNvPr id="5" name="">
             <a:extLst xmlns:a="http://schemas.openxmlformats.org/drawingml/2006/main">
               <a:ext uri="{FF2B5EF4-FFF2-40B4-BE49-F238E27FC236}">
-                <a16:creationId xmlns:a16="http://schemas.microsoft.com/office/drawing/2014/main" id="{FE620646-EF93-42D1-82AF-DA72A4D2701B}"/>
+                <a16:creationId xmlns:a16="http://schemas.microsoft.com/office/drawing/2014/main" id="{83D50D7B-7C4D-481A-A0B2-04F8767A33D1}"/>
               </a:ext>
             </a:extLst>
           </p:cNvPr>
@@ -3304,8 +3222,8 @@
         </p:nvSpPr>
         <p:spPr>
           <a:xfrm xmlns:a="http://schemas.openxmlformats.org/drawingml/2006/main">
-            <a:off x="647700" y="4457700"/>
-            <a:ext cx="6572250" cy="809625"/>
+            <a:off x="657225" y="4943475"/>
+            <a:ext cx="5619750" cy="838200"/>
           </a:xfrm>
           <a:prstGeom xmlns:a="http://schemas.openxmlformats.org/drawingml/2006/main" prst="rect">
             <a:avLst/>
@@ -3322,7 +3240,7 @@
           <a:lstStyle xmlns:a="http://schemas.openxmlformats.org/drawingml/2006/main"/>
           <a:p xmlns:a="http://schemas.openxmlformats.org/drawingml/2006/main">
             <a:pPr algn="l">
-              <a:defRPr sz="2025" b="0">
+              <a:defRPr sz="1875" b="0">
                 <a:solidFill>
                   <a:srgbClr val="6E6D68"/>
                 </a:solidFill>
@@ -3332,7 +3250,7 @@
               </a:defRPr>
             </a:pPr>
             <a:r>
-              <a:rPr sz="2025" b="0">
+              <a:rPr sz="1875" b="0">
                 <a:solidFill>
                   <a:srgbClr val="6E6D68"/>
                 </a:solidFill>
@@ -3345,7 +3263,7 @@
           </a:p>
           <a:p xmlns:a="http://schemas.openxmlformats.org/drawingml/2006/main">
             <a:pPr algn="l">
-              <a:defRPr sz="2025" b="0">
+              <a:defRPr sz="1875" b="0">
                 <a:solidFill>
                   <a:srgbClr val="6E6D68"/>
                 </a:solidFill>
@@ -3355,7 +3273,7 @@
               </a:defRPr>
             </a:pPr>
             <a:r>
-              <a:rPr sz="2025" b="0">
+              <a:rPr sz="1875" b="0">
                 <a:solidFill>
                   <a:srgbClr val="6E6D68"/>
                 </a:solidFill>
@@ -3363,7 +3281,7 @@
                 <a:ea typeface="Inter"/>
                 <a:cs typeface="Inter"/>
               </a:rPr>
-              <a:t>Ausgaben in CHF, ein Budget pro Monat</a:t>
+              <a:t>mit einem eigenen Monatsbudget</a:t>
             </a:r>
           </a:p>
         </p:txBody>
@@ -3373,7 +3291,7 @@
           <p:cNvPr id="6" name="">
             <a:extLst xmlns:a="http://schemas.openxmlformats.org/drawingml/2006/main">
               <a:ext uri="{FF2B5EF4-FFF2-40B4-BE49-F238E27FC236}">
-                <a16:creationId xmlns:a16="http://schemas.microsoft.com/office/drawing/2014/main" id="{40BE945F-481E-46D0-AC90-9D486C4F49FE}"/>
+                <a16:creationId xmlns:a16="http://schemas.microsoft.com/office/drawing/2014/main" id="{F3C9C272-AC0F-49C5-B4C6-64ACD5F2ABAA}"/>
               </a:ext>
             </a:extLst>
           </p:cNvPr>
@@ -3384,8 +3302,8 @@
         </p:nvSpPr>
         <p:spPr>
           <a:xfrm xmlns:a="http://schemas.openxmlformats.org/drawingml/2006/main">
-            <a:off x="647700" y="5629275"/>
-            <a:ext cx="6762750" cy="381000"/>
+            <a:off x="7429500" y="1790700"/>
+            <a:ext cx="4124325" cy="400050"/>
           </a:xfrm>
           <a:prstGeom xmlns:a="http://schemas.openxmlformats.org/drawingml/2006/main" prst="rect">
             <a:avLst/>
@@ -3402,7 +3320,7 @@
           <a:lstStyle xmlns:a="http://schemas.openxmlformats.org/drawingml/2006/main"/>
           <a:p xmlns:a="http://schemas.openxmlformats.org/drawingml/2006/main">
             <a:pPr algn="l">
-              <a:defRPr sz="1875" b="0">
+              <a:defRPr sz="1875" b="1">
                 <a:solidFill>
                   <a:srgbClr val="1F5A45"/>
                 </a:solidFill>
@@ -3412,7 +3330,7 @@
               </a:defRPr>
             </a:pPr>
             <a:r>
-              <a:rPr sz="1875" b="0">
+              <a:rPr sz="1875" b="1">
                 <a:solidFill>
                   <a:srgbClr val="1F5A45"/>
                 </a:solidFill>
@@ -3420,37 +3338,561 @@
                 <a:ea typeface="Inter"/>
                 <a:cs typeface="Inter"/>
               </a:rPr>
-              <a:t>Ohne Konto und ohne Bankanbindung</a:t>
-            </a:r>
-          </a:p>
-        </p:txBody>
-      </p:sp>
-      <p:pic>
-        <p:nvPicPr>
-          <p:cNvPr id="14" name=""/>
-          <p:cNvPicPr>
-            <a:picLocks xmlns:a="http://schemas.openxmlformats.org/drawingml/2006/main" noChangeAspect="1"/>
-          </p:cNvPicPr>
+              <a:t>Beispiel aus dem Alltag</a:t>
+            </a:r>
+          </a:p>
+        </p:txBody>
+      </p:sp>
+      <p:sp>
+        <p:nvSpPr>
+          <p:cNvPr id="7" name="">
+            <a:extLst xmlns:a="http://schemas.openxmlformats.org/drawingml/2006/main">
+              <a:ext uri="{FF2B5EF4-FFF2-40B4-BE49-F238E27FC236}">
+                <a16:creationId xmlns:a16="http://schemas.microsoft.com/office/drawing/2014/main" id="{5DCCB865-5041-41EA-B7DF-08BD22754B4B}"/>
+              </a:ext>
+            </a:extLst>
+          </p:cNvPr>
+          <p:cNvSpPr>
+            <a:spLocks xmlns:a="http://schemas.openxmlformats.org/drawingml/2006/main" noGrp="1"/>
+          </p:cNvSpPr>
           <p:nvPr/>
-        </p:nvPicPr>
-        <p:blipFill>
-          <a:blip xmlns:r="http://schemas.openxmlformats.org/officeDocument/2006/relationships" xmlns:a="http://schemas.openxmlformats.org/drawingml/2006/main" r:embed="Rf5e07adff08f4cc3"/>
-          <a:stretch xmlns:a="http://schemas.openxmlformats.org/drawingml/2006/main"/>
-        </p:blipFill>
+        </p:nvSpPr>
         <p:spPr>
           <a:xfrm xmlns:a="http://schemas.openxmlformats.org/drawingml/2006/main">
-            <a:off x="8472978" y="1343025"/>
-            <a:ext cx="2199294" cy="4781550"/>
+            <a:off x="7429500" y="2571750"/>
+            <a:ext cx="2571750" cy="400050"/>
           </a:xfrm>
           <a:prstGeom xmlns:a="http://schemas.openxmlformats.org/drawingml/2006/main" prst="rect">
             <a:avLst/>
           </a:prstGeom>
-        </p:spPr>
-      </p:pic>
+          <a:noFill xmlns:a="http://schemas.openxmlformats.org/drawingml/2006/main"/>
+          <a:ln xmlns:a="http://schemas.openxmlformats.org/drawingml/2006/main" w="0">
+            <a:noFill/>
+          </a:ln>
+        </p:spPr>
+        <p:txBody>
+          <a:bodyPr xmlns:a="http://schemas.openxmlformats.org/drawingml/2006/main" wrap="square" lIns="0" tIns="0" rIns="0" bIns="0" anchor="t">
+            <a:noAutofit/>
+          </a:bodyPr>
+          <a:lstStyle xmlns:a="http://schemas.openxmlformats.org/drawingml/2006/main"/>
+          <a:p xmlns:a="http://schemas.openxmlformats.org/drawingml/2006/main">
+            <a:pPr algn="l">
+              <a:defRPr sz="2025" b="0">
+                <a:solidFill>
+                  <a:srgbClr val="15171A"/>
+                </a:solidFill>
+                <a:latin typeface="Inter"/>
+                <a:ea typeface="Inter"/>
+                <a:cs typeface="Inter"/>
+              </a:defRPr>
+            </a:pPr>
+            <a:r>
+              <a:rPr sz="2025" b="0">
+                <a:solidFill>
+                  <a:srgbClr val="15171A"/>
+                </a:solidFill>
+                <a:latin typeface="Inter"/>
+                <a:ea typeface="Inter"/>
+                <a:cs typeface="Inter"/>
+              </a:rPr>
+              <a:t>Kaffee</a:t>
+            </a:r>
+          </a:p>
+        </p:txBody>
+      </p:sp>
+      <p:sp>
+        <p:nvSpPr>
+          <p:cNvPr id="8" name="">
+            <a:extLst xmlns:a="http://schemas.openxmlformats.org/drawingml/2006/main">
+              <a:ext uri="{FF2B5EF4-FFF2-40B4-BE49-F238E27FC236}">
+                <a16:creationId xmlns:a16="http://schemas.microsoft.com/office/drawing/2014/main" id="{560815B4-A802-4289-81EE-B61D830A7DDA}"/>
+              </a:ext>
+            </a:extLst>
+          </p:cNvPr>
+          <p:cNvSpPr>
+            <a:spLocks xmlns:a="http://schemas.openxmlformats.org/drawingml/2006/main" noGrp="1"/>
+          </p:cNvSpPr>
+          <p:nvPr/>
+        </p:nvSpPr>
+        <p:spPr>
+          <a:xfrm xmlns:a="http://schemas.openxmlformats.org/drawingml/2006/main">
+            <a:off x="9667875" y="2571750"/>
+            <a:ext cx="1885950" cy="400050"/>
+          </a:xfrm>
+          <a:prstGeom xmlns:a="http://schemas.openxmlformats.org/drawingml/2006/main" prst="rect">
+            <a:avLst/>
+          </a:prstGeom>
+          <a:noFill xmlns:a="http://schemas.openxmlformats.org/drawingml/2006/main"/>
+          <a:ln xmlns:a="http://schemas.openxmlformats.org/drawingml/2006/main" w="0">
+            <a:noFill/>
+          </a:ln>
+        </p:spPr>
+        <p:txBody>
+          <a:bodyPr xmlns:a="http://schemas.openxmlformats.org/drawingml/2006/main" wrap="square" lIns="0" tIns="0" rIns="0" bIns="0" anchor="t">
+            <a:noAutofit/>
+          </a:bodyPr>
+          <a:lstStyle xmlns:a="http://schemas.openxmlformats.org/drawingml/2006/main"/>
+          <a:p xmlns:a="http://schemas.openxmlformats.org/drawingml/2006/main">
+            <a:pPr algn="r">
+              <a:defRPr sz="2025" b="0">
+                <a:solidFill>
+                  <a:srgbClr val="15171A"/>
+                </a:solidFill>
+                <a:latin typeface="Inter"/>
+                <a:ea typeface="Inter"/>
+                <a:cs typeface="Inter"/>
+              </a:defRPr>
+            </a:pPr>
+            <a:r>
+              <a:rPr sz="2025" b="0">
+                <a:solidFill>
+                  <a:srgbClr val="15171A"/>
+                </a:solidFill>
+                <a:latin typeface="Inter"/>
+                <a:ea typeface="Inter"/>
+                <a:cs typeface="Inter"/>
+              </a:rPr>
+              <a:t>CHF 4.50</a:t>
+            </a:r>
+          </a:p>
+        </p:txBody>
+      </p:sp>
+      <p:sp>
+        <p:nvSpPr>
+          <p:cNvPr id="9" name="">
+            <a:extLst xmlns:a="http://schemas.openxmlformats.org/drawingml/2006/main">
+              <a:ext uri="{FF2B5EF4-FFF2-40B4-BE49-F238E27FC236}">
+                <a16:creationId xmlns:a16="http://schemas.microsoft.com/office/drawing/2014/main" id="{7ADDFBC4-A2D2-4282-9EA7-9429E5C48490}"/>
+              </a:ext>
+            </a:extLst>
+          </p:cNvPr>
+          <p:cNvSpPr>
+            <a:spLocks xmlns:a="http://schemas.openxmlformats.org/drawingml/2006/main" noGrp="1"/>
+          </p:cNvSpPr>
+          <p:nvPr/>
+        </p:nvSpPr>
+        <p:spPr>
+          <a:xfrm xmlns:a="http://schemas.openxmlformats.org/drawingml/2006/main">
+            <a:off x="7429500" y="3124200"/>
+            <a:ext cx="4124325" cy="14288"/>
+          </a:xfrm>
+          <a:prstGeom xmlns:a="http://schemas.openxmlformats.org/drawingml/2006/main" prst="rect">
+            <a:avLst/>
+          </a:prstGeom>
+          <a:solidFill xmlns:a="http://schemas.openxmlformats.org/drawingml/2006/main">
+            <a:srgbClr val="D6D8D0"/>
+          </a:solidFill>
+          <a:ln xmlns:a="http://schemas.openxmlformats.org/drawingml/2006/main" w="0">
+            <a:noFill/>
+          </a:ln>
+        </p:spPr>
+      </p:sp>
+      <p:sp>
+        <p:nvSpPr>
+          <p:cNvPr id="10" name="">
+            <a:extLst xmlns:a="http://schemas.openxmlformats.org/drawingml/2006/main">
+              <a:ext uri="{FF2B5EF4-FFF2-40B4-BE49-F238E27FC236}">
+                <a16:creationId xmlns:a16="http://schemas.microsoft.com/office/drawing/2014/main" id="{457F66BF-DEDF-42A2-80C3-CF576D29269E}"/>
+              </a:ext>
+            </a:extLst>
+          </p:cNvPr>
+          <p:cNvSpPr>
+            <a:spLocks xmlns:a="http://schemas.openxmlformats.org/drawingml/2006/main" noGrp="1"/>
+          </p:cNvSpPr>
+          <p:nvPr/>
+        </p:nvSpPr>
+        <p:spPr>
+          <a:xfrm xmlns:a="http://schemas.openxmlformats.org/drawingml/2006/main">
+            <a:off x="7429500" y="3371850"/>
+            <a:ext cx="2571750" cy="400050"/>
+          </a:xfrm>
+          <a:prstGeom xmlns:a="http://schemas.openxmlformats.org/drawingml/2006/main" prst="rect">
+            <a:avLst/>
+          </a:prstGeom>
+          <a:noFill xmlns:a="http://schemas.openxmlformats.org/drawingml/2006/main"/>
+          <a:ln xmlns:a="http://schemas.openxmlformats.org/drawingml/2006/main" w="0">
+            <a:noFill/>
+          </a:ln>
+        </p:spPr>
+        <p:txBody>
+          <a:bodyPr xmlns:a="http://schemas.openxmlformats.org/drawingml/2006/main" wrap="square" lIns="0" tIns="0" rIns="0" bIns="0" anchor="t">
+            <a:noAutofit/>
+          </a:bodyPr>
+          <a:lstStyle xmlns:a="http://schemas.openxmlformats.org/drawingml/2006/main"/>
+          <a:p xmlns:a="http://schemas.openxmlformats.org/drawingml/2006/main">
+            <a:pPr algn="l">
+              <a:defRPr sz="2025" b="0">
+                <a:solidFill>
+                  <a:srgbClr val="15171A"/>
+                </a:solidFill>
+                <a:latin typeface="Inter"/>
+                <a:ea typeface="Inter"/>
+                <a:cs typeface="Inter"/>
+              </a:defRPr>
+            </a:pPr>
+            <a:r>
+              <a:rPr sz="2025" b="0">
+                <a:solidFill>
+                  <a:srgbClr val="15171A"/>
+                </a:solidFill>
+                <a:latin typeface="Inter"/>
+                <a:ea typeface="Inter"/>
+                <a:cs typeface="Inter"/>
+              </a:rPr>
+              <a:t>Mittagessen</a:t>
+            </a:r>
+          </a:p>
+        </p:txBody>
+      </p:sp>
+      <p:sp>
+        <p:nvSpPr>
+          <p:cNvPr id="11" name="">
+            <a:extLst xmlns:a="http://schemas.openxmlformats.org/drawingml/2006/main">
+              <a:ext uri="{FF2B5EF4-FFF2-40B4-BE49-F238E27FC236}">
+                <a16:creationId xmlns:a16="http://schemas.microsoft.com/office/drawing/2014/main" id="{6C512A3B-5C91-4E89-89C1-CF5839E7A0B8}"/>
+              </a:ext>
+            </a:extLst>
+          </p:cNvPr>
+          <p:cNvSpPr>
+            <a:spLocks xmlns:a="http://schemas.openxmlformats.org/drawingml/2006/main" noGrp="1"/>
+          </p:cNvSpPr>
+          <p:nvPr/>
+        </p:nvSpPr>
+        <p:spPr>
+          <a:xfrm xmlns:a="http://schemas.openxmlformats.org/drawingml/2006/main">
+            <a:off x="9667875" y="3371850"/>
+            <a:ext cx="1885950" cy="400050"/>
+          </a:xfrm>
+          <a:prstGeom xmlns:a="http://schemas.openxmlformats.org/drawingml/2006/main" prst="rect">
+            <a:avLst/>
+          </a:prstGeom>
+          <a:noFill xmlns:a="http://schemas.openxmlformats.org/drawingml/2006/main"/>
+          <a:ln xmlns:a="http://schemas.openxmlformats.org/drawingml/2006/main" w="0">
+            <a:noFill/>
+          </a:ln>
+        </p:spPr>
+        <p:txBody>
+          <a:bodyPr xmlns:a="http://schemas.openxmlformats.org/drawingml/2006/main" wrap="square" lIns="0" tIns="0" rIns="0" bIns="0" anchor="t">
+            <a:noAutofit/>
+          </a:bodyPr>
+          <a:lstStyle xmlns:a="http://schemas.openxmlformats.org/drawingml/2006/main"/>
+          <a:p xmlns:a="http://schemas.openxmlformats.org/drawingml/2006/main">
+            <a:pPr algn="r">
+              <a:defRPr sz="2025" b="0">
+                <a:solidFill>
+                  <a:srgbClr val="15171A"/>
+                </a:solidFill>
+                <a:latin typeface="Inter"/>
+                <a:ea typeface="Inter"/>
+                <a:cs typeface="Inter"/>
+              </a:defRPr>
+            </a:pPr>
+            <a:r>
+              <a:rPr sz="2025" b="0">
+                <a:solidFill>
+                  <a:srgbClr val="15171A"/>
+                </a:solidFill>
+                <a:latin typeface="Inter"/>
+                <a:ea typeface="Inter"/>
+                <a:cs typeface="Inter"/>
+              </a:rPr>
+              <a:t>CHF 12.80</a:t>
+            </a:r>
+          </a:p>
+        </p:txBody>
+      </p:sp>
+      <p:sp>
+        <p:nvSpPr>
+          <p:cNvPr id="12" name="">
+            <a:extLst xmlns:a="http://schemas.openxmlformats.org/drawingml/2006/main">
+              <a:ext uri="{FF2B5EF4-FFF2-40B4-BE49-F238E27FC236}">
+                <a16:creationId xmlns:a16="http://schemas.microsoft.com/office/drawing/2014/main" id="{EE7A38C9-64AD-4989-ACCB-9C8F9F4A68C9}"/>
+              </a:ext>
+            </a:extLst>
+          </p:cNvPr>
+          <p:cNvSpPr>
+            <a:spLocks xmlns:a="http://schemas.openxmlformats.org/drawingml/2006/main" noGrp="1"/>
+          </p:cNvSpPr>
+          <p:nvPr/>
+        </p:nvSpPr>
+        <p:spPr>
+          <a:xfrm xmlns:a="http://schemas.openxmlformats.org/drawingml/2006/main">
+            <a:off x="7429500" y="3924300"/>
+            <a:ext cx="4124325" cy="14288"/>
+          </a:xfrm>
+          <a:prstGeom xmlns:a="http://schemas.openxmlformats.org/drawingml/2006/main" prst="rect">
+            <a:avLst/>
+          </a:prstGeom>
+          <a:solidFill xmlns:a="http://schemas.openxmlformats.org/drawingml/2006/main">
+            <a:srgbClr val="D6D8D0"/>
+          </a:solidFill>
+          <a:ln xmlns:a="http://schemas.openxmlformats.org/drawingml/2006/main" w="0">
+            <a:noFill/>
+          </a:ln>
+        </p:spPr>
+      </p:sp>
+      <p:sp>
+        <p:nvSpPr>
+          <p:cNvPr id="13" name="">
+            <a:extLst xmlns:a="http://schemas.openxmlformats.org/drawingml/2006/main">
+              <a:ext uri="{FF2B5EF4-FFF2-40B4-BE49-F238E27FC236}">
+                <a16:creationId xmlns:a16="http://schemas.microsoft.com/office/drawing/2014/main" id="{C0F87CED-1EF4-43CC-8696-00957CA05603}"/>
+              </a:ext>
+            </a:extLst>
+          </p:cNvPr>
+          <p:cNvSpPr>
+            <a:spLocks xmlns:a="http://schemas.openxmlformats.org/drawingml/2006/main" noGrp="1"/>
+          </p:cNvSpPr>
+          <p:nvPr/>
+        </p:nvSpPr>
+        <p:spPr>
+          <a:xfrm xmlns:a="http://schemas.openxmlformats.org/drawingml/2006/main">
+            <a:off x="7429500" y="4171950"/>
+            <a:ext cx="2571750" cy="400050"/>
+          </a:xfrm>
+          <a:prstGeom xmlns:a="http://schemas.openxmlformats.org/drawingml/2006/main" prst="rect">
+            <a:avLst/>
+          </a:prstGeom>
+          <a:noFill xmlns:a="http://schemas.openxmlformats.org/drawingml/2006/main"/>
+          <a:ln xmlns:a="http://schemas.openxmlformats.org/drawingml/2006/main" w="0">
+            <a:noFill/>
+          </a:ln>
+        </p:spPr>
+        <p:txBody>
+          <a:bodyPr xmlns:a="http://schemas.openxmlformats.org/drawingml/2006/main" wrap="square" lIns="0" tIns="0" rIns="0" bIns="0" anchor="t">
+            <a:noAutofit/>
+          </a:bodyPr>
+          <a:lstStyle xmlns:a="http://schemas.openxmlformats.org/drawingml/2006/main"/>
+          <a:p xmlns:a="http://schemas.openxmlformats.org/drawingml/2006/main">
+            <a:pPr algn="l">
+              <a:defRPr sz="2025" b="0">
+                <a:solidFill>
+                  <a:srgbClr val="15171A"/>
+                </a:solidFill>
+                <a:latin typeface="Inter"/>
+                <a:ea typeface="Inter"/>
+                <a:cs typeface="Inter"/>
+              </a:defRPr>
+            </a:pPr>
+            <a:r>
+              <a:rPr sz="2025" b="0">
+                <a:solidFill>
+                  <a:srgbClr val="15171A"/>
+                </a:solidFill>
+                <a:latin typeface="Inter"/>
+                <a:ea typeface="Inter"/>
+                <a:cs typeface="Inter"/>
+              </a:rPr>
+              <a:t>Musikabo</a:t>
+            </a:r>
+          </a:p>
+        </p:txBody>
+      </p:sp>
+      <p:sp>
+        <p:nvSpPr>
+          <p:cNvPr id="14" name="">
+            <a:extLst xmlns:a="http://schemas.openxmlformats.org/drawingml/2006/main">
+              <a:ext uri="{FF2B5EF4-FFF2-40B4-BE49-F238E27FC236}">
+                <a16:creationId xmlns:a16="http://schemas.microsoft.com/office/drawing/2014/main" id="{25288B9D-5C00-4047-88A6-4335E22A4C61}"/>
+              </a:ext>
+            </a:extLst>
+          </p:cNvPr>
+          <p:cNvSpPr>
+            <a:spLocks xmlns:a="http://schemas.openxmlformats.org/drawingml/2006/main" noGrp="1"/>
+          </p:cNvSpPr>
+          <p:nvPr/>
+        </p:nvSpPr>
+        <p:spPr>
+          <a:xfrm xmlns:a="http://schemas.openxmlformats.org/drawingml/2006/main">
+            <a:off x="9667875" y="4171950"/>
+            <a:ext cx="1885950" cy="400050"/>
+          </a:xfrm>
+          <a:prstGeom xmlns:a="http://schemas.openxmlformats.org/drawingml/2006/main" prst="rect">
+            <a:avLst/>
+          </a:prstGeom>
+          <a:noFill xmlns:a="http://schemas.openxmlformats.org/drawingml/2006/main"/>
+          <a:ln xmlns:a="http://schemas.openxmlformats.org/drawingml/2006/main" w="0">
+            <a:noFill/>
+          </a:ln>
+        </p:spPr>
+        <p:txBody>
+          <a:bodyPr xmlns:a="http://schemas.openxmlformats.org/drawingml/2006/main" wrap="square" lIns="0" tIns="0" rIns="0" bIns="0" anchor="t">
+            <a:noAutofit/>
+          </a:bodyPr>
+          <a:lstStyle xmlns:a="http://schemas.openxmlformats.org/drawingml/2006/main"/>
+          <a:p xmlns:a="http://schemas.openxmlformats.org/drawingml/2006/main">
+            <a:pPr algn="r">
+              <a:defRPr sz="2025" b="0">
+                <a:solidFill>
+                  <a:srgbClr val="15171A"/>
+                </a:solidFill>
+                <a:latin typeface="Inter"/>
+                <a:ea typeface="Inter"/>
+                <a:cs typeface="Inter"/>
+              </a:defRPr>
+            </a:pPr>
+            <a:r>
+              <a:rPr sz="2025" b="0">
+                <a:solidFill>
+                  <a:srgbClr val="15171A"/>
+                </a:solidFill>
+                <a:latin typeface="Inter"/>
+                <a:ea typeface="Inter"/>
+                <a:cs typeface="Inter"/>
+              </a:rPr>
+              <a:t>CHF 13.95</a:t>
+            </a:r>
+          </a:p>
+        </p:txBody>
+      </p:sp>
+      <p:sp>
+        <p:nvSpPr>
+          <p:cNvPr id="15" name="">
+            <a:extLst xmlns:a="http://schemas.openxmlformats.org/drawingml/2006/main">
+              <a:ext uri="{FF2B5EF4-FFF2-40B4-BE49-F238E27FC236}">
+                <a16:creationId xmlns:a16="http://schemas.microsoft.com/office/drawing/2014/main" id="{70BDA0D1-0CB9-4DFC-99BD-30B8C30DBA19}"/>
+              </a:ext>
+            </a:extLst>
+          </p:cNvPr>
+          <p:cNvSpPr>
+            <a:spLocks xmlns:a="http://schemas.openxmlformats.org/drawingml/2006/main" noGrp="1"/>
+          </p:cNvSpPr>
+          <p:nvPr/>
+        </p:nvSpPr>
+        <p:spPr>
+          <a:xfrm xmlns:a="http://schemas.openxmlformats.org/drawingml/2006/main">
+            <a:off x="7429500" y="4724400"/>
+            <a:ext cx="4124325" cy="14288"/>
+          </a:xfrm>
+          <a:prstGeom xmlns:a="http://schemas.openxmlformats.org/drawingml/2006/main" prst="rect">
+            <a:avLst/>
+          </a:prstGeom>
+          <a:solidFill xmlns:a="http://schemas.openxmlformats.org/drawingml/2006/main">
+            <a:srgbClr val="D6D8D0"/>
+          </a:solidFill>
+          <a:ln xmlns:a="http://schemas.openxmlformats.org/drawingml/2006/main" w="0">
+            <a:noFill/>
+          </a:ln>
+        </p:spPr>
+      </p:sp>
+      <p:sp>
+        <p:nvSpPr>
+          <p:cNvPr id="16" name="">
+            <a:extLst xmlns:a="http://schemas.openxmlformats.org/drawingml/2006/main">
+              <a:ext uri="{FF2B5EF4-FFF2-40B4-BE49-F238E27FC236}">
+                <a16:creationId xmlns:a16="http://schemas.microsoft.com/office/drawing/2014/main" id="{29753486-5213-445A-BA03-F85892CF8DF1}"/>
+              </a:ext>
+            </a:extLst>
+          </p:cNvPr>
+          <p:cNvSpPr>
+            <a:spLocks xmlns:a="http://schemas.openxmlformats.org/drawingml/2006/main" noGrp="1"/>
+          </p:cNvSpPr>
+          <p:nvPr/>
+        </p:nvSpPr>
+        <p:spPr>
+          <a:xfrm xmlns:a="http://schemas.openxmlformats.org/drawingml/2006/main">
+            <a:off x="7429500" y="5200650"/>
+            <a:ext cx="2219325" cy="400050"/>
+          </a:xfrm>
+          <a:prstGeom xmlns:a="http://schemas.openxmlformats.org/drawingml/2006/main" prst="rect">
+            <a:avLst/>
+          </a:prstGeom>
+          <a:noFill xmlns:a="http://schemas.openxmlformats.org/drawingml/2006/main"/>
+          <a:ln xmlns:a="http://schemas.openxmlformats.org/drawingml/2006/main" w="0">
+            <a:noFill/>
+          </a:ln>
+        </p:spPr>
+        <p:txBody>
+          <a:bodyPr xmlns:a="http://schemas.openxmlformats.org/drawingml/2006/main" wrap="square" lIns="0" tIns="0" rIns="0" bIns="0" anchor="t">
+            <a:noAutofit/>
+          </a:bodyPr>
+          <a:lstStyle xmlns:a="http://schemas.openxmlformats.org/drawingml/2006/main"/>
+          <a:p xmlns:a="http://schemas.openxmlformats.org/drawingml/2006/main">
+            <a:pPr algn="l">
+              <a:defRPr sz="2025" b="1">
+                <a:solidFill>
+                  <a:srgbClr val="1F5A45"/>
+                </a:solidFill>
+                <a:latin typeface="Inter"/>
+                <a:ea typeface="Inter"/>
+                <a:cs typeface="Inter"/>
+              </a:defRPr>
+            </a:pPr>
+            <a:r>
+              <a:rPr sz="2025" b="1">
+                <a:solidFill>
+                  <a:srgbClr val="1F5A45"/>
+                </a:solidFill>
+                <a:latin typeface="Inter"/>
+                <a:ea typeface="Inter"/>
+                <a:cs typeface="Inter"/>
+              </a:rPr>
+              <a:t>Zusammen</a:t>
+            </a:r>
+          </a:p>
+        </p:txBody>
+      </p:sp>
+      <p:sp>
+        <p:nvSpPr>
+          <p:cNvPr id="17" name="">
+            <a:extLst xmlns:a="http://schemas.openxmlformats.org/drawingml/2006/main">
+              <a:ext uri="{FF2B5EF4-FFF2-40B4-BE49-F238E27FC236}">
+                <a16:creationId xmlns:a16="http://schemas.microsoft.com/office/drawing/2014/main" id="{325FDE3B-8062-4D01-A8D6-D3F6BC3020FB}"/>
+              </a:ext>
+            </a:extLst>
+          </p:cNvPr>
+          <p:cNvSpPr>
+            <a:spLocks xmlns:a="http://schemas.openxmlformats.org/drawingml/2006/main" noGrp="1"/>
+          </p:cNvSpPr>
+          <p:nvPr/>
+        </p:nvSpPr>
+        <p:spPr>
+          <a:xfrm xmlns:a="http://schemas.openxmlformats.org/drawingml/2006/main">
+            <a:off x="9620250" y="5114925"/>
+            <a:ext cx="1933575" cy="552450"/>
+          </a:xfrm>
+          <a:prstGeom xmlns:a="http://schemas.openxmlformats.org/drawingml/2006/main" prst="rect">
+            <a:avLst/>
+          </a:prstGeom>
+          <a:noFill xmlns:a="http://schemas.openxmlformats.org/drawingml/2006/main"/>
+          <a:ln xmlns:a="http://schemas.openxmlformats.org/drawingml/2006/main" w="0">
+            <a:noFill/>
+          </a:ln>
+        </p:spPr>
+        <p:txBody>
+          <a:bodyPr xmlns:a="http://schemas.openxmlformats.org/drawingml/2006/main" wrap="square" lIns="0" tIns="0" rIns="0" bIns="0" anchor="t">
+            <a:noAutofit/>
+          </a:bodyPr>
+          <a:lstStyle xmlns:a="http://schemas.openxmlformats.org/drawingml/2006/main"/>
+          <a:p xmlns:a="http://schemas.openxmlformats.org/drawingml/2006/main">
+            <a:pPr algn="r">
+              <a:defRPr sz="2775" b="0">
+                <a:solidFill>
+                  <a:srgbClr val="1F5A45"/>
+                </a:solidFill>
+                <a:latin typeface="Newsreader"/>
+                <a:ea typeface="Newsreader"/>
+                <a:cs typeface="Newsreader"/>
+              </a:defRPr>
+            </a:pPr>
+            <a:r>
+              <a:rPr sz="2775" b="0">
+                <a:solidFill>
+                  <a:srgbClr val="1F5A45"/>
+                </a:solidFill>
+                <a:latin typeface="Newsreader"/>
+                <a:ea typeface="Newsreader"/>
+                <a:cs typeface="Newsreader"/>
+              </a:rPr>
+              <a:t>CHF 31.25</a:t>
+            </a:r>
+          </a:p>
+        </p:txBody>
+      </p:sp>
     </p:spTree>
     <p:extLst>
       <p:ext uri="{BB962C8B-B14F-4D97-AF65-F5344CB8AC3E}">
-        <p14:creationId xmlns:p14="http://schemas.microsoft.com/office/powerpoint/2010/main" val="328255084"/>
+        <p14:creationId xmlns:p14="http://schemas.microsoft.com/office/powerpoint/2010/main" val="321554564"/>
       </p:ext>
     </p:extLst>
   </p:cSld>
@@ -3458,6 +3900,331 @@
 </file>
 
 <file path=ppt/slides/slide3.xml><?xml version="1.0" encoding="utf-8"?>
+<p:sld xmlns:p="http://schemas.openxmlformats.org/presentationml/2006/main">
+  <p:cSld>
+    <p:bg>
+      <p:bgPr>
+        <a:solidFill xmlns:a="http://schemas.openxmlformats.org/drawingml/2006/main">
+          <a:srgbClr val="1F5A45"/>
+        </a:solidFill>
+      </p:bgPr>
+    </p:bg>
+    <p:spTree>
+      <p:nvGrpSpPr>
+        <p:cNvPr id="1" name=""/>
+        <p:cNvGrpSpPr/>
+        <p:nvPr/>
+      </p:nvGrpSpPr>
+      <p:grpSpPr>
+        <a:xfrm xmlns:a="http://schemas.openxmlformats.org/drawingml/2006/main"/>
+      </p:grpSpPr>
+      <p:sp>
+        <p:nvSpPr>
+          <p:cNvPr id="6" name="">
+            <a:extLst xmlns:a="http://schemas.openxmlformats.org/drawingml/2006/main">
+              <a:ext uri="{FF2B5EF4-FFF2-40B4-BE49-F238E27FC236}">
+                <a16:creationId xmlns:a16="http://schemas.microsoft.com/office/drawing/2014/main" id="{EDB886B4-82BE-4C72-A3ED-EC03D6421526}"/>
+              </a:ext>
+            </a:extLst>
+          </p:cNvPr>
+          <p:cNvSpPr>
+            <a:spLocks xmlns:a="http://schemas.openxmlformats.org/drawingml/2006/main" noGrp="1"/>
+          </p:cNvSpPr>
+          <p:nvPr/>
+        </p:nvSpPr>
+        <p:spPr>
+          <a:xfrm xmlns:a="http://schemas.openxmlformats.org/drawingml/2006/main">
+            <a:off x="11334750" y="6296025"/>
+            <a:ext cx="333375" cy="219075"/>
+          </a:xfrm>
+          <a:prstGeom xmlns:a="http://schemas.openxmlformats.org/drawingml/2006/main" prst="rect">
+            <a:avLst/>
+          </a:prstGeom>
+          <a:noFill xmlns:a="http://schemas.openxmlformats.org/drawingml/2006/main"/>
+          <a:ln xmlns:a="http://schemas.openxmlformats.org/drawingml/2006/main" w="0">
+            <a:noFill/>
+          </a:ln>
+        </p:spPr>
+        <p:txBody>
+          <a:bodyPr xmlns:a="http://schemas.openxmlformats.org/drawingml/2006/main" wrap="square" lIns="0" tIns="0" rIns="0" bIns="0" anchor="t">
+            <a:noAutofit/>
+          </a:bodyPr>
+          <a:lstStyle xmlns:a="http://schemas.openxmlformats.org/drawingml/2006/main"/>
+          <a:p xmlns:a="http://schemas.openxmlformats.org/drawingml/2006/main">
+            <a:pPr algn="r">
+              <a:defRPr sz="1275" b="0">
+                <a:solidFill>
+                  <a:srgbClr val="DCEBE2"/>
+                </a:solidFill>
+                <a:latin typeface="Inter"/>
+                <a:ea typeface="Inter"/>
+                <a:cs typeface="Inter"/>
+              </a:defRPr>
+            </a:pPr>
+            <a:r>
+              <a:rPr sz="1275" b="0">
+                <a:solidFill>
+                  <a:srgbClr val="DCEBE2"/>
+                </a:solidFill>
+                <a:latin typeface="Inter"/>
+                <a:ea typeface="Inter"/>
+                <a:cs typeface="Inter"/>
+              </a:rPr>
+              <a:t>3</a:t>
+            </a:r>
+          </a:p>
+        </p:txBody>
+      </p:sp>
+      <p:sp>
+        <p:nvSpPr>
+          <p:cNvPr id="2" name="">
+            <a:extLst xmlns:a="http://schemas.openxmlformats.org/drawingml/2006/main">
+              <a:ext uri="{FF2B5EF4-FFF2-40B4-BE49-F238E27FC236}">
+                <a16:creationId xmlns:a16="http://schemas.microsoft.com/office/drawing/2014/main" id="{131EE3C7-47B2-430E-99C1-6E15C60D081C}"/>
+              </a:ext>
+            </a:extLst>
+          </p:cNvPr>
+          <p:cNvSpPr>
+            <a:spLocks xmlns:a="http://schemas.openxmlformats.org/drawingml/2006/main" noGrp="1"/>
+          </p:cNvSpPr>
+          <p:nvPr/>
+        </p:nvSpPr>
+        <p:spPr>
+          <a:xfrm xmlns:a="http://schemas.openxmlformats.org/drawingml/2006/main">
+            <a:off x="609600" y="1295400"/>
+            <a:ext cx="8001000" cy="1543050"/>
+          </a:xfrm>
+          <a:prstGeom xmlns:a="http://schemas.openxmlformats.org/drawingml/2006/main" prst="rect">
+            <a:avLst/>
+          </a:prstGeom>
+          <a:noFill xmlns:a="http://schemas.openxmlformats.org/drawingml/2006/main"/>
+          <a:ln xmlns:a="http://schemas.openxmlformats.org/drawingml/2006/main" w="0">
+            <a:noFill/>
+          </a:ln>
+        </p:spPr>
+        <p:txBody>
+          <a:bodyPr xmlns:a="http://schemas.openxmlformats.org/drawingml/2006/main" wrap="square" lIns="0" tIns="0" rIns="0" bIns="0" anchor="t">
+            <a:noAutofit/>
+          </a:bodyPr>
+          <a:lstStyle xmlns:a="http://schemas.openxmlformats.org/drawingml/2006/main"/>
+          <a:p xmlns:a="http://schemas.openxmlformats.org/drawingml/2006/main">
+            <a:pPr algn="l">
+              <a:defRPr sz="10200" b="0">
+                <a:solidFill>
+                  <a:srgbClr val="F6F5F1"/>
+                </a:solidFill>
+                <a:latin typeface="Newsreader"/>
+                <a:ea typeface="Newsreader"/>
+                <a:cs typeface="Newsreader"/>
+              </a:defRPr>
+            </a:pPr>
+            <a:r>
+              <a:rPr sz="10200" b="0">
+                <a:solidFill>
+                  <a:srgbClr val="F6F5F1"/>
+                </a:solidFill>
+                <a:latin typeface="Newsreader"/>
+                <a:ea typeface="Newsreader"/>
+                <a:cs typeface="Newsreader"/>
+              </a:rPr>
+              <a:t>spendly.</a:t>
+            </a:r>
+          </a:p>
+        </p:txBody>
+      </p:sp>
+      <p:sp>
+        <p:nvSpPr>
+          <p:cNvPr id="3" name="">
+            <a:extLst xmlns:a="http://schemas.openxmlformats.org/drawingml/2006/main">
+              <a:ext uri="{FF2B5EF4-FFF2-40B4-BE49-F238E27FC236}">
+                <a16:creationId xmlns:a16="http://schemas.microsoft.com/office/drawing/2014/main" id="{71B52AD9-9DBB-4CF0-96DE-45D26BB5D422}"/>
+              </a:ext>
+            </a:extLst>
+          </p:cNvPr>
+          <p:cNvSpPr>
+            <a:spLocks xmlns:a="http://schemas.openxmlformats.org/drawingml/2006/main" noGrp="1"/>
+          </p:cNvSpPr>
+          <p:nvPr/>
+        </p:nvSpPr>
+        <p:spPr>
+          <a:xfrm xmlns:a="http://schemas.openxmlformats.org/drawingml/2006/main">
+            <a:off x="666750" y="3133725"/>
+            <a:ext cx="7572375" cy="1190625"/>
+          </a:xfrm>
+          <a:prstGeom xmlns:a="http://schemas.openxmlformats.org/drawingml/2006/main" prst="rect">
+            <a:avLst/>
+          </a:prstGeom>
+          <a:noFill xmlns:a="http://schemas.openxmlformats.org/drawingml/2006/main"/>
+          <a:ln xmlns:a="http://schemas.openxmlformats.org/drawingml/2006/main" w="0">
+            <a:noFill/>
+          </a:ln>
+        </p:spPr>
+        <p:txBody>
+          <a:bodyPr xmlns:a="http://schemas.openxmlformats.org/drawingml/2006/main" wrap="square" lIns="0" tIns="0" rIns="0" bIns="0" anchor="t">
+            <a:noAutofit/>
+          </a:bodyPr>
+          <a:lstStyle xmlns:a="http://schemas.openxmlformats.org/drawingml/2006/main"/>
+          <a:p xmlns:a="http://schemas.openxmlformats.org/drawingml/2006/main">
+            <a:pPr algn="l">
+              <a:defRPr sz="3225" b="0">
+                <a:solidFill>
+                  <a:srgbClr val="F6F5F1"/>
+                </a:solidFill>
+                <a:latin typeface="Inter"/>
+                <a:ea typeface="Inter"/>
+                <a:cs typeface="Inter"/>
+              </a:defRPr>
+            </a:pPr>
+            <a:r>
+              <a:rPr sz="3225" b="0">
+                <a:solidFill>
+                  <a:srgbClr val="F6F5F1"/>
+                </a:solidFill>
+                <a:latin typeface="Inter"/>
+                <a:ea typeface="Inter"/>
+                <a:cs typeface="Inter"/>
+              </a:rPr>
+              <a:t>Dein Budget für heute.</a:t>
+            </a:r>
+          </a:p>
+          <a:p xmlns:a="http://schemas.openxmlformats.org/drawingml/2006/main">
+            <a:pPr algn="l">
+              <a:defRPr sz="3225" b="0">
+                <a:solidFill>
+                  <a:srgbClr val="F6F5F1"/>
+                </a:solidFill>
+                <a:latin typeface="Inter"/>
+                <a:ea typeface="Inter"/>
+                <a:cs typeface="Inter"/>
+              </a:defRPr>
+            </a:pPr>
+            <a:r>
+              <a:rPr sz="3225" b="0">
+                <a:solidFill>
+                  <a:srgbClr val="F6F5F1"/>
+                </a:solidFill>
+                <a:latin typeface="Inter"/>
+                <a:ea typeface="Inter"/>
+                <a:cs typeface="Inter"/>
+              </a:rPr>
+              <a:t>Direkt im Blick.</a:t>
+            </a:r>
+          </a:p>
+        </p:txBody>
+      </p:sp>
+      <p:sp>
+        <p:nvSpPr>
+          <p:cNvPr id="4" name="">
+            <a:extLst xmlns:a="http://schemas.openxmlformats.org/drawingml/2006/main">
+              <a:ext uri="{FF2B5EF4-FFF2-40B4-BE49-F238E27FC236}">
+                <a16:creationId xmlns:a16="http://schemas.microsoft.com/office/drawing/2014/main" id="{E1ABB24C-E9CC-4800-B0FA-717FCA770C4B}"/>
+              </a:ext>
+            </a:extLst>
+          </p:cNvPr>
+          <p:cNvSpPr>
+            <a:spLocks xmlns:a="http://schemas.openxmlformats.org/drawingml/2006/main" noGrp="1"/>
+          </p:cNvSpPr>
+          <p:nvPr/>
+        </p:nvSpPr>
+        <p:spPr>
+          <a:xfrm xmlns:a="http://schemas.openxmlformats.org/drawingml/2006/main">
+            <a:off x="685800" y="4895850"/>
+            <a:ext cx="7258050" cy="819150"/>
+          </a:xfrm>
+          <a:prstGeom xmlns:a="http://schemas.openxmlformats.org/drawingml/2006/main" prst="rect">
+            <a:avLst/>
+          </a:prstGeom>
+          <a:noFill xmlns:a="http://schemas.openxmlformats.org/drawingml/2006/main"/>
+          <a:ln xmlns:a="http://schemas.openxmlformats.org/drawingml/2006/main" w="0">
+            <a:noFill/>
+          </a:ln>
+        </p:spPr>
+        <p:txBody>
+          <a:bodyPr xmlns:a="http://schemas.openxmlformats.org/drawingml/2006/main" wrap="square" lIns="0" tIns="0" rIns="0" bIns="0" anchor="t">
+            <a:noAutofit/>
+          </a:bodyPr>
+          <a:lstStyle xmlns:a="http://schemas.openxmlformats.org/drawingml/2006/main"/>
+          <a:p xmlns:a="http://schemas.openxmlformats.org/drawingml/2006/main">
+            <a:pPr algn="l">
+              <a:defRPr sz="2025" b="0">
+                <a:solidFill>
+                  <a:srgbClr val="DCEBE2"/>
+                </a:solidFill>
+                <a:latin typeface="Inter"/>
+                <a:ea typeface="Inter"/>
+                <a:cs typeface="Inter"/>
+              </a:defRPr>
+            </a:pPr>
+            <a:r>
+              <a:rPr sz="2025" b="0">
+                <a:solidFill>
+                  <a:srgbClr val="DCEBE2"/>
+                </a:solidFill>
+                <a:latin typeface="Inter"/>
+                <a:ea typeface="Inter"/>
+                <a:cs typeface="Inter"/>
+              </a:rPr>
+              <a:t>Ausgaben erfassen und korrigieren.</a:t>
+            </a:r>
+          </a:p>
+          <a:p xmlns:a="http://schemas.openxmlformats.org/drawingml/2006/main">
+            <a:pPr algn="l">
+              <a:defRPr sz="2025" b="0">
+                <a:solidFill>
+                  <a:srgbClr val="DCEBE2"/>
+                </a:solidFill>
+                <a:latin typeface="Inter"/>
+                <a:ea typeface="Inter"/>
+                <a:cs typeface="Inter"/>
+              </a:defRPr>
+            </a:pPr>
+            <a:r>
+              <a:rPr sz="2025" b="0">
+                <a:solidFill>
+                  <a:srgbClr val="DCEBE2"/>
+                </a:solidFill>
+                <a:latin typeface="Inter"/>
+                <a:ea typeface="Inter"/>
+                <a:cs typeface="Inter"/>
+              </a:rPr>
+              <a:t>Das restliche Monatsbudget sehen.</a:t>
+            </a:r>
+          </a:p>
+        </p:txBody>
+      </p:sp>
+      <p:pic>
+        <p:nvPicPr>
+          <p:cNvPr id="10" name=""/>
+          <p:cNvPicPr>
+            <a:picLocks xmlns:a="http://schemas.openxmlformats.org/drawingml/2006/main" noChangeAspect="1"/>
+          </p:cNvPicPr>
+          <p:nvPr/>
+        </p:nvPicPr>
+        <p:blipFill>
+          <a:blip xmlns:r="http://schemas.openxmlformats.org/officeDocument/2006/relationships" xmlns:a="http://schemas.openxmlformats.org/drawingml/2006/main" r:embed="Re3aaa20c8a2a4e9e"/>
+          <a:stretch xmlns:a="http://schemas.openxmlformats.org/drawingml/2006/main"/>
+        </p:blipFill>
+        <p:spPr>
+          <a:xfrm xmlns:a="http://schemas.openxmlformats.org/drawingml/2006/main">
+            <a:off x="8877300" y="753660"/>
+            <a:ext cx="2447925" cy="5322106"/>
+          </a:xfrm>
+          <a:prstGeom xmlns:a="http://schemas.openxmlformats.org/drawingml/2006/main" prst="rect">
+            <a:avLst/>
+          </a:prstGeom>
+        </p:spPr>
+      </p:pic>
+    </p:spTree>
+    <p:extLst>
+      <p:ext uri="{BB962C8B-B14F-4D97-AF65-F5344CB8AC3E}">
+        <p14:creationId xmlns:p14="http://schemas.microsoft.com/office/powerpoint/2010/main" val="1908114061"/>
+      </p:ext>
+    </p:extLst>
+  </p:cSld>
+</p:sld>
+</file>
+
+<file path=ppt/slides/slide4.xml><?xml version="1.0" encoding="utf-8"?>
 <p:sld xmlns:p="http://schemas.openxmlformats.org/presentationml/2006/main">
   <p:cSld>
     <p:bg>
@@ -3478,10 +4245,10 @@
       </p:grpSpPr>
       <p:sp>
         <p:nvSpPr>
-          <p:cNvPr id="11" name="">
+          <p:cNvPr id="13" name="">
             <a:extLst xmlns:a="http://schemas.openxmlformats.org/drawingml/2006/main">
               <a:ext uri="{FF2B5EF4-FFF2-40B4-BE49-F238E27FC236}">
-                <a16:creationId xmlns:a16="http://schemas.microsoft.com/office/drawing/2014/main" id="{C3B1AC61-F739-470D-9295-DF926D9E72DE}"/>
+                <a16:creationId xmlns:a16="http://schemas.microsoft.com/office/drawing/2014/main" id="{F8F4E52C-9CF9-4C29-8D36-D3ABBEF08CFB}"/>
               </a:ext>
             </a:extLst>
           </p:cNvPr>
@@ -3528,7 +4295,7 @@
                 <a:ea typeface="Inter"/>
                 <a:cs typeface="Inter"/>
               </a:rPr>
-              <a:t>3</a:t>
+              <a:t>4</a:t>
             </a:r>
           </a:p>
         </p:txBody>
@@ -3538,7 +4305,7 @@
           <p:cNvPr id="2" name="">
             <a:extLst xmlns:a="http://schemas.openxmlformats.org/drawingml/2006/main">
               <a:ext uri="{FF2B5EF4-FFF2-40B4-BE49-F238E27FC236}">
-                <a16:creationId xmlns:a16="http://schemas.microsoft.com/office/drawing/2014/main" id="{0BB43B96-CF9B-4999-BE0A-DB5EAE8DE4A8}"/>
+                <a16:creationId xmlns:a16="http://schemas.microsoft.com/office/drawing/2014/main" id="{6140DD78-48BF-4EDC-93CC-1570BEAEEDA4}"/>
               </a:ext>
             </a:extLst>
           </p:cNvPr>
@@ -3585,7 +4352,7 @@
                 <a:ea typeface="Newsreader"/>
                 <a:cs typeface="Newsreader"/>
               </a:rPr>
-              <a:t>Konzept und Design</a:t>
+              <a:t>Spendly im Alltag</a:t>
             </a:r>
           </a:p>
         </p:txBody>
@@ -3595,7 +4362,7 @@
           <p:cNvPr id="3" name="">
             <a:extLst xmlns:a="http://schemas.openxmlformats.org/drawingml/2006/main">
               <a:ext uri="{FF2B5EF4-FFF2-40B4-BE49-F238E27FC236}">
-                <a16:creationId xmlns:a16="http://schemas.microsoft.com/office/drawing/2014/main" id="{88F4F4C2-293D-4E83-8031-ABD530A8B2EE}"/>
+                <a16:creationId xmlns:a16="http://schemas.microsoft.com/office/drawing/2014/main" id="{67E1032C-AF94-408D-B33C-BF95AE01E560}"/>
               </a:ext>
             </a:extLst>
           </p:cNvPr>
@@ -3606,8 +4373,8 @@
         </p:nvSpPr>
         <p:spPr>
           <a:xfrm xmlns:a="http://schemas.openxmlformats.org/drawingml/2006/main">
-            <a:off x="609600" y="1762125"/>
-            <a:ext cx="5048250" cy="571500"/>
+            <a:off x="638175" y="1847850"/>
+            <a:ext cx="857250" cy="666750"/>
           </a:xfrm>
           <a:prstGeom xmlns:a="http://schemas.openxmlformats.org/drawingml/2006/main" prst="rect">
             <a:avLst/>
@@ -3624,7 +4391,7 @@
           <a:lstStyle xmlns:a="http://schemas.openxmlformats.org/drawingml/2006/main"/>
           <a:p xmlns:a="http://schemas.openxmlformats.org/drawingml/2006/main">
             <a:pPr algn="l">
-              <a:defRPr sz="2850" b="0">
+              <a:defRPr sz="3375" b="0">
                 <a:solidFill>
                   <a:srgbClr val="1F5A45"/>
                 </a:solidFill>
@@ -3634,7 +4401,7 @@
               </a:defRPr>
             </a:pPr>
             <a:r>
-              <a:rPr sz="2850" b="0">
+              <a:rPr sz="3375" b="0">
                 <a:solidFill>
                   <a:srgbClr val="1F5A45"/>
                 </a:solidFill>
@@ -3642,7 +4409,7 @@
                 <a:ea typeface="Newsreader"/>
                 <a:cs typeface="Newsreader"/>
               </a:rPr>
-              <a:t>Budget im Fokus</a:t>
+              <a:t>01</a:t>
             </a:r>
           </a:p>
         </p:txBody>
@@ -3652,7 +4419,7 @@
           <p:cNvPr id="4" name="">
             <a:extLst xmlns:a="http://schemas.openxmlformats.org/drawingml/2006/main">
               <a:ext uri="{FF2B5EF4-FFF2-40B4-BE49-F238E27FC236}">
-                <a16:creationId xmlns:a16="http://schemas.microsoft.com/office/drawing/2014/main" id="{B00C9683-948E-41B4-A016-AD0E6AD5C0E7}"/>
+                <a16:creationId xmlns:a16="http://schemas.microsoft.com/office/drawing/2014/main" id="{73483E75-818D-4E41-A03E-2B25AB7FD293}"/>
               </a:ext>
             </a:extLst>
           </p:cNvPr>
@@ -3663,8 +4430,8 @@
         </p:nvSpPr>
         <p:spPr>
           <a:xfrm xmlns:a="http://schemas.openxmlformats.org/drawingml/2006/main">
-            <a:off x="638175" y="2533650"/>
-            <a:ext cx="4667250" cy="1457325"/>
+            <a:off x="1609725" y="1847850"/>
+            <a:ext cx="6191250" cy="561975"/>
           </a:xfrm>
           <a:prstGeom xmlns:a="http://schemas.openxmlformats.org/drawingml/2006/main" prst="rect">
             <a:avLst/>
@@ -3681,71 +4448,25 @@
           <a:lstStyle xmlns:a="http://schemas.openxmlformats.org/drawingml/2006/main"/>
           <a:p xmlns:a="http://schemas.openxmlformats.org/drawingml/2006/main">
             <a:pPr algn="l">
-              <a:defRPr sz="2250" b="0">
-                <a:solidFill>
-                  <a:srgbClr val="15171A"/>
-                </a:solidFill>
-                <a:latin typeface="Inter"/>
-                <a:ea typeface="Inter"/>
-                <a:cs typeface="Inter"/>
-              </a:defRPr>
-            </a:pPr>
-            <a:r>
-              <a:rPr sz="2250" b="0">
-                <a:solidFill>
-                  <a:srgbClr val="15171A"/>
-                </a:solidFill>
-                <a:latin typeface="Inter"/>
-                <a:ea typeface="Inter"/>
-                <a:cs typeface="Inter"/>
-              </a:rPr>
-              <a:t>Grosse Beträge</a:t>
-            </a:r>
-          </a:p>
-          <a:p xmlns:a="http://schemas.openxmlformats.org/drawingml/2006/main">
-            <a:pPr algn="l">
-              <a:defRPr sz="2250" b="0">
-                <a:solidFill>
-                  <a:srgbClr val="15171A"/>
-                </a:solidFill>
-                <a:latin typeface="Inter"/>
-                <a:ea typeface="Inter"/>
-                <a:cs typeface="Inter"/>
-              </a:defRPr>
-            </a:pPr>
-            <a:r>
-              <a:rPr sz="2250" b="0">
-                <a:solidFill>
-                  <a:srgbClr val="15171A"/>
-                </a:solidFill>
-                <a:latin typeface="Inter"/>
-                <a:ea typeface="Inter"/>
-                <a:cs typeface="Inter"/>
-              </a:rPr>
-              <a:t>Ruhige Farben</a:t>
-            </a:r>
-          </a:p>
-          <a:p xmlns:a="http://schemas.openxmlformats.org/drawingml/2006/main">
-            <a:pPr algn="l">
-              <a:defRPr sz="2250" b="0">
-                <a:solidFill>
-                  <a:srgbClr val="15171A"/>
-                </a:solidFill>
-                <a:latin typeface="Inter"/>
-                <a:ea typeface="Inter"/>
-                <a:cs typeface="Inter"/>
-              </a:defRPr>
-            </a:pPr>
-            <a:r>
-              <a:rPr sz="2250" b="0">
-                <a:solidFill>
-                  <a:srgbClr val="15171A"/>
-                </a:solidFill>
-                <a:latin typeface="Inter"/>
-                <a:ea typeface="Inter"/>
-                <a:cs typeface="Inter"/>
-              </a:rPr>
-              <a:t>Kurze Wege</a:t>
+              <a:defRPr sz="2850" b="0">
+                <a:solidFill>
+                  <a:srgbClr val="1F5A45"/>
+                </a:solidFill>
+                <a:latin typeface="Newsreader"/>
+                <a:ea typeface="Newsreader"/>
+                <a:cs typeface="Newsreader"/>
+              </a:defRPr>
+            </a:pPr>
+            <a:r>
+              <a:rPr sz="2850" b="0">
+                <a:solidFill>
+                  <a:srgbClr val="1F5A45"/>
+                </a:solidFill>
+                <a:latin typeface="Newsreader"/>
+                <a:ea typeface="Newsreader"/>
+                <a:cs typeface="Newsreader"/>
+              </a:rPr>
+              <a:t>Eintragen</a:t>
             </a:r>
           </a:p>
         </p:txBody>
@@ -3755,7 +4476,7 @@
           <p:cNvPr id="5" name="">
             <a:extLst xmlns:a="http://schemas.openxmlformats.org/drawingml/2006/main">
               <a:ext uri="{FF2B5EF4-FFF2-40B4-BE49-F238E27FC236}">
-                <a16:creationId xmlns:a16="http://schemas.microsoft.com/office/drawing/2014/main" id="{FD2EB3EF-4FA7-4E5B-A258-1868F1F1B251}"/>
+                <a16:creationId xmlns:a16="http://schemas.microsoft.com/office/drawing/2014/main" id="{97A8EE6C-EBE6-4F9A-93B9-DED340130183}"/>
               </a:ext>
             </a:extLst>
           </p:cNvPr>
@@ -3766,8 +4487,8 @@
         </p:nvSpPr>
         <p:spPr>
           <a:xfrm xmlns:a="http://schemas.openxmlformats.org/drawingml/2006/main">
-            <a:off x="638175" y="4400550"/>
-            <a:ext cx="4667250" cy="342900"/>
+            <a:off x="1628775" y="2447925"/>
+            <a:ext cx="6238875" cy="457200"/>
           </a:xfrm>
           <a:prstGeom xmlns:a="http://schemas.openxmlformats.org/drawingml/2006/main" prst="rect">
             <a:avLst/>
@@ -3784,25 +4505,25 @@
           <a:lstStyle xmlns:a="http://schemas.openxmlformats.org/drawingml/2006/main"/>
           <a:p xmlns:a="http://schemas.openxmlformats.org/drawingml/2006/main">
             <a:pPr algn="l">
-              <a:defRPr sz="1725" b="1">
-                <a:solidFill>
-                  <a:srgbClr val="1F5A45"/>
-                </a:solidFill>
-                <a:latin typeface="Inter"/>
-                <a:ea typeface="Inter"/>
-                <a:cs typeface="Inter"/>
-              </a:defRPr>
-            </a:pPr>
-            <a:r>
-              <a:rPr sz="1725" b="1">
-                <a:solidFill>
-                  <a:srgbClr val="1F5A45"/>
-                </a:solidFill>
-                <a:latin typeface="Inter"/>
-                <a:ea typeface="Inter"/>
-                <a:cs typeface="Inter"/>
-              </a:rPr>
-              <a:t>Vorgehen</a:t>
+              <a:defRPr sz="1875" b="0">
+                <a:solidFill>
+                  <a:srgbClr val="15171A"/>
+                </a:solidFill>
+                <a:latin typeface="Inter"/>
+                <a:ea typeface="Inter"/>
+                <a:cs typeface="Inter"/>
+              </a:defRPr>
+            </a:pPr>
+            <a:r>
+              <a:rPr sz="1875" b="0">
+                <a:solidFill>
+                  <a:srgbClr val="15171A"/>
+                </a:solidFill>
+                <a:latin typeface="Inter"/>
+                <a:ea typeface="Inter"/>
+                <a:cs typeface="Inter"/>
+              </a:rPr>
+              <a:t>CHF 14.80 für ein Mittagessen</a:t>
             </a:r>
           </a:p>
         </p:txBody>
@@ -3812,7 +4533,7 @@
           <p:cNvPr id="6" name="">
             <a:extLst xmlns:a="http://schemas.openxmlformats.org/drawingml/2006/main">
               <a:ext uri="{FF2B5EF4-FFF2-40B4-BE49-F238E27FC236}">
-                <a16:creationId xmlns:a16="http://schemas.microsoft.com/office/drawing/2014/main" id="{49192D9C-0148-4C39-BED5-B6A640AA55DD}"/>
+                <a16:creationId xmlns:a16="http://schemas.microsoft.com/office/drawing/2014/main" id="{BE649C59-8F46-4672-A57B-ACCCA1A841DA}"/>
               </a:ext>
             </a:extLst>
           </p:cNvPr>
@@ -3823,8 +4544,8 @@
         </p:nvSpPr>
         <p:spPr>
           <a:xfrm xmlns:a="http://schemas.openxmlformats.org/drawingml/2006/main">
-            <a:off x="638175" y="4895850"/>
-            <a:ext cx="4762500" cy="1085850"/>
+            <a:off x="638175" y="3228975"/>
+            <a:ext cx="857250" cy="666750"/>
           </a:xfrm>
           <a:prstGeom xmlns:a="http://schemas.openxmlformats.org/drawingml/2006/main" prst="rect">
             <a:avLst/>
@@ -3841,71 +4562,25 @@
           <a:lstStyle xmlns:a="http://schemas.openxmlformats.org/drawingml/2006/main"/>
           <a:p xmlns:a="http://schemas.openxmlformats.org/drawingml/2006/main">
             <a:pPr algn="l">
-              <a:defRPr sz="1800" b="0">
-                <a:solidFill>
-                  <a:srgbClr val="6E6D68"/>
-                </a:solidFill>
-                <a:latin typeface="Inter"/>
-                <a:ea typeface="Inter"/>
-                <a:cs typeface="Inter"/>
-              </a:defRPr>
-            </a:pPr>
-            <a:r>
-              <a:rPr sz="1800" b="0">
-                <a:solidFill>
-                  <a:srgbClr val="6E6D68"/>
-                </a:solidFill>
-                <a:latin typeface="Inter"/>
-                <a:ea typeface="Inter"/>
-                <a:cs typeface="Inter"/>
-              </a:rPr>
-              <a:t>23.9.  Oberfläche und Navigation</a:t>
-            </a:r>
-          </a:p>
-          <a:p xmlns:a="http://schemas.openxmlformats.org/drawingml/2006/main">
-            <a:pPr algn="l">
-              <a:defRPr sz="1800" b="0">
-                <a:solidFill>
-                  <a:srgbClr val="6E6D68"/>
-                </a:solidFill>
-                <a:latin typeface="Inter"/>
-                <a:ea typeface="Inter"/>
-                <a:cs typeface="Inter"/>
-              </a:defRPr>
-            </a:pPr>
-            <a:r>
-              <a:rPr sz="1800" b="0">
-                <a:solidFill>
-                  <a:srgbClr val="6E6D68"/>
-                </a:solidFill>
-                <a:latin typeface="Inter"/>
-                <a:ea typeface="Inter"/>
-                <a:cs typeface="Inter"/>
-              </a:rPr>
-              <a:t>24.9.  Speicherung und Biometrie</a:t>
-            </a:r>
-          </a:p>
-          <a:p xmlns:a="http://schemas.openxmlformats.org/drawingml/2006/main">
-            <a:pPr algn="l">
-              <a:defRPr sz="1800" b="0">
-                <a:solidFill>
-                  <a:srgbClr val="6E6D68"/>
-                </a:solidFill>
-                <a:latin typeface="Inter"/>
-                <a:ea typeface="Inter"/>
-                <a:cs typeface="Inter"/>
-              </a:defRPr>
-            </a:pPr>
-            <a:r>
-              <a:rPr sz="1800" b="0">
-                <a:solidFill>
-                  <a:srgbClr val="6E6D68"/>
-                </a:solidFill>
-                <a:latin typeface="Inter"/>
-                <a:ea typeface="Inter"/>
-                <a:cs typeface="Inter"/>
-              </a:rPr>
-              <a:t>25.9.  Fehlerfälle und Tests</a:t>
+              <a:defRPr sz="3375" b="0">
+                <a:solidFill>
+                  <a:srgbClr val="1F5A45"/>
+                </a:solidFill>
+                <a:latin typeface="Newsreader"/>
+                <a:ea typeface="Newsreader"/>
+                <a:cs typeface="Newsreader"/>
+              </a:defRPr>
+            </a:pPr>
+            <a:r>
+              <a:rPr sz="3375" b="0">
+                <a:solidFill>
+                  <a:srgbClr val="1F5A45"/>
+                </a:solidFill>
+                <a:latin typeface="Newsreader"/>
+                <a:ea typeface="Newsreader"/>
+                <a:cs typeface="Newsreader"/>
+              </a:rPr>
+              <a:t>02</a:t>
             </a:r>
           </a:p>
         </p:txBody>
@@ -3915,7 +4590,7 @@
           <p:cNvPr id="7" name="">
             <a:extLst xmlns:a="http://schemas.openxmlformats.org/drawingml/2006/main">
               <a:ext uri="{FF2B5EF4-FFF2-40B4-BE49-F238E27FC236}">
-                <a16:creationId xmlns:a16="http://schemas.microsoft.com/office/drawing/2014/main" id="{E21355EB-1E10-465A-BCAB-1310B95B39D0}"/>
+                <a16:creationId xmlns:a16="http://schemas.microsoft.com/office/drawing/2014/main" id="{5A567AFF-2B3E-42D6-BD28-EACA0747825C}"/>
               </a:ext>
             </a:extLst>
           </p:cNvPr>
@@ -3926,8 +4601,8 @@
         </p:nvSpPr>
         <p:spPr>
           <a:xfrm xmlns:a="http://schemas.openxmlformats.org/drawingml/2006/main">
-            <a:off x="6000750" y="1390650"/>
-            <a:ext cx="2343150" cy="295275"/>
+            <a:off x="1609725" y="3228975"/>
+            <a:ext cx="6191250" cy="561975"/>
           </a:xfrm>
           <a:prstGeom xmlns:a="http://schemas.openxmlformats.org/drawingml/2006/main" prst="rect">
             <a:avLst/>
@@ -3944,25 +4619,25 @@
           <a:lstStyle xmlns:a="http://schemas.openxmlformats.org/drawingml/2006/main"/>
           <a:p xmlns:a="http://schemas.openxmlformats.org/drawingml/2006/main">
             <a:pPr algn="l">
-              <a:defRPr sz="1500" b="1">
-                <a:solidFill>
-                  <a:srgbClr val="6E6D68"/>
-                </a:solidFill>
-                <a:latin typeface="Inter"/>
-                <a:ea typeface="Inter"/>
-                <a:cs typeface="Inter"/>
-              </a:defRPr>
-            </a:pPr>
-            <a:r>
-              <a:rPr sz="1500" b="1">
-                <a:solidFill>
-                  <a:srgbClr val="6E6D68"/>
-                </a:solidFill>
-                <a:latin typeface="Inter"/>
-                <a:ea typeface="Inter"/>
-                <a:cs typeface="Inter"/>
-              </a:rPr>
-              <a:t>LB1-Mockup</a:t>
+              <a:defRPr sz="2850" b="0">
+                <a:solidFill>
+                  <a:srgbClr val="1F5A45"/>
+                </a:solidFill>
+                <a:latin typeface="Newsreader"/>
+                <a:ea typeface="Newsreader"/>
+                <a:cs typeface="Newsreader"/>
+              </a:defRPr>
+            </a:pPr>
+            <a:r>
+              <a:rPr sz="2850" b="0">
+                <a:solidFill>
+                  <a:srgbClr val="1F5A45"/>
+                </a:solidFill>
+                <a:latin typeface="Newsreader"/>
+                <a:ea typeface="Newsreader"/>
+                <a:cs typeface="Newsreader"/>
+              </a:rPr>
+              <a:t>Entscheiden</a:t>
             </a:r>
           </a:p>
         </p:txBody>
@@ -3972,7 +4647,7 @@
           <p:cNvPr id="8" name="">
             <a:extLst xmlns:a="http://schemas.openxmlformats.org/drawingml/2006/main">
               <a:ext uri="{FF2B5EF4-FFF2-40B4-BE49-F238E27FC236}">
-                <a16:creationId xmlns:a16="http://schemas.microsoft.com/office/drawing/2014/main" id="{532ED6AD-38E9-4CC5-80FC-305A2A6B8842}"/>
+                <a16:creationId xmlns:a16="http://schemas.microsoft.com/office/drawing/2014/main" id="{F41F2844-5F6F-4D12-9FE8-EA821222F4E5}"/>
               </a:ext>
             </a:extLst>
           </p:cNvPr>
@@ -3983,8 +4658,8 @@
         </p:nvSpPr>
         <p:spPr>
           <a:xfrm xmlns:a="http://schemas.openxmlformats.org/drawingml/2006/main">
-            <a:off x="8924925" y="1390650"/>
-            <a:ext cx="2343150" cy="295275"/>
+            <a:off x="1628775" y="3829050"/>
+            <a:ext cx="6238875" cy="457200"/>
           </a:xfrm>
           <a:prstGeom xmlns:a="http://schemas.openxmlformats.org/drawingml/2006/main" prst="rect">
             <a:avLst/>
@@ -4001,108 +4676,35 @@
           <a:lstStyle xmlns:a="http://schemas.openxmlformats.org/drawingml/2006/main"/>
           <a:p xmlns:a="http://schemas.openxmlformats.org/drawingml/2006/main">
             <a:pPr algn="l">
-              <a:defRPr sz="1500" b="1">
-                <a:solidFill>
-                  <a:srgbClr val="1F5A45"/>
-                </a:solidFill>
-                <a:latin typeface="Inter"/>
-                <a:ea typeface="Inter"/>
-                <a:cs typeface="Inter"/>
-              </a:defRPr>
-            </a:pPr>
-            <a:r>
-              <a:rPr sz="1500" b="1">
-                <a:solidFill>
-                  <a:srgbClr val="1F5A45"/>
-                </a:solidFill>
-                <a:latin typeface="Inter"/>
-                <a:ea typeface="Inter"/>
-                <a:cs typeface="Inter"/>
-              </a:rPr>
-              <a:t>App heute</a:t>
-            </a:r>
-          </a:p>
-        </p:txBody>
-      </p:sp>
-      <p:pic>
-        <p:nvPicPr>
-          <p:cNvPr id="19" name=""/>
-          <p:cNvPicPr>
-            <a:picLocks xmlns:a="http://schemas.openxmlformats.org/drawingml/2006/main" noChangeAspect="1"/>
-          </p:cNvPicPr>
-          <p:nvPr/>
-        </p:nvPicPr>
-        <p:blipFill>
-          <a:blip xmlns:r="http://schemas.openxmlformats.org/officeDocument/2006/relationships" xmlns:a="http://schemas.openxmlformats.org/drawingml/2006/main" r:embed="Rf9705ec11896454b"/>
-          <a:stretch xmlns:a="http://schemas.openxmlformats.org/drawingml/2006/main"/>
-        </p:blipFill>
-        <p:spPr>
-          <a:xfrm xmlns:a="http://schemas.openxmlformats.org/drawingml/2006/main">
-            <a:off x="6098460" y="1809750"/>
-            <a:ext cx="2033430" cy="4400550"/>
-          </a:xfrm>
-          <a:prstGeom xmlns:a="http://schemas.openxmlformats.org/drawingml/2006/main" prst="rect">
-            <a:avLst/>
-          </a:prstGeom>
-        </p:spPr>
-      </p:pic>
-      <p:pic>
-        <p:nvPicPr>
-          <p:cNvPr id="20" name=""/>
-          <p:cNvPicPr>
-            <a:picLocks xmlns:a="http://schemas.openxmlformats.org/drawingml/2006/main" noChangeAspect="1"/>
-          </p:cNvPicPr>
-          <p:nvPr/>
-        </p:nvPicPr>
-        <p:blipFill>
-          <a:blip xmlns:r="http://schemas.openxmlformats.org/officeDocument/2006/relationships" xmlns:a="http://schemas.openxmlformats.org/drawingml/2006/main" r:embed="R4a626e0c26324f0e"/>
-          <a:stretch xmlns:a="http://schemas.openxmlformats.org/drawingml/2006/main"/>
-        </p:blipFill>
-        <p:spPr>
-          <a:xfrm xmlns:a="http://schemas.openxmlformats.org/drawingml/2006/main">
-            <a:off x="9027324" y="1809750"/>
-            <a:ext cx="2024052" cy="4400550"/>
-          </a:xfrm>
-          <a:prstGeom xmlns:a="http://schemas.openxmlformats.org/drawingml/2006/main" prst="rect">
-            <a:avLst/>
-          </a:prstGeom>
-        </p:spPr>
-      </p:pic>
-    </p:spTree>
-    <p:extLst>
-      <p:ext uri="{BB962C8B-B14F-4D97-AF65-F5344CB8AC3E}">
-        <p14:creationId xmlns:p14="http://schemas.microsoft.com/office/powerpoint/2010/main" val="688257642"/>
-      </p:ext>
-    </p:extLst>
-  </p:cSld>
-</p:sld>
-</file>
-
-<file path=ppt/slides/slide4.xml><?xml version="1.0" encoding="utf-8"?>
-<p:sld xmlns:p="http://schemas.openxmlformats.org/presentationml/2006/main">
-  <p:cSld>
-    <p:bg>
-      <p:bgPr>
-        <a:solidFill xmlns:a="http://schemas.openxmlformats.org/drawingml/2006/main">
-          <a:srgbClr val="1F5A45"/>
-        </a:solidFill>
-      </p:bgPr>
-    </p:bg>
-    <p:spTree>
-      <p:nvGrpSpPr>
-        <p:cNvPr id="1" name=""/>
-        <p:cNvGrpSpPr/>
-        <p:nvPr/>
-      </p:nvGrpSpPr>
-      <p:grpSpPr>
-        <a:xfrm xmlns:a="http://schemas.openxmlformats.org/drawingml/2006/main"/>
-      </p:grpSpPr>
-      <p:sp>
-        <p:nvSpPr>
-          <p:cNvPr id="13" name="">
+              <a:defRPr sz="1875" b="0">
+                <a:solidFill>
+                  <a:srgbClr val="15171A"/>
+                </a:solidFill>
+                <a:latin typeface="Inter"/>
+                <a:ea typeface="Inter"/>
+                <a:cs typeface="Inter"/>
+              </a:defRPr>
+            </a:pPr>
+            <a:r>
+              <a:rPr sz="1875" b="0">
+                <a:solidFill>
+                  <a:srgbClr val="15171A"/>
+                </a:solidFill>
+                <a:latin typeface="Inter"/>
+                <a:ea typeface="Inter"/>
+                <a:cs typeface="Inter"/>
+              </a:rPr>
+              <a:t>Das verfügbare Budget aktualisiert sich</a:t>
+            </a:r>
+          </a:p>
+        </p:txBody>
+      </p:sp>
+      <p:sp>
+        <p:nvSpPr>
+          <p:cNvPr id="9" name="">
             <a:extLst xmlns:a="http://schemas.openxmlformats.org/drawingml/2006/main">
               <a:ext uri="{FF2B5EF4-FFF2-40B4-BE49-F238E27FC236}">
-                <a16:creationId xmlns:a16="http://schemas.microsoft.com/office/drawing/2014/main" id="{61402DC1-627B-4DA9-8316-1CDE4F4B0900}"/>
+                <a16:creationId xmlns:a16="http://schemas.microsoft.com/office/drawing/2014/main" id="{3815FF2B-31EB-46E7-BCA5-9AC13DCB6897}"/>
               </a:ext>
             </a:extLst>
           </p:cNvPr>
@@ -4113,8 +4715,8 @@
         </p:nvSpPr>
         <p:spPr>
           <a:xfrm xmlns:a="http://schemas.openxmlformats.org/drawingml/2006/main">
-            <a:off x="11334750" y="6296025"/>
-            <a:ext cx="333375" cy="219075"/>
+            <a:off x="638175" y="4610100"/>
+            <a:ext cx="857250" cy="666750"/>
           </a:xfrm>
           <a:prstGeom xmlns:a="http://schemas.openxmlformats.org/drawingml/2006/main" prst="rect">
             <a:avLst/>
@@ -4130,36 +4732,36 @@
           </a:bodyPr>
           <a:lstStyle xmlns:a="http://schemas.openxmlformats.org/drawingml/2006/main"/>
           <a:p xmlns:a="http://schemas.openxmlformats.org/drawingml/2006/main">
-            <a:pPr algn="r">
-              <a:defRPr sz="1275" b="0">
-                <a:solidFill>
-                  <a:srgbClr val="DCEBE2"/>
-                </a:solidFill>
-                <a:latin typeface="Inter"/>
-                <a:ea typeface="Inter"/>
-                <a:cs typeface="Inter"/>
-              </a:defRPr>
-            </a:pPr>
-            <a:r>
-              <a:rPr sz="1275" b="0">
-                <a:solidFill>
-                  <a:srgbClr val="DCEBE2"/>
-                </a:solidFill>
-                <a:latin typeface="Inter"/>
-                <a:ea typeface="Inter"/>
-                <a:cs typeface="Inter"/>
-              </a:rPr>
-              <a:t>4</a:t>
-            </a:r>
-          </a:p>
-        </p:txBody>
-      </p:sp>
-      <p:sp>
-        <p:nvSpPr>
-          <p:cNvPr id="2" name="">
+            <a:pPr algn="l">
+              <a:defRPr sz="3375" b="0">
+                <a:solidFill>
+                  <a:srgbClr val="1F5A45"/>
+                </a:solidFill>
+                <a:latin typeface="Newsreader"/>
+                <a:ea typeface="Newsreader"/>
+                <a:cs typeface="Newsreader"/>
+              </a:defRPr>
+            </a:pPr>
+            <a:r>
+              <a:rPr sz="3375" b="0">
+                <a:solidFill>
+                  <a:srgbClr val="1F5A45"/>
+                </a:solidFill>
+                <a:latin typeface="Newsreader"/>
+                <a:ea typeface="Newsreader"/>
+                <a:cs typeface="Newsreader"/>
+              </a:rPr>
+              <a:t>03</a:t>
+            </a:r>
+          </a:p>
+        </p:txBody>
+      </p:sp>
+      <p:sp>
+        <p:nvSpPr>
+          <p:cNvPr id="10" name="">
             <a:extLst xmlns:a="http://schemas.openxmlformats.org/drawingml/2006/main">
               <a:ext uri="{FF2B5EF4-FFF2-40B4-BE49-F238E27FC236}">
-                <a16:creationId xmlns:a16="http://schemas.microsoft.com/office/drawing/2014/main" id="{51670070-7D4F-4643-907F-53A285AB415C}"/>
+                <a16:creationId xmlns:a16="http://schemas.microsoft.com/office/drawing/2014/main" id="{F6C67F9A-E203-4227-8209-FE27C86848EF}"/>
               </a:ext>
             </a:extLst>
           </p:cNvPr>
@@ -4170,8 +4772,8 @@
         </p:nvSpPr>
         <p:spPr>
           <a:xfrm xmlns:a="http://schemas.openxmlformats.org/drawingml/2006/main">
-            <a:off x="609600" y="476250"/>
-            <a:ext cx="10934700" cy="742950"/>
+            <a:off x="1609725" y="4610100"/>
+            <a:ext cx="6191250" cy="561975"/>
           </a:xfrm>
           <a:prstGeom xmlns:a="http://schemas.openxmlformats.org/drawingml/2006/main" prst="rect">
             <a:avLst/>
@@ -4188,9 +4790,9 @@
           <a:lstStyle xmlns:a="http://schemas.openxmlformats.org/drawingml/2006/main"/>
           <a:p xmlns:a="http://schemas.openxmlformats.org/drawingml/2006/main">
             <a:pPr algn="l">
-              <a:defRPr sz="3975" b="0">
-                <a:solidFill>
-                  <a:srgbClr val="F6F5F1"/>
+              <a:defRPr sz="2850" b="0">
+                <a:solidFill>
+                  <a:srgbClr val="1F5A45"/>
                 </a:solidFill>
                 <a:latin typeface="Newsreader"/>
                 <a:ea typeface="Newsreader"/>
@@ -4198,25 +4800,25 @@
               </a:defRPr>
             </a:pPr>
             <a:r>
-              <a:rPr sz="3975" b="0">
-                <a:solidFill>
-                  <a:srgbClr val="F6F5F1"/>
+              <a:rPr sz="2850" b="0">
+                <a:solidFill>
+                  <a:srgbClr val="1F5A45"/>
                 </a:solidFill>
                 <a:latin typeface="Newsreader"/>
                 <a:ea typeface="Newsreader"/>
                 <a:cs typeface="Newsreader"/>
               </a:rPr>
-              <a:t>Live-Demo</a:t>
-            </a:r>
-          </a:p>
-        </p:txBody>
-      </p:sp>
-      <p:sp>
-        <p:nvSpPr>
-          <p:cNvPr id="3" name="">
+              <a:t>Korrigieren</a:t>
+            </a:r>
+          </a:p>
+        </p:txBody>
+      </p:sp>
+      <p:sp>
+        <p:nvSpPr>
+          <p:cNvPr id="11" name="">
             <a:extLst xmlns:a="http://schemas.openxmlformats.org/drawingml/2006/main">
               <a:ext uri="{FF2B5EF4-FFF2-40B4-BE49-F238E27FC236}">
-                <a16:creationId xmlns:a16="http://schemas.microsoft.com/office/drawing/2014/main" id="{03B94287-C734-4244-8E7F-A1390CF7754D}"/>
+                <a16:creationId xmlns:a16="http://schemas.microsoft.com/office/drawing/2014/main" id="{9031C2FF-BC8B-4962-A75C-8DD398FA777F}"/>
               </a:ext>
             </a:extLst>
           </p:cNvPr>
@@ -4227,8 +4829,8 @@
         </p:nvSpPr>
         <p:spPr>
           <a:xfrm xmlns:a="http://schemas.openxmlformats.org/drawingml/2006/main">
-            <a:off x="638175" y="1847850"/>
-            <a:ext cx="857250" cy="666750"/>
+            <a:off x="1628775" y="5210175"/>
+            <a:ext cx="6238875" cy="457200"/>
           </a:xfrm>
           <a:prstGeom xmlns:a="http://schemas.openxmlformats.org/drawingml/2006/main" prst="rect">
             <a:avLst/>
@@ -4245,123 +4847,9 @@
           <a:lstStyle xmlns:a="http://schemas.openxmlformats.org/drawingml/2006/main"/>
           <a:p xmlns:a="http://schemas.openxmlformats.org/drawingml/2006/main">
             <a:pPr algn="l">
-              <a:defRPr sz="3375" b="0">
-                <a:solidFill>
-                  <a:srgbClr val="DCEBE2"/>
-                </a:solidFill>
-                <a:latin typeface="Newsreader"/>
-                <a:ea typeface="Newsreader"/>
-                <a:cs typeface="Newsreader"/>
-              </a:defRPr>
-            </a:pPr>
-            <a:r>
-              <a:rPr sz="3375" b="0">
-                <a:solidFill>
-                  <a:srgbClr val="DCEBE2"/>
-                </a:solidFill>
-                <a:latin typeface="Newsreader"/>
-                <a:ea typeface="Newsreader"/>
-                <a:cs typeface="Newsreader"/>
-              </a:rPr>
-              <a:t>01</a:t>
-            </a:r>
-          </a:p>
-        </p:txBody>
-      </p:sp>
-      <p:sp>
-        <p:nvSpPr>
-          <p:cNvPr id="4" name="">
-            <a:extLst xmlns:a="http://schemas.openxmlformats.org/drawingml/2006/main">
-              <a:ext uri="{FF2B5EF4-FFF2-40B4-BE49-F238E27FC236}">
-                <a16:creationId xmlns:a16="http://schemas.microsoft.com/office/drawing/2014/main" id="{1AFFA326-9F41-45AD-918A-4A53316F36A9}"/>
-              </a:ext>
-            </a:extLst>
-          </p:cNvPr>
-          <p:cNvSpPr>
-            <a:spLocks xmlns:a="http://schemas.openxmlformats.org/drawingml/2006/main" noGrp="1"/>
-          </p:cNvSpPr>
-          <p:nvPr/>
-        </p:nvSpPr>
-        <p:spPr>
-          <a:xfrm xmlns:a="http://schemas.openxmlformats.org/drawingml/2006/main">
-            <a:off x="1609725" y="1847850"/>
-            <a:ext cx="6191250" cy="561975"/>
-          </a:xfrm>
-          <a:prstGeom xmlns:a="http://schemas.openxmlformats.org/drawingml/2006/main" prst="rect">
-            <a:avLst/>
-          </a:prstGeom>
-          <a:noFill xmlns:a="http://schemas.openxmlformats.org/drawingml/2006/main"/>
-          <a:ln xmlns:a="http://schemas.openxmlformats.org/drawingml/2006/main" w="0">
-            <a:noFill/>
-          </a:ln>
-        </p:spPr>
-        <p:txBody>
-          <a:bodyPr xmlns:a="http://schemas.openxmlformats.org/drawingml/2006/main" wrap="square" lIns="0" tIns="0" rIns="0" bIns="0" anchor="t">
-            <a:noAutofit/>
-          </a:bodyPr>
-          <a:lstStyle xmlns:a="http://schemas.openxmlformats.org/drawingml/2006/main"/>
-          <a:p xmlns:a="http://schemas.openxmlformats.org/drawingml/2006/main">
-            <a:pPr algn="l">
-              <a:defRPr sz="2850" b="0">
-                <a:solidFill>
-                  <a:srgbClr val="F6F5F1"/>
-                </a:solidFill>
-                <a:latin typeface="Newsreader"/>
-                <a:ea typeface="Newsreader"/>
-                <a:cs typeface="Newsreader"/>
-              </a:defRPr>
-            </a:pPr>
-            <a:r>
-              <a:rPr sz="2850" b="0">
-                <a:solidFill>
-                  <a:srgbClr val="F6F5F1"/>
-                </a:solidFill>
-                <a:latin typeface="Newsreader"/>
-                <a:ea typeface="Newsreader"/>
-                <a:cs typeface="Newsreader"/>
-              </a:rPr>
-              <a:t>Erfassen</a:t>
-            </a:r>
-          </a:p>
-        </p:txBody>
-      </p:sp>
-      <p:sp>
-        <p:nvSpPr>
-          <p:cNvPr id="5" name="">
-            <a:extLst xmlns:a="http://schemas.openxmlformats.org/drawingml/2006/main">
-              <a:ext uri="{FF2B5EF4-FFF2-40B4-BE49-F238E27FC236}">
-                <a16:creationId xmlns:a16="http://schemas.microsoft.com/office/drawing/2014/main" id="{967084AE-FD5A-4A0D-B02C-D099C49083F4}"/>
-              </a:ext>
-            </a:extLst>
-          </p:cNvPr>
-          <p:cNvSpPr>
-            <a:spLocks xmlns:a="http://schemas.openxmlformats.org/drawingml/2006/main" noGrp="1"/>
-          </p:cNvSpPr>
-          <p:nvPr/>
-        </p:nvSpPr>
-        <p:spPr>
-          <a:xfrm xmlns:a="http://schemas.openxmlformats.org/drawingml/2006/main">
-            <a:off x="1628775" y="2447925"/>
-            <a:ext cx="6238875" cy="457200"/>
-          </a:xfrm>
-          <a:prstGeom xmlns:a="http://schemas.openxmlformats.org/drawingml/2006/main" prst="rect">
-            <a:avLst/>
-          </a:prstGeom>
-          <a:noFill xmlns:a="http://schemas.openxmlformats.org/drawingml/2006/main"/>
-          <a:ln xmlns:a="http://schemas.openxmlformats.org/drawingml/2006/main" w="0">
-            <a:noFill/>
-          </a:ln>
-        </p:spPr>
-        <p:txBody>
-          <a:bodyPr xmlns:a="http://schemas.openxmlformats.org/drawingml/2006/main" wrap="square" lIns="0" tIns="0" rIns="0" bIns="0" anchor="t">
-            <a:noAutofit/>
-          </a:bodyPr>
-          <a:lstStyle xmlns:a="http://schemas.openxmlformats.org/drawingml/2006/main"/>
-          <a:p xmlns:a="http://schemas.openxmlformats.org/drawingml/2006/main">
-            <a:pPr algn="l">
               <a:defRPr sz="1875" b="0">
                 <a:solidFill>
-                  <a:srgbClr val="DCEBE2"/>
+                  <a:srgbClr val="15171A"/>
                 </a:solidFill>
                 <a:latin typeface="Inter"/>
                 <a:ea typeface="Inter"/>
@@ -4371,355 +4859,13 @@
             <a:r>
               <a:rPr sz="1875" b="0">
                 <a:solidFill>
-                  <a:srgbClr val="DCEBE2"/>
-                </a:solidFill>
-                <a:latin typeface="Inter"/>
-                <a:ea typeface="Inter"/>
-                <a:cs typeface="Inter"/>
-              </a:rPr>
-              <a:t>CHF 14.80, Essen &amp; Trinken</a:t>
-            </a:r>
-          </a:p>
-        </p:txBody>
-      </p:sp>
-      <p:sp>
-        <p:nvSpPr>
-          <p:cNvPr id="6" name="">
-            <a:extLst xmlns:a="http://schemas.openxmlformats.org/drawingml/2006/main">
-              <a:ext uri="{FF2B5EF4-FFF2-40B4-BE49-F238E27FC236}">
-                <a16:creationId xmlns:a16="http://schemas.microsoft.com/office/drawing/2014/main" id="{1DB20EC5-7C51-4BD4-96DC-68F936D97E6E}"/>
-              </a:ext>
-            </a:extLst>
-          </p:cNvPr>
-          <p:cNvSpPr>
-            <a:spLocks xmlns:a="http://schemas.openxmlformats.org/drawingml/2006/main" noGrp="1"/>
-          </p:cNvSpPr>
-          <p:nvPr/>
-        </p:nvSpPr>
-        <p:spPr>
-          <a:xfrm xmlns:a="http://schemas.openxmlformats.org/drawingml/2006/main">
-            <a:off x="638175" y="3228975"/>
-            <a:ext cx="857250" cy="666750"/>
-          </a:xfrm>
-          <a:prstGeom xmlns:a="http://schemas.openxmlformats.org/drawingml/2006/main" prst="rect">
-            <a:avLst/>
-          </a:prstGeom>
-          <a:noFill xmlns:a="http://schemas.openxmlformats.org/drawingml/2006/main"/>
-          <a:ln xmlns:a="http://schemas.openxmlformats.org/drawingml/2006/main" w="0">
-            <a:noFill/>
-          </a:ln>
-        </p:spPr>
-        <p:txBody>
-          <a:bodyPr xmlns:a="http://schemas.openxmlformats.org/drawingml/2006/main" wrap="square" lIns="0" tIns="0" rIns="0" bIns="0" anchor="t">
-            <a:noAutofit/>
-          </a:bodyPr>
-          <a:lstStyle xmlns:a="http://schemas.openxmlformats.org/drawingml/2006/main"/>
-          <a:p xmlns:a="http://schemas.openxmlformats.org/drawingml/2006/main">
-            <a:pPr algn="l">
-              <a:defRPr sz="3375" b="0">
-                <a:solidFill>
-                  <a:srgbClr val="DCEBE2"/>
-                </a:solidFill>
-                <a:latin typeface="Newsreader"/>
-                <a:ea typeface="Newsreader"/>
-                <a:cs typeface="Newsreader"/>
-              </a:defRPr>
-            </a:pPr>
-            <a:r>
-              <a:rPr sz="3375" b="0">
-                <a:solidFill>
-                  <a:srgbClr val="DCEBE2"/>
-                </a:solidFill>
-                <a:latin typeface="Newsreader"/>
-                <a:ea typeface="Newsreader"/>
-                <a:cs typeface="Newsreader"/>
-              </a:rPr>
-              <a:t>02</a:t>
-            </a:r>
-          </a:p>
-        </p:txBody>
-      </p:sp>
-      <p:sp>
-        <p:nvSpPr>
-          <p:cNvPr id="7" name="">
-            <a:extLst xmlns:a="http://schemas.openxmlformats.org/drawingml/2006/main">
-              <a:ext uri="{FF2B5EF4-FFF2-40B4-BE49-F238E27FC236}">
-                <a16:creationId xmlns:a16="http://schemas.microsoft.com/office/drawing/2014/main" id="{9FAC46F8-41DB-4EA8-8CC0-06CD6870450E}"/>
-              </a:ext>
-            </a:extLst>
-          </p:cNvPr>
-          <p:cNvSpPr>
-            <a:spLocks xmlns:a="http://schemas.openxmlformats.org/drawingml/2006/main" noGrp="1"/>
-          </p:cNvSpPr>
-          <p:nvPr/>
-        </p:nvSpPr>
-        <p:spPr>
-          <a:xfrm xmlns:a="http://schemas.openxmlformats.org/drawingml/2006/main">
-            <a:off x="1609725" y="3228975"/>
-            <a:ext cx="6191250" cy="561975"/>
-          </a:xfrm>
-          <a:prstGeom xmlns:a="http://schemas.openxmlformats.org/drawingml/2006/main" prst="rect">
-            <a:avLst/>
-          </a:prstGeom>
-          <a:noFill xmlns:a="http://schemas.openxmlformats.org/drawingml/2006/main"/>
-          <a:ln xmlns:a="http://schemas.openxmlformats.org/drawingml/2006/main" w="0">
-            <a:noFill/>
-          </a:ln>
-        </p:spPr>
-        <p:txBody>
-          <a:bodyPr xmlns:a="http://schemas.openxmlformats.org/drawingml/2006/main" wrap="square" lIns="0" tIns="0" rIns="0" bIns="0" anchor="t">
-            <a:noAutofit/>
-          </a:bodyPr>
-          <a:lstStyle xmlns:a="http://schemas.openxmlformats.org/drawingml/2006/main"/>
-          <a:p xmlns:a="http://schemas.openxmlformats.org/drawingml/2006/main">
-            <a:pPr algn="l">
-              <a:defRPr sz="2850" b="0">
-                <a:solidFill>
-                  <a:srgbClr val="F6F5F1"/>
-                </a:solidFill>
-                <a:latin typeface="Newsreader"/>
-                <a:ea typeface="Newsreader"/>
-                <a:cs typeface="Newsreader"/>
-              </a:defRPr>
-            </a:pPr>
-            <a:r>
-              <a:rPr sz="2850" b="0">
-                <a:solidFill>
-                  <a:srgbClr val="F6F5F1"/>
-                </a:solidFill>
-                <a:latin typeface="Newsreader"/>
-                <a:ea typeface="Newsreader"/>
-                <a:cs typeface="Newsreader"/>
-              </a:rPr>
-              <a:t>Prüfen</a:t>
-            </a:r>
-          </a:p>
-        </p:txBody>
-      </p:sp>
-      <p:sp>
-        <p:nvSpPr>
-          <p:cNvPr id="8" name="">
-            <a:extLst xmlns:a="http://schemas.openxmlformats.org/drawingml/2006/main">
-              <a:ext uri="{FF2B5EF4-FFF2-40B4-BE49-F238E27FC236}">
-                <a16:creationId xmlns:a16="http://schemas.microsoft.com/office/drawing/2014/main" id="{9A5DE003-D6E6-4B14-A69A-332427F4412D}"/>
-              </a:ext>
-            </a:extLst>
-          </p:cNvPr>
-          <p:cNvSpPr>
-            <a:spLocks xmlns:a="http://schemas.openxmlformats.org/drawingml/2006/main" noGrp="1"/>
-          </p:cNvSpPr>
-          <p:nvPr/>
-        </p:nvSpPr>
-        <p:spPr>
-          <a:xfrm xmlns:a="http://schemas.openxmlformats.org/drawingml/2006/main">
-            <a:off x="1628775" y="3829050"/>
-            <a:ext cx="6238875" cy="457200"/>
-          </a:xfrm>
-          <a:prstGeom xmlns:a="http://schemas.openxmlformats.org/drawingml/2006/main" prst="rect">
-            <a:avLst/>
-          </a:prstGeom>
-          <a:noFill xmlns:a="http://schemas.openxmlformats.org/drawingml/2006/main"/>
-          <a:ln xmlns:a="http://schemas.openxmlformats.org/drawingml/2006/main" w="0">
-            <a:noFill/>
-          </a:ln>
-        </p:spPr>
-        <p:txBody>
-          <a:bodyPr xmlns:a="http://schemas.openxmlformats.org/drawingml/2006/main" wrap="square" lIns="0" tIns="0" rIns="0" bIns="0" anchor="t">
-            <a:noAutofit/>
-          </a:bodyPr>
-          <a:lstStyle xmlns:a="http://schemas.openxmlformats.org/drawingml/2006/main"/>
-          <a:p xmlns:a="http://schemas.openxmlformats.org/drawingml/2006/main">
-            <a:pPr algn="l">
-              <a:defRPr sz="1875" b="0">
-                <a:solidFill>
-                  <a:srgbClr val="DCEBE2"/>
-                </a:solidFill>
-                <a:latin typeface="Inter"/>
-                <a:ea typeface="Inter"/>
-                <a:cs typeface="Inter"/>
-              </a:defRPr>
-            </a:pPr>
-            <a:r>
-              <a:rPr sz="1875" b="0">
-                <a:solidFill>
-                  <a:srgbClr val="DCEBE2"/>
-                </a:solidFill>
-                <a:latin typeface="Inter"/>
-                <a:ea typeface="Inter"/>
-                <a:cs typeface="Inter"/>
-              </a:rPr>
-              <a:t>Budget und Verlauf aktualisieren sich</a:t>
-            </a:r>
-          </a:p>
-        </p:txBody>
-      </p:sp>
-      <p:sp>
-        <p:nvSpPr>
-          <p:cNvPr id="9" name="">
-            <a:extLst xmlns:a="http://schemas.openxmlformats.org/drawingml/2006/main">
-              <a:ext uri="{FF2B5EF4-FFF2-40B4-BE49-F238E27FC236}">
-                <a16:creationId xmlns:a16="http://schemas.microsoft.com/office/drawing/2014/main" id="{2F0E4CF4-B579-4A15-9E44-33B60F9EBAE2}"/>
-              </a:ext>
-            </a:extLst>
-          </p:cNvPr>
-          <p:cNvSpPr>
-            <a:spLocks xmlns:a="http://schemas.openxmlformats.org/drawingml/2006/main" noGrp="1"/>
-          </p:cNvSpPr>
-          <p:nvPr/>
-        </p:nvSpPr>
-        <p:spPr>
-          <a:xfrm xmlns:a="http://schemas.openxmlformats.org/drawingml/2006/main">
-            <a:off x="638175" y="4610100"/>
-            <a:ext cx="857250" cy="666750"/>
-          </a:xfrm>
-          <a:prstGeom xmlns:a="http://schemas.openxmlformats.org/drawingml/2006/main" prst="rect">
-            <a:avLst/>
-          </a:prstGeom>
-          <a:noFill xmlns:a="http://schemas.openxmlformats.org/drawingml/2006/main"/>
-          <a:ln xmlns:a="http://schemas.openxmlformats.org/drawingml/2006/main" w="0">
-            <a:noFill/>
-          </a:ln>
-        </p:spPr>
-        <p:txBody>
-          <a:bodyPr xmlns:a="http://schemas.openxmlformats.org/drawingml/2006/main" wrap="square" lIns="0" tIns="0" rIns="0" bIns="0" anchor="t">
-            <a:noAutofit/>
-          </a:bodyPr>
-          <a:lstStyle xmlns:a="http://schemas.openxmlformats.org/drawingml/2006/main"/>
-          <a:p xmlns:a="http://schemas.openxmlformats.org/drawingml/2006/main">
-            <a:pPr algn="l">
-              <a:defRPr sz="3375" b="0">
-                <a:solidFill>
-                  <a:srgbClr val="DCEBE2"/>
-                </a:solidFill>
-                <a:latin typeface="Newsreader"/>
-                <a:ea typeface="Newsreader"/>
-                <a:cs typeface="Newsreader"/>
-              </a:defRPr>
-            </a:pPr>
-            <a:r>
-              <a:rPr sz="3375" b="0">
-                <a:solidFill>
-                  <a:srgbClr val="DCEBE2"/>
-                </a:solidFill>
-                <a:latin typeface="Newsreader"/>
-                <a:ea typeface="Newsreader"/>
-                <a:cs typeface="Newsreader"/>
-              </a:rPr>
-              <a:t>03</a:t>
-            </a:r>
-          </a:p>
-        </p:txBody>
-      </p:sp>
-      <p:sp>
-        <p:nvSpPr>
-          <p:cNvPr id="10" name="">
-            <a:extLst xmlns:a="http://schemas.openxmlformats.org/drawingml/2006/main">
-              <a:ext uri="{FF2B5EF4-FFF2-40B4-BE49-F238E27FC236}">
-                <a16:creationId xmlns:a16="http://schemas.microsoft.com/office/drawing/2014/main" id="{0C14AAAE-2565-4098-888F-5B35B0940823}"/>
-              </a:ext>
-            </a:extLst>
-          </p:cNvPr>
-          <p:cNvSpPr>
-            <a:spLocks xmlns:a="http://schemas.openxmlformats.org/drawingml/2006/main" noGrp="1"/>
-          </p:cNvSpPr>
-          <p:nvPr/>
-        </p:nvSpPr>
-        <p:spPr>
-          <a:xfrm xmlns:a="http://schemas.openxmlformats.org/drawingml/2006/main">
-            <a:off x="1609725" y="4610100"/>
-            <a:ext cx="6191250" cy="561975"/>
-          </a:xfrm>
-          <a:prstGeom xmlns:a="http://schemas.openxmlformats.org/drawingml/2006/main" prst="rect">
-            <a:avLst/>
-          </a:prstGeom>
-          <a:noFill xmlns:a="http://schemas.openxmlformats.org/drawingml/2006/main"/>
-          <a:ln xmlns:a="http://schemas.openxmlformats.org/drawingml/2006/main" w="0">
-            <a:noFill/>
-          </a:ln>
-        </p:spPr>
-        <p:txBody>
-          <a:bodyPr xmlns:a="http://schemas.openxmlformats.org/drawingml/2006/main" wrap="square" lIns="0" tIns="0" rIns="0" bIns="0" anchor="t">
-            <a:noAutofit/>
-          </a:bodyPr>
-          <a:lstStyle xmlns:a="http://schemas.openxmlformats.org/drawingml/2006/main"/>
-          <a:p xmlns:a="http://schemas.openxmlformats.org/drawingml/2006/main">
-            <a:pPr algn="l">
-              <a:defRPr sz="2850" b="0">
-                <a:solidFill>
-                  <a:srgbClr val="F6F5F1"/>
-                </a:solidFill>
-                <a:latin typeface="Newsreader"/>
-                <a:ea typeface="Newsreader"/>
-                <a:cs typeface="Newsreader"/>
-              </a:defRPr>
-            </a:pPr>
-            <a:r>
-              <a:rPr sz="2850" b="0">
-                <a:solidFill>
-                  <a:srgbClr val="F6F5F1"/>
-                </a:solidFill>
-                <a:latin typeface="Newsreader"/>
-                <a:ea typeface="Newsreader"/>
-                <a:cs typeface="Newsreader"/>
-              </a:rPr>
-              <a:t>Korrigieren</a:t>
-            </a:r>
-          </a:p>
-        </p:txBody>
-      </p:sp>
-      <p:sp>
-        <p:nvSpPr>
-          <p:cNvPr id="11" name="">
-            <a:extLst xmlns:a="http://schemas.openxmlformats.org/drawingml/2006/main">
-              <a:ext uri="{FF2B5EF4-FFF2-40B4-BE49-F238E27FC236}">
-                <a16:creationId xmlns:a16="http://schemas.microsoft.com/office/drawing/2014/main" id="{AF855224-CB03-48F1-9F24-51AC3ACC1182}"/>
-              </a:ext>
-            </a:extLst>
-          </p:cNvPr>
-          <p:cNvSpPr>
-            <a:spLocks xmlns:a="http://schemas.openxmlformats.org/drawingml/2006/main" noGrp="1"/>
-          </p:cNvSpPr>
-          <p:nvPr/>
-        </p:nvSpPr>
-        <p:spPr>
-          <a:xfrm xmlns:a="http://schemas.openxmlformats.org/drawingml/2006/main">
-            <a:off x="1628775" y="5210175"/>
-            <a:ext cx="6238875" cy="457200"/>
-          </a:xfrm>
-          <a:prstGeom xmlns:a="http://schemas.openxmlformats.org/drawingml/2006/main" prst="rect">
-            <a:avLst/>
-          </a:prstGeom>
-          <a:noFill xmlns:a="http://schemas.openxmlformats.org/drawingml/2006/main"/>
-          <a:ln xmlns:a="http://schemas.openxmlformats.org/drawingml/2006/main" w="0">
-            <a:noFill/>
-          </a:ln>
-        </p:spPr>
-        <p:txBody>
-          <a:bodyPr xmlns:a="http://schemas.openxmlformats.org/drawingml/2006/main" wrap="square" lIns="0" tIns="0" rIns="0" bIns="0" anchor="t">
-            <a:noAutofit/>
-          </a:bodyPr>
-          <a:lstStyle xmlns:a="http://schemas.openxmlformats.org/drawingml/2006/main"/>
-          <a:p xmlns:a="http://schemas.openxmlformats.org/drawingml/2006/main">
-            <a:pPr algn="l">
-              <a:defRPr sz="1875" b="0">
-                <a:solidFill>
-                  <a:srgbClr val="DCEBE2"/>
-                </a:solidFill>
-                <a:latin typeface="Inter"/>
-                <a:ea typeface="Inter"/>
-                <a:cs typeface="Inter"/>
-              </a:defRPr>
-            </a:pPr>
-            <a:r>
-              <a:rPr sz="1875" b="0">
-                <a:solidFill>
-                  <a:srgbClr val="DCEBE2"/>
-                </a:solidFill>
-                <a:latin typeface="Inter"/>
-                <a:ea typeface="Inter"/>
-                <a:cs typeface="Inter"/>
-              </a:rPr>
-              <a:t>Bearbeiten, löschen und rückgängig</a:t>
+                  <a:srgbClr val="15171A"/>
+                </a:solidFill>
+                <a:latin typeface="Inter"/>
+                <a:ea typeface="Inter"/>
+                <a:cs typeface="Inter"/>
+              </a:rPr>
+              <a:t>Ändern und eine Löschung zurückholen</a:t>
             </a:r>
           </a:p>
         </p:txBody>
@@ -4733,7 +4879,7 @@
           <p:nvPr/>
         </p:nvPicPr>
         <p:blipFill>
-          <a:blip xmlns:r="http://schemas.openxmlformats.org/officeDocument/2006/relationships" xmlns:a="http://schemas.openxmlformats.org/drawingml/2006/main" r:embed="R6e959dc4f8304831"/>
+          <a:blip xmlns:r="http://schemas.openxmlformats.org/officeDocument/2006/relationships" xmlns:a="http://schemas.openxmlformats.org/drawingml/2006/main" r:embed="R9b21d559252a4e6e"/>
           <a:stretch xmlns:a="http://schemas.openxmlformats.org/drawingml/2006/main"/>
         </p:blipFill>
         <p:spPr>
@@ -4749,7 +4895,7 @@
     </p:spTree>
     <p:extLst>
       <p:ext uri="{BB962C8B-B14F-4D97-AF65-F5344CB8AC3E}">
-        <p14:creationId xmlns:p14="http://schemas.microsoft.com/office/powerpoint/2010/main" val="443689025"/>
+        <p14:creationId xmlns:p14="http://schemas.microsoft.com/office/powerpoint/2010/main" val="1776169237"/>
       </p:ext>
     </p:extLst>
   </p:cSld>
@@ -4777,10 +4923,10 @@
       </p:grpSpPr>
       <p:sp>
         <p:nvSpPr>
-          <p:cNvPr id="8" name="">
+          <p:cNvPr id="9" name="">
             <a:extLst xmlns:a="http://schemas.openxmlformats.org/drawingml/2006/main">
               <a:ext uri="{FF2B5EF4-FFF2-40B4-BE49-F238E27FC236}">
-                <a16:creationId xmlns:a16="http://schemas.microsoft.com/office/drawing/2014/main" id="{DFA63C0C-960B-4057-B7EA-8034A1DFF560}"/>
+                <a16:creationId xmlns:a16="http://schemas.microsoft.com/office/drawing/2014/main" id="{E452B5A5-6FF8-4109-B85B-A1274E408FDA}"/>
               </a:ext>
             </a:extLst>
           </p:cNvPr>
@@ -4837,7 +4983,7 @@
           <p:cNvPr id="2" name="">
             <a:extLst xmlns:a="http://schemas.openxmlformats.org/drawingml/2006/main">
               <a:ext uri="{FF2B5EF4-FFF2-40B4-BE49-F238E27FC236}">
-                <a16:creationId xmlns:a16="http://schemas.microsoft.com/office/drawing/2014/main" id="{B9B9030D-C564-4492-AF5A-8B0CD7CF8205}"/>
+                <a16:creationId xmlns:a16="http://schemas.microsoft.com/office/drawing/2014/main" id="{38B97356-6AC7-4A45-B37C-AE177D8AD53D}"/>
               </a:ext>
             </a:extLst>
           </p:cNvPr>
@@ -4884,27 +5030,27 @@
                 <a:ea typeface="Newsreader"/>
                 <a:cs typeface="Newsreader"/>
               </a:rPr>
-              <a:t>Biometrische App-Sperre</a:t>
+              <a:t>Deine Ausgaben bleiben bei dir</a:t>
             </a:r>
           </a:p>
         </p:txBody>
       </p:sp>
       <p:pic>
         <p:nvPicPr>
-          <p:cNvPr id="10" name=""/>
+          <p:cNvPr id="11" name=""/>
           <p:cNvPicPr>
             <a:picLocks xmlns:a="http://schemas.openxmlformats.org/drawingml/2006/main" noChangeAspect="1"/>
           </p:cNvPicPr>
           <p:nvPr/>
         </p:nvPicPr>
         <p:blipFill>
-          <a:blip xmlns:r="http://schemas.openxmlformats.org/officeDocument/2006/relationships" xmlns:a="http://schemas.openxmlformats.org/drawingml/2006/main" r:embed="R06270efb88894c9d"/>
+          <a:blip xmlns:r="http://schemas.openxmlformats.org/officeDocument/2006/relationships" xmlns:a="http://schemas.openxmlformats.org/drawingml/2006/main" r:embed="Rca5d987e79d64527"/>
           <a:stretch xmlns:a="http://schemas.openxmlformats.org/drawingml/2006/main"/>
         </p:blipFill>
         <p:spPr>
           <a:xfrm xmlns:a="http://schemas.openxmlformats.org/drawingml/2006/main">
-            <a:off x="928121" y="1600200"/>
-            <a:ext cx="2010908" cy="4371975"/>
+            <a:off x="882120" y="1581150"/>
+            <a:ext cx="2102911" cy="4572000"/>
           </a:xfrm>
           <a:prstGeom xmlns:a="http://schemas.openxmlformats.org/drawingml/2006/main" prst="rect">
             <a:avLst/>
@@ -4916,7 +5062,7 @@
           <p:cNvPr id="4" name="">
             <a:extLst xmlns:a="http://schemas.openxmlformats.org/drawingml/2006/main">
               <a:ext uri="{FF2B5EF4-FFF2-40B4-BE49-F238E27FC236}">
-                <a16:creationId xmlns:a16="http://schemas.microsoft.com/office/drawing/2014/main" id="{73AD83F6-8A2D-4F11-95D1-8EE9C9D05287}"/>
+                <a16:creationId xmlns:a16="http://schemas.microsoft.com/office/drawing/2014/main" id="{E11C820E-83C4-4DFD-B982-8EA81EA045B2}"/>
               </a:ext>
             </a:extLst>
           </p:cNvPr>
@@ -4927,8 +5073,8 @@
         </p:nvSpPr>
         <p:spPr>
           <a:xfrm xmlns:a="http://schemas.openxmlformats.org/drawingml/2006/main">
-            <a:off x="4048125" y="1762125"/>
-            <a:ext cx="7181850" cy="647700"/>
+            <a:off x="4048125" y="1657350"/>
+            <a:ext cx="7143750" cy="552450"/>
           </a:xfrm>
           <a:prstGeom xmlns:a="http://schemas.openxmlformats.org/drawingml/2006/main" prst="rect">
             <a:avLst/>
@@ -4963,7 +5109,7 @@
                 <a:ea typeface="Newsreader"/>
                 <a:cs typeface="Newsreader"/>
               </a:rPr>
-              <a:t>Das Gerät prüft die Person</a:t>
+              <a:t>Lokal gespeichert</a:t>
             </a:r>
           </a:p>
         </p:txBody>
@@ -4973,7 +5119,7 @@
           <p:cNvPr id="5" name="">
             <a:extLst xmlns:a="http://schemas.openxmlformats.org/drawingml/2006/main">
               <a:ext uri="{FF2B5EF4-FFF2-40B4-BE49-F238E27FC236}">
-                <a16:creationId xmlns:a16="http://schemas.microsoft.com/office/drawing/2014/main" id="{2B4A0CEB-A1F2-46B6-A0A8-AC993FF54F4A}"/>
+                <a16:creationId xmlns:a16="http://schemas.microsoft.com/office/drawing/2014/main" id="{A4A4114A-2525-4E67-8CB7-F2DDD0F63A42}"/>
               </a:ext>
             </a:extLst>
           </p:cNvPr>
@@ -4984,8 +5130,8 @@
         </p:nvSpPr>
         <p:spPr>
           <a:xfrm xmlns:a="http://schemas.openxmlformats.org/drawingml/2006/main">
-            <a:off x="4095750" y="2790825"/>
-            <a:ext cx="7191375" cy="1714500"/>
+            <a:off x="4095750" y="2371725"/>
+            <a:ext cx="7191375" cy="914400"/>
           </a:xfrm>
           <a:prstGeom xmlns:a="http://schemas.openxmlformats.org/drawingml/2006/main" prst="rect">
             <a:avLst/>
@@ -5002,7 +5148,7 @@
           <a:lstStyle xmlns:a="http://schemas.openxmlformats.org/drawingml/2006/main"/>
           <a:p xmlns:a="http://schemas.openxmlformats.org/drawingml/2006/main">
             <a:pPr algn="l">
-              <a:defRPr sz="2250" b="0">
+              <a:defRPr sz="2175" b="0">
                 <a:solidFill>
                   <a:srgbClr val="15171A"/>
                 </a:solidFill>
@@ -5012,7 +5158,7 @@
               </a:defRPr>
             </a:pPr>
             <a:r>
-              <a:rPr sz="2250" b="0">
+              <a:rPr sz="2175" b="0">
                 <a:solidFill>
                   <a:srgbClr val="15171A"/>
                 </a:solidFill>
@@ -5020,12 +5166,12 @@
                 <a:ea typeface="Inter"/>
                 <a:cs typeface="Inter"/>
               </a:rPr>
-              <a:t>Spendly fragt das Betriebssystem an.</a:t>
+              <a:t>Kein Benutzerkonto.</a:t>
             </a:r>
           </a:p>
           <a:p xmlns:a="http://schemas.openxmlformats.org/drawingml/2006/main">
             <a:pPr algn="l">
-              <a:defRPr sz="2250" b="0">
+              <a:defRPr sz="2175" b="0">
                 <a:solidFill>
                   <a:srgbClr val="15171A"/>
                 </a:solidFill>
@@ -5035,7 +5181,7 @@
               </a:defRPr>
             </a:pPr>
             <a:r>
-              <a:rPr sz="2250" b="0">
+              <a:rPr sz="2175" b="0">
                 <a:solidFill>
                   <a:srgbClr val="15171A"/>
                 </a:solidFill>
@@ -5043,30 +5189,7 @@
                 <a:ea typeface="Inter"/>
                 <a:cs typeface="Inter"/>
               </a:rPr>
-              <a:t>Face ID oder Fingerabdruck prüft den Zugang.</a:t>
-            </a:r>
-          </a:p>
-          <a:p xmlns:a="http://schemas.openxmlformats.org/drawingml/2006/main">
-            <a:pPr algn="l">
-              <a:defRPr sz="2250" b="0">
-                <a:solidFill>
-                  <a:srgbClr val="15171A"/>
-                </a:solidFill>
-                <a:latin typeface="Inter"/>
-                <a:ea typeface="Inter"/>
-                <a:cs typeface="Inter"/>
-              </a:defRPr>
-            </a:pPr>
-            <a:r>
-              <a:rPr sz="2250" b="0">
-                <a:solidFill>
-                  <a:srgbClr val="15171A"/>
-                </a:solidFill>
-                <a:latin typeface="Inter"/>
-                <a:ea typeface="Inter"/>
-                <a:cs typeface="Inter"/>
-              </a:rPr>
-              <a:t>Die App erhält das Ergebnis.</a:t>
+              <a:t>Kein Server für deine Ausgaben.</a:t>
             </a:r>
           </a:p>
         </p:txBody>
@@ -5076,7 +5199,7 @@
           <p:cNvPr id="6" name="">
             <a:extLst xmlns:a="http://schemas.openxmlformats.org/drawingml/2006/main">
               <a:ext uri="{FF2B5EF4-FFF2-40B4-BE49-F238E27FC236}">
-                <a16:creationId xmlns:a16="http://schemas.microsoft.com/office/drawing/2014/main" id="{00C9839F-1850-428C-A126-433F0233B337}"/>
+                <a16:creationId xmlns:a16="http://schemas.microsoft.com/office/drawing/2014/main" id="{19235528-7184-4B62-B09C-E15FF45481F7}"/>
               </a:ext>
             </a:extLst>
           </p:cNvPr>
@@ -5087,8 +5210,8 @@
         </p:nvSpPr>
         <p:spPr>
           <a:xfrm xmlns:a="http://schemas.openxmlformats.org/drawingml/2006/main">
-            <a:off x="4095750" y="4857750"/>
-            <a:ext cx="7191375" cy="438150"/>
+            <a:off x="4048125" y="3819525"/>
+            <a:ext cx="7191375" cy="552450"/>
           </a:xfrm>
           <a:prstGeom xmlns:a="http://schemas.openxmlformats.org/drawingml/2006/main" prst="rect">
             <a:avLst/>
@@ -5105,25 +5228,25 @@
           <a:lstStyle xmlns:a="http://schemas.openxmlformats.org/drawingml/2006/main"/>
           <a:p xmlns:a="http://schemas.openxmlformats.org/drawingml/2006/main">
             <a:pPr algn="l">
-              <a:defRPr sz="2100" b="0">
+              <a:defRPr sz="2775" b="0">
                 <a:solidFill>
                   <a:srgbClr val="1F5A45"/>
                 </a:solidFill>
-                <a:latin typeface="Inter"/>
-                <a:ea typeface="Inter"/>
-                <a:cs typeface="Inter"/>
-              </a:defRPr>
-            </a:pPr>
-            <a:r>
-              <a:rPr sz="2100" b="0">
+                <a:latin typeface="Newsreader"/>
+                <a:ea typeface="Newsreader"/>
+                <a:cs typeface="Newsreader"/>
+              </a:defRPr>
+            </a:pPr>
+            <a:r>
+              <a:rPr sz="2775" b="0">
                 <a:solidFill>
                   <a:srgbClr val="1F5A45"/>
                 </a:solidFill>
-                <a:latin typeface="Inter"/>
-                <a:ea typeface="Inter"/>
-                <a:cs typeface="Inter"/>
-              </a:rPr>
-              <a:t>Alternativ: eigener 6-stelliger App-Code</a:t>
+                <a:latin typeface="Newsreader"/>
+                <a:ea typeface="Newsreader"/>
+                <a:cs typeface="Newsreader"/>
+              </a:rPr>
+              <a:t>Das Gerät prüft den Zugang</a:t>
             </a:r>
           </a:p>
         </p:txBody>
@@ -5133,7 +5256,7 @@
           <p:cNvPr id="7" name="">
             <a:extLst xmlns:a="http://schemas.openxmlformats.org/drawingml/2006/main">
               <a:ext uri="{FF2B5EF4-FFF2-40B4-BE49-F238E27FC236}">
-                <a16:creationId xmlns:a16="http://schemas.microsoft.com/office/drawing/2014/main" id="{8CFB3388-62CA-4727-BCAE-59E6D8C818E5}"/>
+                <a16:creationId xmlns:a16="http://schemas.microsoft.com/office/drawing/2014/main" id="{906902C7-37DC-4A2A-A9DA-547D6C414782}"/>
               </a:ext>
             </a:extLst>
           </p:cNvPr>
@@ -5144,8 +5267,8 @@
         </p:nvSpPr>
         <p:spPr>
           <a:xfrm xmlns:a="http://schemas.openxmlformats.org/drawingml/2006/main">
-            <a:off x="4095750" y="5562600"/>
-            <a:ext cx="7191375" cy="590550"/>
+            <a:off x="4095750" y="4514850"/>
+            <a:ext cx="7191375" cy="914400"/>
           </a:xfrm>
           <a:prstGeom xmlns:a="http://schemas.openxmlformats.org/drawingml/2006/main" prst="rect">
             <a:avLst/>
@@ -5162,7 +5285,87 @@
           <a:lstStyle xmlns:a="http://schemas.openxmlformats.org/drawingml/2006/main"/>
           <a:p xmlns:a="http://schemas.openxmlformats.org/drawingml/2006/main">
             <a:pPr algn="l">
-              <a:defRPr sz="1650" b="0">
+              <a:defRPr sz="2175" b="0">
+                <a:solidFill>
+                  <a:srgbClr val="15171A"/>
+                </a:solidFill>
+                <a:latin typeface="Inter"/>
+                <a:ea typeface="Inter"/>
+                <a:cs typeface="Inter"/>
+              </a:defRPr>
+            </a:pPr>
+            <a:r>
+              <a:rPr sz="2175" b="0">
+                <a:solidFill>
+                  <a:srgbClr val="15171A"/>
+                </a:solidFill>
+                <a:latin typeface="Inter"/>
+                <a:ea typeface="Inter"/>
+                <a:cs typeface="Inter"/>
+              </a:rPr>
+              <a:t>Face ID oder Fingerabdruck.</a:t>
+            </a:r>
+          </a:p>
+          <a:p xmlns:a="http://schemas.openxmlformats.org/drawingml/2006/main">
+            <a:pPr algn="l">
+              <a:defRPr sz="2175" b="0">
+                <a:solidFill>
+                  <a:srgbClr val="15171A"/>
+                </a:solidFill>
+                <a:latin typeface="Inter"/>
+                <a:ea typeface="Inter"/>
+                <a:cs typeface="Inter"/>
+              </a:defRPr>
+            </a:pPr>
+            <a:r>
+              <a:rPr sz="2175" b="0">
+                <a:solidFill>
+                  <a:srgbClr val="15171A"/>
+                </a:solidFill>
+                <a:latin typeface="Inter"/>
+                <a:ea typeface="Inter"/>
+                <a:cs typeface="Inter"/>
+              </a:rPr>
+              <a:t>Spendly erhält nur das Ergebnis.</a:t>
+            </a:r>
+          </a:p>
+        </p:txBody>
+      </p:sp>
+      <p:sp>
+        <p:nvSpPr>
+          <p:cNvPr id="8" name="">
+            <a:extLst xmlns:a="http://schemas.openxmlformats.org/drawingml/2006/main">
+              <a:ext uri="{FF2B5EF4-FFF2-40B4-BE49-F238E27FC236}">
+                <a16:creationId xmlns:a16="http://schemas.microsoft.com/office/drawing/2014/main" id="{163B4108-C04F-4871-BB2F-7F535FF4E383}"/>
+              </a:ext>
+            </a:extLst>
+          </p:cNvPr>
+          <p:cNvSpPr>
+            <a:spLocks xmlns:a="http://schemas.openxmlformats.org/drawingml/2006/main" noGrp="1"/>
+          </p:cNvSpPr>
+          <p:nvPr/>
+        </p:nvSpPr>
+        <p:spPr>
+          <a:xfrm xmlns:a="http://schemas.openxmlformats.org/drawingml/2006/main">
+            <a:off x="4095750" y="5772150"/>
+            <a:ext cx="7191375" cy="457200"/>
+          </a:xfrm>
+          <a:prstGeom xmlns:a="http://schemas.openxmlformats.org/drawingml/2006/main" prst="rect">
+            <a:avLst/>
+          </a:prstGeom>
+          <a:noFill xmlns:a="http://schemas.openxmlformats.org/drawingml/2006/main"/>
+          <a:ln xmlns:a="http://schemas.openxmlformats.org/drawingml/2006/main" w="0">
+            <a:noFill/>
+          </a:ln>
+        </p:spPr>
+        <p:txBody>
+          <a:bodyPr xmlns:a="http://schemas.openxmlformats.org/drawingml/2006/main" wrap="square" lIns="0" tIns="0" rIns="0" bIns="0" anchor="t">
+            <a:noAutofit/>
+          </a:bodyPr>
+          <a:lstStyle xmlns:a="http://schemas.openxmlformats.org/drawingml/2006/main"/>
+          <a:p xmlns:a="http://schemas.openxmlformats.org/drawingml/2006/main">
+            <a:pPr algn="l">
+              <a:defRPr sz="1575" b="0">
                 <a:solidFill>
                   <a:srgbClr val="6E6D68"/>
                 </a:solidFill>
@@ -5172,7 +5375,7 @@
               </a:defRPr>
             </a:pPr>
             <a:r>
-              <a:rPr sz="1650" b="0">
+              <a:rPr sz="1575" b="0">
                 <a:solidFill>
                   <a:srgbClr val="6E6D68"/>
                 </a:solidFill>
@@ -5180,7 +5383,7 @@
                 <a:ea typeface="Inter"/>
                 <a:cs typeface="Inter"/>
               </a:rPr>
-              <a:t>Face ID im Simulator geprüft · echter Scan offen</a:t>
+              <a:t>Alternativ: eigener App-Code. Echter Face-ID-Scan offen.</a:t>
             </a:r>
           </a:p>
         </p:txBody>
@@ -5188,7 +5391,7 @@
     </p:spTree>
     <p:extLst>
       <p:ext uri="{BB962C8B-B14F-4D97-AF65-F5344CB8AC3E}">
-        <p14:creationId xmlns:p14="http://schemas.microsoft.com/office/powerpoint/2010/main" val="925703176"/>
+        <p14:creationId xmlns:p14="http://schemas.microsoft.com/office/powerpoint/2010/main" val="114062653"/>
       </p:ext>
     </p:extLst>
   </p:cSld>
@@ -5216,10 +5419,10 @@
       </p:grpSpPr>
       <p:sp>
         <p:nvSpPr>
-          <p:cNvPr id="17" name="">
+          <p:cNvPr id="10" name="">
             <a:extLst xmlns:a="http://schemas.openxmlformats.org/drawingml/2006/main">
               <a:ext uri="{FF2B5EF4-FFF2-40B4-BE49-F238E27FC236}">
-                <a16:creationId xmlns:a16="http://schemas.microsoft.com/office/drawing/2014/main" id="{A72105B5-5476-4797-AF78-13BD4DE60990}"/>
+                <a16:creationId xmlns:a16="http://schemas.microsoft.com/office/drawing/2014/main" id="{1269EC8B-8C81-4740-8751-B65B7121214C}"/>
               </a:ext>
             </a:extLst>
           </p:cNvPr>
@@ -5276,7 +5479,7 @@
           <p:cNvPr id="2" name="">
             <a:extLst xmlns:a="http://schemas.openxmlformats.org/drawingml/2006/main">
               <a:ext uri="{FF2B5EF4-FFF2-40B4-BE49-F238E27FC236}">
-                <a16:creationId xmlns:a16="http://schemas.microsoft.com/office/drawing/2014/main" id="{437CAFB6-10BD-4742-A077-7A5A502920A8}"/>
+                <a16:creationId xmlns:a16="http://schemas.microsoft.com/office/drawing/2014/main" id="{CFD6C13A-351B-48D2-8244-FC6C254B0594}"/>
               </a:ext>
             </a:extLst>
           </p:cNvPr>
@@ -5323,7 +5526,7 @@
                 <a:ea typeface="Newsreader"/>
                 <a:cs typeface="Newsreader"/>
               </a:rPr>
-              <a:t>Der Weg einer Ausgabe</a:t>
+              <a:t>Vom Entwurf zur nutzbaren App</a:t>
             </a:r>
           </a:p>
         </p:txBody>
@@ -5333,7 +5536,7 @@
           <p:cNvPr id="3" name="">
             <a:extLst xmlns:a="http://schemas.openxmlformats.org/drawingml/2006/main">
               <a:ext uri="{FF2B5EF4-FFF2-40B4-BE49-F238E27FC236}">
-                <a16:creationId xmlns:a16="http://schemas.microsoft.com/office/drawing/2014/main" id="{420BF2D3-BFA5-40FB-BD29-70442A98C040}"/>
+                <a16:creationId xmlns:a16="http://schemas.microsoft.com/office/drawing/2014/main" id="{67E7E3B2-7059-4F51-8ECA-A0BCF997CC29}"/>
               </a:ext>
             </a:extLst>
           </p:cNvPr>
@@ -5344,8 +5547,8 @@
         </p:nvSpPr>
         <p:spPr>
           <a:xfrm xmlns:a="http://schemas.openxmlformats.org/drawingml/2006/main">
-            <a:off x="609600" y="1438275"/>
-            <a:ext cx="6191250" cy="381000"/>
+            <a:off x="609600" y="1733550"/>
+            <a:ext cx="5048250" cy="1076325"/>
           </a:xfrm>
           <a:prstGeom xmlns:a="http://schemas.openxmlformats.org/drawingml/2006/main" prst="rect">
             <a:avLst/>
@@ -5362,25 +5565,25 @@
           <a:lstStyle xmlns:a="http://schemas.openxmlformats.org/drawingml/2006/main"/>
           <a:p xmlns:a="http://schemas.openxmlformats.org/drawingml/2006/main">
             <a:pPr algn="l">
-              <a:defRPr sz="1875" b="1">
+              <a:defRPr sz="3000" b="0">
                 <a:solidFill>
                   <a:srgbClr val="1F5A45"/>
                 </a:solidFill>
-                <a:latin typeface="Inter"/>
-                <a:ea typeface="Inter"/>
-                <a:cs typeface="Inter"/>
-              </a:defRPr>
-            </a:pPr>
-            <a:r>
-              <a:rPr sz="1875" b="1">
+                <a:latin typeface="Newsreader"/>
+                <a:ea typeface="Newsreader"/>
+                <a:cs typeface="Newsreader"/>
+              </a:defRPr>
+            </a:pPr>
+            <a:r>
+              <a:rPr sz="3000" b="0">
                 <a:solidFill>
                   <a:srgbClr val="1F5A45"/>
                 </a:solidFill>
-                <a:latin typeface="Inter"/>
-                <a:ea typeface="Inter"/>
-                <a:cs typeface="Inter"/>
-              </a:rPr>
-              <a:t>React Native + Expo</a:t>
+                <a:latin typeface="Newsreader"/>
+                <a:ea typeface="Newsreader"/>
+                <a:cs typeface="Newsreader"/>
+              </a:rPr>
+              <a:t>Die Eingabe bleibt einfach</a:t>
             </a:r>
           </a:p>
         </p:txBody>
@@ -5390,7 +5593,7 @@
           <p:cNvPr id="4" name="">
             <a:extLst xmlns:a="http://schemas.openxmlformats.org/drawingml/2006/main">
               <a:ext uri="{FF2B5EF4-FFF2-40B4-BE49-F238E27FC236}">
-                <a16:creationId xmlns:a16="http://schemas.microsoft.com/office/drawing/2014/main" id="{AFC23572-0087-4B2A-A9C2-19E2FC6428E5}"/>
+                <a16:creationId xmlns:a16="http://schemas.microsoft.com/office/drawing/2014/main" id="{16C6F91B-6D13-4945-9983-200AA9556546}"/>
               </a:ext>
             </a:extLst>
           </p:cNvPr>
@@ -5401,8 +5604,8 @@
         </p:nvSpPr>
         <p:spPr>
           <a:xfrm xmlns:a="http://schemas.openxmlformats.org/drawingml/2006/main">
-            <a:off x="628650" y="2200275"/>
-            <a:ext cx="495300" cy="561975"/>
+            <a:off x="638175" y="3000375"/>
+            <a:ext cx="4886325" cy="1428750"/>
           </a:xfrm>
           <a:prstGeom xmlns:a="http://schemas.openxmlformats.org/drawingml/2006/main" prst="rect">
             <a:avLst/>
@@ -5419,25 +5622,71 @@
           <a:lstStyle xmlns:a="http://schemas.openxmlformats.org/drawingml/2006/main"/>
           <a:p xmlns:a="http://schemas.openxmlformats.org/drawingml/2006/main">
             <a:pPr algn="l">
-              <a:defRPr sz="2700" b="0">
-                <a:solidFill>
-                  <a:srgbClr val="1F5A45"/>
-                </a:solidFill>
-                <a:latin typeface="Newsreader"/>
-                <a:ea typeface="Newsreader"/>
-                <a:cs typeface="Newsreader"/>
-              </a:defRPr>
-            </a:pPr>
-            <a:r>
-              <a:rPr sz="2700" b="0">
-                <a:solidFill>
-                  <a:srgbClr val="1F5A45"/>
-                </a:solidFill>
-                <a:latin typeface="Newsreader"/>
-                <a:ea typeface="Newsreader"/>
-                <a:cs typeface="Newsreader"/>
-              </a:rPr>
-              <a:t>1</a:t>
+              <a:defRPr sz="2175" b="0">
+                <a:solidFill>
+                  <a:srgbClr val="15171A"/>
+                </a:solidFill>
+                <a:latin typeface="Inter"/>
+                <a:ea typeface="Inter"/>
+                <a:cs typeface="Inter"/>
+              </a:defRPr>
+            </a:pPr>
+            <a:r>
+              <a:rPr sz="2175" b="0">
+                <a:solidFill>
+                  <a:srgbClr val="15171A"/>
+                </a:solidFill>
+                <a:latin typeface="Inter"/>
+                <a:ea typeface="Inter"/>
+                <a:cs typeface="Inter"/>
+              </a:rPr>
+              <a:t>Betrag im Mittelpunkt</a:t>
+            </a:r>
+          </a:p>
+          <a:p xmlns:a="http://schemas.openxmlformats.org/drawingml/2006/main">
+            <a:pPr algn="l">
+              <a:defRPr sz="2175" b="0">
+                <a:solidFill>
+                  <a:srgbClr val="15171A"/>
+                </a:solidFill>
+                <a:latin typeface="Inter"/>
+                <a:ea typeface="Inter"/>
+                <a:cs typeface="Inter"/>
+              </a:defRPr>
+            </a:pPr>
+            <a:r>
+              <a:rPr sz="2175" b="0">
+                <a:solidFill>
+                  <a:srgbClr val="15171A"/>
+                </a:solidFill>
+                <a:latin typeface="Inter"/>
+                <a:ea typeface="Inter"/>
+                <a:cs typeface="Inter"/>
+              </a:rPr>
+              <a:t>Kategorie direkt auswählen</a:t>
+            </a:r>
+          </a:p>
+          <a:p xmlns:a="http://schemas.openxmlformats.org/drawingml/2006/main">
+            <a:pPr algn="l">
+              <a:defRPr sz="2175" b="0">
+                <a:solidFill>
+                  <a:srgbClr val="15171A"/>
+                </a:solidFill>
+                <a:latin typeface="Inter"/>
+                <a:ea typeface="Inter"/>
+                <a:cs typeface="Inter"/>
+              </a:defRPr>
+            </a:pPr>
+            <a:r>
+              <a:rPr sz="2175" b="0">
+                <a:solidFill>
+                  <a:srgbClr val="15171A"/>
+                </a:solidFill>
+                <a:latin typeface="Inter"/>
+                <a:ea typeface="Inter"/>
+                <a:cs typeface="Inter"/>
+              </a:rPr>
+              <a:t>Fehler am richtigen Feld</a:t>
             </a:r>
           </a:p>
         </p:txBody>
@@ -5447,7 +5696,7 @@
           <p:cNvPr id="5" name="">
             <a:extLst xmlns:a="http://schemas.openxmlformats.org/drawingml/2006/main">
               <a:ext uri="{FF2B5EF4-FFF2-40B4-BE49-F238E27FC236}">
-                <a16:creationId xmlns:a16="http://schemas.microsoft.com/office/drawing/2014/main" id="{F79F8DCA-E2A0-48FE-98D9-49937431801C}"/>
+                <a16:creationId xmlns:a16="http://schemas.microsoft.com/office/drawing/2014/main" id="{A0BDCA5F-A620-4AD3-B5CB-C3C2D29A3A02}"/>
               </a:ext>
             </a:extLst>
           </p:cNvPr>
@@ -5458,8 +5707,8 @@
         </p:nvSpPr>
         <p:spPr>
           <a:xfrm xmlns:a="http://schemas.openxmlformats.org/drawingml/2006/main">
-            <a:off x="1343025" y="2200275"/>
-            <a:ext cx="9810750" cy="428625"/>
+            <a:off x="638175" y="4933950"/>
+            <a:ext cx="4914900" cy="1047750"/>
           </a:xfrm>
           <a:prstGeom xmlns:a="http://schemas.openxmlformats.org/drawingml/2006/main" prst="rect">
             <a:avLst/>
@@ -5476,25 +5725,71 @@
           <a:lstStyle xmlns:a="http://schemas.openxmlformats.org/drawingml/2006/main"/>
           <a:p xmlns:a="http://schemas.openxmlformats.org/drawingml/2006/main">
             <a:pPr algn="l">
-              <a:defRPr sz="2175" b="0">
-                <a:solidFill>
-                  <a:srgbClr val="15171A"/>
-                </a:solidFill>
-                <a:latin typeface="Inter"/>
-                <a:ea typeface="Inter"/>
-                <a:cs typeface="Inter"/>
-              </a:defRPr>
-            </a:pPr>
-            <a:r>
-              <a:rPr sz="2175" b="0">
-                <a:solidFill>
-                  <a:srgbClr val="15171A"/>
-                </a:solidFill>
-                <a:latin typeface="Inter"/>
-                <a:ea typeface="Inter"/>
-                <a:cs typeface="Inter"/>
-              </a:rPr>
-              <a:t>Formular prüft Eingaben</a:t>
+              <a:defRPr sz="1725" b="0">
+                <a:solidFill>
+                  <a:srgbClr val="6E6D68"/>
+                </a:solidFill>
+                <a:latin typeface="Inter"/>
+                <a:ea typeface="Inter"/>
+                <a:cs typeface="Inter"/>
+              </a:defRPr>
+            </a:pPr>
+            <a:r>
+              <a:rPr sz="1725" b="0">
+                <a:solidFill>
+                  <a:srgbClr val="6E6D68"/>
+                </a:solidFill>
+                <a:latin typeface="Inter"/>
+                <a:ea typeface="Inter"/>
+                <a:cs typeface="Inter"/>
+              </a:rPr>
+              <a:t>Oberfläche und Navigation</a:t>
+            </a:r>
+          </a:p>
+          <a:p xmlns:a="http://schemas.openxmlformats.org/drawingml/2006/main">
+            <a:pPr algn="l">
+              <a:defRPr sz="1725" b="0">
+                <a:solidFill>
+                  <a:srgbClr val="6E6D68"/>
+                </a:solidFill>
+                <a:latin typeface="Inter"/>
+                <a:ea typeface="Inter"/>
+                <a:cs typeface="Inter"/>
+              </a:defRPr>
+            </a:pPr>
+            <a:r>
+              <a:rPr sz="1725" b="0">
+                <a:solidFill>
+                  <a:srgbClr val="6E6D68"/>
+                </a:solidFill>
+                <a:latin typeface="Inter"/>
+                <a:ea typeface="Inter"/>
+                <a:cs typeface="Inter"/>
+              </a:rPr>
+              <a:t>Speicherung und Gerätesperre</a:t>
+            </a:r>
+          </a:p>
+          <a:p xmlns:a="http://schemas.openxmlformats.org/drawingml/2006/main">
+            <a:pPr algn="l">
+              <a:defRPr sz="1725" b="0">
+                <a:solidFill>
+                  <a:srgbClr val="6E6D68"/>
+                </a:solidFill>
+                <a:latin typeface="Inter"/>
+                <a:ea typeface="Inter"/>
+                <a:cs typeface="Inter"/>
+              </a:defRPr>
+            </a:pPr>
+            <a:r>
+              <a:rPr sz="1725" b="0">
+                <a:solidFill>
+                  <a:srgbClr val="6E6D68"/>
+                </a:solidFill>
+                <a:latin typeface="Inter"/>
+                <a:ea typeface="Inter"/>
+                <a:cs typeface="Inter"/>
+              </a:rPr>
+              <a:t>Fehlerfälle und Tests</a:t>
             </a:r>
           </a:p>
         </p:txBody>
@@ -5504,7 +5799,7 @@
           <p:cNvPr id="6" name="">
             <a:extLst xmlns:a="http://schemas.openxmlformats.org/drawingml/2006/main">
               <a:ext uri="{FF2B5EF4-FFF2-40B4-BE49-F238E27FC236}">
-                <a16:creationId xmlns:a16="http://schemas.microsoft.com/office/drawing/2014/main" id="{62DB6AC1-200D-48CE-B48D-5033527BB535}"/>
+                <a16:creationId xmlns:a16="http://schemas.microsoft.com/office/drawing/2014/main" id="{4AD9FF0E-1DB5-489B-9857-AC7F292E5169}"/>
               </a:ext>
             </a:extLst>
           </p:cNvPr>
@@ -5515,8 +5810,8 @@
         </p:nvSpPr>
         <p:spPr>
           <a:xfrm xmlns:a="http://schemas.openxmlformats.org/drawingml/2006/main">
-            <a:off x="1362075" y="2619375"/>
-            <a:ext cx="9525000" cy="295275"/>
+            <a:off x="6000750" y="1390650"/>
+            <a:ext cx="2343150" cy="295275"/>
           </a:xfrm>
           <a:prstGeom xmlns:a="http://schemas.openxmlformats.org/drawingml/2006/main" prst="rect">
             <a:avLst/>
@@ -5533,7 +5828,7 @@
           <a:lstStyle xmlns:a="http://schemas.openxmlformats.org/drawingml/2006/main"/>
           <a:p xmlns:a="http://schemas.openxmlformats.org/drawingml/2006/main">
             <a:pPr algn="l">
-              <a:defRPr sz="1575" b="0">
+              <a:defRPr sz="1500" b="1">
                 <a:solidFill>
                   <a:srgbClr val="6E6D68"/>
                 </a:solidFill>
@@ -5543,7 +5838,7 @@
               </a:defRPr>
             </a:pPr>
             <a:r>
-              <a:rPr sz="1575" b="0">
+              <a:rPr sz="1500" b="1">
                 <a:solidFill>
                   <a:srgbClr val="6E6D68"/>
                 </a:solidFill>
@@ -5551,7 +5846,7 @@
                 <a:ea typeface="Inter"/>
                 <a:cs typeface="Inter"/>
               </a:rPr>
-              <a:t>NewExpenseScreen + validateExpense</a:t>
+              <a:t>LB1-Mockup</a:t>
             </a:r>
           </a:p>
         </p:txBody>
@@ -5561,7 +5856,7 @@
           <p:cNvPr id="7" name="">
             <a:extLst xmlns:a="http://schemas.openxmlformats.org/drawingml/2006/main">
               <a:ext uri="{FF2B5EF4-FFF2-40B4-BE49-F238E27FC236}">
-                <a16:creationId xmlns:a16="http://schemas.microsoft.com/office/drawing/2014/main" id="{AD39DCC4-4D70-4F0B-9D53-24D8FEC66E4D}"/>
+                <a16:creationId xmlns:a16="http://schemas.microsoft.com/office/drawing/2014/main" id="{17C31F1D-B092-469F-A249-6C98E1EDC663}"/>
               </a:ext>
             </a:extLst>
           </p:cNvPr>
@@ -5572,8 +5867,8 @@
         </p:nvSpPr>
         <p:spPr>
           <a:xfrm xmlns:a="http://schemas.openxmlformats.org/drawingml/2006/main">
-            <a:off x="628650" y="3048000"/>
-            <a:ext cx="495300" cy="561975"/>
+            <a:off x="8924925" y="1390650"/>
+            <a:ext cx="2343150" cy="295275"/>
           </a:xfrm>
           <a:prstGeom xmlns:a="http://schemas.openxmlformats.org/drawingml/2006/main" prst="rect">
             <a:avLst/>
@@ -5590,546 +5885,77 @@
           <a:lstStyle xmlns:a="http://schemas.openxmlformats.org/drawingml/2006/main"/>
           <a:p xmlns:a="http://schemas.openxmlformats.org/drawingml/2006/main">
             <a:pPr algn="l">
-              <a:defRPr sz="2700" b="0">
+              <a:defRPr sz="1500" b="1">
                 <a:solidFill>
                   <a:srgbClr val="1F5A45"/>
                 </a:solidFill>
-                <a:latin typeface="Newsreader"/>
-                <a:ea typeface="Newsreader"/>
-                <a:cs typeface="Newsreader"/>
-              </a:defRPr>
-            </a:pPr>
-            <a:r>
-              <a:rPr sz="2700" b="0">
+                <a:latin typeface="Inter"/>
+                <a:ea typeface="Inter"/>
+                <a:cs typeface="Inter"/>
+              </a:defRPr>
+            </a:pPr>
+            <a:r>
+              <a:rPr sz="1500" b="1">
                 <a:solidFill>
                   <a:srgbClr val="1F5A45"/>
                 </a:solidFill>
-                <a:latin typeface="Newsreader"/>
-                <a:ea typeface="Newsreader"/>
-                <a:cs typeface="Newsreader"/>
-              </a:rPr>
-              <a:t>2</a:t>
-            </a:r>
-          </a:p>
-        </p:txBody>
-      </p:sp>
-      <p:sp>
-        <p:nvSpPr>
-          <p:cNvPr id="8" name="">
-            <a:extLst xmlns:a="http://schemas.openxmlformats.org/drawingml/2006/main">
-              <a:ext uri="{FF2B5EF4-FFF2-40B4-BE49-F238E27FC236}">
-                <a16:creationId xmlns:a16="http://schemas.microsoft.com/office/drawing/2014/main" id="{E56C1F6D-A070-46A2-A6DF-5C539D4FA7A0}"/>
-              </a:ext>
-            </a:extLst>
-          </p:cNvPr>
-          <p:cNvSpPr>
-            <a:spLocks xmlns:a="http://schemas.openxmlformats.org/drawingml/2006/main" noGrp="1"/>
-          </p:cNvSpPr>
+                <a:latin typeface="Inter"/>
+                <a:ea typeface="Inter"/>
+                <a:cs typeface="Inter"/>
+              </a:rPr>
+              <a:t>App heute</a:t>
+            </a:r>
+          </a:p>
+        </p:txBody>
+      </p:sp>
+      <p:pic>
+        <p:nvPicPr>
+          <p:cNvPr id="17" name=""/>
+          <p:cNvPicPr>
+            <a:picLocks xmlns:a="http://schemas.openxmlformats.org/drawingml/2006/main" noChangeAspect="1"/>
+          </p:cNvPicPr>
           <p:nvPr/>
-        </p:nvSpPr>
+        </p:nvPicPr>
+        <p:blipFill>
+          <a:blip xmlns:r="http://schemas.openxmlformats.org/officeDocument/2006/relationships" xmlns:a="http://schemas.openxmlformats.org/drawingml/2006/main" r:embed="R7864bcd7f33344e6"/>
+          <a:stretch xmlns:a="http://schemas.openxmlformats.org/drawingml/2006/main"/>
+        </p:blipFill>
         <p:spPr>
           <a:xfrm xmlns:a="http://schemas.openxmlformats.org/drawingml/2006/main">
-            <a:off x="1343025" y="3048000"/>
-            <a:ext cx="9810750" cy="428625"/>
+            <a:off x="6098460" y="1809750"/>
+            <a:ext cx="2033430" cy="4400550"/>
           </a:xfrm>
           <a:prstGeom xmlns:a="http://schemas.openxmlformats.org/drawingml/2006/main" prst="rect">
             <a:avLst/>
           </a:prstGeom>
-          <a:noFill xmlns:a="http://schemas.openxmlformats.org/drawingml/2006/main"/>
-          <a:ln xmlns:a="http://schemas.openxmlformats.org/drawingml/2006/main" w="0">
-            <a:noFill/>
-          </a:ln>
-        </p:spPr>
-        <p:txBody>
-          <a:bodyPr xmlns:a="http://schemas.openxmlformats.org/drawingml/2006/main" wrap="square" lIns="0" tIns="0" rIns="0" bIns="0" anchor="t">
-            <a:noAutofit/>
-          </a:bodyPr>
-          <a:lstStyle xmlns:a="http://schemas.openxmlformats.org/drawingml/2006/main"/>
-          <a:p xmlns:a="http://schemas.openxmlformats.org/drawingml/2006/main">
-            <a:pPr algn="l">
-              <a:defRPr sz="2175" b="0">
-                <a:solidFill>
-                  <a:srgbClr val="15171A"/>
-                </a:solidFill>
-                <a:latin typeface="Inter"/>
-                <a:ea typeface="Inter"/>
-                <a:cs typeface="Inter"/>
-              </a:defRPr>
-            </a:pPr>
-            <a:r>
-              <a:rPr sz="2175" b="0">
-                <a:solidFill>
-                  <a:srgbClr val="15171A"/>
-                </a:solidFill>
-                <a:latin typeface="Inter"/>
-                <a:ea typeface="Inter"/>
-                <a:cs typeface="Inter"/>
-              </a:rPr>
-              <a:t>Context koordiniert die Änderung</a:t>
-            </a:r>
-          </a:p>
-        </p:txBody>
-      </p:sp>
-      <p:sp>
-        <p:nvSpPr>
-          <p:cNvPr id="9" name="">
-            <a:extLst xmlns:a="http://schemas.openxmlformats.org/drawingml/2006/main">
-              <a:ext uri="{FF2B5EF4-FFF2-40B4-BE49-F238E27FC236}">
-                <a16:creationId xmlns:a16="http://schemas.microsoft.com/office/drawing/2014/main" id="{365C5A58-E7C4-43D1-8A36-CF48A79EC0DE}"/>
-              </a:ext>
-            </a:extLst>
-          </p:cNvPr>
-          <p:cNvSpPr>
-            <a:spLocks xmlns:a="http://schemas.openxmlformats.org/drawingml/2006/main" noGrp="1"/>
-          </p:cNvSpPr>
+        </p:spPr>
+      </p:pic>
+      <p:pic>
+        <p:nvPicPr>
+          <p:cNvPr id="18" name=""/>
+          <p:cNvPicPr>
+            <a:picLocks xmlns:a="http://schemas.openxmlformats.org/drawingml/2006/main" noChangeAspect="1"/>
+          </p:cNvPicPr>
           <p:nvPr/>
-        </p:nvSpPr>
+        </p:nvPicPr>
+        <p:blipFill>
+          <a:blip xmlns:r="http://schemas.openxmlformats.org/officeDocument/2006/relationships" xmlns:a="http://schemas.openxmlformats.org/drawingml/2006/main" r:embed="R8ab18a4f01b74859"/>
+          <a:stretch xmlns:a="http://schemas.openxmlformats.org/drawingml/2006/main"/>
+        </p:blipFill>
         <p:spPr>
           <a:xfrm xmlns:a="http://schemas.openxmlformats.org/drawingml/2006/main">
-            <a:off x="1362075" y="3467100"/>
-            <a:ext cx="9525000" cy="295275"/>
+            <a:off x="9027324" y="1809750"/>
+            <a:ext cx="2024052" cy="4400550"/>
           </a:xfrm>
           <a:prstGeom xmlns:a="http://schemas.openxmlformats.org/drawingml/2006/main" prst="rect">
             <a:avLst/>
           </a:prstGeom>
-          <a:noFill xmlns:a="http://schemas.openxmlformats.org/drawingml/2006/main"/>
-          <a:ln xmlns:a="http://schemas.openxmlformats.org/drawingml/2006/main" w="0">
-            <a:noFill/>
-          </a:ln>
-        </p:spPr>
-        <p:txBody>
-          <a:bodyPr xmlns:a="http://schemas.openxmlformats.org/drawingml/2006/main" wrap="square" lIns="0" tIns="0" rIns="0" bIns="0" anchor="t">
-            <a:noAutofit/>
-          </a:bodyPr>
-          <a:lstStyle xmlns:a="http://schemas.openxmlformats.org/drawingml/2006/main"/>
-          <a:p xmlns:a="http://schemas.openxmlformats.org/drawingml/2006/main">
-            <a:pPr algn="l">
-              <a:defRPr sz="1575" b="0">
-                <a:solidFill>
-                  <a:srgbClr val="6E6D68"/>
-                </a:solidFill>
-                <a:latin typeface="Inter"/>
-                <a:ea typeface="Inter"/>
-                <a:cs typeface="Inter"/>
-              </a:defRPr>
-            </a:pPr>
-            <a:r>
-              <a:rPr sz="1575" b="0">
-                <a:solidFill>
-                  <a:srgbClr val="6E6D68"/>
-                </a:solidFill>
-                <a:latin typeface="Inter"/>
-                <a:ea typeface="Inter"/>
-                <a:cs typeface="Inter"/>
-              </a:rPr>
-              <a:t>DataContext</a:t>
-            </a:r>
-          </a:p>
-        </p:txBody>
-      </p:sp>
-      <p:sp>
-        <p:nvSpPr>
-          <p:cNvPr id="10" name="">
-            <a:extLst xmlns:a="http://schemas.openxmlformats.org/drawingml/2006/main">
-              <a:ext uri="{FF2B5EF4-FFF2-40B4-BE49-F238E27FC236}">
-                <a16:creationId xmlns:a16="http://schemas.microsoft.com/office/drawing/2014/main" id="{A3894776-FE4A-4F2E-A97D-C3B72E5FE465}"/>
-              </a:ext>
-            </a:extLst>
-          </p:cNvPr>
-          <p:cNvSpPr>
-            <a:spLocks xmlns:a="http://schemas.openxmlformats.org/drawingml/2006/main" noGrp="1"/>
-          </p:cNvSpPr>
-          <p:nvPr/>
-        </p:nvSpPr>
-        <p:spPr>
-          <a:xfrm xmlns:a="http://schemas.openxmlformats.org/drawingml/2006/main">
-            <a:off x="628650" y="3895725"/>
-            <a:ext cx="495300" cy="561975"/>
-          </a:xfrm>
-          <a:prstGeom xmlns:a="http://schemas.openxmlformats.org/drawingml/2006/main" prst="rect">
-            <a:avLst/>
-          </a:prstGeom>
-          <a:noFill xmlns:a="http://schemas.openxmlformats.org/drawingml/2006/main"/>
-          <a:ln xmlns:a="http://schemas.openxmlformats.org/drawingml/2006/main" w="0">
-            <a:noFill/>
-          </a:ln>
-        </p:spPr>
-        <p:txBody>
-          <a:bodyPr xmlns:a="http://schemas.openxmlformats.org/drawingml/2006/main" wrap="square" lIns="0" tIns="0" rIns="0" bIns="0" anchor="t">
-            <a:noAutofit/>
-          </a:bodyPr>
-          <a:lstStyle xmlns:a="http://schemas.openxmlformats.org/drawingml/2006/main"/>
-          <a:p xmlns:a="http://schemas.openxmlformats.org/drawingml/2006/main">
-            <a:pPr algn="l">
-              <a:defRPr sz="2700" b="0">
-                <a:solidFill>
-                  <a:srgbClr val="1F5A45"/>
-                </a:solidFill>
-                <a:latin typeface="Newsreader"/>
-                <a:ea typeface="Newsreader"/>
-                <a:cs typeface="Newsreader"/>
-              </a:defRPr>
-            </a:pPr>
-            <a:r>
-              <a:rPr sz="2700" b="0">
-                <a:solidFill>
-                  <a:srgbClr val="1F5A45"/>
-                </a:solidFill>
-                <a:latin typeface="Newsreader"/>
-                <a:ea typeface="Newsreader"/>
-                <a:cs typeface="Newsreader"/>
-              </a:rPr>
-              <a:t>3</a:t>
-            </a:r>
-          </a:p>
-        </p:txBody>
-      </p:sp>
-      <p:sp>
-        <p:nvSpPr>
-          <p:cNvPr id="11" name="">
-            <a:extLst xmlns:a="http://schemas.openxmlformats.org/drawingml/2006/main">
-              <a:ext uri="{FF2B5EF4-FFF2-40B4-BE49-F238E27FC236}">
-                <a16:creationId xmlns:a16="http://schemas.microsoft.com/office/drawing/2014/main" id="{916DAC25-F7D0-422D-BD91-72F942083BEE}"/>
-              </a:ext>
-            </a:extLst>
-          </p:cNvPr>
-          <p:cNvSpPr>
-            <a:spLocks xmlns:a="http://schemas.openxmlformats.org/drawingml/2006/main" noGrp="1"/>
-          </p:cNvSpPr>
-          <p:nvPr/>
-        </p:nvSpPr>
-        <p:spPr>
-          <a:xfrm xmlns:a="http://schemas.openxmlformats.org/drawingml/2006/main">
-            <a:off x="1343025" y="3895725"/>
-            <a:ext cx="9810750" cy="428625"/>
-          </a:xfrm>
-          <a:prstGeom xmlns:a="http://schemas.openxmlformats.org/drawingml/2006/main" prst="rect">
-            <a:avLst/>
-          </a:prstGeom>
-          <a:noFill xmlns:a="http://schemas.openxmlformats.org/drawingml/2006/main"/>
-          <a:ln xmlns:a="http://schemas.openxmlformats.org/drawingml/2006/main" w="0">
-            <a:noFill/>
-          </a:ln>
-        </p:spPr>
-        <p:txBody>
-          <a:bodyPr xmlns:a="http://schemas.openxmlformats.org/drawingml/2006/main" wrap="square" lIns="0" tIns="0" rIns="0" bIns="0" anchor="t">
-            <a:noAutofit/>
-          </a:bodyPr>
-          <a:lstStyle xmlns:a="http://schemas.openxmlformats.org/drawingml/2006/main"/>
-          <a:p xmlns:a="http://schemas.openxmlformats.org/drawingml/2006/main">
-            <a:pPr algn="l">
-              <a:defRPr sz="2175" b="0">
-                <a:solidFill>
-                  <a:srgbClr val="15171A"/>
-                </a:solidFill>
-                <a:latin typeface="Inter"/>
-                <a:ea typeface="Inter"/>
-                <a:cs typeface="Inter"/>
-              </a:defRPr>
-            </a:pPr>
-            <a:r>
-              <a:rPr sz="2175" b="0">
-                <a:solidFill>
-                  <a:srgbClr val="15171A"/>
-                </a:solidFill>
-                <a:latin typeface="Inter"/>
-                <a:ea typeface="Inter"/>
-                <a:cs typeface="Inter"/>
-              </a:rPr>
-              <a:t>SQLite speichert den Eintrag</a:t>
-            </a:r>
-          </a:p>
-        </p:txBody>
-      </p:sp>
-      <p:sp>
-        <p:nvSpPr>
-          <p:cNvPr id="12" name="">
-            <a:extLst xmlns:a="http://schemas.openxmlformats.org/drawingml/2006/main">
-              <a:ext uri="{FF2B5EF4-FFF2-40B4-BE49-F238E27FC236}">
-                <a16:creationId xmlns:a16="http://schemas.microsoft.com/office/drawing/2014/main" id="{9D2E9B2E-F109-48A3-87FD-CDE921AB159F}"/>
-              </a:ext>
-            </a:extLst>
-          </p:cNvPr>
-          <p:cNvSpPr>
-            <a:spLocks xmlns:a="http://schemas.openxmlformats.org/drawingml/2006/main" noGrp="1"/>
-          </p:cNvSpPr>
-          <p:nvPr/>
-        </p:nvSpPr>
-        <p:spPr>
-          <a:xfrm xmlns:a="http://schemas.openxmlformats.org/drawingml/2006/main">
-            <a:off x="1362075" y="4314825"/>
-            <a:ext cx="9525000" cy="295275"/>
-          </a:xfrm>
-          <a:prstGeom xmlns:a="http://schemas.openxmlformats.org/drawingml/2006/main" prst="rect">
-            <a:avLst/>
-          </a:prstGeom>
-          <a:noFill xmlns:a="http://schemas.openxmlformats.org/drawingml/2006/main"/>
-          <a:ln xmlns:a="http://schemas.openxmlformats.org/drawingml/2006/main" w="0">
-            <a:noFill/>
-          </a:ln>
-        </p:spPr>
-        <p:txBody>
-          <a:bodyPr xmlns:a="http://schemas.openxmlformats.org/drawingml/2006/main" wrap="square" lIns="0" tIns="0" rIns="0" bIns="0" anchor="t">
-            <a:noAutofit/>
-          </a:bodyPr>
-          <a:lstStyle xmlns:a="http://schemas.openxmlformats.org/drawingml/2006/main"/>
-          <a:p xmlns:a="http://schemas.openxmlformats.org/drawingml/2006/main">
-            <a:pPr algn="l">
-              <a:defRPr sz="1575" b="0">
-                <a:solidFill>
-                  <a:srgbClr val="6E6D68"/>
-                </a:solidFill>
-                <a:latin typeface="Inter"/>
-                <a:ea typeface="Inter"/>
-                <a:cs typeface="Inter"/>
-              </a:defRPr>
-            </a:pPr>
-            <a:r>
-              <a:rPr sz="1575" b="0">
-                <a:solidFill>
-                  <a:srgbClr val="6E6D68"/>
-                </a:solidFill>
-                <a:latin typeface="Inter"/>
-                <a:ea typeface="Inter"/>
-                <a:cs typeface="Inter"/>
-              </a:rPr>
-              <a:t>expenses.js + db.js</a:t>
-            </a:r>
-          </a:p>
-        </p:txBody>
-      </p:sp>
-      <p:sp>
-        <p:nvSpPr>
-          <p:cNvPr id="13" name="">
-            <a:extLst xmlns:a="http://schemas.openxmlformats.org/drawingml/2006/main">
-              <a:ext uri="{FF2B5EF4-FFF2-40B4-BE49-F238E27FC236}">
-                <a16:creationId xmlns:a16="http://schemas.microsoft.com/office/drawing/2014/main" id="{0627361B-3A21-4E5E-ADC1-66AD8EA645B0}"/>
-              </a:ext>
-            </a:extLst>
-          </p:cNvPr>
-          <p:cNvSpPr>
-            <a:spLocks xmlns:a="http://schemas.openxmlformats.org/drawingml/2006/main" noGrp="1"/>
-          </p:cNvSpPr>
-          <p:nvPr/>
-        </p:nvSpPr>
-        <p:spPr>
-          <a:xfrm xmlns:a="http://schemas.openxmlformats.org/drawingml/2006/main">
-            <a:off x="628650" y="4743450"/>
-            <a:ext cx="495300" cy="561975"/>
-          </a:xfrm>
-          <a:prstGeom xmlns:a="http://schemas.openxmlformats.org/drawingml/2006/main" prst="rect">
-            <a:avLst/>
-          </a:prstGeom>
-          <a:noFill xmlns:a="http://schemas.openxmlformats.org/drawingml/2006/main"/>
-          <a:ln xmlns:a="http://schemas.openxmlformats.org/drawingml/2006/main" w="0">
-            <a:noFill/>
-          </a:ln>
-        </p:spPr>
-        <p:txBody>
-          <a:bodyPr xmlns:a="http://schemas.openxmlformats.org/drawingml/2006/main" wrap="square" lIns="0" tIns="0" rIns="0" bIns="0" anchor="t">
-            <a:noAutofit/>
-          </a:bodyPr>
-          <a:lstStyle xmlns:a="http://schemas.openxmlformats.org/drawingml/2006/main"/>
-          <a:p xmlns:a="http://schemas.openxmlformats.org/drawingml/2006/main">
-            <a:pPr algn="l">
-              <a:defRPr sz="2700" b="0">
-                <a:solidFill>
-                  <a:srgbClr val="1F5A45"/>
-                </a:solidFill>
-                <a:latin typeface="Newsreader"/>
-                <a:ea typeface="Newsreader"/>
-                <a:cs typeface="Newsreader"/>
-              </a:defRPr>
-            </a:pPr>
-            <a:r>
-              <a:rPr sz="2700" b="0">
-                <a:solidFill>
-                  <a:srgbClr val="1F5A45"/>
-                </a:solidFill>
-                <a:latin typeface="Newsreader"/>
-                <a:ea typeface="Newsreader"/>
-                <a:cs typeface="Newsreader"/>
-              </a:rPr>
-              <a:t>4</a:t>
-            </a:r>
-          </a:p>
-        </p:txBody>
-      </p:sp>
-      <p:sp>
-        <p:nvSpPr>
-          <p:cNvPr id="14" name="">
-            <a:extLst xmlns:a="http://schemas.openxmlformats.org/drawingml/2006/main">
-              <a:ext uri="{FF2B5EF4-FFF2-40B4-BE49-F238E27FC236}">
-                <a16:creationId xmlns:a16="http://schemas.microsoft.com/office/drawing/2014/main" id="{AEC96999-3334-41AC-BBD8-477CF900639A}"/>
-              </a:ext>
-            </a:extLst>
-          </p:cNvPr>
-          <p:cNvSpPr>
-            <a:spLocks xmlns:a="http://schemas.openxmlformats.org/drawingml/2006/main" noGrp="1"/>
-          </p:cNvSpPr>
-          <p:nvPr/>
-        </p:nvSpPr>
-        <p:spPr>
-          <a:xfrm xmlns:a="http://schemas.openxmlformats.org/drawingml/2006/main">
-            <a:off x="1343025" y="4743450"/>
-            <a:ext cx="9810750" cy="428625"/>
-          </a:xfrm>
-          <a:prstGeom xmlns:a="http://schemas.openxmlformats.org/drawingml/2006/main" prst="rect">
-            <a:avLst/>
-          </a:prstGeom>
-          <a:noFill xmlns:a="http://schemas.openxmlformats.org/drawingml/2006/main"/>
-          <a:ln xmlns:a="http://schemas.openxmlformats.org/drawingml/2006/main" w="0">
-            <a:noFill/>
-          </a:ln>
-        </p:spPr>
-        <p:txBody>
-          <a:bodyPr xmlns:a="http://schemas.openxmlformats.org/drawingml/2006/main" wrap="square" lIns="0" tIns="0" rIns="0" bIns="0" anchor="t">
-            <a:noAutofit/>
-          </a:bodyPr>
-          <a:lstStyle xmlns:a="http://schemas.openxmlformats.org/drawingml/2006/main"/>
-          <a:p xmlns:a="http://schemas.openxmlformats.org/drawingml/2006/main">
-            <a:pPr algn="l">
-              <a:defRPr sz="2175" b="0">
-                <a:solidFill>
-                  <a:srgbClr val="15171A"/>
-                </a:solidFill>
-                <a:latin typeface="Inter"/>
-                <a:ea typeface="Inter"/>
-                <a:cs typeface="Inter"/>
-              </a:defRPr>
-            </a:pPr>
-            <a:r>
-              <a:rPr sz="2175" b="0">
-                <a:solidFill>
-                  <a:srgbClr val="15171A"/>
-                </a:solidFill>
-                <a:latin typeface="Inter"/>
-                <a:ea typeface="Inter"/>
-                <a:cs typeface="Inter"/>
-              </a:rPr>
-              <a:t>Übersicht berechnet das Budget neu</a:t>
-            </a:r>
-          </a:p>
-        </p:txBody>
-      </p:sp>
-      <p:sp>
-        <p:nvSpPr>
-          <p:cNvPr id="15" name="">
-            <a:extLst xmlns:a="http://schemas.openxmlformats.org/drawingml/2006/main">
-              <a:ext uri="{FF2B5EF4-FFF2-40B4-BE49-F238E27FC236}">
-                <a16:creationId xmlns:a16="http://schemas.microsoft.com/office/drawing/2014/main" id="{B1E7D155-1E57-43D3-9AD3-560A6CF5616A}"/>
-              </a:ext>
-            </a:extLst>
-          </p:cNvPr>
-          <p:cNvSpPr>
-            <a:spLocks xmlns:a="http://schemas.openxmlformats.org/drawingml/2006/main" noGrp="1"/>
-          </p:cNvSpPr>
-          <p:nvPr/>
-        </p:nvSpPr>
-        <p:spPr>
-          <a:xfrm xmlns:a="http://schemas.openxmlformats.org/drawingml/2006/main">
-            <a:off x="1362075" y="5162550"/>
-            <a:ext cx="9525000" cy="295275"/>
-          </a:xfrm>
-          <a:prstGeom xmlns:a="http://schemas.openxmlformats.org/drawingml/2006/main" prst="rect">
-            <a:avLst/>
-          </a:prstGeom>
-          <a:noFill xmlns:a="http://schemas.openxmlformats.org/drawingml/2006/main"/>
-          <a:ln xmlns:a="http://schemas.openxmlformats.org/drawingml/2006/main" w="0">
-            <a:noFill/>
-          </a:ln>
-        </p:spPr>
-        <p:txBody>
-          <a:bodyPr xmlns:a="http://schemas.openxmlformats.org/drawingml/2006/main" wrap="square" lIns="0" tIns="0" rIns="0" bIns="0" anchor="t">
-            <a:noAutofit/>
-          </a:bodyPr>
-          <a:lstStyle xmlns:a="http://schemas.openxmlformats.org/drawingml/2006/main"/>
-          <a:p xmlns:a="http://schemas.openxmlformats.org/drawingml/2006/main">
-            <a:pPr algn="l">
-              <a:defRPr sz="1575" b="0">
-                <a:solidFill>
-                  <a:srgbClr val="6E6D68"/>
-                </a:solidFill>
-                <a:latin typeface="Inter"/>
-                <a:ea typeface="Inter"/>
-                <a:cs typeface="Inter"/>
-              </a:defRPr>
-            </a:pPr>
-            <a:r>
-              <a:rPr sz="1575" b="0">
-                <a:solidFill>
-                  <a:srgbClr val="6E6D68"/>
-                </a:solidFill>
-                <a:latin typeface="Inter"/>
-                <a:ea typeface="Inter"/>
-                <a:cs typeface="Inter"/>
-              </a:rPr>
-              <a:t>OverviewScreen + getBudgetStatus</a:t>
-            </a:r>
-          </a:p>
-        </p:txBody>
-      </p:sp>
-      <p:sp>
-        <p:nvSpPr>
-          <p:cNvPr id="16" name="">
-            <a:extLst xmlns:a="http://schemas.openxmlformats.org/drawingml/2006/main">
-              <a:ext uri="{FF2B5EF4-FFF2-40B4-BE49-F238E27FC236}">
-                <a16:creationId xmlns:a16="http://schemas.microsoft.com/office/drawing/2014/main" id="{1597DC7C-FAD4-4FBD-881D-EF604F14FAF4}"/>
-              </a:ext>
-            </a:extLst>
-          </p:cNvPr>
-          <p:cNvSpPr>
-            <a:spLocks xmlns:a="http://schemas.openxmlformats.org/drawingml/2006/main" noGrp="1"/>
-          </p:cNvSpPr>
-          <p:nvPr/>
-        </p:nvSpPr>
-        <p:spPr>
-          <a:xfrm xmlns:a="http://schemas.openxmlformats.org/drawingml/2006/main">
-            <a:off x="7343775" y="1485900"/>
-            <a:ext cx="4124325" cy="419100"/>
-          </a:xfrm>
-          <a:prstGeom xmlns:a="http://schemas.openxmlformats.org/drawingml/2006/main" prst="rect">
-            <a:avLst/>
-          </a:prstGeom>
-          <a:noFill xmlns:a="http://schemas.openxmlformats.org/drawingml/2006/main"/>
-          <a:ln xmlns:a="http://schemas.openxmlformats.org/drawingml/2006/main" w="0">
-            <a:noFill/>
-          </a:ln>
-        </p:spPr>
-        <p:txBody>
-          <a:bodyPr xmlns:a="http://schemas.openxmlformats.org/drawingml/2006/main" wrap="square" lIns="0" tIns="0" rIns="0" bIns="0" anchor="t">
-            <a:noAutofit/>
-          </a:bodyPr>
-          <a:lstStyle xmlns:a="http://schemas.openxmlformats.org/drawingml/2006/main"/>
-          <a:p xmlns:a="http://schemas.openxmlformats.org/drawingml/2006/main">
-            <a:pPr algn="r">
-              <a:defRPr sz="2025" b="0">
-                <a:solidFill>
-                  <a:srgbClr val="1F5A45"/>
-                </a:solidFill>
-                <a:latin typeface="Newsreader"/>
-                <a:ea typeface="Newsreader"/>
-                <a:cs typeface="Newsreader"/>
-              </a:defRPr>
-            </a:pPr>
-            <a:r>
-              <a:rPr sz="2025" b="0">
-                <a:solidFill>
-                  <a:srgbClr val="1F5A45"/>
-                </a:solidFill>
-                <a:latin typeface="Newsreader"/>
-                <a:ea typeface="Newsreader"/>
-                <a:cs typeface="Newsreader"/>
-              </a:rPr>
-              <a:t>CHF 14.80 = 1480 Rappen</a:t>
-            </a:r>
-          </a:p>
-        </p:txBody>
-      </p:sp>
+        </p:spPr>
+      </p:pic>
     </p:spTree>
     <p:extLst>
       <p:ext uri="{BB962C8B-B14F-4D97-AF65-F5344CB8AC3E}">
-        <p14:creationId xmlns:p14="http://schemas.microsoft.com/office/powerpoint/2010/main" val="816071995"/>
+        <p14:creationId xmlns:p14="http://schemas.microsoft.com/office/powerpoint/2010/main" val="1736987920"/>
       </p:ext>
     </p:extLst>
   </p:cSld>
@@ -6157,10 +5983,10 @@
       </p:grpSpPr>
       <p:sp>
         <p:nvSpPr>
-          <p:cNvPr id="5" name="">
+          <p:cNvPr id="6" name="">
             <a:extLst xmlns:a="http://schemas.openxmlformats.org/drawingml/2006/main">
               <a:ext uri="{FF2B5EF4-FFF2-40B4-BE49-F238E27FC236}">
-                <a16:creationId xmlns:a16="http://schemas.microsoft.com/office/drawing/2014/main" id="{C56F8B8F-BB3B-4BED-8B04-22544C2DA07E}"/>
+                <a16:creationId xmlns:a16="http://schemas.microsoft.com/office/drawing/2014/main" id="{19271203-F32E-44D5-8393-3ECA3B6542B0}"/>
               </a:ext>
             </a:extLst>
           </p:cNvPr>
@@ -6217,7 +6043,7 @@
           <p:cNvPr id="2" name="">
             <a:extLst xmlns:a="http://schemas.openxmlformats.org/drawingml/2006/main">
               <a:ext uri="{FF2B5EF4-FFF2-40B4-BE49-F238E27FC236}">
-                <a16:creationId xmlns:a16="http://schemas.microsoft.com/office/drawing/2014/main" id="{A282006B-0F60-4F4A-8534-0F242F77AF0B}"/>
+                <a16:creationId xmlns:a16="http://schemas.microsoft.com/office/drawing/2014/main" id="{307053AE-BC77-4BDD-9C32-0F0124B3C134}"/>
               </a:ext>
             </a:extLst>
           </p:cNvPr>
@@ -6264,20 +6090,77 @@
                 <a:ea typeface="Newsreader"/>
                 <a:cs typeface="Newsreader"/>
               </a:rPr>
-              <a:t>Konzept und Umsetzung</a:t>
+              <a:t>Die Technik hinter Spendly</a:t>
+            </a:r>
+          </a:p>
+        </p:txBody>
+      </p:sp>
+      <p:sp>
+        <p:nvSpPr>
+          <p:cNvPr id="3" name="">
+            <a:extLst xmlns:a="http://schemas.openxmlformats.org/drawingml/2006/main">
+              <a:ext uri="{FF2B5EF4-FFF2-40B4-BE49-F238E27FC236}">
+                <a16:creationId xmlns:a16="http://schemas.microsoft.com/office/drawing/2014/main" id="{034C2A89-26E3-4F17-AA89-340A3DE3DD26}"/>
+              </a:ext>
+            </a:extLst>
+          </p:cNvPr>
+          <p:cNvSpPr>
+            <a:spLocks xmlns:a="http://schemas.openxmlformats.org/drawingml/2006/main" noGrp="1"/>
+          </p:cNvSpPr>
+          <p:nvPr/>
+        </p:nvSpPr>
+        <p:spPr>
+          <a:xfrm xmlns:a="http://schemas.openxmlformats.org/drawingml/2006/main">
+            <a:off x="619125" y="1362075"/>
+            <a:ext cx="10953750" cy="381000"/>
+          </a:xfrm>
+          <a:prstGeom xmlns:a="http://schemas.openxmlformats.org/drawingml/2006/main" prst="rect">
+            <a:avLst/>
+          </a:prstGeom>
+          <a:noFill xmlns:a="http://schemas.openxmlformats.org/drawingml/2006/main"/>
+          <a:ln xmlns:a="http://schemas.openxmlformats.org/drawingml/2006/main" w="0">
+            <a:noFill/>
+          </a:ln>
+        </p:spPr>
+        <p:txBody>
+          <a:bodyPr xmlns:a="http://schemas.openxmlformats.org/drawingml/2006/main" wrap="square" lIns="0" tIns="0" rIns="0" bIns="0" anchor="t">
+            <a:noAutofit/>
+          </a:bodyPr>
+          <a:lstStyle xmlns:a="http://schemas.openxmlformats.org/drawingml/2006/main"/>
+          <a:p xmlns:a="http://schemas.openxmlformats.org/drawingml/2006/main">
+            <a:pPr algn="l">
+              <a:defRPr sz="1875" b="0">
+                <a:solidFill>
+                  <a:srgbClr val="1F5A45"/>
+                </a:solidFill>
+                <a:latin typeface="Inter"/>
+                <a:ea typeface="Inter"/>
+                <a:cs typeface="Inter"/>
+              </a:defRPr>
+            </a:pPr>
+            <a:r>
+              <a:rPr sz="1875" b="0">
+                <a:solidFill>
+                  <a:srgbClr val="1F5A45"/>
+                </a:solidFill>
+                <a:latin typeface="Inter"/>
+                <a:ea typeface="Inter"/>
+                <a:cs typeface="Inter"/>
+              </a:rPr>
+              <a:t>React Native und Expo, lokale SQLite-Datenbank</a:t>
             </a:r>
           </a:p>
         </p:txBody>
       </p:sp>
       <p:graphicFrame>
         <p:nvGraphicFramePr>
-          <p:cNvPr id="7" name=""/>
+          <p:cNvPr id="9" name=""/>
           <p:cNvGraphicFramePr/>
           <p:nvPr/>
         </p:nvGraphicFramePr>
         <p:xfrm>
-          <a:off xmlns:a="http://schemas.openxmlformats.org/drawingml/2006/main" x="609600" y="1581150"/>
-          <a:ext xmlns:a="http://schemas.openxmlformats.org/drawingml/2006/main" cx="10953750" cy="4038600"/>
+          <a:off xmlns:a="http://schemas.openxmlformats.org/drawingml/2006/main" x="609600" y="2019300"/>
+          <a:ext xmlns:a="http://schemas.openxmlformats.org/drawingml/2006/main" cx="10953750" cy="3638550"/>
         </p:xfrm>
         <a:graphic xmlns:a="http://schemas.openxmlformats.org/drawingml/2006/main">
           <a:graphicData uri="http://schemas.openxmlformats.org/drawingml/2006/table">
@@ -6288,7 +6171,7 @@
                 <a:gridCol w="3810000"/>
                 <a:gridCol w="4143375"/>
               </a:tblGrid>
-              <a:tr h="609600">
+              <a:tr h="590550">
                 <a:tc>
                   <a:txBody>
                     <a:bodyPr/>
@@ -6303,11 +6186,11 @@
                           <a:ea typeface="Inter"/>
                           <a:cs typeface="Inter"/>
                         </a:rPr>
-                        <a:t>LB1-Konzept</a:t>
+                        <a:t>Aus LB1</a:t>
                       </a:r>
                     </a:p>
                   </a:txBody>
-                  <a:tcPr marL="171450" marR="171450" marT="142875" marB="142875" anchor="ctr">
+                  <a:tcPr marL="171450" marR="171450" marT="114300" marB="114300" anchor="ctr">
                     <a:lnL w="0">
                       <a:noFill/>
                     </a:lnL>
@@ -6339,7 +6222,7 @@
                       </a:r>
                     </a:p>
                   </a:txBody>
-                  <a:tcPr marL="171450" marR="171450" marT="142875" marB="142875" anchor="ctr">
+                  <a:tcPr marL="171450" marR="171450" marT="114300" marB="114300" anchor="ctr">
                     <a:lnT w="6191">
                       <a:solidFill>
                         <a:srgbClr val="D6D8D0"/>
@@ -6364,11 +6247,11 @@
                           <a:ea typeface="Inter"/>
                           <a:cs typeface="Inter"/>
                         </a:rPr>
-                        <a:t>Einordnung</a:t>
+                        <a:t>Ergebnis</a:t>
                       </a:r>
                     </a:p>
                   </a:txBody>
-                  <a:tcPr marL="171450" marR="171450" marT="142875" marB="142875" anchor="ctr">
+                  <a:tcPr marL="171450" marR="171450" marT="114300" marB="114300" anchor="ctr">
                     <a:lnR w="0">
                       <a:noFill/>
                     </a:lnR>
@@ -6383,7 +6266,7 @@
                   </a:tcPr>
                 </a:tc>
               </a:tr>
-              <a:tr h="857250">
+              <a:tr h="762000">
                 <a:tc>
                   <a:txBody>
                     <a:bodyPr/>
@@ -6402,7 +6285,7 @@
                       </a:r>
                     </a:p>
                   </a:txBody>
-                  <a:tcPr marL="171450" marR="171450" marT="142875" marB="142875" anchor="ctr">
+                  <a:tcPr marL="171450" marR="171450" marT="114300" marB="114300" anchor="ctr">
                     <a:lnL w="0">
                       <a:noFill/>
                     </a:lnL>
@@ -6425,11 +6308,171 @@
                           <a:ea typeface="Inter"/>
                           <a:cs typeface="Inter"/>
                         </a:rPr>
-                        <a:t>Monatswerte und Standard</a:t>
+                        <a:t>Eigene Monatswerte</a:t>
                       </a:r>
                     </a:p>
                   </a:txBody>
-                  <a:tcPr marL="171450" marR="171450" marT="142875" marB="142875" anchor="ctr">
+                  <a:tcPr marL="171450" marR="171450" marT="114300" marB="114300" anchor="ctr">
+                    <a:solidFill>
+                      <a:srgbClr val="F6F5F1"/>
+                    </a:solidFill>
+                  </a:tcPr>
+                </a:tc>
+                <a:tc>
+                  <a:txBody>
+                    <a:bodyPr/>
+                    <a:lstStyle/>
+                    <a:p>
+                      <a:r>
+                        <a:rPr sz="1875">
+                          <a:solidFill>
+                            <a:srgbClr val="15171A"/>
+                          </a:solidFill>
+                          <a:latin typeface="Inter"/>
+                          <a:ea typeface="Inter"/>
+                          <a:cs typeface="Inter"/>
+                        </a:rPr>
+                        <a:t>Alte Budgets bleiben erhalten</a:t>
+                      </a:r>
+                    </a:p>
+                  </a:txBody>
+                  <a:tcPr marL="171450" marR="171450" marT="114300" marB="114300" anchor="ctr">
+                    <a:lnR w="0">
+                      <a:noFill/>
+                    </a:lnR>
+                    <a:solidFill>
+                      <a:srgbClr val="F6F5F1"/>
+                    </a:solidFill>
+                  </a:tcPr>
+                </a:tc>
+              </a:tr>
+              <a:tr h="762000">
+                <a:tc>
+                  <a:txBody>
+                    <a:bodyPr/>
+                    <a:lstStyle/>
+                    <a:p>
+                      <a:r>
+                        <a:rPr sz="1875">
+                          <a:solidFill>
+                            <a:srgbClr val="15171A"/>
+                          </a:solidFill>
+                          <a:latin typeface="Inter"/>
+                          <a:ea typeface="Inter"/>
+                          <a:cs typeface="Inter"/>
+                        </a:rPr>
+                        <a:t>Rückgängig für 5 Sekunden</a:t>
+                      </a:r>
+                    </a:p>
+                  </a:txBody>
+                  <a:tcPr marL="171450" marR="171450" marT="114300" marB="114300" anchor="ctr">
+                    <a:lnL w="0">
+                      <a:noFill/>
+                    </a:lnL>
+                    <a:solidFill>
+                      <a:srgbClr val="F6F5F1"/>
+                    </a:solidFill>
+                  </a:tcPr>
+                </a:tc>
+                <a:tc>
+                  <a:txBody>
+                    <a:bodyPr/>
+                    <a:lstStyle/>
+                    <a:p>
+                      <a:r>
+                        <a:rPr sz="1875">
+                          <a:solidFill>
+                            <a:srgbClr val="15171A"/>
+                          </a:solidFill>
+                          <a:latin typeface="Inter"/>
+                          <a:ea typeface="Inter"/>
+                          <a:cs typeface="Inter"/>
+                        </a:rPr>
+                        <a:t>Frist in SQLite</a:t>
+                      </a:r>
+                    </a:p>
+                  </a:txBody>
+                  <a:tcPr marL="171450" marR="171450" marT="114300" marB="114300" anchor="ctr">
+                    <a:solidFill>
+                      <a:srgbClr val="F6F5F1"/>
+                    </a:solidFill>
+                  </a:tcPr>
+                </a:tc>
+                <a:tc>
+                  <a:txBody>
+                    <a:bodyPr/>
+                    <a:lstStyle/>
+                    <a:p>
+                      <a:r>
+                        <a:rPr sz="1875">
+                          <a:solidFill>
+                            <a:srgbClr val="15171A"/>
+                          </a:solidFill>
+                          <a:latin typeface="Inter"/>
+                          <a:ea typeface="Inter"/>
+                          <a:cs typeface="Inter"/>
+                        </a:rPr>
+                        <a:t>Bleibt nach Neustart gültig</a:t>
+                      </a:r>
+                    </a:p>
+                  </a:txBody>
+                  <a:tcPr marL="171450" marR="171450" marT="114300" marB="114300" anchor="ctr">
+                    <a:lnR w="0">
+                      <a:noFill/>
+                    </a:lnR>
+                    <a:solidFill>
+                      <a:srgbClr val="F6F5F1"/>
+                    </a:solidFill>
+                  </a:tcPr>
+                </a:tc>
+              </a:tr>
+              <a:tr h="762000">
+                <a:tc>
+                  <a:txBody>
+                    <a:bodyPr/>
+                    <a:lstStyle/>
+                    <a:p>
+                      <a:r>
+                        <a:rPr sz="1875">
+                          <a:solidFill>
+                            <a:srgbClr val="15171A"/>
+                          </a:solidFill>
+                          <a:latin typeface="Inter"/>
+                          <a:ea typeface="Inter"/>
+                          <a:cs typeface="Inter"/>
+                        </a:rPr>
+                        <a:t>Geld in ganzen Rappen</a:t>
+                      </a:r>
+                    </a:p>
+                  </a:txBody>
+                  <a:tcPr marL="171450" marR="171450" marT="114300" marB="114300" anchor="ctr">
+                    <a:lnL w="0">
+                      <a:noFill/>
+                    </a:lnL>
+                    <a:solidFill>
+                      <a:srgbClr val="F6F5F1"/>
+                    </a:solidFill>
+                  </a:tcPr>
+                </a:tc>
+                <a:tc>
+                  <a:txBody>
+                    <a:bodyPr/>
+                    <a:lstStyle/>
+                    <a:p>
+                      <a:r>
+                        <a:rPr sz="1875">
+                          <a:solidFill>
+                            <a:srgbClr val="15171A"/>
+                          </a:solidFill>
+                          <a:latin typeface="Inter"/>
+                          <a:ea typeface="Inter"/>
+                          <a:cs typeface="Inter"/>
+                        </a:rPr>
+                        <a:t>CHF 14.80 = 1480</a:t>
+                      </a:r>
+                    </a:p>
+                  </a:txBody>
+                  <a:tcPr marL="171450" marR="171450" marT="114300" marB="114300" anchor="ctr">
                     <a:solidFill>
                       <a:srgbClr val="F6F5F1"/>
                     </a:solidFill>
@@ -6453,7 +6496,7 @@
                       </a:r>
                     </a:p>
                   </a:txBody>
-                  <a:tcPr marL="171450" marR="171450" marT="142875" marB="142875" anchor="ctr">
+                  <a:tcPr marL="171450" marR="171450" marT="114300" marB="114300" anchor="ctr">
                     <a:lnR w="0">
                       <a:noFill/>
                     </a:lnR>
@@ -6463,87 +6506,7 @@
                   </a:tcPr>
                 </a:tc>
               </a:tr>
-              <a:tr h="857250">
-                <a:tc>
-                  <a:txBody>
-                    <a:bodyPr/>
-                    <a:lstStyle/>
-                    <a:p>
-                      <a:r>
-                        <a:rPr sz="1875">
-                          <a:solidFill>
-                            <a:srgbClr val="15171A"/>
-                          </a:solidFill>
-                          <a:latin typeface="Inter"/>
-                          <a:ea typeface="Inter"/>
-                          <a:cs typeface="Inter"/>
-                        </a:rPr>
-                        <a:t>Rückgängig für 5 Sekunden</a:t>
-                      </a:r>
-                    </a:p>
-                  </a:txBody>
-                  <a:tcPr marL="171450" marR="171450" marT="142875" marB="142875" anchor="ctr">
-                    <a:lnL w="0">
-                      <a:noFill/>
-                    </a:lnL>
-                    <a:solidFill>
-                      <a:srgbClr val="F6F5F1"/>
-                    </a:solidFill>
-                  </a:tcPr>
-                </a:tc>
-                <a:tc>
-                  <a:txBody>
-                    <a:bodyPr/>
-                    <a:lstStyle/>
-                    <a:p>
-                      <a:r>
-                        <a:rPr sz="1875">
-                          <a:solidFill>
-                            <a:srgbClr val="15171A"/>
-                          </a:solidFill>
-                          <a:latin typeface="Inter"/>
-                          <a:ea typeface="Inter"/>
-                          <a:cs typeface="Inter"/>
-                        </a:rPr>
-                        <a:t>Löschfrist in SQLite</a:t>
-                      </a:r>
-                    </a:p>
-                  </a:txBody>
-                  <a:tcPr marL="171450" marR="171450" marT="142875" marB="142875" anchor="ctr">
-                    <a:solidFill>
-                      <a:srgbClr val="F6F5F1"/>
-                    </a:solidFill>
-                  </a:tcPr>
-                </a:tc>
-                <a:tc>
-                  <a:txBody>
-                    <a:bodyPr/>
-                    <a:lstStyle/>
-                    <a:p>
-                      <a:r>
-                        <a:rPr sz="1875">
-                          <a:solidFill>
-                            <a:srgbClr val="15171A"/>
-                          </a:solidFill>
-                          <a:latin typeface="Inter"/>
-                          <a:ea typeface="Inter"/>
-                          <a:cs typeface="Inter"/>
-                        </a:rPr>
-                        <a:t>Frist bleibt gespeichert</a:t>
-                      </a:r>
-                    </a:p>
-                  </a:txBody>
-                  <a:tcPr marL="171450" marR="171450" marT="142875" marB="142875" anchor="ctr">
-                    <a:lnR w="0">
-                      <a:noFill/>
-                    </a:lnR>
-                    <a:solidFill>
-                      <a:srgbClr val="F6F5F1"/>
-                    </a:solidFill>
-                  </a:tcPr>
-                </a:tc>
-              </a:tr>
-              <a:tr h="857250">
+              <a:tr h="762000">
                 <a:tc>
                   <a:txBody>
                     <a:bodyPr/>
@@ -6562,87 +6525,7 @@
                       </a:r>
                     </a:p>
                   </a:txBody>
-                  <a:tcPr marL="171450" marR="171450" marT="142875" marB="142875" anchor="ctr">
-                    <a:lnL w="0">
-                      <a:noFill/>
-                    </a:lnL>
-                    <a:solidFill>
-                      <a:srgbClr val="F6F5F1"/>
-                    </a:solidFill>
-                  </a:tcPr>
-                </a:tc>
-                <a:tc>
-                  <a:txBody>
-                    <a:bodyPr/>
-                    <a:lstStyle/>
-                    <a:p>
-                      <a:r>
-                        <a:rPr sz="1875">
-                          <a:solidFill>
-                            <a:srgbClr val="15171A"/>
-                          </a:solidFill>
-                          <a:latin typeface="Inter"/>
-                          <a:ea typeface="Inter"/>
-                          <a:cs typeface="Inter"/>
-                        </a:rPr>
-                        <a:t>SHA-256 mit Salt</a:t>
-                      </a:r>
-                    </a:p>
-                  </a:txBody>
-                  <a:tcPr marL="171450" marR="171450" marT="142875" marB="142875" anchor="ctr">
-                    <a:solidFill>
-                      <a:srgbClr val="F6F5F1"/>
-                    </a:solidFill>
-                  </a:tcPr>
-                </a:tc>
-                <a:tc>
-                  <a:txBody>
-                    <a:bodyPr/>
-                    <a:lstStyle/>
-                    <a:p>
-                      <a:r>
-                        <a:rPr sz="1875">
-                          <a:solidFill>
-                            <a:srgbClr val="15171A"/>
-                          </a:solidFill>
-                          <a:latin typeface="Inter"/>
-                          <a:ea typeface="Inter"/>
-                          <a:cs typeface="Inter"/>
-                        </a:rPr>
-                        <a:t>Einfacher als geplant</a:t>
-                      </a:r>
-                    </a:p>
-                  </a:txBody>
-                  <a:tcPr marL="171450" marR="171450" marT="142875" marB="142875" anchor="ctr">
-                    <a:lnR w="0">
-                      <a:noFill/>
-                    </a:lnR>
-                    <a:solidFill>
-                      <a:srgbClr val="F6F5F1"/>
-                    </a:solidFill>
-                  </a:tcPr>
-                </a:tc>
-              </a:tr>
-              <a:tr h="857250">
-                <a:tc>
-                  <a:txBody>
-                    <a:bodyPr/>
-                    <a:lstStyle/>
-                    <a:p>
-                      <a:r>
-                        <a:rPr sz="1875">
-                          <a:solidFill>
-                            <a:srgbClr val="15171A"/>
-                          </a:solidFill>
-                          <a:latin typeface="Inter"/>
-                          <a:ea typeface="Inter"/>
-                          <a:cs typeface="Inter"/>
-                        </a:rPr>
-                        <a:t>Dark Mode optional</a:t>
-                      </a:r>
-                    </a:p>
-                  </a:txBody>
-                  <a:tcPr marL="171450" marR="171450" marT="142875" marB="142875" anchor="ctr">
+                  <a:tcPr marL="171450" marR="171450" marT="114300" marB="114300" anchor="ctr">
                     <a:lnL w="0">
                       <a:noFill/>
                     </a:lnL>
@@ -6670,11 +6553,11 @@
                           <a:ea typeface="Inter"/>
                           <a:cs typeface="Inter"/>
                         </a:rPr>
-                        <a:t>Hell, Dunkel und System</a:t>
+                        <a:t>SHA-256 mit Salt</a:t>
                       </a:r>
                     </a:p>
                   </a:txBody>
-                  <a:tcPr marL="171450" marR="171450" marT="142875" marB="142875" anchor="ctr">
+                  <a:tcPr marL="171450" marR="171450" marT="114300" marB="114300" anchor="ctr">
                     <a:lnB w="6191">
                       <a:solidFill>
                         <a:srgbClr val="D6D8D0"/>
@@ -6699,11 +6582,11 @@
                           <a:ea typeface="Inter"/>
                           <a:cs typeface="Inter"/>
                         </a:rPr>
-                        <a:t>Zusätzlicher Umfang</a:t>
+                        <a:t>Einfacher als geplant</a:t>
                       </a:r>
                     </a:p>
                   </a:txBody>
-                  <a:tcPr marL="171450" marR="171450" marT="142875" marB="142875" anchor="ctr">
+                  <a:tcPr marL="171450" marR="171450" marT="114300" marB="114300" anchor="ctr">
                     <a:lnR w="0">
                       <a:noFill/>
                     </a:lnR>
@@ -6724,10 +6607,10 @@
       </p:graphicFrame>
       <p:sp>
         <p:nvSpPr>
-          <p:cNvPr id="4" name="">
+          <p:cNvPr id="5" name="">
             <a:extLst xmlns:a="http://schemas.openxmlformats.org/drawingml/2006/main">
               <a:ext uri="{FF2B5EF4-FFF2-40B4-BE49-F238E27FC236}">
-                <a16:creationId xmlns:a16="http://schemas.microsoft.com/office/drawing/2014/main" id="{9E8E28FA-CE20-4D04-A46C-C8E5297CCED2}"/>
+                <a16:creationId xmlns:a16="http://schemas.microsoft.com/office/drawing/2014/main" id="{7FE19B0E-50C9-4B73-9031-77025119B5AD}"/>
               </a:ext>
             </a:extLst>
           </p:cNvPr>
@@ -6738,8 +6621,8 @@
         </p:nvSpPr>
         <p:spPr>
           <a:xfrm xmlns:a="http://schemas.openxmlformats.org/drawingml/2006/main">
-            <a:off x="628650" y="5953125"/>
-            <a:ext cx="10363200" cy="371475"/>
+            <a:off x="628650" y="5962650"/>
+            <a:ext cx="10363200" cy="342900"/>
           </a:xfrm>
           <a:prstGeom xmlns:a="http://schemas.openxmlformats.org/drawingml/2006/main" prst="rect">
             <a:avLst/>
@@ -6756,7 +6639,7 @@
           <a:lstStyle xmlns:a="http://schemas.openxmlformats.org/drawingml/2006/main"/>
           <a:p xmlns:a="http://schemas.openxmlformats.org/drawingml/2006/main">
             <a:pPr algn="l">
-              <a:defRPr sz="1875" b="0">
+              <a:defRPr sz="1725" b="0">
                 <a:solidFill>
                   <a:srgbClr val="1F5A45"/>
                 </a:solidFill>
@@ -6766,7 +6649,7 @@
               </a:defRPr>
             </a:pPr>
             <a:r>
-              <a:rPr sz="1875" b="0">
+              <a:rPr sz="1725" b="0">
                 <a:solidFill>
                   <a:srgbClr val="1F5A45"/>
                 </a:solidFill>
@@ -6774,7 +6657,7 @@
                 <a:ea typeface="Inter"/>
                 <a:cs typeface="Inter"/>
               </a:rPr>
-              <a:t>Lokale App mit fünf Hauptscreens bleibt der Kern</a:t>
+              <a:t>Formular prüft. Context koordiniert. SQLite speichert.</a:t>
             </a:r>
           </a:p>
         </p:txBody>
@@ -6782,7 +6665,7 @@
     </p:spTree>
     <p:extLst>
       <p:ext uri="{BB962C8B-B14F-4D97-AF65-F5344CB8AC3E}">
-        <p14:creationId xmlns:p14="http://schemas.microsoft.com/office/powerpoint/2010/main" val="1996201185"/>
+        <p14:creationId xmlns:p14="http://schemas.microsoft.com/office/powerpoint/2010/main" val="367293417"/>
       </p:ext>
     </p:extLst>
   </p:cSld>
@@ -6813,7 +6696,7 @@
           <p:cNvPr id="9" name="">
             <a:extLst xmlns:a="http://schemas.openxmlformats.org/drawingml/2006/main">
               <a:ext uri="{FF2B5EF4-FFF2-40B4-BE49-F238E27FC236}">
-                <a16:creationId xmlns:a16="http://schemas.microsoft.com/office/drawing/2014/main" id="{3764DF07-043F-44FA-B162-302E08EFDFD5}"/>
+                <a16:creationId xmlns:a16="http://schemas.microsoft.com/office/drawing/2014/main" id="{349074FD-AF0F-4F58-A6C4-3E71AD344CC0}"/>
               </a:ext>
             </a:extLst>
           </p:cNvPr>
@@ -6870,7 +6753,7 @@
           <p:cNvPr id="2" name="">
             <a:extLst xmlns:a="http://schemas.openxmlformats.org/drawingml/2006/main">
               <a:ext uri="{FF2B5EF4-FFF2-40B4-BE49-F238E27FC236}">
-                <a16:creationId xmlns:a16="http://schemas.microsoft.com/office/drawing/2014/main" id="{69160282-A708-437A-8F80-DB2DA30DC705}"/>
+                <a16:creationId xmlns:a16="http://schemas.microsoft.com/office/drawing/2014/main" id="{B4F93783-14C7-4B1A-A136-486DCFE4E486}"/>
               </a:ext>
             </a:extLst>
           </p:cNvPr>
@@ -6917,7 +6800,7 @@
                 <a:ea typeface="Newsreader"/>
                 <a:cs typeface="Newsreader"/>
               </a:rPr>
-              <a:t>Qualität und Tests</a:t>
+              <a:t>Der Kern funktioniert</a:t>
             </a:r>
           </a:p>
         </p:txBody>
@@ -6927,7 +6810,7 @@
           <p:cNvPr id="3" name="">
             <a:extLst xmlns:a="http://schemas.openxmlformats.org/drawingml/2006/main">
               <a:ext uri="{FF2B5EF4-FFF2-40B4-BE49-F238E27FC236}">
-                <a16:creationId xmlns:a16="http://schemas.microsoft.com/office/drawing/2014/main" id="{1B34B693-BDDF-409B-9795-608DA9110D39}"/>
+                <a16:creationId xmlns:a16="http://schemas.microsoft.com/office/drawing/2014/main" id="{44ACD0C5-A593-40B2-A5CF-BA004181CDE1}"/>
               </a:ext>
             </a:extLst>
           </p:cNvPr>
@@ -6938,8 +6821,8 @@
         </p:nvSpPr>
         <p:spPr>
           <a:xfrm xmlns:a="http://schemas.openxmlformats.org/drawingml/2006/main">
-            <a:off x="609600" y="1628775"/>
-            <a:ext cx="3733800" cy="1562100"/>
+            <a:off x="609600" y="1581150"/>
+            <a:ext cx="4143375" cy="1704975"/>
           </a:xfrm>
           <a:prstGeom xmlns:a="http://schemas.openxmlformats.org/drawingml/2006/main" prst="rect">
             <a:avLst/>
@@ -6956,7 +6839,7 @@
           <a:lstStyle xmlns:a="http://schemas.openxmlformats.org/drawingml/2006/main"/>
           <a:p xmlns:a="http://schemas.openxmlformats.org/drawingml/2006/main">
             <a:pPr algn="l">
-              <a:defRPr sz="9825" b="0">
+              <a:defRPr sz="10575" b="0">
                 <a:solidFill>
                   <a:srgbClr val="1F5A45"/>
                 </a:solidFill>
@@ -6966,7 +6849,7 @@
               </a:defRPr>
             </a:pPr>
             <a:r>
-              <a:rPr sz="9825" b="0">
+              <a:rPr sz="10575" b="0">
                 <a:solidFill>
                   <a:srgbClr val="1F5A45"/>
                 </a:solidFill>
@@ -6984,7 +6867,7 @@
           <p:cNvPr id="4" name="">
             <a:extLst xmlns:a="http://schemas.openxmlformats.org/drawingml/2006/main">
               <a:ext uri="{FF2B5EF4-FFF2-40B4-BE49-F238E27FC236}">
-                <a16:creationId xmlns:a16="http://schemas.microsoft.com/office/drawing/2014/main" id="{4F9B26D0-8C86-43F5-8D80-DFAB495520C2}"/>
+                <a16:creationId xmlns:a16="http://schemas.microsoft.com/office/drawing/2014/main" id="{1C39F1C0-50DB-46C3-83FA-E4EA6B2E1E08}"/>
               </a:ext>
             </a:extLst>
           </p:cNvPr>
@@ -6995,8 +6878,8 @@
         </p:nvSpPr>
         <p:spPr>
           <a:xfrm xmlns:a="http://schemas.openxmlformats.org/drawingml/2006/main">
-            <a:off x="647700" y="3333750"/>
-            <a:ext cx="5048250" cy="704850"/>
+            <a:off x="647700" y="3419475"/>
+            <a:ext cx="5238750" cy="752475"/>
           </a:xfrm>
           <a:prstGeom xmlns:a="http://schemas.openxmlformats.org/drawingml/2006/main" prst="rect">
             <a:avLst/>
@@ -7041,7 +6924,7 @@
           <p:cNvPr id="5" name="">
             <a:extLst xmlns:a="http://schemas.openxmlformats.org/drawingml/2006/main">
               <a:ext uri="{FF2B5EF4-FFF2-40B4-BE49-F238E27FC236}">
-                <a16:creationId xmlns:a16="http://schemas.microsoft.com/office/drawing/2014/main" id="{3A62F4EE-4B2A-42AF-A881-F1B3F5770BF8}"/>
+                <a16:creationId xmlns:a16="http://schemas.microsoft.com/office/drawing/2014/main" id="{CEE4EF87-756E-46DB-8256-761233958292}"/>
               </a:ext>
             </a:extLst>
           </p:cNvPr>
@@ -7052,8 +6935,8 @@
         </p:nvSpPr>
         <p:spPr>
           <a:xfrm xmlns:a="http://schemas.openxmlformats.org/drawingml/2006/main">
-            <a:off x="647700" y="4419600"/>
-            <a:ext cx="5305425" cy="1457325"/>
+            <a:off x="647700" y="4552950"/>
+            <a:ext cx="5524500" cy="1190625"/>
           </a:xfrm>
           <a:prstGeom xmlns:a="http://schemas.openxmlformats.org/drawingml/2006/main" prst="rect">
             <a:avLst/>
@@ -7111,7 +6994,7 @@
                 <a:ea typeface="Inter"/>
                 <a:cs typeface="Inter"/>
               </a:rPr>
-              <a:t>Rechenlogik und Sicherheitsregeln</a:t>
+              <a:t>Echtes SQLite in den Regressionen</a:t>
             </a:r>
           </a:p>
           <a:p xmlns:a="http://schemas.openxmlformats.org/drawingml/2006/main">
@@ -7134,7 +7017,7 @@
                 <a:ea typeface="Inter"/>
                 <a:cs typeface="Inter"/>
               </a:rPr>
-              <a:t>SQLite-Regressionen und ESLint</a:t>
+              <a:t>ESLint ohne Fehler</a:t>
             </a:r>
           </a:p>
         </p:txBody>
@@ -7144,7 +7027,7 @@
           <p:cNvPr id="6" name="">
             <a:extLst xmlns:a="http://schemas.openxmlformats.org/drawingml/2006/main">
               <a:ext uri="{FF2B5EF4-FFF2-40B4-BE49-F238E27FC236}">
-                <a16:creationId xmlns:a16="http://schemas.microsoft.com/office/drawing/2014/main" id="{8D14CC06-CD8A-4062-8797-088EE21F12E1}"/>
+                <a16:creationId xmlns:a16="http://schemas.microsoft.com/office/drawing/2014/main" id="{A4138365-6C5E-4544-8CA7-255F18B54EFC}"/>
               </a:ext>
             </a:extLst>
           </p:cNvPr>
@@ -7156,7 +7039,7 @@
         <p:spPr>
           <a:xfrm xmlns:a="http://schemas.openxmlformats.org/drawingml/2006/main">
             <a:off x="6838950" y="1819275"/>
-            <a:ext cx="4572000" cy="523875"/>
+            <a:ext cx="4667250" cy="790575"/>
           </a:xfrm>
           <a:prstGeom xmlns:a="http://schemas.openxmlformats.org/drawingml/2006/main" prst="rect">
             <a:avLst/>
@@ -7191,7 +7074,7 @@
                 <a:ea typeface="Newsreader"/>
                 <a:cs typeface="Newsreader"/>
               </a:rPr>
-              <a:t>Nachweis an der App</a:t>
+              <a:t>Eigener iOS-Release-Build</a:t>
             </a:r>
           </a:p>
         </p:txBody>
@@ -7201,7 +7084,7 @@
           <p:cNvPr id="7" name="">
             <a:extLst xmlns:a="http://schemas.openxmlformats.org/drawingml/2006/main">
               <a:ext uri="{FF2B5EF4-FFF2-40B4-BE49-F238E27FC236}">
-                <a16:creationId xmlns:a16="http://schemas.microsoft.com/office/drawing/2014/main" id="{19DD42BB-74B0-462F-822E-30F1BECBFB3E}"/>
+                <a16:creationId xmlns:a16="http://schemas.microsoft.com/office/drawing/2014/main" id="{B884866F-6912-4F97-9584-A900CFDE077D}"/>
               </a:ext>
             </a:extLst>
           </p:cNvPr>
@@ -7212,8 +7095,8 @@
         </p:nvSpPr>
         <p:spPr>
           <a:xfrm xmlns:a="http://schemas.openxmlformats.org/drawingml/2006/main">
-            <a:off x="6886575" y="2647950"/>
-            <a:ext cx="4572000" cy="2571750"/>
+            <a:off x="6886575" y="2952750"/>
+            <a:ext cx="4572000" cy="1943100"/>
           </a:xfrm>
           <a:prstGeom xmlns:a="http://schemas.openxmlformats.org/drawingml/2006/main" prst="rect">
             <a:avLst/>
@@ -7248,7 +7131,7 @@
                 <a:ea typeface="Inter"/>
                 <a:cs typeface="Inter"/>
               </a:rPr>
-              <a:t>Erstellen, bearbeiten und suchen</a:t>
+              <a:t>Erfassen und korrigieren</a:t>
             </a:r>
           </a:p>
           <a:p xmlns:a="http://schemas.openxmlformats.org/drawingml/2006/main">
@@ -7271,7 +7154,7 @@
                 <a:ea typeface="Inter"/>
                 <a:cs typeface="Inter"/>
               </a:rPr>
-              <a:t>Löschen und wiederherstellen</a:t>
+              <a:t>Löschen und zurückholen</a:t>
             </a:r>
           </a:p>
           <a:p xmlns:a="http://schemas.openxmlformats.org/drawingml/2006/main">
@@ -7294,7 +7177,7 @@
                 <a:ea typeface="Inter"/>
                 <a:cs typeface="Inter"/>
               </a:rPr>
-              <a:t>Neustart ohne Entwicklungsserver</a:t>
+              <a:t>Nach Neustart wiederfinden</a:t>
             </a:r>
           </a:p>
           <a:p xmlns:a="http://schemas.openxmlformats.org/drawingml/2006/main">
@@ -7317,7 +7200,7 @@
                 <a:ea typeface="Inter"/>
                 <a:cs typeface="Inter"/>
               </a:rPr>
-              <a:t>Getrennte Monatsbudgets</a:t>
+              <a:t>Ohne Entwicklungsserver</a:t>
             </a:r>
           </a:p>
         </p:txBody>
@@ -7327,7 +7210,7 @@
           <p:cNvPr id="8" name="">
             <a:extLst xmlns:a="http://schemas.openxmlformats.org/drawingml/2006/main">
               <a:ext uri="{FF2B5EF4-FFF2-40B4-BE49-F238E27FC236}">
-                <a16:creationId xmlns:a16="http://schemas.microsoft.com/office/drawing/2014/main" id="{5CB2FAD3-95D4-4AA4-A899-BD8AEC9341EE}"/>
+                <a16:creationId xmlns:a16="http://schemas.microsoft.com/office/drawing/2014/main" id="{3153FE0A-1DA7-48F1-80E1-2A12F7404007}"/>
               </a:ext>
             </a:extLst>
           </p:cNvPr>
@@ -7338,8 +7221,8 @@
         </p:nvSpPr>
         <p:spPr>
           <a:xfrm xmlns:a="http://schemas.openxmlformats.org/drawingml/2006/main">
-            <a:off x="6877050" y="5429250"/>
-            <a:ext cx="4543425" cy="638175"/>
+            <a:off x="6877050" y="5476875"/>
+            <a:ext cx="4572000" cy="638175"/>
           </a:xfrm>
           <a:prstGeom xmlns:a="http://schemas.openxmlformats.org/drawingml/2006/main" prst="rect">
             <a:avLst/>
@@ -7356,7 +7239,7 @@
           <a:lstStyle xmlns:a="http://schemas.openxmlformats.org/drawingml/2006/main"/>
           <a:p xmlns:a="http://schemas.openxmlformats.org/drawingml/2006/main">
             <a:pPr algn="l">
-              <a:defRPr sz="1650" b="0">
+              <a:defRPr sz="1575" b="0">
                 <a:solidFill>
                   <a:srgbClr val="6E6D68"/>
                 </a:solidFill>
@@ -7366,7 +7249,7 @@
               </a:defRPr>
             </a:pPr>
             <a:r>
-              <a:rPr sz="1650" b="0">
+              <a:rPr sz="1575" b="0">
                 <a:solidFill>
                   <a:srgbClr val="6E6D68"/>
                 </a:solidFill>
@@ -7374,7 +7257,30 @@
                 <a:ea typeface="Inter"/>
                 <a:cs typeface="Inter"/>
               </a:rPr>
-              <a:t>Physischer Face-ID-Scan und Nutzertest offen</a:t>
+              <a:t>Face ID simuliert geprüft.</a:t>
+            </a:r>
+          </a:p>
+          <a:p xmlns:a="http://schemas.openxmlformats.org/drawingml/2006/main">
+            <a:pPr algn="l">
+              <a:defRPr sz="1575" b="0">
+                <a:solidFill>
+                  <a:srgbClr val="6E6D68"/>
+                </a:solidFill>
+                <a:latin typeface="Inter"/>
+                <a:ea typeface="Inter"/>
+                <a:cs typeface="Inter"/>
+              </a:defRPr>
+            </a:pPr>
+            <a:r>
+              <a:rPr sz="1575" b="0">
+                <a:solidFill>
+                  <a:srgbClr val="6E6D68"/>
+                </a:solidFill>
+                <a:latin typeface="Inter"/>
+                <a:ea typeface="Inter"/>
+                <a:cs typeface="Inter"/>
+              </a:rPr>
+              <a:t>Physischer Scan und Nutzertest offen.</a:t>
             </a:r>
           </a:p>
         </p:txBody>
@@ -7382,7 +7288,7 @@
     </p:spTree>
     <p:extLst>
       <p:ext uri="{BB962C8B-B14F-4D97-AF65-F5344CB8AC3E}">
-        <p14:creationId xmlns:p14="http://schemas.microsoft.com/office/powerpoint/2010/main" val="1933120105"/>
+        <p14:creationId xmlns:p14="http://schemas.microsoft.com/office/powerpoint/2010/main" val="795363001"/>
       </p:ext>
     </p:extLst>
   </p:cSld>
@@ -7410,10 +7316,10 @@
       </p:grpSpPr>
       <p:sp>
         <p:nvSpPr>
-          <p:cNvPr id="8" name="">
+          <p:cNvPr id="10" name="">
             <a:extLst xmlns:a="http://schemas.openxmlformats.org/drawingml/2006/main">
               <a:ext uri="{FF2B5EF4-FFF2-40B4-BE49-F238E27FC236}">
-                <a16:creationId xmlns:a16="http://schemas.microsoft.com/office/drawing/2014/main" id="{AE02D11F-E3B8-47E7-BB16-C4FAD6C1234B}"/>
+                <a16:creationId xmlns:a16="http://schemas.microsoft.com/office/drawing/2014/main" id="{1306F4C5-7CE3-47D5-963F-9B056C44B1B6}"/>
               </a:ext>
             </a:extLst>
           </p:cNvPr>
@@ -7470,7 +7376,7 @@
           <p:cNvPr id="2" name="">
             <a:extLst xmlns:a="http://schemas.openxmlformats.org/drawingml/2006/main">
               <a:ext uri="{FF2B5EF4-FFF2-40B4-BE49-F238E27FC236}">
-                <a16:creationId xmlns:a16="http://schemas.microsoft.com/office/drawing/2014/main" id="{ADCD3D4D-28D0-44EB-AA8A-1AC47FDEA845}"/>
+                <a16:creationId xmlns:a16="http://schemas.microsoft.com/office/drawing/2014/main" id="{6E9DD13E-02C7-4A2E-8F06-E410D494B1E1}"/>
               </a:ext>
             </a:extLst>
           </p:cNvPr>
@@ -7517,7 +7423,7 @@
                 <a:ea typeface="Newsreader"/>
                 <a:cs typeface="Newsreader"/>
               </a:rPr>
-              <a:t>Herausforderungen</a:t>
+              <a:t>Rückblick und Ausblick</a:t>
             </a:r>
           </a:p>
         </p:txBody>
@@ -7527,7 +7433,7 @@
           <p:cNvPr id="3" name="">
             <a:extLst xmlns:a="http://schemas.openxmlformats.org/drawingml/2006/main">
               <a:ext uri="{FF2B5EF4-FFF2-40B4-BE49-F238E27FC236}">
-                <a16:creationId xmlns:a16="http://schemas.microsoft.com/office/drawing/2014/main" id="{9B2C36E3-D346-4A2B-A838-0BCD39191A81}"/>
+                <a16:creationId xmlns:a16="http://schemas.microsoft.com/office/drawing/2014/main" id="{E0F728BB-D44F-4A52-BBCB-7F77D3AF724A}"/>
               </a:ext>
             </a:extLst>
           </p:cNvPr>
@@ -7538,8 +7444,8 @@
         </p:nvSpPr>
         <p:spPr>
           <a:xfrm xmlns:a="http://schemas.openxmlformats.org/drawingml/2006/main">
-            <a:off x="609600" y="1724025"/>
-            <a:ext cx="7000875" cy="600075"/>
+            <a:off x="628650" y="1762125"/>
+            <a:ext cx="5162550" cy="838200"/>
           </a:xfrm>
           <a:prstGeom xmlns:a="http://schemas.openxmlformats.org/drawingml/2006/main" prst="rect">
             <a:avLst/>
@@ -7556,7 +7462,7 @@
           <a:lstStyle xmlns:a="http://schemas.openxmlformats.org/drawingml/2006/main"/>
           <a:p xmlns:a="http://schemas.openxmlformats.org/drawingml/2006/main">
             <a:pPr algn="l">
-              <a:defRPr sz="2775" b="0">
+              <a:defRPr sz="2850" b="0">
                 <a:solidFill>
                   <a:srgbClr val="1F5A45"/>
                 </a:solidFill>
@@ -7566,7 +7472,7 @@
               </a:defRPr>
             </a:pPr>
             <a:r>
-              <a:rPr sz="2775" b="0">
+              <a:rPr sz="2850" b="0">
                 <a:solidFill>
                   <a:srgbClr val="1F5A45"/>
                 </a:solidFill>
@@ -7574,7 +7480,7 @@
                 <a:ea typeface="Newsreader"/>
                 <a:cs typeface="Newsreader"/>
               </a:rPr>
-              <a:t>Monate sauber trennen</a:t>
+              <a:t>Was wir gelernt haben</a:t>
             </a:r>
           </a:p>
         </p:txBody>
@@ -7584,7 +7490,7 @@
           <p:cNvPr id="4" name="">
             <a:extLst xmlns:a="http://schemas.openxmlformats.org/drawingml/2006/main">
               <a:ext uri="{FF2B5EF4-FFF2-40B4-BE49-F238E27FC236}">
-                <a16:creationId xmlns:a16="http://schemas.microsoft.com/office/drawing/2014/main" id="{80773235-AF5A-4909-8B84-4A6A4486AEEB}"/>
+                <a16:creationId xmlns:a16="http://schemas.microsoft.com/office/drawing/2014/main" id="{4EB8995F-6DC7-4C70-9431-BD3B35DD5F72}"/>
               </a:ext>
             </a:extLst>
           </p:cNvPr>
@@ -7595,8 +7501,8 @@
         </p:nvSpPr>
         <p:spPr>
           <a:xfrm xmlns:a="http://schemas.openxmlformats.org/drawingml/2006/main">
-            <a:off x="647700" y="2457450"/>
-            <a:ext cx="6667500" cy="1066800"/>
+            <a:off x="666750" y="2876550"/>
+            <a:ext cx="5095875" cy="1009650"/>
           </a:xfrm>
           <a:prstGeom xmlns:a="http://schemas.openxmlformats.org/drawingml/2006/main" prst="rect">
             <a:avLst/>
@@ -7613,7 +7519,7 @@
           <a:lstStyle xmlns:a="http://schemas.openxmlformats.org/drawingml/2006/main"/>
           <a:p xmlns:a="http://schemas.openxmlformats.org/drawingml/2006/main">
             <a:pPr algn="l">
-              <a:defRPr sz="2100" b="0">
+              <a:defRPr sz="2175" b="0">
                 <a:solidFill>
                   <a:srgbClr val="15171A"/>
                 </a:solidFill>
@@ -7623,7 +7529,7 @@
               </a:defRPr>
             </a:pPr>
             <a:r>
-              <a:rPr sz="2100" b="0">
+              <a:rPr sz="2175" b="0">
                 <a:solidFill>
                   <a:srgbClr val="15171A"/>
                 </a:solidFill>
@@ -7631,12 +7537,12 @@
                 <a:ea typeface="Inter"/>
                 <a:cs typeface="Inter"/>
               </a:rPr>
-              <a:t>Ein Budget gehört zu einem Monat.</a:t>
+              <a:t>Monatsbudgets und Fristen</a:t>
             </a:r>
           </a:p>
           <a:p xmlns:a="http://schemas.openxmlformats.org/drawingml/2006/main">
             <a:pPr algn="l">
-              <a:defRPr sz="2100" b="0">
+              <a:defRPr sz="2175" b="0">
                 <a:solidFill>
                   <a:srgbClr val="15171A"/>
                 </a:solidFill>
@@ -7646,7 +7552,7 @@
               </a:defRPr>
             </a:pPr>
             <a:r>
-              <a:rPr sz="2100" b="0">
+              <a:rPr sz="2175" b="0">
                 <a:solidFill>
                   <a:srgbClr val="15171A"/>
                 </a:solidFill>
@@ -7654,7 +7560,7 @@
                 <a:ea typeface="Inter"/>
                 <a:cs typeface="Inter"/>
               </a:rPr>
-              <a:t>Neue Werte dürfen alte Monate nicht verändern.</a:t>
+              <a:t>brauchen klare Regeln.</a:t>
             </a:r>
           </a:p>
         </p:txBody>
@@ -7664,7 +7570,7 @@
           <p:cNvPr id="5" name="">
             <a:extLst xmlns:a="http://schemas.openxmlformats.org/drawingml/2006/main">
               <a:ext uri="{FF2B5EF4-FFF2-40B4-BE49-F238E27FC236}">
-                <a16:creationId xmlns:a16="http://schemas.microsoft.com/office/drawing/2014/main" id="{EEA28210-CE7F-4087-AD13-54281C01F6FA}"/>
+                <a16:creationId xmlns:a16="http://schemas.microsoft.com/office/drawing/2014/main" id="{CE243F8F-8201-4762-B886-2D6044B448EF}"/>
               </a:ext>
             </a:extLst>
           </p:cNvPr>
@@ -7675,8 +7581,8 @@
         </p:nvSpPr>
         <p:spPr>
           <a:xfrm xmlns:a="http://schemas.openxmlformats.org/drawingml/2006/main">
-            <a:off x="609600" y="3981450"/>
-            <a:ext cx="7000875" cy="590550"/>
+            <a:off x="666750" y="4543425"/>
+            <a:ext cx="5095875" cy="1009650"/>
           </a:xfrm>
           <a:prstGeom xmlns:a="http://schemas.openxmlformats.org/drawingml/2006/main" prst="rect">
             <a:avLst/>
@@ -7693,25 +7599,48 @@
           <a:lstStyle xmlns:a="http://schemas.openxmlformats.org/drawingml/2006/main"/>
           <a:p xmlns:a="http://schemas.openxmlformats.org/drawingml/2006/main">
             <a:pPr algn="l">
-              <a:defRPr sz="2775" b="0">
-                <a:solidFill>
-                  <a:srgbClr val="1F5A45"/>
-                </a:solidFill>
-                <a:latin typeface="Newsreader"/>
-                <a:ea typeface="Newsreader"/>
-                <a:cs typeface="Newsreader"/>
-              </a:defRPr>
-            </a:pPr>
-            <a:r>
-              <a:rPr sz="2775" b="0">
-                <a:solidFill>
-                  <a:srgbClr val="1F5A45"/>
-                </a:solidFill>
-                <a:latin typeface="Newsreader"/>
-                <a:ea typeface="Newsreader"/>
-                <a:cs typeface="Newsreader"/>
-              </a:rPr>
-              <a:t>Fehlerfälle mitdenken</a:t>
+              <a:defRPr sz="2175" b="0">
+                <a:solidFill>
+                  <a:srgbClr val="15171A"/>
+                </a:solidFill>
+                <a:latin typeface="Inter"/>
+                <a:ea typeface="Inter"/>
+                <a:cs typeface="Inter"/>
+              </a:defRPr>
+            </a:pPr>
+            <a:r>
+              <a:rPr sz="2175" b="0">
+                <a:solidFill>
+                  <a:srgbClr val="15171A"/>
+                </a:solidFill>
+                <a:latin typeface="Inter"/>
+                <a:ea typeface="Inter"/>
+                <a:cs typeface="Inter"/>
+              </a:rPr>
+              <a:t>Fehlerfälle und Neustarts</a:t>
+            </a:r>
+          </a:p>
+          <a:p xmlns:a="http://schemas.openxmlformats.org/drawingml/2006/main">
+            <a:pPr algn="l">
+              <a:defRPr sz="2175" b="0">
+                <a:solidFill>
+                  <a:srgbClr val="15171A"/>
+                </a:solidFill>
+                <a:latin typeface="Inter"/>
+                <a:ea typeface="Inter"/>
+                <a:cs typeface="Inter"/>
+              </a:defRPr>
+            </a:pPr>
+            <a:r>
+              <a:rPr sz="2175" b="0">
+                <a:solidFill>
+                  <a:srgbClr val="15171A"/>
+                </a:solidFill>
+                <a:latin typeface="Inter"/>
+                <a:ea typeface="Inter"/>
+                <a:cs typeface="Inter"/>
+              </a:rPr>
+              <a:t>früher im Entwurf mitdenken.</a:t>
             </a:r>
           </a:p>
         </p:txBody>
@@ -7721,7 +7650,7 @@
           <p:cNvPr id="6" name="">
             <a:extLst xmlns:a="http://schemas.openxmlformats.org/drawingml/2006/main">
               <a:ext uri="{FF2B5EF4-FFF2-40B4-BE49-F238E27FC236}">
-                <a16:creationId xmlns:a16="http://schemas.microsoft.com/office/drawing/2014/main" id="{22573CD1-8D4C-429D-818C-A20398CC3667}"/>
+                <a16:creationId xmlns:a16="http://schemas.microsoft.com/office/drawing/2014/main" id="{A4F787A6-AFC3-468A-8C03-29FBC2A8FA8D}"/>
               </a:ext>
             </a:extLst>
           </p:cNvPr>
@@ -7732,8 +7661,8 @@
         </p:nvSpPr>
         <p:spPr>
           <a:xfrm xmlns:a="http://schemas.openxmlformats.org/drawingml/2006/main">
-            <a:off x="647700" y="4724400"/>
-            <a:ext cx="6667500" cy="1133475"/>
+            <a:off x="6419850" y="1762125"/>
+            <a:ext cx="5124450" cy="838200"/>
           </a:xfrm>
           <a:prstGeom xmlns:a="http://schemas.openxmlformats.org/drawingml/2006/main" prst="rect">
             <a:avLst/>
@@ -7750,7 +7679,64 @@
           <a:lstStyle xmlns:a="http://schemas.openxmlformats.org/drawingml/2006/main"/>
           <a:p xmlns:a="http://schemas.openxmlformats.org/drawingml/2006/main">
             <a:pPr algn="l">
-              <a:defRPr sz="2100" b="0">
+              <a:defRPr sz="2850" b="0">
+                <a:solidFill>
+                  <a:srgbClr val="1F5A45"/>
+                </a:solidFill>
+                <a:latin typeface="Newsreader"/>
+                <a:ea typeface="Newsreader"/>
+                <a:cs typeface="Newsreader"/>
+              </a:defRPr>
+            </a:pPr>
+            <a:r>
+              <a:rPr sz="2850" b="0">
+                <a:solidFill>
+                  <a:srgbClr val="1F5A45"/>
+                </a:solidFill>
+                <a:latin typeface="Newsreader"/>
+                <a:ea typeface="Newsreader"/>
+                <a:cs typeface="Newsreader"/>
+              </a:rPr>
+              <a:t>Mögliche Erweiterungen</a:t>
+            </a:r>
+          </a:p>
+        </p:txBody>
+      </p:sp>
+      <p:sp>
+        <p:nvSpPr>
+          <p:cNvPr id="7" name="">
+            <a:extLst xmlns:a="http://schemas.openxmlformats.org/drawingml/2006/main">
+              <a:ext uri="{FF2B5EF4-FFF2-40B4-BE49-F238E27FC236}">
+                <a16:creationId xmlns:a16="http://schemas.microsoft.com/office/drawing/2014/main" id="{02CD1449-9F6F-491B-B3B9-9CFB12835304}"/>
+              </a:ext>
+            </a:extLst>
+          </p:cNvPr>
+          <p:cNvSpPr>
+            <a:spLocks xmlns:a="http://schemas.openxmlformats.org/drawingml/2006/main" noGrp="1"/>
+          </p:cNvSpPr>
+          <p:nvPr/>
+        </p:nvSpPr>
+        <p:spPr>
+          <a:xfrm xmlns:a="http://schemas.openxmlformats.org/drawingml/2006/main">
+            <a:off x="6467475" y="2914650"/>
+            <a:ext cx="5076825" cy="714375"/>
+          </a:xfrm>
+          <a:prstGeom xmlns:a="http://schemas.openxmlformats.org/drawingml/2006/main" prst="rect">
+            <a:avLst/>
+          </a:prstGeom>
+          <a:noFill xmlns:a="http://schemas.openxmlformats.org/drawingml/2006/main"/>
+          <a:ln xmlns:a="http://schemas.openxmlformats.org/drawingml/2006/main" w="0">
+            <a:noFill/>
+          </a:ln>
+        </p:spPr>
+        <p:txBody>
+          <a:bodyPr xmlns:a="http://schemas.openxmlformats.org/drawingml/2006/main" wrap="square" lIns="0" tIns="0" rIns="0" bIns="0" anchor="t">
+            <a:noAutofit/>
+          </a:bodyPr>
+          <a:lstStyle xmlns:a="http://schemas.openxmlformats.org/drawingml/2006/main"/>
+          <a:p xmlns:a="http://schemas.openxmlformats.org/drawingml/2006/main">
+            <a:pPr algn="l">
+              <a:defRPr sz="2175" b="0">
                 <a:solidFill>
                   <a:srgbClr val="15171A"/>
                 </a:solidFill>
@@ -7760,7 +7746,7 @@
               </a:defRPr>
             </a:pPr>
             <a:r>
-              <a:rPr sz="2100" b="0">
+              <a:rPr sz="2175" b="0">
                 <a:solidFill>
                   <a:srgbClr val="15171A"/>
                 </a:solidFill>
@@ -7768,12 +7754,46 @@
                 <a:ea typeface="Inter"/>
                 <a:cs typeface="Inter"/>
               </a:rPr>
-              <a:t>Sperrfristen bleiben gespeichert.</a:t>
-            </a:r>
-          </a:p>
+              <a:t>Ausgaben als CSV exportieren</a:t>
+            </a:r>
+          </a:p>
+        </p:txBody>
+      </p:sp>
+      <p:sp>
+        <p:nvSpPr>
+          <p:cNvPr id="8" name="">
+            <a:extLst xmlns:a="http://schemas.openxmlformats.org/drawingml/2006/main">
+              <a:ext uri="{FF2B5EF4-FFF2-40B4-BE49-F238E27FC236}">
+                <a16:creationId xmlns:a16="http://schemas.microsoft.com/office/drawing/2014/main" id="{43AC2C48-54AA-4595-9E3A-4BB8DB254EFE}"/>
+              </a:ext>
+            </a:extLst>
+          </p:cNvPr>
+          <p:cNvSpPr>
+            <a:spLocks xmlns:a="http://schemas.openxmlformats.org/drawingml/2006/main" noGrp="1"/>
+          </p:cNvSpPr>
+          <p:nvPr/>
+        </p:nvSpPr>
+        <p:spPr>
+          <a:xfrm xmlns:a="http://schemas.openxmlformats.org/drawingml/2006/main">
+            <a:off x="6467475" y="4095750"/>
+            <a:ext cx="5076825" cy="714375"/>
+          </a:xfrm>
+          <a:prstGeom xmlns:a="http://schemas.openxmlformats.org/drawingml/2006/main" prst="rect">
+            <a:avLst/>
+          </a:prstGeom>
+          <a:noFill xmlns:a="http://schemas.openxmlformats.org/drawingml/2006/main"/>
+          <a:ln xmlns:a="http://schemas.openxmlformats.org/drawingml/2006/main" w="0">
+            <a:noFill/>
+          </a:ln>
+        </p:spPr>
+        <p:txBody>
+          <a:bodyPr xmlns:a="http://schemas.openxmlformats.org/drawingml/2006/main" wrap="square" lIns="0" tIns="0" rIns="0" bIns="0" anchor="t">
+            <a:noAutofit/>
+          </a:bodyPr>
+          <a:lstStyle xmlns:a="http://schemas.openxmlformats.org/drawingml/2006/main"/>
           <a:p xmlns:a="http://schemas.openxmlformats.org/drawingml/2006/main">
             <a:pPr algn="l">
-              <a:defRPr sz="2100" b="0">
+              <a:defRPr sz="2175" b="0">
                 <a:solidFill>
                   <a:srgbClr val="15171A"/>
                 </a:solidFill>
@@ -7783,7 +7803,7 @@
               </a:defRPr>
             </a:pPr>
             <a:r>
-              <a:rPr sz="2100" b="0">
+              <a:rPr sz="2175" b="0">
                 <a:solidFill>
                   <a:srgbClr val="15171A"/>
                 </a:solidFill>
@@ -7791,37 +7811,95 @@
                 <a:ea typeface="Inter"/>
                 <a:cs typeface="Inter"/>
               </a:rPr>
-              <a:t>Abbrechen schützt ungesicherte Eingaben.</a:t>
-            </a:r>
-          </a:p>
-        </p:txBody>
-      </p:sp>
-      <p:pic>
-        <p:nvPicPr>
-          <p:cNvPr id="14" name=""/>
-          <p:cNvPicPr>
-            <a:picLocks xmlns:a="http://schemas.openxmlformats.org/drawingml/2006/main" noChangeAspect="1"/>
-          </p:cNvPicPr>
+              <a:t>Statistiken nach Kategorien</a:t>
+            </a:r>
+          </a:p>
+        </p:txBody>
+      </p:sp>
+      <p:sp>
+        <p:nvSpPr>
+          <p:cNvPr id="9" name="">
+            <a:extLst xmlns:a="http://schemas.openxmlformats.org/drawingml/2006/main">
+              <a:ext uri="{FF2B5EF4-FFF2-40B4-BE49-F238E27FC236}">
+                <a16:creationId xmlns:a16="http://schemas.microsoft.com/office/drawing/2014/main" id="{438FEB1C-EB8B-4AA4-800A-5AC034B9D5CB}"/>
+              </a:ext>
+            </a:extLst>
+          </p:cNvPr>
+          <p:cNvSpPr>
+            <a:spLocks xmlns:a="http://schemas.openxmlformats.org/drawingml/2006/main" noGrp="1"/>
+          </p:cNvSpPr>
           <p:nvPr/>
-        </p:nvPicPr>
-        <p:blipFill>
-          <a:blip xmlns:r="http://schemas.openxmlformats.org/officeDocument/2006/relationships" xmlns:a="http://schemas.openxmlformats.org/drawingml/2006/main" r:embed="R4b2356b8348344ad"/>
-          <a:stretch xmlns:a="http://schemas.openxmlformats.org/drawingml/2006/main"/>
-        </p:blipFill>
+        </p:nvSpPr>
         <p:spPr>
           <a:xfrm xmlns:a="http://schemas.openxmlformats.org/drawingml/2006/main">
-            <a:off x="8816445" y="1457325"/>
-            <a:ext cx="2102911" cy="4572000"/>
+            <a:off x="6457950" y="5495925"/>
+            <a:ext cx="5095875" cy="695325"/>
           </a:xfrm>
           <a:prstGeom xmlns:a="http://schemas.openxmlformats.org/drawingml/2006/main" prst="rect">
             <a:avLst/>
           </a:prstGeom>
-        </p:spPr>
-      </p:pic>
+          <a:noFill xmlns:a="http://schemas.openxmlformats.org/drawingml/2006/main"/>
+          <a:ln xmlns:a="http://schemas.openxmlformats.org/drawingml/2006/main" w="0">
+            <a:noFill/>
+          </a:ln>
+        </p:spPr>
+        <p:txBody>
+          <a:bodyPr xmlns:a="http://schemas.openxmlformats.org/drawingml/2006/main" wrap="square" lIns="0" tIns="0" rIns="0" bIns="0" anchor="t">
+            <a:noAutofit/>
+          </a:bodyPr>
+          <a:lstStyle xmlns:a="http://schemas.openxmlformats.org/drawingml/2006/main"/>
+          <a:p xmlns:a="http://schemas.openxmlformats.org/drawingml/2006/main">
+            <a:pPr algn="l">
+              <a:defRPr sz="1650" b="0">
+                <a:solidFill>
+                  <a:srgbClr val="6E6D68"/>
+                </a:solidFill>
+                <a:latin typeface="Inter"/>
+                <a:ea typeface="Inter"/>
+                <a:cs typeface="Inter"/>
+              </a:defRPr>
+            </a:pPr>
+            <a:r>
+              <a:rPr sz="1650" b="0">
+                <a:solidFill>
+                  <a:srgbClr val="6E6D68"/>
+                </a:solidFill>
+                <a:latin typeface="Inter"/>
+                <a:ea typeface="Inter"/>
+                <a:cs typeface="Inter"/>
+              </a:rPr>
+              <a:t>Ideen für spätere Versionen.</a:t>
+            </a:r>
+          </a:p>
+          <a:p xmlns:a="http://schemas.openxmlformats.org/drawingml/2006/main">
+            <a:pPr algn="l">
+              <a:defRPr sz="1650" b="0">
+                <a:solidFill>
+                  <a:srgbClr val="6E6D68"/>
+                </a:solidFill>
+                <a:latin typeface="Inter"/>
+                <a:ea typeface="Inter"/>
+                <a:cs typeface="Inter"/>
+              </a:defRPr>
+            </a:pPr>
+            <a:r>
+              <a:rPr sz="1650" b="0">
+                <a:solidFill>
+                  <a:srgbClr val="6E6D68"/>
+                </a:solidFill>
+                <a:latin typeface="Inter"/>
+                <a:ea typeface="Inter"/>
+                <a:cs typeface="Inter"/>
+              </a:rPr>
+              <a:t>Zuerst die Bedienung mit Nutzern prüfen.</a:t>
+            </a:r>
+          </a:p>
+        </p:txBody>
+      </p:sp>
     </p:spTree>
     <p:extLst>
       <p:ext uri="{BB962C8B-B14F-4D97-AF65-F5344CB8AC3E}">
-        <p14:creationId xmlns:p14="http://schemas.microsoft.com/office/powerpoint/2010/main" val="1642462663"/>
+        <p14:creationId xmlns:p14="http://schemas.microsoft.com/office/powerpoint/2010/main" val="155262311"/>
       </p:ext>
     </p:extLst>
   </p:cSld>
